--- a/S1-CL2-Cloud-Disaster-Recovery/delivery/topic_06/Topic_06_Slides.pptx
+++ b/S1-CL2-Cloud-Disaster-Recovery/delivery/topic_06/Topic_06_Slides.pptx
@@ -3388,7 +3388,7 @@
           <a:noFill/>
         </p:spPr>
         <p:txBody>
-          <a:bodyPr wrap="square" anchor="t" lIns="0" rIns="0" tIns="0" bIns="0">
+          <a:bodyPr wrap="square" anchor="ctr" lIns="0" rIns="0" tIns="0" bIns="0">
             <a:spAutoFit/>
           </a:bodyPr>
           <a:lstStyle/>
@@ -3405,7 +3405,7 @@
               </a:spcAft>
             </a:pPr>
             <a:r>
-              <a:rPr sz="1800" b="1" i="0">
+              <a:rPr sz="2400" b="1" i="0">
                 <a:solidFill>
                   <a:srgbClr val="EDAB0C"/>
                 </a:solidFill>
@@ -3414,7 +3414,7 @@
               <a:t>■  </a:t>
             </a:r>
             <a:r>
-              <a:rPr sz="1800" b="0" i="0">
+              <a:rPr sz="2400" b="0" i="0">
                 <a:solidFill>
                   <a:srgbClr val="2A2929"/>
                 </a:solidFill>
@@ -3436,7 +3436,7 @@
               </a:spcAft>
             </a:pPr>
             <a:r>
-              <a:rPr sz="1800" b="1" i="0">
+              <a:rPr sz="2400" b="1" i="0">
                 <a:solidFill>
                   <a:srgbClr val="EDAB0C"/>
                 </a:solidFill>
@@ -3445,7 +3445,7 @@
               <a:t>■  </a:t>
             </a:r>
             <a:r>
-              <a:rPr sz="1800" b="0" i="0">
+              <a:rPr sz="2400" b="0" i="0">
                 <a:solidFill>
                   <a:srgbClr val="2A2929"/>
                 </a:solidFill>
@@ -3467,7 +3467,7 @@
               </a:spcAft>
             </a:pPr>
             <a:r>
-              <a:rPr sz="1800" b="1" i="0">
+              <a:rPr sz="2400" b="1" i="0">
                 <a:solidFill>
                   <a:srgbClr val="EDAB0C"/>
                 </a:solidFill>
@@ -3476,7 +3476,7 @@
               <a:t>■  </a:t>
             </a:r>
             <a:r>
-              <a:rPr sz="1800" b="0" i="0">
+              <a:rPr sz="2400" b="0" i="0">
                 <a:solidFill>
                   <a:srgbClr val="2A2929"/>
                 </a:solidFill>
@@ -4910,7 +4910,7 @@
           <a:noFill/>
         </p:spPr>
         <p:txBody>
-          <a:bodyPr wrap="square" anchor="t" lIns="0" rIns="0" tIns="0" bIns="0">
+          <a:bodyPr wrap="square" anchor="ctr" lIns="0" rIns="0" tIns="0" bIns="0">
             <a:spAutoFit/>
           </a:bodyPr>
           <a:lstStyle/>
@@ -4927,7 +4927,7 @@
               </a:spcAft>
             </a:pPr>
             <a:r>
-              <a:rPr sz="1800" b="1" i="0">
+              <a:rPr sz="2400" b="1" i="0">
                 <a:solidFill>
                   <a:srgbClr val="EDAB0C"/>
                 </a:solidFill>
@@ -4936,7 +4936,7 @@
               <a:t>■  </a:t>
             </a:r>
             <a:r>
-              <a:rPr sz="1800" b="0" i="0">
+              <a:rPr sz="2400" b="0" i="0">
                 <a:solidFill>
                   <a:srgbClr val="2A2929"/>
                 </a:solidFill>
@@ -4958,7 +4958,7 @@
               </a:spcAft>
             </a:pPr>
             <a:r>
-              <a:rPr sz="1800" b="1" i="0">
+              <a:rPr sz="2400" b="1" i="0">
                 <a:solidFill>
                   <a:srgbClr val="EDAB0C"/>
                 </a:solidFill>
@@ -4967,7 +4967,7 @@
               <a:t>■  </a:t>
             </a:r>
             <a:r>
-              <a:rPr sz="1800" b="0" i="0">
+              <a:rPr sz="2400" b="0" i="0">
                 <a:solidFill>
                   <a:srgbClr val="2A2929"/>
                 </a:solidFill>
@@ -4989,7 +4989,7 @@
               </a:spcAft>
             </a:pPr>
             <a:r>
-              <a:rPr sz="1800" b="1" i="0">
+              <a:rPr sz="2400" b="1" i="0">
                 <a:solidFill>
                   <a:srgbClr val="EDAB0C"/>
                 </a:solidFill>
@@ -4998,7 +4998,7 @@
               <a:t>■  </a:t>
             </a:r>
             <a:r>
-              <a:rPr sz="1800" b="0" i="0">
+              <a:rPr sz="2400" b="0" i="0">
                 <a:solidFill>
                   <a:srgbClr val="2A2929"/>
                 </a:solidFill>
@@ -6370,7 +6370,7 @@
           <a:noFill/>
         </p:spPr>
         <p:txBody>
-          <a:bodyPr wrap="square" anchor="t" lIns="0" rIns="0" tIns="0" bIns="0">
+          <a:bodyPr wrap="square" anchor="ctr" lIns="0" rIns="0" tIns="0" bIns="0">
             <a:spAutoFit/>
           </a:bodyPr>
           <a:lstStyle/>
@@ -6387,7 +6387,7 @@
               </a:spcAft>
             </a:pPr>
             <a:r>
-              <a:rPr sz="1800" b="1" i="0">
+              <a:rPr sz="2400" b="1" i="0">
                 <a:solidFill>
                   <a:srgbClr val="EDAB0C"/>
                 </a:solidFill>
@@ -6396,7 +6396,7 @@
               <a:t>■  </a:t>
             </a:r>
             <a:r>
-              <a:rPr sz="1800" b="0" i="0">
+              <a:rPr sz="2400" b="0" i="0">
                 <a:solidFill>
                   <a:srgbClr val="2A2929"/>
                 </a:solidFill>
@@ -6418,7 +6418,7 @@
               </a:spcAft>
             </a:pPr>
             <a:r>
-              <a:rPr sz="1800" b="1" i="0">
+              <a:rPr sz="2400" b="1" i="0">
                 <a:solidFill>
                   <a:srgbClr val="EDAB0C"/>
                 </a:solidFill>
@@ -6427,7 +6427,7 @@
               <a:t>■  </a:t>
             </a:r>
             <a:r>
-              <a:rPr sz="1800" b="0" i="0">
+              <a:rPr sz="2400" b="0" i="0">
                 <a:solidFill>
                   <a:srgbClr val="2A2929"/>
                 </a:solidFill>
@@ -6449,7 +6449,7 @@
               </a:spcAft>
             </a:pPr>
             <a:r>
-              <a:rPr sz="1800" b="1" i="0">
+              <a:rPr sz="2400" b="1" i="0">
                 <a:solidFill>
                   <a:srgbClr val="EDAB0C"/>
                 </a:solidFill>
@@ -6458,7 +6458,7 @@
               <a:t>■  </a:t>
             </a:r>
             <a:r>
-              <a:rPr sz="1800" b="0" i="0">
+              <a:rPr sz="2400" b="0" i="0">
                 <a:solidFill>
                   <a:srgbClr val="2A2929"/>
                 </a:solidFill>
@@ -7543,7 +7543,7 @@
           <a:noFill/>
         </p:spPr>
         <p:txBody>
-          <a:bodyPr wrap="square" anchor="t" lIns="0" rIns="0" tIns="0" bIns="0">
+          <a:bodyPr wrap="square" anchor="ctr" lIns="0" rIns="0" tIns="0" bIns="0">
             <a:spAutoFit/>
           </a:bodyPr>
           <a:lstStyle/>
@@ -7560,7 +7560,7 @@
               </a:spcAft>
             </a:pPr>
             <a:r>
-              <a:rPr sz="1800" b="1" i="0">
+              <a:rPr sz="2400" b="1" i="0">
                 <a:solidFill>
                   <a:srgbClr val="EDAB0C"/>
                 </a:solidFill>
@@ -7569,7 +7569,7 @@
               <a:t>■  </a:t>
             </a:r>
             <a:r>
-              <a:rPr sz="1800" b="0" i="0">
+              <a:rPr sz="2400" b="0" i="0">
                 <a:solidFill>
                   <a:srgbClr val="2A2929"/>
                 </a:solidFill>
@@ -7591,7 +7591,7 @@
               </a:spcAft>
             </a:pPr>
             <a:r>
-              <a:rPr sz="1800" b="1" i="0">
+              <a:rPr sz="2400" b="1" i="0">
                 <a:solidFill>
                   <a:srgbClr val="EDAB0C"/>
                 </a:solidFill>
@@ -7600,7 +7600,7 @@
               <a:t>■  </a:t>
             </a:r>
             <a:r>
-              <a:rPr sz="1800" b="0" i="0">
+              <a:rPr sz="2400" b="0" i="0">
                 <a:solidFill>
                   <a:srgbClr val="2A2929"/>
                 </a:solidFill>
@@ -7622,7 +7622,7 @@
               </a:spcAft>
             </a:pPr>
             <a:r>
-              <a:rPr sz="1800" b="1" i="0">
+              <a:rPr sz="2400" b="1" i="0">
                 <a:solidFill>
                   <a:srgbClr val="EDAB0C"/>
                 </a:solidFill>
@@ -7631,7 +7631,7 @@
               <a:t>■  </a:t>
             </a:r>
             <a:r>
-              <a:rPr sz="1800" b="0" i="0">
+              <a:rPr sz="2400" b="0" i="0">
                 <a:solidFill>
                   <a:srgbClr val="2A2929"/>
                 </a:solidFill>
@@ -7885,7 +7885,7 @@
           <a:noFill/>
         </p:spPr>
         <p:txBody>
-          <a:bodyPr wrap="square" anchor="t" lIns="0" rIns="0" tIns="0" bIns="0">
+          <a:bodyPr wrap="square" anchor="ctr" lIns="0" rIns="0" tIns="0" bIns="0">
             <a:spAutoFit/>
           </a:bodyPr>
           <a:lstStyle/>
@@ -7902,7 +7902,7 @@
               </a:spcAft>
             </a:pPr>
             <a:r>
-              <a:rPr sz="1800" b="1" i="0">
+              <a:rPr sz="2400" b="1" i="0">
                 <a:solidFill>
                   <a:srgbClr val="EDAB0C"/>
                 </a:solidFill>
@@ -7911,7 +7911,7 @@
               <a:t>■  </a:t>
             </a:r>
             <a:r>
-              <a:rPr sz="1800" b="0" i="0">
+              <a:rPr sz="2400" b="0" i="0">
                 <a:solidFill>
                   <a:srgbClr val="2A2929"/>
                 </a:solidFill>
@@ -7933,7 +7933,7 @@
               </a:spcAft>
             </a:pPr>
             <a:r>
-              <a:rPr sz="1800" b="1" i="0">
+              <a:rPr sz="2400" b="1" i="0">
                 <a:solidFill>
                   <a:srgbClr val="EDAB0C"/>
                 </a:solidFill>
@@ -7942,7 +7942,7 @@
               <a:t>■  </a:t>
             </a:r>
             <a:r>
-              <a:rPr sz="1800" b="0" i="0">
+              <a:rPr sz="2400" b="0" i="0">
                 <a:solidFill>
                   <a:srgbClr val="2A2929"/>
                 </a:solidFill>
@@ -7964,7 +7964,7 @@
               </a:spcAft>
             </a:pPr>
             <a:r>
-              <a:rPr sz="1800" b="1" i="0">
+              <a:rPr sz="2400" b="1" i="0">
                 <a:solidFill>
                   <a:srgbClr val="EDAB0C"/>
                 </a:solidFill>
@@ -7973,7 +7973,7 @@
               <a:t>■  </a:t>
             </a:r>
             <a:r>
-              <a:rPr sz="1800" b="0" i="0">
+              <a:rPr sz="2400" b="0" i="0">
                 <a:solidFill>
                   <a:srgbClr val="2A2929"/>
                 </a:solidFill>
@@ -8519,7 +8519,7 @@
           <a:noFill/>
         </p:spPr>
         <p:txBody>
-          <a:bodyPr wrap="square" anchor="t" lIns="0" rIns="0" tIns="0" bIns="0">
+          <a:bodyPr wrap="square" anchor="ctr" lIns="0" rIns="0" tIns="0" bIns="0">
             <a:spAutoFit/>
           </a:bodyPr>
           <a:lstStyle/>
@@ -8536,7 +8536,7 @@
               </a:spcAft>
             </a:pPr>
             <a:r>
-              <a:rPr sz="1800" b="1" i="0">
+              <a:rPr sz="2400" b="1" i="0">
                 <a:solidFill>
                   <a:srgbClr val="EDAB0C"/>
                 </a:solidFill>
@@ -8545,7 +8545,7 @@
               <a:t>■  </a:t>
             </a:r>
             <a:r>
-              <a:rPr sz="1800" b="0" i="0">
+              <a:rPr sz="2400" b="0" i="0">
                 <a:solidFill>
                   <a:srgbClr val="2A2929"/>
                 </a:solidFill>
@@ -8567,7 +8567,7 @@
               </a:spcAft>
             </a:pPr>
             <a:r>
-              <a:rPr sz="1800" b="1" i="0">
+              <a:rPr sz="2400" b="1" i="0">
                 <a:solidFill>
                   <a:srgbClr val="EDAB0C"/>
                 </a:solidFill>
@@ -8576,7 +8576,7 @@
               <a:t>■  </a:t>
             </a:r>
             <a:r>
-              <a:rPr sz="1800" b="0" i="0">
+              <a:rPr sz="2400" b="0" i="0">
                 <a:solidFill>
                   <a:srgbClr val="2A2929"/>
                 </a:solidFill>
@@ -8598,7 +8598,7 @@
               </a:spcAft>
             </a:pPr>
             <a:r>
-              <a:rPr sz="1800" b="1" i="0">
+              <a:rPr sz="2400" b="1" i="0">
                 <a:solidFill>
                   <a:srgbClr val="EDAB0C"/>
                 </a:solidFill>
@@ -8607,7 +8607,7 @@
               <a:t>■  </a:t>
             </a:r>
             <a:r>
-              <a:rPr sz="1800" b="0" i="0">
+              <a:rPr sz="2400" b="0" i="0">
                 <a:solidFill>
                   <a:srgbClr val="2A2929"/>
                 </a:solidFill>

--- a/S1-CL2-Cloud-Disaster-Recovery/delivery/topic_06/Topic_06_Slides.pptx
+++ b/S1-CL2-Cloud-Disaster-Recovery/delivery/topic_06/Topic_06_Slides.pptx
@@ -7,23 +7,23 @@
   <p:sldIdLst>
     <p:sldId id="256" r:id="rId7"/>
     <p:sldId id="257" r:id="rId8"/>
-    <p:sldId id="258" r:id="rId9"/>
-    <p:sldId id="259" r:id="rId10"/>
-    <p:sldId id="260" r:id="rId11"/>
-    <p:sldId id="261" r:id="rId12"/>
-    <p:sldId id="262" r:id="rId13"/>
-    <p:sldId id="263" r:id="rId14"/>
-    <p:sldId id="264" r:id="rId15"/>
-    <p:sldId id="265" r:id="rId16"/>
-    <p:sldId id="266" r:id="rId17"/>
-    <p:sldId id="267" r:id="rId18"/>
-    <p:sldId id="268" r:id="rId19"/>
-    <p:sldId id="269" r:id="rId20"/>
-    <p:sldId id="270" r:id="rId21"/>
-    <p:sldId id="271" r:id="rId22"/>
-    <p:sldId id="272" r:id="rId23"/>
-    <p:sldId id="273" r:id="rId24"/>
-    <p:sldId id="274" r:id="rId25"/>
+    <p:sldId id="258" r:id="rId10"/>
+    <p:sldId id="259" r:id="rId11"/>
+    <p:sldId id="260" r:id="rId12"/>
+    <p:sldId id="261" r:id="rId13"/>
+    <p:sldId id="262" r:id="rId14"/>
+    <p:sldId id="263" r:id="rId15"/>
+    <p:sldId id="264" r:id="rId16"/>
+    <p:sldId id="265" r:id="rId17"/>
+    <p:sldId id="266" r:id="rId18"/>
+    <p:sldId id="267" r:id="rId19"/>
+    <p:sldId id="268" r:id="rId20"/>
+    <p:sldId id="269" r:id="rId21"/>
+    <p:sldId id="270" r:id="rId22"/>
+    <p:sldId id="271" r:id="rId23"/>
+    <p:sldId id="272" r:id="rId24"/>
+    <p:sldId id="273" r:id="rId25"/>
+    <p:sldId id="274" r:id="rId26"/>
   </p:sldIdLst>
   <p:sldSz cx="12191695" cy="6858000" type="screen4x3"/>
   <p:notesSz cx="6858000" cy="9144000"/>
@@ -123,6 +123,2047 @@
     </a:lvl9pPr>
   </p:defaultTextStyle>
 </p:presentation>
+</file>
+
+<file path=ppt/notesMasters/notesMaster1.xml><?xml version="1.0" encoding="utf-8"?>
+<p:notesMaster xmlns:a="http://schemas.openxmlformats.org/drawingml/2006/main" xmlns:p="http://schemas.openxmlformats.org/presentationml/2006/main" xmlns:r="http://schemas.openxmlformats.org/officeDocument/2006/relationships">
+  <p:cSld>
+    <p:bg>
+      <p:bgRef idx="1001">
+        <a:schemeClr val="bg1"/>
+      </p:bgRef>
+    </p:bg>
+    <p:spTree>
+      <p:nvGrpSpPr>
+        <p:cNvPr id="1" name=""/>
+        <p:cNvGrpSpPr/>
+        <p:nvPr/>
+      </p:nvGrpSpPr>
+      <p:grpSpPr>
+        <a:xfrm>
+          <a:off x="0" y="0"/>
+          <a:ext cx="0" cy="0"/>
+          <a:chOff x="0" y="0"/>
+          <a:chExt cx="0" cy="0"/>
+        </a:xfrm>
+      </p:grpSpPr>
+      <p:sp>
+        <p:nvSpPr>
+          <p:cNvPr id="2" name="Header Placeholder 1"/>
+          <p:cNvSpPr>
+            <a:spLocks noGrp="1"/>
+          </p:cNvSpPr>
+          <p:nvPr>
+            <p:ph type="hdr" sz="quarter"/>
+          </p:nvPr>
+        </p:nvSpPr>
+        <p:spPr>
+          <a:xfrm>
+            <a:off x="0" y="0"/>
+            <a:ext cx="2971800" cy="457200"/>
+          </a:xfrm>
+          <a:prstGeom prst="rect">
+            <a:avLst/>
+          </a:prstGeom>
+        </p:spPr>
+        <p:txBody>
+          <a:bodyPr vert="horz" lIns="91440" tIns="45720" rIns="91440" bIns="45720" rtlCol="0"/>
+          <a:lstStyle>
+            <a:lvl1pPr algn="l">
+              <a:defRPr sz="1200"/>
+            </a:lvl1pPr>
+          </a:lstStyle>
+          <a:p>
+            <a:endParaRPr lang="en-US"/>
+          </a:p>
+        </p:txBody>
+      </p:sp>
+      <p:sp>
+        <p:nvSpPr>
+          <p:cNvPr id="3" name="Date Placeholder 2"/>
+          <p:cNvSpPr>
+            <a:spLocks noGrp="1"/>
+          </p:cNvSpPr>
+          <p:nvPr>
+            <p:ph type="dt" idx="1"/>
+          </p:nvPr>
+        </p:nvSpPr>
+        <p:spPr>
+          <a:xfrm>
+            <a:off x="3884613" y="0"/>
+            <a:ext cx="2971800" cy="457200"/>
+          </a:xfrm>
+          <a:prstGeom prst="rect">
+            <a:avLst/>
+          </a:prstGeom>
+        </p:spPr>
+        <p:txBody>
+          <a:bodyPr vert="horz" lIns="91440" tIns="45720" rIns="91440" bIns="45720" rtlCol="0"/>
+          <a:lstStyle>
+            <a:lvl1pPr algn="r">
+              <a:defRPr sz="1200"/>
+            </a:lvl1pPr>
+          </a:lstStyle>
+          <a:p>
+            <a:fld id="{0F89C1C7-3DCD-1040-A9CF-14679D8B5DDD}" type="datetimeFigureOut">
+              <a:rPr lang="en-US" smtClean="0"/>
+              <a:t>10/17/16</a:t>
+            </a:fld>
+            <a:endParaRPr lang="en-US"/>
+          </a:p>
+        </p:txBody>
+      </p:sp>
+      <p:sp>
+        <p:nvSpPr>
+          <p:cNvPr id="4" name="Slide Image Placeholder 3"/>
+          <p:cNvSpPr>
+            <a:spLocks noGrp="1" noRot="1" noChangeAspect="1"/>
+          </p:cNvSpPr>
+          <p:nvPr>
+            <p:ph type="sldImg" idx="2"/>
+          </p:nvPr>
+        </p:nvSpPr>
+        <p:spPr>
+          <a:xfrm>
+            <a:off x="1143000" y="685800"/>
+            <a:ext cx="4572000" cy="3429000"/>
+          </a:xfrm>
+          <a:prstGeom prst="rect">
+            <a:avLst/>
+          </a:prstGeom>
+          <a:noFill/>
+          <a:ln w="12700">
+            <a:solidFill>
+              <a:prstClr val="black"/>
+            </a:solidFill>
+          </a:ln>
+        </p:spPr>
+        <p:txBody>
+          <a:bodyPr vert="horz" lIns="91440" tIns="45720" rIns="91440" bIns="45720" rtlCol="0" anchor="ctr"/>
+          <a:lstStyle/>
+          <a:p>
+            <a:endParaRPr lang="en-US"/>
+          </a:p>
+        </p:txBody>
+      </p:sp>
+      <p:sp>
+        <p:nvSpPr>
+          <p:cNvPr id="5" name="Notes Placeholder 4"/>
+          <p:cNvSpPr>
+            <a:spLocks noGrp="1"/>
+          </p:cNvSpPr>
+          <p:nvPr>
+            <p:ph type="body" sz="quarter" idx="3"/>
+          </p:nvPr>
+        </p:nvSpPr>
+        <p:spPr>
+          <a:xfrm>
+            <a:off x="685800" y="4343400"/>
+            <a:ext cx="5486400" cy="4114800"/>
+          </a:xfrm>
+          <a:prstGeom prst="rect">
+            <a:avLst/>
+          </a:prstGeom>
+        </p:spPr>
+        <p:txBody>
+          <a:bodyPr vert="horz" lIns="91440" tIns="45720" rIns="91440" bIns="45720" rtlCol="0"/>
+          <a:lstStyle/>
+          <a:p>
+            <a:pPr lvl="0"/>
+            <a:r>
+              <a:rPr lang="en-US" smtClean="0"/>
+              <a:t>Click to edit Master text styles</a:t>
+            </a:r>
+          </a:p>
+          <a:p>
+            <a:pPr lvl="1"/>
+            <a:r>
+              <a:rPr lang="en-US" smtClean="0"/>
+              <a:t>Second level</a:t>
+            </a:r>
+          </a:p>
+          <a:p>
+            <a:pPr lvl="2"/>
+            <a:r>
+              <a:rPr lang="en-US" smtClean="0"/>
+              <a:t>Third level</a:t>
+            </a:r>
+          </a:p>
+          <a:p>
+            <a:pPr lvl="3"/>
+            <a:r>
+              <a:rPr lang="en-US" smtClean="0"/>
+              <a:t>Fourth level</a:t>
+            </a:r>
+          </a:p>
+          <a:p>
+            <a:pPr lvl="4"/>
+            <a:r>
+              <a:rPr lang="en-US" smtClean="0"/>
+              <a:t>Fifth level</a:t>
+            </a:r>
+            <a:endParaRPr lang="en-US"/>
+          </a:p>
+        </p:txBody>
+      </p:sp>
+      <p:sp>
+        <p:nvSpPr>
+          <p:cNvPr id="6" name="Footer Placeholder 5"/>
+          <p:cNvSpPr>
+            <a:spLocks noGrp="1"/>
+          </p:cNvSpPr>
+          <p:nvPr>
+            <p:ph type="ftr" sz="quarter" idx="4"/>
+          </p:nvPr>
+        </p:nvSpPr>
+        <p:spPr>
+          <a:xfrm>
+            <a:off x="0" y="8685213"/>
+            <a:ext cx="2971800" cy="457200"/>
+          </a:xfrm>
+          <a:prstGeom prst="rect">
+            <a:avLst/>
+          </a:prstGeom>
+        </p:spPr>
+        <p:txBody>
+          <a:bodyPr vert="horz" lIns="91440" tIns="45720" rIns="91440" bIns="45720" rtlCol="0" anchor="b"/>
+          <a:lstStyle>
+            <a:lvl1pPr algn="l">
+              <a:defRPr sz="1200"/>
+            </a:lvl1pPr>
+          </a:lstStyle>
+          <a:p>
+            <a:endParaRPr lang="en-US"/>
+          </a:p>
+        </p:txBody>
+      </p:sp>
+      <p:sp>
+        <p:nvSpPr>
+          <p:cNvPr id="7" name="Slide Number Placeholder 6"/>
+          <p:cNvSpPr>
+            <a:spLocks noGrp="1"/>
+          </p:cNvSpPr>
+          <p:nvPr>
+            <p:ph type="sldNum" sz="quarter" idx="5"/>
+          </p:nvPr>
+        </p:nvSpPr>
+        <p:spPr>
+          <a:xfrm>
+            <a:off x="3884613" y="8685213"/>
+            <a:ext cx="2971800" cy="457200"/>
+          </a:xfrm>
+          <a:prstGeom prst="rect">
+            <a:avLst/>
+          </a:prstGeom>
+        </p:spPr>
+        <p:txBody>
+          <a:bodyPr vert="horz" lIns="91440" tIns="45720" rIns="91440" bIns="45720" rtlCol="0" anchor="b"/>
+          <a:lstStyle>
+            <a:lvl1pPr algn="r">
+              <a:defRPr sz="1200"/>
+            </a:lvl1pPr>
+          </a:lstStyle>
+          <a:p>
+            <a:fld id="{BB5E49A5-4136-284D-997B-48E1D791AD67}" type="slidenum">
+              <a:rPr lang="en-US" smtClean="0"/>
+              <a:t>‹#›</a:t>
+            </a:fld>
+            <a:endParaRPr lang="en-US"/>
+          </a:p>
+        </p:txBody>
+      </p:sp>
+    </p:spTree>
+    <p:extLst>
+      <p:ext uri="{BB962C8B-B14F-4D97-AF65-F5344CB8AC3E}">
+        <p14:creationId xmlns:p14="http://schemas.microsoft.com/office/powerpoint/2010/main" val="2623252185"/>
+      </p:ext>
+    </p:extLst>
+  </p:cSld>
+  <p:clrMap bg1="lt1" tx1="dk1" bg2="lt2" tx2="dk2" accent1="accent1" accent2="accent2" accent3="accent3" accent4="accent4" accent5="accent5" accent6="accent6" hlink="hlink" folHlink="folHlink"/>
+  <p:notesStyle>
+    <a:lvl1pPr marL="0" algn="l" defTabSz="457200" rtl="0" eaLnBrk="1" latinLnBrk="0" hangingPunct="1">
+      <a:defRPr sz="1200" kern="1200">
+        <a:solidFill>
+          <a:schemeClr val="tx1"/>
+        </a:solidFill>
+        <a:latin typeface="+mn-lt"/>
+        <a:ea typeface="+mn-ea"/>
+        <a:cs typeface="+mn-cs"/>
+      </a:defRPr>
+    </a:lvl1pPr>
+    <a:lvl2pPr marL="457200" algn="l" defTabSz="457200" rtl="0" eaLnBrk="1" latinLnBrk="0" hangingPunct="1">
+      <a:defRPr sz="1200" kern="1200">
+        <a:solidFill>
+          <a:schemeClr val="tx1"/>
+        </a:solidFill>
+        <a:latin typeface="+mn-lt"/>
+        <a:ea typeface="+mn-ea"/>
+        <a:cs typeface="+mn-cs"/>
+      </a:defRPr>
+    </a:lvl2pPr>
+    <a:lvl3pPr marL="914400" algn="l" defTabSz="457200" rtl="0" eaLnBrk="1" latinLnBrk="0" hangingPunct="1">
+      <a:defRPr sz="1200" kern="1200">
+        <a:solidFill>
+          <a:schemeClr val="tx1"/>
+        </a:solidFill>
+        <a:latin typeface="+mn-lt"/>
+        <a:ea typeface="+mn-ea"/>
+        <a:cs typeface="+mn-cs"/>
+      </a:defRPr>
+    </a:lvl3pPr>
+    <a:lvl4pPr marL="1371600" algn="l" defTabSz="457200" rtl="0" eaLnBrk="1" latinLnBrk="0" hangingPunct="1">
+      <a:defRPr sz="1200" kern="1200">
+        <a:solidFill>
+          <a:schemeClr val="tx1"/>
+        </a:solidFill>
+        <a:latin typeface="+mn-lt"/>
+        <a:ea typeface="+mn-ea"/>
+        <a:cs typeface="+mn-cs"/>
+      </a:defRPr>
+    </a:lvl4pPr>
+    <a:lvl5pPr marL="1828800" algn="l" defTabSz="457200" rtl="0" eaLnBrk="1" latinLnBrk="0" hangingPunct="1">
+      <a:defRPr sz="1200" kern="1200">
+        <a:solidFill>
+          <a:schemeClr val="tx1"/>
+        </a:solidFill>
+        <a:latin typeface="+mn-lt"/>
+        <a:ea typeface="+mn-ea"/>
+        <a:cs typeface="+mn-cs"/>
+      </a:defRPr>
+    </a:lvl5pPr>
+    <a:lvl6pPr marL="2286000" algn="l" defTabSz="457200" rtl="0" eaLnBrk="1" latinLnBrk="0" hangingPunct="1">
+      <a:defRPr sz="1200" kern="1200">
+        <a:solidFill>
+          <a:schemeClr val="tx1"/>
+        </a:solidFill>
+        <a:latin typeface="+mn-lt"/>
+        <a:ea typeface="+mn-ea"/>
+        <a:cs typeface="+mn-cs"/>
+      </a:defRPr>
+    </a:lvl6pPr>
+    <a:lvl7pPr marL="2743200" algn="l" defTabSz="457200" rtl="0" eaLnBrk="1" latinLnBrk="0" hangingPunct="1">
+      <a:defRPr sz="1200" kern="1200">
+        <a:solidFill>
+          <a:schemeClr val="tx1"/>
+        </a:solidFill>
+        <a:latin typeface="+mn-lt"/>
+        <a:ea typeface="+mn-ea"/>
+        <a:cs typeface="+mn-cs"/>
+      </a:defRPr>
+    </a:lvl7pPr>
+    <a:lvl8pPr marL="3200400" algn="l" defTabSz="457200" rtl="0" eaLnBrk="1" latinLnBrk="0" hangingPunct="1">
+      <a:defRPr sz="1200" kern="1200">
+        <a:solidFill>
+          <a:schemeClr val="tx1"/>
+        </a:solidFill>
+        <a:latin typeface="+mn-lt"/>
+        <a:ea typeface="+mn-ea"/>
+        <a:cs typeface="+mn-cs"/>
+      </a:defRPr>
+    </a:lvl8pPr>
+    <a:lvl9pPr marL="3657600" algn="l" defTabSz="457200" rtl="0" eaLnBrk="1" latinLnBrk="0" hangingPunct="1">
+      <a:defRPr sz="1200" kern="1200">
+        <a:solidFill>
+          <a:schemeClr val="tx1"/>
+        </a:solidFill>
+        <a:latin typeface="+mn-lt"/>
+        <a:ea typeface="+mn-ea"/>
+        <a:cs typeface="+mn-cs"/>
+      </a:defRPr>
+    </a:lvl9pPr>
+  </p:notesStyle>
+</p:notesMaster>
+</file>
+
+<file path=ppt/notesSlides/notesSlide1.xml><?xml version="1.0" encoding="utf-8"?>
+<p:notes xmlns:a="http://schemas.openxmlformats.org/drawingml/2006/main" xmlns:p="http://schemas.openxmlformats.org/presentationml/2006/main" xmlns:r="http://schemas.openxmlformats.org/officeDocument/2006/relationships">
+  <p:cSld>
+    <p:spTree>
+      <p:nvGrpSpPr>
+        <p:cNvPr id="1" name=""/>
+        <p:cNvGrpSpPr/>
+        <p:nvPr/>
+      </p:nvGrpSpPr>
+      <p:grpSpPr>
+        <a:xfrm>
+          <a:off x="0" y="0"/>
+          <a:ext cx="0" cy="0"/>
+          <a:chOff x="0" y="0"/>
+          <a:chExt cx="0" cy="0"/>
+        </a:xfrm>
+      </p:grpSpPr>
+      <p:sp>
+        <p:nvSpPr>
+          <p:cNvPr id="2" name="Slide Image Placeholder 1"/>
+          <p:cNvSpPr>
+            <a:spLocks noGrp="1"/>
+          </p:cNvSpPr>
+          <p:nvPr>
+            <p:ph type="sldImg" idx="2"/>
+          </p:nvPr>
+        </p:nvSpPr>
+        <p:spPr/>
+      </p:sp>
+      <p:sp>
+        <p:nvSpPr>
+          <p:cNvPr id="3" name="Notes Placeholder 2"/>
+          <p:cNvSpPr>
+            <a:spLocks noGrp="1"/>
+          </p:cNvSpPr>
+          <p:nvPr>
+            <p:ph type="body" idx="3" sz="quarter"/>
+          </p:nvPr>
+        </p:nvSpPr>
+        <p:spPr/>
+        <p:txBody>
+          <a:bodyPr/>
+          <a:lstStyle/>
+          <a:p>
+            <a:r>
+              <a:t>Frame Topic 6 as the START of AT2 — the design is signed off; now you build it in the lab. Set the mode</a:t>
+            </a:r>
+          </a:p>
+          <a:p>
+            <a:r>
+              <a:t>and the two conventions (Region substitution, teach→demo→practice); don't teach CloudFormation yet.</a:t>
+            </a:r>
+          </a:p>
+          <a:p>
+            <a:r>
+              <a:t>• First bullet: AT1 is signed off; AT2 begins — you build in the lab, TO the approved design. The design</a:t>
+            </a:r>
+          </a:p>
+          <a:p>
+            <a:r>
+              <a:t>is settled; your job is faithful implementation.</a:t>
+            </a:r>
+          </a:p>
+          <a:p>
+            <a:r>
+              <a:t>• Second bullet: scope today — what IaC is, and OPERATING a template someone else wrote (authoring your</a:t>
+            </a:r>
+          </a:p>
+          <a:p>
+            <a:r>
+              <a:t>own is Topic 7).</a:t>
+            </a:r>
+          </a:p>
+          <a:p>
+            <a:r>
+              <a:t>• Third bullet (say it explicitly): Region substitution starts here — the design targets Sydney/India,</a:t>
+            </a:r>
+          </a:p>
+          <a:p>
+            <a:r>
+              <a:t>but you deploy to us-east-1 in the Learner Lab: [scenario: ap-southeast-2 (Sydney) | deploy: us-east-1].</a:t>
+            </a:r>
+          </a:p>
+          <a:p>
+            <a:r>
+              <a:t>Same build; only the console Region label differs.</a:t>
+            </a:r>
+          </a:p>
+          <a:p>
+            <a:r>
+              <a:t>• Fourth bullet: the rhythm for every AWS practical — teach → demo → practice. Watch the demo, then do it</a:t>
+            </a:r>
+          </a:p>
+          <a:p>
+            <a:r>
+              <a:t>on the practice scenario.</a:t>
+            </a:r>
+          </a:p>
+          <a:p>
+            <a:r>
+              <a:t>Misconception to pre-empt: "us-east-1 means residency doesn't matter." No — the DESIGN still mandates the</a:t>
+            </a:r>
+          </a:p>
+          <a:p>
+            <a:r>
+              <a:t>onshore Region for legal reasons; the lab just can't host it, so we substitute and label it.</a:t>
+            </a:r>
+          </a:p>
+          <a:p>
+            <a:r>
+              <a:t>Question to pose: "Why describe infrastructure in a template at all, instead of just clicking it in the</a:t>
+            </a:r>
+          </a:p>
+          <a:p>
+            <a:r>
+              <a:t>console?" (repeatable, versioned, reviewable — teased here, answered in C1).</a:t>
+            </a:r>
+          </a:p>
+          <a:p>
+            <a:r>
+              <a:t>UoC/AT2 tie: opens the AT2 build arc — ICTCLD505 (IaC) primary; today feeds AT2 §4.2 (operate the</a:t>
+            </a:r>
+          </a:p>
+          <a:p>
+            <a:r>
+              <a:t>provided data-store template).</a:t>
+            </a:r>
+          </a:p>
+        </p:txBody>
+      </p:sp>
+      <p:sp>
+        <p:nvSpPr>
+          <p:cNvPr id="4" name="Slide Number Placeholder 3"/>
+          <p:cNvSpPr>
+            <a:spLocks noGrp="1"/>
+          </p:cNvSpPr>
+          <p:nvPr>
+            <p:ph type="sldNum" idx="5" sz="quarter"/>
+          </p:nvPr>
+        </p:nvSpPr>
+        <p:spPr/>
+      </p:sp>
+    </p:spTree>
+  </p:cSld>
+  <p:clrMapOvr>
+    <a:masterClrMapping/>
+  </p:clrMapOvr>
+</p:notes>
+</file>
+
+<file path=ppt/notesSlides/notesSlide10.xml><?xml version="1.0" encoding="utf-8"?>
+<p:notes xmlns:a="http://schemas.openxmlformats.org/drawingml/2006/main" xmlns:p="http://schemas.openxmlformats.org/presentationml/2006/main" xmlns:r="http://schemas.openxmlformats.org/officeDocument/2006/relationships">
+  <p:cSld>
+    <p:spTree>
+      <p:nvGrpSpPr>
+        <p:cNvPr id="1" name=""/>
+        <p:cNvGrpSpPr/>
+        <p:nvPr/>
+      </p:nvGrpSpPr>
+      <p:grpSpPr>
+        <a:xfrm>
+          <a:off x="0" y="0"/>
+          <a:ext cx="0" cy="0"/>
+          <a:chOff x="0" y="0"/>
+          <a:chExt cx="0" cy="0"/>
+        </a:xfrm>
+      </p:grpSpPr>
+      <p:sp>
+        <p:nvSpPr>
+          <p:cNvPr id="2" name="Slide Image Placeholder 1"/>
+          <p:cNvSpPr>
+            <a:spLocks noGrp="1"/>
+          </p:cNvSpPr>
+          <p:nvPr>
+            <p:ph type="sldImg" idx="2"/>
+          </p:nvPr>
+        </p:nvSpPr>
+        <p:spPr/>
+      </p:sp>
+      <p:sp>
+        <p:nvSpPr>
+          <p:cNvPr id="3" name="Notes Placeholder 2"/>
+          <p:cNvSpPr>
+            <a:spLocks noGrp="1"/>
+          </p:cNvSpPr>
+          <p:nvPr>
+            <p:ph type="body" idx="3" sz="quarter"/>
+          </p:nvPr>
+        </p:nvSpPr>
+        <p:spPr/>
+        <p:txBody>
+          <a:bodyPr/>
+          <a:lstStyle/>
+          <a:p>
+            <a:r>
+              <a:t>LIVE DEMONSTRATION (educator-led — screen it live, or your own screen capture; no recorded-demos</a:t>
+            </a:r>
+          </a:p>
+          <a:p>
+            <a:r>
+              <a:t>catalogue in CL2). Walk a DELIBERATELY BROKEN copy of the provided template against the lab-pack, then</a:t>
+            </a:r>
+          </a:p>
+          <a:p>
+            <a:r>
+              <a:t>students replicate on the next slide.</a:t>
+            </a:r>
+          </a:p>
+          <a:p/>
+          <a:p>
+            <a:r>
+              <a:t>WHAT TO DEMONSTRATE (in the Learner Lab, us-east-1):</a:t>
+            </a:r>
+          </a:p>
+          <a:p>
+            <a:r>
+              <a:t>1. Deploy the deliberately broken template; let it fail.</a:t>
+            </a:r>
+          </a:p>
+          <a:p>
+            <a:r>
+              <a:t>2. Open the stack events; scroll to the FIRST CREATE_FAILED and read its reason out loud.</a:t>
+            </a:r>
+          </a:p>
+          <a:p>
+            <a:r>
+              <a:t>3. Diagnose from the message (e.g. a bad !Ref, an invalid property, a name clash — the KE 7 suspects).</a:t>
+            </a:r>
+          </a:p>
+          <a:p>
+            <a:r>
+              <a:t>4. Make the one-line fix in the template; redeploy; confirm it reaches CREATE_COMPLETE.</a:t>
+            </a:r>
+          </a:p>
+          <a:p/>
+          <a:p>
+            <a:r>
+              <a:t>WHAT TO EMPHASISE:</a:t>
+            </a:r>
+          </a:p>
+          <a:p>
+            <a:r>
+              <a:t>• Model reading the error BEFORE touching anything — narrate the diagnosis, don't just fix it silently.</a:t>
+            </a:r>
+          </a:p>
+          <a:p>
+            <a:r>
+              <a:t>• It's the FIRST failure that matters — show how the later failures were downstream of it.</a:t>
+            </a:r>
+          </a:p>
+          <a:p>
+            <a:r>
+              <a:t>• One deliberate fix, then redeploy — reinforce diagnosis over trial-and-error.</a:t>
+            </a:r>
+          </a:p>
+          <a:p>
+            <a:r>
+              <a:t>• Clean up (delete the stack) at the end.</a:t>
+            </a:r>
+          </a:p>
+          <a:p/>
+          <a:p>
+            <a:r>
+              <a:t>PREP: have a broken copy of the provided template ready (a single planted error), the events view</a:t>
+            </a:r>
+          </a:p>
+          <a:p>
+            <a:r>
+              <a:t>familiar, lab open in us-east-1. ~6–8 min to screen + narrate before the activity.</a:t>
+            </a:r>
+          </a:p>
+        </p:txBody>
+      </p:sp>
+      <p:sp>
+        <p:nvSpPr>
+          <p:cNvPr id="4" name="Slide Number Placeholder 3"/>
+          <p:cNvSpPr>
+            <a:spLocks noGrp="1"/>
+          </p:cNvSpPr>
+          <p:nvPr>
+            <p:ph type="sldNum" idx="5" sz="quarter"/>
+          </p:nvPr>
+        </p:nvSpPr>
+        <p:spPr/>
+      </p:sp>
+    </p:spTree>
+  </p:cSld>
+  <p:clrMapOvr>
+    <a:masterClrMapping/>
+  </p:clrMapOvr>
+</p:notes>
+</file>
+
+<file path=ppt/notesSlides/notesSlide11.xml><?xml version="1.0" encoding="utf-8"?>
+<p:notes xmlns:a="http://schemas.openxmlformats.org/drawingml/2006/main" xmlns:p="http://schemas.openxmlformats.org/presentationml/2006/main" xmlns:r="http://schemas.openxmlformats.org/officeDocument/2006/relationships">
+  <p:cSld>
+    <p:spTree>
+      <p:nvGrpSpPr>
+        <p:cNvPr id="1" name=""/>
+        <p:cNvGrpSpPr/>
+        <p:nvPr/>
+      </p:nvGrpSpPr>
+      <p:grpSpPr>
+        <a:xfrm>
+          <a:off x="0" y="0"/>
+          <a:ext cx="0" cy="0"/>
+          <a:chOff x="0" y="0"/>
+          <a:chExt cx="0" cy="0"/>
+        </a:xfrm>
+      </p:grpSpPr>
+      <p:sp>
+        <p:nvSpPr>
+          <p:cNvPr id="2" name="Slide Image Placeholder 1"/>
+          <p:cNvSpPr>
+            <a:spLocks noGrp="1"/>
+          </p:cNvSpPr>
+          <p:nvPr>
+            <p:ph type="sldImg" idx="2"/>
+          </p:nvPr>
+        </p:nvSpPr>
+        <p:spPr/>
+      </p:sp>
+      <p:sp>
+        <p:nvSpPr>
+          <p:cNvPr id="3" name="Notes Placeholder 2"/>
+          <p:cNvSpPr>
+            <a:spLocks noGrp="1"/>
+          </p:cNvSpPr>
+          <p:nvPr>
+            <p:ph type="body" idx="3" sz="quarter"/>
+          </p:nvPr>
+        </p:nvSpPr>
+        <p:spPr/>
+        <p:txBody>
+          <a:bodyPr/>
+          <a:lstStyle/>
+          <a:p>
+            <a:r>
+              <a:t>Facilitation — the C4 practice; students diagnose and fix the broken template on the practice scenario.</a:t>
+            </a:r>
+          </a:p>
+          <a:p>
+            <a:r>
+              <a:t>They apply the method you just demoed.</a:t>
+            </a:r>
+          </a:p>
+          <a:p>
+            <a:r>
+              <a:t>Tell students, in these words: "On the practice scenario, deploy the broken template, read the error,</a:t>
+            </a:r>
+          </a:p>
+          <a:p>
+            <a:r>
+              <a:t>fix it, and redeploy to success."</a:t>
+            </a:r>
+          </a:p>
+          <a:p>
+            <a:r>
+              <a:t>Steps (put on the board):</a:t>
+            </a:r>
+          </a:p>
+          <a:p>
+            <a:r>
+              <a:t>1. Deploy the broken template in us-east-1; let it fail.</a:t>
+            </a:r>
+          </a:p>
+          <a:p>
+            <a:r>
+              <a:t>2. Open the stack events; find the FIRST CREATE_FAILED and read its reason.</a:t>
+            </a:r>
+          </a:p>
+          <a:p>
+            <a:r>
+              <a:t>3. Diagnose (bad reference / missing permission / invalid property / name clash) and make the fix.</a:t>
+            </a:r>
+          </a:p>
+          <a:p>
+            <a:r>
+              <a:t>4. Redeploy; confirm CREATE_COMPLETE; then delete the stack.</a:t>
+            </a:r>
+          </a:p>
+          <a:p>
+            <a:r>
+              <a:t>Must produce: the once-broken stack redeployed to success, plus a one-line statement of what the error</a:t>
+            </a:r>
+          </a:p>
+          <a:p>
+            <a:r>
+              <a:t>was and how they knew.</a:t>
+            </a:r>
+          </a:p>
+          <a:p>
+            <a:r>
+              <a:t>Timing: ~20 min. Where they get stuck: they read the LAST failure not the first, or start changing</a:t>
+            </a:r>
+          </a:p>
+          <a:p>
+            <a:r>
+              <a:t>random properties — circulate and point them at the first CREATE_FAILED and its message.</a:t>
+            </a:r>
+          </a:p>
+          <a:p>
+            <a:r>
+              <a:t>Share-back prompt: "What did the first failure event actually say, and what did that tell you to fix?"</a:t>
+            </a:r>
+          </a:p>
+          <a:p>
+            <a:r>
+              <a:t>No-leakage note: practice scenario — AT2 assesses troubleshooting on the provided data-store template</a:t>
+            </a:r>
+          </a:p>
+          <a:p>
+            <a:r>
+              <a:t>(comparable, not identical).</a:t>
+            </a:r>
+          </a:p>
+        </p:txBody>
+      </p:sp>
+      <p:sp>
+        <p:nvSpPr>
+          <p:cNvPr id="4" name="Slide Number Placeholder 3"/>
+          <p:cNvSpPr>
+            <a:spLocks noGrp="1"/>
+          </p:cNvSpPr>
+          <p:nvPr>
+            <p:ph type="sldNum" idx="5" sz="quarter"/>
+          </p:nvPr>
+        </p:nvSpPr>
+        <p:spPr/>
+      </p:sp>
+    </p:spTree>
+  </p:cSld>
+  <p:clrMapOvr>
+    <a:masterClrMapping/>
+  </p:clrMapOvr>
+</p:notes>
+</file>
+
+<file path=ppt/notesSlides/notesSlide12.xml><?xml version="1.0" encoding="utf-8"?>
+<p:notes xmlns:a="http://schemas.openxmlformats.org/drawingml/2006/main" xmlns:p="http://schemas.openxmlformats.org/presentationml/2006/main" xmlns:r="http://schemas.openxmlformats.org/officeDocument/2006/relationships">
+  <p:cSld>
+    <p:spTree>
+      <p:nvGrpSpPr>
+        <p:cNvPr id="1" name=""/>
+        <p:cNvGrpSpPr/>
+        <p:nvPr/>
+      </p:nvGrpSpPr>
+      <p:grpSpPr>
+        <a:xfrm>
+          <a:off x="0" y="0"/>
+          <a:ext cx="0" cy="0"/>
+          <a:chOff x="0" y="0"/>
+          <a:chExt cx="0" cy="0"/>
+        </a:xfrm>
+      </p:grpSpPr>
+      <p:sp>
+        <p:nvSpPr>
+          <p:cNvPr id="2" name="Slide Image Placeholder 1"/>
+          <p:cNvSpPr>
+            <a:spLocks noGrp="1"/>
+          </p:cNvSpPr>
+          <p:nvPr>
+            <p:ph type="sldImg" idx="2"/>
+          </p:nvPr>
+        </p:nvSpPr>
+        <p:spPr/>
+      </p:sp>
+      <p:sp>
+        <p:nvSpPr>
+          <p:cNvPr id="3" name="Notes Placeholder 2"/>
+          <p:cNvSpPr>
+            <a:spLocks noGrp="1"/>
+          </p:cNvSpPr>
+          <p:nvPr>
+            <p:ph type="body" idx="3" sz="quarter"/>
+          </p:nvPr>
+        </p:nvSpPr>
+        <p:spPr/>
+        <p:txBody>
+          <a:bodyPr/>
+          <a:lstStyle/>
+          <a:p>
+            <a:r>
+              <a:t>Bespoke — the shared-foundations KE: the standards and standard products under the build. This is</a:t>
+            </a:r>
+          </a:p>
+          <a:p>
+            <a:r>
+              <a:t>knowledge shared across BOTH units (503 and 505), so teach it once here.</a:t>
+            </a:r>
+          </a:p>
+          <a:p>
+            <a:r>
+              <a:t>• First bullet: industry technology STANDARDS that underpin cloud building — interoperability, security,</a:t>
+            </a:r>
+          </a:p>
+          <a:p>
+            <a:r>
+              <a:t>and management baselines (KE 1). These are the agreed rules that make cloud components work together and</a:t>
+            </a:r>
+          </a:p>
+          <a:p>
+            <a:r>
+              <a:t>stay secure.</a:t>
+            </a:r>
+          </a:p>
+          <a:p>
+            <a:r>
+              <a:t>• Second bullet: standard PRODUCTS the platform is built on (KE 2) — compute families, managed</a:t>
+            </a:r>
+          </a:p>
+          <a:p>
+            <a:r>
+              <a:t>databases, object/block storage. The building blocks you assemble, not things you invent.</a:t>
+            </a:r>
+          </a:p>
+          <a:p>
+            <a:r>
+              <a:t>• Third bullet: this is the shared foundation behind both the IaC strand (505) and the microservice</a:t>
+            </a:r>
+          </a:p>
+          <a:p>
+            <a:r>
+              <a:t>strand (503) — flag that it earns marks in the written KE appendix, assembled in Topic 10.</a:t>
+            </a:r>
+          </a:p>
+          <a:p>
+            <a:r>
+              <a:t>Misconception to pre-empt: "standards are abstract theory with no bearing on my build." No — they're why</a:t>
+            </a:r>
+          </a:p>
+          <a:p>
+            <a:r>
+              <a:t>your template's resources interoperate and why the managed products behave predictably; it's the ground</a:t>
+            </a:r>
+          </a:p>
+          <a:p>
+            <a:r>
+              <a:t>the whole build stands on.</a:t>
+            </a:r>
+          </a:p>
+          <a:p>
+            <a:r>
+              <a:t>Question to pose: "Name a standard PRODUCT you'll use in this build and a standard it depends on." (e.g.</a:t>
+            </a:r>
+          </a:p>
+          <a:p>
+            <a:r>
+              <a:t>a managed database + the security/interoperability baselines it implements).</a:t>
+            </a:r>
+          </a:p>
+          <a:p>
+            <a:r>
+              <a:t>UoC/AT2 tie: ICTCLD503 KE 1/KE 2 + ICTCLD505 KE 1/KE 2 (industry standards + standard hardware/software/</a:t>
+            </a:r>
+          </a:p>
+          <a:p>
+            <a:r>
+              <a:t>storage) → the AT2 written KE appendix (§8, assembled in Topic 10).</a:t>
+            </a:r>
+          </a:p>
+        </p:txBody>
+      </p:sp>
+      <p:sp>
+        <p:nvSpPr>
+          <p:cNvPr id="4" name="Slide Number Placeholder 3"/>
+          <p:cNvSpPr>
+            <a:spLocks noGrp="1"/>
+          </p:cNvSpPr>
+          <p:nvPr>
+            <p:ph type="sldNum" idx="5" sz="quarter"/>
+          </p:nvPr>
+        </p:nvSpPr>
+        <p:spPr/>
+      </p:sp>
+    </p:spTree>
+  </p:cSld>
+  <p:clrMapOvr>
+    <a:masterClrMapping/>
+  </p:clrMapOvr>
+</p:notes>
+</file>
+
+<file path=ppt/notesSlides/notesSlide2.xml><?xml version="1.0" encoding="utf-8"?>
+<p:notes xmlns:a="http://schemas.openxmlformats.org/drawingml/2006/main" xmlns:p="http://schemas.openxmlformats.org/presentationml/2006/main" xmlns:r="http://schemas.openxmlformats.org/officeDocument/2006/relationships">
+  <p:cSld>
+    <p:spTree>
+      <p:nvGrpSpPr>
+        <p:cNvPr id="1" name=""/>
+        <p:cNvGrpSpPr/>
+        <p:nvPr/>
+      </p:nvGrpSpPr>
+      <p:grpSpPr>
+        <a:xfrm>
+          <a:off x="0" y="0"/>
+          <a:ext cx="0" cy="0"/>
+          <a:chOff x="0" y="0"/>
+          <a:chExt cx="0" cy="0"/>
+        </a:xfrm>
+      </p:grpSpPr>
+      <p:sp>
+        <p:nvSpPr>
+          <p:cNvPr id="2" name="Slide Image Placeholder 1"/>
+          <p:cNvSpPr>
+            <a:spLocks noGrp="1"/>
+          </p:cNvSpPr>
+          <p:nvPr>
+            <p:ph type="sldImg" idx="2"/>
+          </p:nvPr>
+        </p:nvSpPr>
+        <p:spPr/>
+      </p:sp>
+      <p:sp>
+        <p:nvSpPr>
+          <p:cNvPr id="3" name="Notes Placeholder 2"/>
+          <p:cNvSpPr>
+            <a:spLocks noGrp="1"/>
+          </p:cNvSpPr>
+          <p:nvPr>
+            <p:ph type="body" idx="3" sz="quarter"/>
+          </p:nvPr>
+        </p:nvSpPr>
+        <p:spPr/>
+        <p:txBody>
+          <a:bodyPr/>
+          <a:lstStyle/>
+          <a:p>
+            <a:r>
+              <a:t>Vendor-neutral primer — install the core idea of IaC before any AWS specifics.</a:t>
+            </a:r>
+          </a:p>
+          <a:p>
+            <a:r>
+              <a:t>• First bullet: IaC describes infrastructure in a TEXT TEMPLATE the platform then provisions for you —</a:t>
+            </a:r>
+          </a:p>
+          <a:p>
+            <a:r>
+              <a:t>you declare what you want, the platform builds it.</a:t>
+            </a:r>
+          </a:p>
+          <a:p>
+            <a:r>
+              <a:t>• Second bullet: walk the benefits over manual console work — repeatable, versioned, reviewable, fast to</a:t>
+            </a:r>
+          </a:p>
+          <a:p>
+            <a:r>
+              <a:t>rebuild. These four are KE 3; say them as the reasons a professional uses IaC.</a:t>
+            </a:r>
+          </a:p>
+          <a:p>
+            <a:r>
+              <a:t>• Third bullet: the same template gives the same result every time — no click-to-click drift between two</a:t>
+            </a:r>
+          </a:p>
+          <a:p>
+            <a:r>
+              <a:t>people or two environments. Determinism is the whole point.</a:t>
+            </a:r>
+          </a:p>
+          <a:p>
+            <a:r>
+              <a:t>Misconception to pre-empt: "IaC is just a faster way to click." No — it's a fundamentally different</a:t>
+            </a:r>
+          </a:p>
+          <a:p>
+            <a:r>
+              <a:t>model: you version and review the DESCRIPTION of infrastructure like source code, and rebuild from it.</a:t>
+            </a:r>
+          </a:p>
+          <a:p>
+            <a:r>
+              <a:t>Question to pose: "You built something perfectly in the console last week and need it again in a new</a:t>
+            </a:r>
+          </a:p>
+          <a:p>
+            <a:r>
+              <a:t>account today — what does the console give you vs a template?" (memory/screenshots vs a repeatable</a:t>
+            </a:r>
+          </a:p>
+          <a:p>
+            <a:r>
+              <a:t>artefact).</a:t>
+            </a:r>
+          </a:p>
+          <a:p>
+            <a:r>
+              <a:t>UoC/AT2 tie: ICTCLD505 PC 1.1 (benefits of IaC) + KE 3 (IaC vs manual provisioning) → AT2 §4.2 / §8.</a:t>
+            </a:r>
+          </a:p>
+        </p:txBody>
+      </p:sp>
+      <p:sp>
+        <p:nvSpPr>
+          <p:cNvPr id="4" name="Slide Number Placeholder 3"/>
+          <p:cNvSpPr>
+            <a:spLocks noGrp="1"/>
+          </p:cNvSpPr>
+          <p:nvPr>
+            <p:ph type="sldNum" idx="5" sz="quarter"/>
+          </p:nvPr>
+        </p:nvSpPr>
+        <p:spPr/>
+      </p:sp>
+    </p:spTree>
+  </p:cSld>
+  <p:clrMapOvr>
+    <a:masterClrMapping/>
+  </p:clrMapOvr>
+</p:notes>
+</file>
+
+<file path=ppt/notesSlides/notesSlide3.xml><?xml version="1.0" encoding="utf-8"?>
+<p:notes xmlns:a="http://schemas.openxmlformats.org/drawingml/2006/main" xmlns:p="http://schemas.openxmlformats.org/presentationml/2006/main" xmlns:r="http://schemas.openxmlformats.org/officeDocument/2006/relationships">
+  <p:cSld>
+    <p:spTree>
+      <p:nvGrpSpPr>
+        <p:cNvPr id="1" name=""/>
+        <p:cNvGrpSpPr/>
+        <p:nvPr/>
+      </p:nvGrpSpPr>
+      <p:grpSpPr>
+        <a:xfrm>
+          <a:off x="0" y="0"/>
+          <a:ext cx="0" cy="0"/>
+          <a:chOff x="0" y="0"/>
+          <a:chExt cx="0" cy="0"/>
+        </a:xfrm>
+      </p:grpSpPr>
+      <p:sp>
+        <p:nvSpPr>
+          <p:cNvPr id="2" name="Slide Image Placeholder 1"/>
+          <p:cNvSpPr>
+            <a:spLocks noGrp="1"/>
+          </p:cNvSpPr>
+          <p:nvPr>
+            <p:ph type="sldImg" idx="2"/>
+          </p:nvPr>
+        </p:nvSpPr>
+        <p:spPr/>
+      </p:sp>
+      <p:sp>
+        <p:nvSpPr>
+          <p:cNvPr id="3" name="Notes Placeholder 2"/>
+          <p:cNvSpPr>
+            <a:spLocks noGrp="1"/>
+          </p:cNvSpPr>
+          <p:nvPr>
+            <p:ph type="body" idx="3" sz="quarter"/>
+          </p:nvPr>
+        </p:nvSpPr>
+        <p:spPr/>
+        <p:txBody>
+          <a:bodyPr/>
+          <a:lstStyle/>
+          <a:p>
+            <a:r>
+              <a:t>Bespoke — the three remaining C1 ideas: how automation leverages the platform, what can go wrong, and</a:t>
+            </a:r>
+          </a:p>
+          <a:p>
+            <a:r>
+              <a:t>choosing the service. Balance the benefits slide with the risks.</a:t>
+            </a:r>
+          </a:p>
+          <a:p>
+            <a:r>
+              <a:t>• First bullet: automation LEVERAGES the platform — one template stands up many related resources</a:t>
+            </a:r>
+          </a:p>
+          <a:p>
+            <a:r>
+              <a:t>consistently, in the right order, without manual steps.</a:t>
+            </a:r>
+          </a:p>
+          <a:p>
+            <a:r>
+              <a:t>• Second bullet: the potential ISSUES (students must know these, not just the upside) — drift from</a:t>
+            </a:r>
+          </a:p>
+          <a:p>
+            <a:r>
+              <a:t>manual edits, a bad change rolling back a whole stack, permission/quota errors. Name them plainly.</a:t>
+            </a:r>
+          </a:p>
+          <a:p>
+            <a:r>
+              <a:t>• Third bullet: choose an IaC service COMPATIBLE with the platform — on AWS, CloudFormation is native;</a:t>
+            </a:r>
+          </a:p>
+          <a:p>
+            <a:r>
+              <a:t>manage/measure deployments by stack status and change sets.</a:t>
+            </a:r>
+          </a:p>
+          <a:p>
+            <a:r>
+              <a:t>Misconception to pre-empt: "IaC removes all risk." No — it introduces its OWN failure modes (drift,</a:t>
+            </a:r>
+          </a:p>
+          <a:p>
+            <a:r>
+              <a:t>rollbacks, quota/permission errors); knowing them is part of using it well and is examined.</a:t>
+            </a:r>
+          </a:p>
+          <a:p>
+            <a:r>
+              <a:t>Question to pose: "Someone tweaks a resource by hand after it was deployed from a template — what problem</a:t>
+            </a:r>
+          </a:p>
+          <a:p>
+            <a:r>
+              <a:t>have they just created?" (drift — the template and reality no longer match).</a:t>
+            </a:r>
+          </a:p>
+          <a:p>
+            <a:r>
+              <a:t>UoC/AT2 tie: ICTCLD505 PC 1.2 (automation leverages platforms) + PC 1.3 (potential issues) + PC 1.4 /</a:t>
+            </a:r>
+          </a:p>
+          <a:p>
+            <a:r>
+              <a:t>KE 4 (select a compatible service) + KE 11 (manage/measure via stack status, change sets) → AT2 §5/§8.</a:t>
+            </a:r>
+          </a:p>
+        </p:txBody>
+      </p:sp>
+      <p:sp>
+        <p:nvSpPr>
+          <p:cNvPr id="4" name="Slide Number Placeholder 3"/>
+          <p:cNvSpPr>
+            <a:spLocks noGrp="1"/>
+          </p:cNvSpPr>
+          <p:nvPr>
+            <p:ph type="sldNum" idx="5" sz="quarter"/>
+          </p:nvPr>
+        </p:nvSpPr>
+        <p:spPr/>
+      </p:sp>
+    </p:spTree>
+  </p:cSld>
+  <p:clrMapOvr>
+    <a:masterClrMapping/>
+  </p:clrMapOvr>
+</p:notes>
+</file>
+
+<file path=ppt/notesSlides/notesSlide4.xml><?xml version="1.0" encoding="utf-8"?>
+<p:notes xmlns:a="http://schemas.openxmlformats.org/drawingml/2006/main" xmlns:p="http://schemas.openxmlformats.org/presentationml/2006/main" xmlns:r="http://schemas.openxmlformats.org/officeDocument/2006/relationships">
+  <p:cSld>
+    <p:spTree>
+      <p:nvGrpSpPr>
+        <p:cNvPr id="1" name=""/>
+        <p:cNvGrpSpPr/>
+        <p:nvPr/>
+      </p:nvGrpSpPr>
+      <p:grpSpPr>
+        <a:xfrm>
+          <a:off x="0" y="0"/>
+          <a:ext cx="0" cy="0"/>
+          <a:chOff x="0" y="0"/>
+          <a:chExt cx="0" cy="0"/>
+        </a:xfrm>
+      </p:grpSpPr>
+      <p:sp>
+        <p:nvSpPr>
+          <p:cNvPr id="2" name="Slide Image Placeholder 1"/>
+          <p:cNvSpPr>
+            <a:spLocks noGrp="1"/>
+          </p:cNvSpPr>
+          <p:nvPr>
+            <p:ph type="sldImg" idx="2"/>
+          </p:nvPr>
+        </p:nvSpPr>
+        <p:spPr/>
+      </p:sp>
+      <p:sp>
+        <p:nvSpPr>
+          <p:cNvPr id="3" name="Notes Placeholder 2"/>
+          <p:cNvSpPr>
+            <a:spLocks noGrp="1"/>
+          </p:cNvSpPr>
+          <p:nvPr>
+            <p:ph type="body" idx="3" sz="quarter"/>
+          </p:nvPr>
+        </p:nvSpPr>
+        <p:spPr/>
+        <p:txBody>
+          <a:bodyPr/>
+          <a:lstStyle/>
+          <a:p>
+            <a:r>
+              <a:t>Primer — the anatomy of a template so students can READ one. Vendor-neutral framing, AWS examples.</a:t>
+            </a:r>
+          </a:p>
+          <a:p>
+            <a:r>
+              <a:t>• First bullet: the parts — Parameters (inputs), Resources (what to create), Outputs (what to share),</a:t>
+            </a:r>
+          </a:p>
+          <a:p>
+            <a:r>
+              <a:t>and intrinsic functions (!Ref, !GetAtt, !Sub) that wire them together. Name each part's job.</a:t>
+            </a:r>
+          </a:p>
+          <a:p>
+            <a:r>
+              <a:t>• Second bullet: resources declare DESIRED STATE — you say what you want to exist; the platform works</a:t>
+            </a:r>
+          </a:p>
+          <a:p>
+            <a:r>
+              <a:t>out how to reach it. This is the declarative mindset (contrast with scripting each step).</a:t>
+            </a:r>
+          </a:p>
+          <a:p>
+            <a:r>
+              <a:t>• Third bullet: read a template TOP-DOWN — inputs → resources → outputs. Give them the reading order</a:t>
+            </a:r>
+          </a:p>
+          <a:p>
+            <a:r>
+              <a:t>they'll use on the provided template next slide.</a:t>
+            </a:r>
+          </a:p>
+          <a:p>
+            <a:r>
+              <a:t>Misconception to pre-empt: "a template is a script that runs line by line." No — it's a DECLARATION of</a:t>
+            </a:r>
+          </a:p>
+          <a:p>
+            <a:r>
+              <a:t>the end state; the platform decides order and method. Order in the file isn't execution order.</a:t>
+            </a:r>
+          </a:p>
+          <a:p>
+            <a:r>
+              <a:t>Question to pose: "If a template just says 'this database and this server should exist,' who decides the</a:t>
+            </a:r>
+          </a:p>
+          <a:p>
+            <a:r>
+              <a:t>order they're created in?" (the platform, from the dependencies/references — not you).</a:t>
+            </a:r>
+          </a:p>
+          <a:p>
+            <a:r>
+              <a:t>UoC/AT2 tie: ICTCLD505 PC 2.1 (template syntax) + KE 5 (template syntax) → AT2 §4.2 (read the provided</a:t>
+            </a:r>
+          </a:p>
+          <a:p>
+            <a:r>
+              <a:t>template before operating it).</a:t>
+            </a:r>
+          </a:p>
+        </p:txBody>
+      </p:sp>
+      <p:sp>
+        <p:nvSpPr>
+          <p:cNvPr id="4" name="Slide Number Placeholder 3"/>
+          <p:cNvSpPr>
+            <a:spLocks noGrp="1"/>
+          </p:cNvSpPr>
+          <p:nvPr>
+            <p:ph type="sldNum" idx="5" sz="quarter"/>
+          </p:nvPr>
+        </p:nvSpPr>
+        <p:spPr/>
+      </p:sp>
+    </p:spTree>
+  </p:cSld>
+  <p:clrMapOvr>
+    <a:masterClrMapping/>
+  </p:clrMapOvr>
+</p:notes>
+</file>
+
+<file path=ppt/notesSlides/notesSlide5.xml><?xml version="1.0" encoding="utf-8"?>
+<p:notes xmlns:a="http://schemas.openxmlformats.org/drawingml/2006/main" xmlns:p="http://schemas.openxmlformats.org/presentationml/2006/main" xmlns:r="http://schemas.openxmlformats.org/officeDocument/2006/relationships">
+  <p:cSld>
+    <p:spTree>
+      <p:nvGrpSpPr>
+        <p:cNvPr id="1" name=""/>
+        <p:cNvGrpSpPr/>
+        <p:nvPr/>
+      </p:nvGrpSpPr>
+      <p:grpSpPr>
+        <a:xfrm>
+          <a:off x="0" y="0"/>
+          <a:ext cx="0" cy="0"/>
+          <a:chOff x="0" y="0"/>
+          <a:chExt cx="0" cy="0"/>
+        </a:xfrm>
+      </p:grpSpPr>
+      <p:sp>
+        <p:nvSpPr>
+          <p:cNvPr id="2" name="Slide Image Placeholder 1"/>
+          <p:cNvSpPr>
+            <a:spLocks noGrp="1"/>
+          </p:cNvSpPr>
+          <p:nvPr>
+            <p:ph type="sldImg" idx="2"/>
+          </p:nvPr>
+        </p:nvSpPr>
+        <p:spPr/>
+      </p:sp>
+      <p:sp>
+        <p:nvSpPr>
+          <p:cNvPr id="3" name="Notes Placeholder 2"/>
+          <p:cNvSpPr>
+            <a:spLocks noGrp="1"/>
+          </p:cNvSpPr>
+          <p:nvPr>
+            <p:ph type="body" idx="3" sz="quarter"/>
+          </p:nvPr>
+        </p:nvSpPr>
+        <p:spPr/>
+        <p:txBody>
+          <a:bodyPr/>
+          <a:lstStyle/>
+          <a:p>
+            <a:r>
+              <a:t>Bespoke — the assessed skill of READING a template you were given, before running it. Use the anatomy</a:t>
+            </a:r>
+          </a:p>
+          <a:p>
+            <a:r>
+              <a:t>diagram to point at each part live.</a:t>
+            </a:r>
+          </a:p>
+          <a:p>
+            <a:r>
+              <a:t>• First bullet: review a pre-defined template to determine the RESOURCES it creates and their</a:t>
+            </a:r>
+          </a:p>
+          <a:p>
+            <a:r>
+              <a:t>DEPENDENCIES — what will exist and what relies on what.</a:t>
+            </a:r>
+          </a:p>
+          <a:p>
+            <a:r>
+              <a:t>• Second bullet: trace !Ref / !GetAtt to see what depends on what — the build ORDER falls out of the</a:t>
+            </a:r>
+          </a:p>
+          <a:p>
+            <a:r>
+              <a:t>references, you don't specify it. Follow a reference on the diagram as you say this.</a:t>
+            </a:r>
+          </a:p>
+          <a:p>
+            <a:r>
+              <a:t>• Third bullet (the point): know what a template does BEFORE you deploy it. The provided data-store</a:t>
+            </a:r>
+          </a:p>
+          <a:p>
+            <a:r>
+              <a:t>template is your AT2 case — reading it is the graded skill, not just running it.</a:t>
+            </a:r>
+          </a:p>
+          <a:p>
+            <a:r>
+              <a:t>Misconception to pre-empt: "just deploy it and see what happens." No — a professional reviews the</a:t>
+            </a:r>
+          </a:p>
+          <a:p>
+            <a:r>
+              <a:t>template first; deploying blind into a real account can create cost or clash with existing resources.</a:t>
+            </a:r>
+          </a:p>
+          <a:p>
+            <a:r>
+              <a:t>Question to pose: "How can you tell, from the template alone, that the database must exist before the app</a:t>
+            </a:r>
+          </a:p>
+          <a:p>
+            <a:r>
+              <a:t>server?" (the app resource !Refs the database — the reference creates the dependency).</a:t>
+            </a:r>
+          </a:p>
+          <a:p>
+            <a:r>
+              <a:t>UoC/AT2 tie: ICTCLD505 PC 2.2 (review pre-defined templates; determine resources &amp; dependencies) + KE 5</a:t>
+            </a:r>
+          </a:p>
+          <a:p>
+            <a:r>
+              <a:t>→ AT2 §4.2 (operate the PROVIDED DynamoDB template — criterion D2).</a:t>
+            </a:r>
+          </a:p>
+        </p:txBody>
+      </p:sp>
+      <p:sp>
+        <p:nvSpPr>
+          <p:cNvPr id="4" name="Slide Number Placeholder 3"/>
+          <p:cNvSpPr>
+            <a:spLocks noGrp="1"/>
+          </p:cNvSpPr>
+          <p:nvPr>
+            <p:ph type="sldNum" idx="5" sz="quarter"/>
+          </p:nvPr>
+        </p:nvSpPr>
+        <p:spPr/>
+      </p:sp>
+    </p:spTree>
+  </p:cSld>
+  <p:clrMapOvr>
+    <a:masterClrMapping/>
+  </p:clrMapOvr>
+</p:notes>
+</file>
+
+<file path=ppt/notesSlides/notesSlide6.xml><?xml version="1.0" encoding="utf-8"?>
+<p:notes xmlns:a="http://schemas.openxmlformats.org/drawingml/2006/main" xmlns:p="http://schemas.openxmlformats.org/presentationml/2006/main" xmlns:r="http://schemas.openxmlformats.org/officeDocument/2006/relationships">
+  <p:cSld>
+    <p:spTree>
+      <p:nvGrpSpPr>
+        <p:cNvPr id="1" name=""/>
+        <p:cNvGrpSpPr/>
+        <p:nvPr/>
+      </p:nvGrpSpPr>
+      <p:grpSpPr>
+        <a:xfrm>
+          <a:off x="0" y="0"/>
+          <a:ext cx="0" cy="0"/>
+          <a:chOff x="0" y="0"/>
+          <a:chExt cx="0" cy="0"/>
+        </a:xfrm>
+      </p:grpSpPr>
+      <p:sp>
+        <p:nvSpPr>
+          <p:cNvPr id="2" name="Slide Image Placeholder 1"/>
+          <p:cNvSpPr>
+            <a:spLocks noGrp="1"/>
+          </p:cNvSpPr>
+          <p:nvPr>
+            <p:ph type="sldImg" idx="2"/>
+          </p:nvPr>
+        </p:nvSpPr>
+        <p:spPr/>
+      </p:sp>
+      <p:sp>
+        <p:nvSpPr>
+          <p:cNvPr id="3" name="Notes Placeholder 2"/>
+          <p:cNvSpPr>
+            <a:spLocks noGrp="1"/>
+          </p:cNvSpPr>
+          <p:nvPr>
+            <p:ph type="body" idx="3" sz="quarter"/>
+          </p:nvPr>
+        </p:nvSpPr>
+        <p:spPr/>
+        <p:txBody>
+          <a:bodyPr/>
+          <a:lstStyle/>
+          <a:p>
+            <a:r>
+              <a:t>Primer — the operational lifecycle of a template and the tooling that runs it, right before the demo.</a:t>
+            </a:r>
+          </a:p>
+          <a:p>
+            <a:r>
+              <a:t>• First bullet: the three operations on a stack — create → update (via a CHANGE SET) → delete. That's</a:t>
+            </a:r>
+          </a:p>
+          <a:p>
+            <a:r>
+              <a:t>the whole lifecycle of operating a template.</a:t>
+            </a:r>
+          </a:p>
+          <a:p>
+            <a:r>
+              <a:t>• Second bullet: tooling — the CloudFormation console OR the CLI executes the template; you</a:t>
+            </a:r>
+          </a:p>
+          <a:p>
+            <a:r>
+              <a:t>manage/provision/update via stacks and change sets. Either tool, same operations.</a:t>
+            </a:r>
+          </a:p>
+          <a:p>
+            <a:r>
+              <a:t>• Third bullet (the safety point): every change is a REVIEWABLE DIFF before it runs — a change set shows</a:t>
+            </a:r>
+          </a:p>
+          <a:p>
+            <a:r>
+              <a:t>you exactly what will change before you commit. You look before you leap.</a:t>
+            </a:r>
+          </a:p>
+          <a:p>
+            <a:r>
+              <a:t>Misconception to pre-empt: "updating means editing the live resources directly." No — you edit the</a:t>
+            </a:r>
+          </a:p>
+          <a:p>
+            <a:r>
+              <a:t>template and apply it; the change set computes the diff and the platform makes the changes. Don't</a:t>
+            </a:r>
+          </a:p>
+          <a:p>
+            <a:r>
+              <a:t>hand-edit resources a template owns (that's drift).</a:t>
+            </a:r>
+          </a:p>
+          <a:p>
+            <a:r>
+              <a:t>Question to pose: "Before you apply an update to a running stack, what should you look at first?" (the</a:t>
+            </a:r>
+          </a:p>
+          <a:p>
+            <a:r>
+              <a:t>change set — the diff of what will be added/modified/removed).</a:t>
+            </a:r>
+          </a:p>
+          <a:p>
+            <a:r>
+              <a:t>UoC/AT2 tie: ICTCLD505 PC 2.3–2.5 (deploy/update/delete; confirm; remove) + PE 1 + PE 3 + KE 6/10/11 →</a:t>
+            </a:r>
+          </a:p>
+          <a:p>
+            <a:r>
+              <a:t>AT2 §4.2 (operate the provided template — D2).</a:t>
+            </a:r>
+          </a:p>
+        </p:txBody>
+      </p:sp>
+      <p:sp>
+        <p:nvSpPr>
+          <p:cNvPr id="4" name="Slide Number Placeholder 3"/>
+          <p:cNvSpPr>
+            <a:spLocks noGrp="1"/>
+          </p:cNvSpPr>
+          <p:nvPr>
+            <p:ph type="sldNum" idx="5" sz="quarter"/>
+          </p:nvPr>
+        </p:nvSpPr>
+        <p:spPr/>
+      </p:sp>
+    </p:spTree>
+  </p:cSld>
+  <p:clrMapOvr>
+    <a:masterClrMapping/>
+  </p:clrMapOvr>
+</p:notes>
+</file>
+
+<file path=ppt/notesSlides/notesSlide7.xml><?xml version="1.0" encoding="utf-8"?>
+<p:notes xmlns:a="http://schemas.openxmlformats.org/drawingml/2006/main" xmlns:p="http://schemas.openxmlformats.org/presentationml/2006/main" xmlns:r="http://schemas.openxmlformats.org/officeDocument/2006/relationships">
+  <p:cSld>
+    <p:spTree>
+      <p:nvGrpSpPr>
+        <p:cNvPr id="1" name=""/>
+        <p:cNvGrpSpPr/>
+        <p:nvPr/>
+      </p:nvGrpSpPr>
+      <p:grpSpPr>
+        <a:xfrm>
+          <a:off x="0" y="0"/>
+          <a:ext cx="0" cy="0"/>
+          <a:chOff x="0" y="0"/>
+          <a:chExt cx="0" cy="0"/>
+        </a:xfrm>
+      </p:grpSpPr>
+      <p:sp>
+        <p:nvSpPr>
+          <p:cNvPr id="2" name="Slide Image Placeholder 1"/>
+          <p:cNvSpPr>
+            <a:spLocks noGrp="1"/>
+          </p:cNvSpPr>
+          <p:nvPr>
+            <p:ph type="sldImg" idx="2"/>
+          </p:nvPr>
+        </p:nvSpPr>
+        <p:spPr/>
+      </p:sp>
+      <p:sp>
+        <p:nvSpPr>
+          <p:cNvPr id="3" name="Notes Placeholder 2"/>
+          <p:cNvSpPr>
+            <a:spLocks noGrp="1"/>
+          </p:cNvSpPr>
+          <p:nvPr>
+            <p:ph type="body" idx="3" sz="quarter"/>
+          </p:nvPr>
+        </p:nvSpPr>
+        <p:spPr/>
+        <p:txBody>
+          <a:bodyPr/>
+          <a:lstStyle/>
+          <a:p>
+            <a:r>
+              <a:t>LIVE DEMONSTRATION (educator-led — screen it live in the lab, or a screen capture you record yourself;</a:t>
+            </a:r>
+          </a:p>
+          <a:p>
+            <a:r>
+              <a:t>CL2 has no recorded-demos catalogue). Demonstrate the COURSE'S OWN provided template against the</a:t>
+            </a:r>
+          </a:p>
+          <a:p>
+            <a:r>
+              <a:t>lab-pack, then students replicate on the next slide.</a:t>
+            </a:r>
+          </a:p>
+          <a:p/>
+          <a:p>
+            <a:r>
+              <a:t>WHAT TO DEMONSTRATE (step by step, in the Learner Lab, Region us-east-1 —</a:t>
+            </a:r>
+          </a:p>
+          <a:p>
+            <a:r>
+              <a:t>[scenario: ap-southeast-2 (Sydney) | deploy: us-east-1]):</a:t>
+            </a:r>
+          </a:p>
+          <a:p>
+            <a:r>
+              <a:t>1. Open the provided data-store template; point out its Parameters/Resources/Outputs (tie back to the</a:t>
+            </a:r>
+          </a:p>
+          <a:p>
+            <a:r>
+              <a:t>anatomy slide).</a:t>
+            </a:r>
+          </a:p>
+          <a:p>
+            <a:r>
+              <a:t>2. Create the stack; watch the events to CREATE_COMPLETE; confirm the resource in the console.</a:t>
+            </a:r>
+          </a:p>
+          <a:p>
+            <a:r>
+              <a:t>3. Make a change SET on one parameter, review the diff, then execute it; confirm the resource changed.</a:t>
+            </a:r>
+          </a:p>
+          <a:p>
+            <a:r>
+              <a:t>4. Delete the stack; confirm the resources are removed (no orphans left behind).</a:t>
+            </a:r>
+          </a:p>
+          <a:p/>
+          <a:p>
+            <a:r>
+              <a:t>WHAT TO EMPHASISE:</a:t>
+            </a:r>
+          </a:p>
+          <a:p>
+            <a:r>
+              <a:t>• Set the Region to us-east-1 FIRST and say the substitution out loud — everything is Region-scoped.</a:t>
+            </a:r>
+          </a:p>
+          <a:p>
+            <a:r>
+              <a:t>• The change set is a DIFF you review BEFORE it runs — pause on it deliberately; don't rush past it.</a:t>
+            </a:r>
+          </a:p>
+          <a:p>
+            <a:r>
+              <a:t>• Confirm at each step (console/CLI) rather than assuming — deploy → confirm is the habit.</a:t>
+            </a:r>
+          </a:p>
+          <a:p>
+            <a:r>
+              <a:t>• Delete cleanly at the end — leaving stacks running costs money and clutters the account.</a:t>
+            </a:r>
+          </a:p>
+          <a:p/>
+          <a:p>
+            <a:r>
+              <a:t>PREP: clean Learner Lab open, the provided data-store template to hand, Region already thought about.</a:t>
+            </a:r>
+          </a:p>
+          <a:p>
+            <a:r>
+              <a:t>~8–10 min to screen + narrate before the activity.</a:t>
+            </a:r>
+          </a:p>
+        </p:txBody>
+      </p:sp>
+      <p:sp>
+        <p:nvSpPr>
+          <p:cNvPr id="4" name="Slide Number Placeholder 3"/>
+          <p:cNvSpPr>
+            <a:spLocks noGrp="1"/>
+          </p:cNvSpPr>
+          <p:nvPr>
+            <p:ph type="sldNum" idx="5" sz="quarter"/>
+          </p:nvPr>
+        </p:nvSpPr>
+        <p:spPr/>
+      </p:sp>
+    </p:spTree>
+  </p:cSld>
+  <p:clrMapOvr>
+    <a:masterClrMapping/>
+  </p:clrMapOvr>
+</p:notes>
+</file>
+
+<file path=ppt/notesSlides/notesSlide8.xml><?xml version="1.0" encoding="utf-8"?>
+<p:notes xmlns:a="http://schemas.openxmlformats.org/drawingml/2006/main" xmlns:p="http://schemas.openxmlformats.org/presentationml/2006/main" xmlns:r="http://schemas.openxmlformats.org/officeDocument/2006/relationships">
+  <p:cSld>
+    <p:spTree>
+      <p:nvGrpSpPr>
+        <p:cNvPr id="1" name=""/>
+        <p:cNvGrpSpPr/>
+        <p:nvPr/>
+      </p:nvGrpSpPr>
+      <p:grpSpPr>
+        <a:xfrm>
+          <a:off x="0" y="0"/>
+          <a:ext cx="0" cy="0"/>
+          <a:chOff x="0" y="0"/>
+          <a:chExt cx="0" cy="0"/>
+        </a:xfrm>
+      </p:grpSpPr>
+      <p:sp>
+        <p:nvSpPr>
+          <p:cNvPr id="2" name="Slide Image Placeholder 1"/>
+          <p:cNvSpPr>
+            <a:spLocks noGrp="1"/>
+          </p:cNvSpPr>
+          <p:nvPr>
+            <p:ph type="sldImg" idx="2"/>
+          </p:nvPr>
+        </p:nvSpPr>
+        <p:spPr/>
+      </p:sp>
+      <p:sp>
+        <p:nvSpPr>
+          <p:cNvPr id="3" name="Notes Placeholder 2"/>
+          <p:cNvSpPr>
+            <a:spLocks noGrp="1"/>
+          </p:cNvSpPr>
+          <p:nvPr>
+            <p:ph type="body" idx="3" sz="quarter"/>
+          </p:nvPr>
+        </p:nvSpPr>
+        <p:spPr/>
+        <p:txBody>
+          <a:bodyPr/>
+          <a:lstStyle/>
+          <a:p>
+            <a:r>
+              <a:t>Facilitation — the C3 practice; students operate the provided template through its full lifecycle on</a:t>
+            </a:r>
+          </a:p>
+          <a:p>
+            <a:r>
+              <a:t>the practice scenario. They do what you just demoed.</a:t>
+            </a:r>
+          </a:p>
+          <a:p>
+            <a:r>
+              <a:t>Tell students, in these words: "On the practice scenario, deploy the provided template, update a</a:t>
+            </a:r>
+          </a:p>
+          <a:p>
+            <a:r>
+              <a:t>parameter via a change set, confirm it, then remove it. Work in us-east-1 — the deploy Region is the</a:t>
+            </a:r>
+          </a:p>
+          <a:p>
+            <a:r>
+              <a:t>substitute, the process is identical."</a:t>
+            </a:r>
+          </a:p>
+          <a:p>
+            <a:r>
+              <a:t>Steps (put on the board):</a:t>
+            </a:r>
+          </a:p>
+          <a:p>
+            <a:r>
+              <a:t>1. Set the Region to us-east-1 — [scenario: ap-southeast-2 (Sydney) | deploy: us-east-1].</a:t>
+            </a:r>
+          </a:p>
+          <a:p>
+            <a:r>
+              <a:t>2. Deploy the provided template; wait for CREATE_COMPLETE; confirm the resource in the console/CLI.</a:t>
+            </a:r>
+          </a:p>
+          <a:p>
+            <a:r>
+              <a:t>3. Update one parameter via a change set — review the diff, then execute; confirm the change.</a:t>
+            </a:r>
+          </a:p>
+          <a:p>
+            <a:r>
+              <a:t>4. Delete the stack; confirm everything is removed.</a:t>
+            </a:r>
+          </a:p>
+          <a:p>
+            <a:r>
+              <a:t>Must produce: a stack taken cleanly through create → update → delete, confirmed at each step.</a:t>
+            </a:r>
+          </a:p>
+          <a:p>
+            <a:r>
+              <a:t>Timing: ~25 min. Where they get stuck: forgetting to set Region first; and trying to change the resource</a:t>
+            </a:r>
+          </a:p>
+          <a:p>
+            <a:r>
+              <a:t>by hand instead of via a change set — circulate and redirect them to the template/change set.</a:t>
+            </a:r>
+          </a:p>
+          <a:p>
+            <a:r>
+              <a:t>Share-back prompt: "What did the change set show you BEFORE you applied it?" (the diff — reinforce the</a:t>
+            </a:r>
+          </a:p>
+          <a:p>
+            <a:r>
+              <a:t>review-before-run habit).</a:t>
+            </a:r>
+          </a:p>
+          <a:p>
+            <a:r>
+              <a:t>No-leakage note: practice scenario template — AT2 §4.2 operates the provided data-store template on a</a:t>
+            </a:r>
+          </a:p>
+          <a:p>
+            <a:r>
+              <a:t>different case (comparable, not identical); keep them on the practice template here.</a:t>
+            </a:r>
+          </a:p>
+        </p:txBody>
+      </p:sp>
+      <p:sp>
+        <p:nvSpPr>
+          <p:cNvPr id="4" name="Slide Number Placeholder 3"/>
+          <p:cNvSpPr>
+            <a:spLocks noGrp="1"/>
+          </p:cNvSpPr>
+          <p:nvPr>
+            <p:ph type="sldNum" idx="5" sz="quarter"/>
+          </p:nvPr>
+        </p:nvSpPr>
+        <p:spPr/>
+      </p:sp>
+    </p:spTree>
+  </p:cSld>
+  <p:clrMapOvr>
+    <a:masterClrMapping/>
+  </p:clrMapOvr>
+</p:notes>
+</file>
+
+<file path=ppt/notesSlides/notesSlide9.xml><?xml version="1.0" encoding="utf-8"?>
+<p:notes xmlns:a="http://schemas.openxmlformats.org/drawingml/2006/main" xmlns:p="http://schemas.openxmlformats.org/presentationml/2006/main" xmlns:r="http://schemas.openxmlformats.org/officeDocument/2006/relationships">
+  <p:cSld>
+    <p:spTree>
+      <p:nvGrpSpPr>
+        <p:cNvPr id="1" name=""/>
+        <p:cNvGrpSpPr/>
+        <p:nvPr/>
+      </p:nvGrpSpPr>
+      <p:grpSpPr>
+        <a:xfrm>
+          <a:off x="0" y="0"/>
+          <a:ext cx="0" cy="0"/>
+          <a:chOff x="0" y="0"/>
+          <a:chExt cx="0" cy="0"/>
+        </a:xfrm>
+      </p:grpSpPr>
+      <p:sp>
+        <p:nvSpPr>
+          <p:cNvPr id="2" name="Slide Image Placeholder 1"/>
+          <p:cNvSpPr>
+            <a:spLocks noGrp="1"/>
+          </p:cNvSpPr>
+          <p:nvPr>
+            <p:ph type="sldImg" idx="2"/>
+          </p:nvPr>
+        </p:nvSpPr>
+        <p:spPr/>
+      </p:sp>
+      <p:sp>
+        <p:nvSpPr>
+          <p:cNvPr id="3" name="Notes Placeholder 2"/>
+          <p:cNvSpPr>
+            <a:spLocks noGrp="1"/>
+          </p:cNvSpPr>
+          <p:nvPr>
+            <p:ph type="body" idx="3" sz="quarter"/>
+          </p:nvPr>
+        </p:nvSpPr>
+        <p:spPr/>
+        <p:txBody>
+          <a:bodyPr/>
+          <a:lstStyle/>
+          <a:p>
+            <a:r>
+              <a:t>Bespoke — teach diagnosis as a METHOD, not guesswork. This is the thinking behind the "fix a broken</a:t>
+            </a:r>
+          </a:p>
+          <a:p>
+            <a:r>
+              <a:t>template" demo that follows.</a:t>
+            </a:r>
+          </a:p>
+          <a:p>
+            <a:r>
+              <a:t>• First bullet: to troubleshoot, read the FAILURE EVENT — find the FIRST CREATE_FAILED in the stack</a:t>
+            </a:r>
+          </a:p>
+          <a:p>
+            <a:r>
+              <a:t>events and read its reason. The first failure is the cause; the rest are knock-on.</a:t>
+            </a:r>
+          </a:p>
+          <a:p>
+            <a:r>
+              <a:t>• Second bullet: the common errors (KE 7) — a bad reference, a missing permission, an invalid property,</a:t>
+            </a:r>
+          </a:p>
+          <a:p>
+            <a:r>
+              <a:t>a name clash. Knowing the usual suspects speeds diagnosis.</a:t>
+            </a:r>
+          </a:p>
+          <a:p>
+            <a:r>
+              <a:t>• Third bullet: fix the template, redeploy, confirm — diagnosis OVER trial-and-error. You reason from</a:t>
+            </a:r>
+          </a:p>
+          <a:p>
+            <a:r>
+              <a:t>the error message, you don't poke randomly.</a:t>
+            </a:r>
+          </a:p>
+          <a:p>
+            <a:r>
+              <a:t>Misconception to pre-empt: "when a stack fails, start changing things until it works." No — read the</a:t>
+            </a:r>
+          </a:p>
+          <a:p>
+            <a:r>
+              <a:t>first CREATE_FAILED event and its reason; the message usually tells you exactly what's wrong. Random</a:t>
+            </a:r>
+          </a:p>
+          <a:p>
+            <a:r>
+              <a:t>changes create new failures.</a:t>
+            </a:r>
+          </a:p>
+          <a:p>
+            <a:r>
+              <a:t>Question to pose: "A stack shows five failed resources — which one do you read first, and why?" (the</a:t>
+            </a:r>
+          </a:p>
+          <a:p>
+            <a:r>
+              <a:t>FIRST CREATE_FAILED — the others likely failed because it did).</a:t>
+            </a:r>
+          </a:p>
+          <a:p>
+            <a:r>
+              <a:t>UoC/AT2 tie: ICTCLD505 PC 2.6 (test &amp; troubleshoot template errors) + KE 7 (testing/debugging, common</a:t>
+            </a:r>
+          </a:p>
+          <a:p>
+            <a:r>
+              <a:t>errors) → AT2 §4.2 (operate the provided template, incl. recovering from a failure).</a:t>
+            </a:r>
+          </a:p>
+        </p:txBody>
+      </p:sp>
+      <p:sp>
+        <p:nvSpPr>
+          <p:cNvPr id="4" name="Slide Number Placeholder 3"/>
+          <p:cNvSpPr>
+            <a:spLocks noGrp="1"/>
+          </p:cNvSpPr>
+          <p:nvPr>
+            <p:ph type="sldNum" idx="5" sz="quarter"/>
+          </p:nvPr>
+        </p:nvSpPr>
+        <p:spPr/>
+      </p:sp>
+    </p:spTree>
+  </p:cSld>
+  <p:clrMapOvr>
+    <a:masterClrMapping/>
+  </p:clrMapOvr>
+</p:notes>
 </file>
 
 <file path=ppt/slideLayouts/slideLayout1.xml><?xml version="1.0" encoding="utf-8"?>
@@ -9724,4 +11765,324 @@
   </a:objectDefaults>
   <a:extraClrSchemeLst/>
 </a:theme>
+</file>
+
+<file path=ppt/theme/theme2.xml><?xml version="1.0" encoding="utf-8"?>
+<a:theme xmlns:a="http://schemas.openxmlformats.org/drawingml/2006/main" name="Office Theme">
+  <a:themeElements>
+    <a:clrScheme name="Office">
+      <a:dk1>
+        <a:sysClr val="windowText" lastClr="000000"/>
+      </a:dk1>
+      <a:lt1>
+        <a:sysClr val="window" lastClr="FFFFFF"/>
+      </a:lt1>
+      <a:dk2>
+        <a:srgbClr val="1F497D"/>
+      </a:dk2>
+      <a:lt2>
+        <a:srgbClr val="EEECE1"/>
+      </a:lt2>
+      <a:accent1>
+        <a:srgbClr val="4F81BD"/>
+      </a:accent1>
+      <a:accent2>
+        <a:srgbClr val="C0504D"/>
+      </a:accent2>
+      <a:accent3>
+        <a:srgbClr val="9BBB59"/>
+      </a:accent3>
+      <a:accent4>
+        <a:srgbClr val="8064A2"/>
+      </a:accent4>
+      <a:accent5>
+        <a:srgbClr val="4BACC6"/>
+      </a:accent5>
+      <a:accent6>
+        <a:srgbClr val="F79646"/>
+      </a:accent6>
+      <a:hlink>
+        <a:srgbClr val="0000FF"/>
+      </a:hlink>
+      <a:folHlink>
+        <a:srgbClr val="800080"/>
+      </a:folHlink>
+    </a:clrScheme>
+    <a:fontScheme name="Office">
+      <a:majorFont>
+        <a:latin typeface="Calibri"/>
+        <a:ea typeface=""/>
+        <a:cs typeface=""/>
+        <a:font script="Jpan" typeface="ＭＳ Ｐゴシック"/>
+        <a:font script="Hang" typeface="맑은 고딕"/>
+        <a:font script="Hans" typeface="宋体"/>
+        <a:font script="Hant" typeface="新細明體"/>
+        <a:font script="Arab" typeface="Times New Roman"/>
+        <a:font script="Hebr" typeface="Times New Roman"/>
+        <a:font script="Thai" typeface="Angsana New"/>
+        <a:font script="Ethi" typeface="Nyala"/>
+        <a:font script="Beng" typeface="Vrinda"/>
+        <a:font script="Gujr" typeface="Shruti"/>
+        <a:font script="Khmr" typeface="MoolBoran"/>
+        <a:font script="Knda" typeface="Tunga"/>
+        <a:font script="Guru" typeface="Raavi"/>
+        <a:font script="Cans" typeface="Euphemia"/>
+        <a:font script="Cher" typeface="Plantagenet Cherokee"/>
+        <a:font script="Yiii" typeface="Microsoft Yi Baiti"/>
+        <a:font script="Tibt" typeface="Microsoft Himalaya"/>
+        <a:font script="Thaa" typeface="MV Boli"/>
+        <a:font script="Deva" typeface="Mangal"/>
+        <a:font script="Telu" typeface="Gautami"/>
+        <a:font script="Taml" typeface="Latha"/>
+        <a:font script="Syrc" typeface="Estrangelo Edessa"/>
+        <a:font script="Orya" typeface="Kalinga"/>
+        <a:font script="Mlym" typeface="Kartika"/>
+        <a:font script="Laoo" typeface="DokChampa"/>
+        <a:font script="Sinh" typeface="Iskoola Pota"/>
+        <a:font script="Mong" typeface="Mongolian Baiti"/>
+        <a:font script="Viet" typeface="Times New Roman"/>
+        <a:font script="Uigh" typeface="Microsoft Uighur"/>
+        <a:font script="Geor" typeface="Sylfaen"/>
+      </a:majorFont>
+      <a:minorFont>
+        <a:latin typeface="Calibri"/>
+        <a:ea typeface=""/>
+        <a:cs typeface=""/>
+        <a:font script="Jpan" typeface="ＭＳ Ｐゴシック"/>
+        <a:font script="Hang" typeface="맑은 고딕"/>
+        <a:font script="Hans" typeface="宋体"/>
+        <a:font script="Hant" typeface="新細明體"/>
+        <a:font script="Arab" typeface="Arial"/>
+        <a:font script="Hebr" typeface="Arial"/>
+        <a:font script="Thai" typeface="Cordia New"/>
+        <a:font script="Ethi" typeface="Nyala"/>
+        <a:font script="Beng" typeface="Vrinda"/>
+        <a:font script="Gujr" typeface="Shruti"/>
+        <a:font script="Khmr" typeface="DaunPenh"/>
+        <a:font script="Knda" typeface="Tunga"/>
+        <a:font script="Guru" typeface="Raavi"/>
+        <a:font script="Cans" typeface="Euphemia"/>
+        <a:font script="Cher" typeface="Plantagenet Cherokee"/>
+        <a:font script="Yiii" typeface="Microsoft Yi Baiti"/>
+        <a:font script="Tibt" typeface="Microsoft Himalaya"/>
+        <a:font script="Thaa" typeface="MV Boli"/>
+        <a:font script="Deva" typeface="Mangal"/>
+        <a:font script="Telu" typeface="Gautami"/>
+        <a:font script="Taml" typeface="Latha"/>
+        <a:font script="Syrc" typeface="Estrangelo Edessa"/>
+        <a:font script="Orya" typeface="Kalinga"/>
+        <a:font script="Mlym" typeface="Kartika"/>
+        <a:font script="Laoo" typeface="DokChampa"/>
+        <a:font script="Sinh" typeface="Iskoola Pota"/>
+        <a:font script="Mong" typeface="Mongolian Baiti"/>
+        <a:font script="Viet" typeface="Arial"/>
+        <a:font script="Uigh" typeface="Microsoft Uighur"/>
+        <a:font script="Geor" typeface="Sylfaen"/>
+      </a:minorFont>
+    </a:fontScheme>
+    <a:fmtScheme name="Office">
+      <a:fillStyleLst>
+        <a:solidFill>
+          <a:schemeClr val="phClr"/>
+        </a:solidFill>
+        <a:gradFill rotWithShape="1">
+          <a:gsLst>
+            <a:gs pos="0">
+              <a:schemeClr val="phClr">
+                <a:tint val="50000"/>
+                <a:satMod val="300000"/>
+              </a:schemeClr>
+            </a:gs>
+            <a:gs pos="35000">
+              <a:schemeClr val="phClr">
+                <a:tint val="37000"/>
+                <a:satMod val="300000"/>
+              </a:schemeClr>
+            </a:gs>
+            <a:gs pos="100000">
+              <a:schemeClr val="phClr">
+                <a:tint val="15000"/>
+                <a:satMod val="350000"/>
+              </a:schemeClr>
+            </a:gs>
+          </a:gsLst>
+          <a:lin ang="16200000" scaled="1"/>
+        </a:gradFill>
+        <a:gradFill rotWithShape="1">
+          <a:gsLst>
+            <a:gs pos="0">
+              <a:schemeClr val="phClr">
+                <a:tint val="100000"/>
+                <a:shade val="100000"/>
+                <a:satMod val="130000"/>
+              </a:schemeClr>
+            </a:gs>
+            <a:gs pos="100000">
+              <a:schemeClr val="phClr">
+                <a:tint val="50000"/>
+                <a:shade val="100000"/>
+                <a:satMod val="350000"/>
+              </a:schemeClr>
+            </a:gs>
+          </a:gsLst>
+          <a:lin ang="16200000" scaled="0"/>
+        </a:gradFill>
+      </a:fillStyleLst>
+      <a:lnStyleLst>
+        <a:ln w="9525" cap="flat" cmpd="sng" algn="ctr">
+          <a:solidFill>
+            <a:schemeClr val="phClr">
+              <a:shade val="95000"/>
+              <a:satMod val="105000"/>
+            </a:schemeClr>
+          </a:solidFill>
+          <a:prstDash val="solid"/>
+        </a:ln>
+        <a:ln w="25400" cap="flat" cmpd="sng" algn="ctr">
+          <a:solidFill>
+            <a:schemeClr val="phClr"/>
+          </a:solidFill>
+          <a:prstDash val="solid"/>
+        </a:ln>
+        <a:ln w="38100" cap="flat" cmpd="sng" algn="ctr">
+          <a:solidFill>
+            <a:schemeClr val="phClr"/>
+          </a:solidFill>
+          <a:prstDash val="solid"/>
+        </a:ln>
+      </a:lnStyleLst>
+      <a:effectStyleLst>
+        <a:effectStyle>
+          <a:effectLst>
+            <a:outerShdw blurRad="40000" dist="20000" dir="5400000" rotWithShape="0">
+              <a:srgbClr val="000000">
+                <a:alpha val="38000"/>
+              </a:srgbClr>
+            </a:outerShdw>
+          </a:effectLst>
+        </a:effectStyle>
+        <a:effectStyle>
+          <a:effectLst>
+            <a:outerShdw blurRad="40000" dist="23000" dir="5400000" rotWithShape="0">
+              <a:srgbClr val="000000">
+                <a:alpha val="35000"/>
+              </a:srgbClr>
+            </a:outerShdw>
+          </a:effectLst>
+        </a:effectStyle>
+        <a:effectStyle>
+          <a:effectLst>
+            <a:outerShdw blurRad="40000" dist="23000" dir="5400000" rotWithShape="0">
+              <a:srgbClr val="000000">
+                <a:alpha val="35000"/>
+              </a:srgbClr>
+            </a:outerShdw>
+          </a:effectLst>
+          <a:scene3d>
+            <a:camera prst="orthographicFront">
+              <a:rot lat="0" lon="0" rev="0"/>
+            </a:camera>
+            <a:lightRig rig="threePt" dir="t">
+              <a:rot lat="0" lon="0" rev="1200000"/>
+            </a:lightRig>
+          </a:scene3d>
+          <a:sp3d>
+            <a:bevelT w="63500" h="25400"/>
+          </a:sp3d>
+        </a:effectStyle>
+      </a:effectStyleLst>
+      <a:bgFillStyleLst>
+        <a:solidFill>
+          <a:schemeClr val="phClr"/>
+        </a:solidFill>
+        <a:gradFill rotWithShape="1">
+          <a:gsLst>
+            <a:gs pos="0">
+              <a:schemeClr val="phClr">
+                <a:tint val="40000"/>
+                <a:satMod val="350000"/>
+              </a:schemeClr>
+            </a:gs>
+            <a:gs pos="40000">
+              <a:schemeClr val="phClr">
+                <a:tint val="45000"/>
+                <a:shade val="99000"/>
+                <a:satMod val="350000"/>
+              </a:schemeClr>
+            </a:gs>
+            <a:gs pos="100000">
+              <a:schemeClr val="phClr">
+                <a:shade val="20000"/>
+                <a:satMod val="255000"/>
+              </a:schemeClr>
+            </a:gs>
+          </a:gsLst>
+          <a:path path="circle">
+            <a:fillToRect l="50000" t="-80000" r="50000" b="180000"/>
+          </a:path>
+        </a:gradFill>
+        <a:gradFill rotWithShape="1">
+          <a:gsLst>
+            <a:gs pos="0">
+              <a:schemeClr val="phClr">
+                <a:tint val="80000"/>
+                <a:satMod val="300000"/>
+              </a:schemeClr>
+            </a:gs>
+            <a:gs pos="100000">
+              <a:schemeClr val="phClr">
+                <a:shade val="30000"/>
+                <a:satMod val="200000"/>
+              </a:schemeClr>
+            </a:gs>
+          </a:gsLst>
+          <a:path path="circle">
+            <a:fillToRect l="50000" t="50000" r="50000" b="50000"/>
+          </a:path>
+        </a:gradFill>
+      </a:bgFillStyleLst>
+    </a:fmtScheme>
+  </a:themeElements>
+  <a:objectDefaults>
+    <a:spDef>
+      <a:spPr/>
+      <a:bodyPr/>
+      <a:lstStyle/>
+      <a:style>
+        <a:lnRef idx="1">
+          <a:schemeClr val="accent1"/>
+        </a:lnRef>
+        <a:fillRef idx="3">
+          <a:schemeClr val="accent1"/>
+        </a:fillRef>
+        <a:effectRef idx="2">
+          <a:schemeClr val="accent1"/>
+        </a:effectRef>
+        <a:fontRef idx="minor">
+          <a:schemeClr val="lt1"/>
+        </a:fontRef>
+      </a:style>
+    </a:spDef>
+    <a:lnDef>
+      <a:spPr/>
+      <a:bodyPr/>
+      <a:lstStyle/>
+      <a:style>
+        <a:lnRef idx="2">
+          <a:schemeClr val="accent1"/>
+        </a:lnRef>
+        <a:fillRef idx="0">
+          <a:schemeClr val="accent1"/>
+        </a:fillRef>
+        <a:effectRef idx="1">
+          <a:schemeClr val="accent1"/>
+        </a:effectRef>
+        <a:fontRef idx="minor">
+          <a:schemeClr val="tx1"/>
+        </a:fontRef>
+      </a:style>
+    </a:lnDef>
+  </a:objectDefaults>
+  <a:extraClrSchemeLst/>
+</a:theme>
 </file>
--- a/S1-CL2-Cloud-Disaster-Recovery/delivery/topic_06/Topic_06_Slides.pptx
+++ b/S1-CL2-Cloud-Disaster-Recovery/delivery/topic_06/Topic_06_Slides.pptx
@@ -5856,7 +5856,7 @@
                 </a:solidFill>
                 <a:latin typeface="Roboto"/>
               </a:rPr>
-              <a:t>Deploy the provided template in the lab (Region us-east-1 — `[scenario: ap-southeast-2 (Sydney) | deploy: us-east-1]`).</a:t>
+              <a:t>Deploy the provided template in the lab (Region us-east-1 — [scenario: ap-southeast-2 (Sydney) | deploy: us-east-1]).</a:t>
             </a:r>
           </a:p>
           <a:p>
@@ -8989,7 +8989,7 @@
                 </a:solidFill>
                 <a:latin typeface="Roboto"/>
               </a:rPr>
-              <a:t>Region substitution starts here: the design targets Sydney/India, but you deploy to us-east-1 — `[scenario: ap-southeast-2 (Sydney) | deploy: us-east-1]`. Same build, only the console Region differs.</a:t>
+              <a:t>Region substitution starts here: the design targets Sydney/India, but you deploy to us-east-1 — [scenario: ap-southeast-2 (Sydney) | deploy: us-east-1]. Same build, only the console Region differs.</a:t>
             </a:r>
           </a:p>
           <a:p>
@@ -9020,7 +9020,7 @@
                 </a:solidFill>
                 <a:latin typeface="Roboto"/>
               </a:rPr>
-              <a:t>`teach → demo → practice`: watch the demo, then do it on the practice scenario.</a:t>
+              <a:t>teach → demo → practice: watch the demo, then do it on the practice scenario.</a:t>
             </a:r>
           </a:p>
         </p:txBody>
@@ -10592,7 +10592,7 @@
                 </a:solidFill>
                 <a:latin typeface="Roboto"/>
               </a:rPr>
-              <a:t>The parts: Parameters (inputs), Resources (what to create), Outputs (what to share), intrinsic functions (`!Ref`, `!GetAtt`, `!Sub`).</a:t>
+              <a:t>The parts: Parameters (inputs), Resources (what to create), Outputs (what to share), intrinsic functions (!Ref, !GetAtt, !Sub).</a:t>
             </a:r>
           </a:p>
           <a:p>
@@ -10965,7 +10965,7 @@
                 </a:solidFill>
                 <a:latin typeface="Roboto"/>
               </a:rPr>
-              <a:t>Trace `!Ref`/`!GetAtt` to see what depends on what — the build order falls out of the references.</a:t>
+              <a:t>Trace !Ref/!GetAtt to see what depends on what — the build order falls out of the references.</a:t>
             </a:r>
           </a:p>
           <a:p>

--- a/S1-CL2-Cloud-Disaster-Recovery/delivery/topic_06/Topic_06_Slides.pptx
+++ b/S1-CL2-Cloud-Disaster-Recovery/delivery/topic_06/Topic_06_Slides.pptx
@@ -24,6 +24,14 @@
     <p:sldId id="272" r:id="rId24"/>
     <p:sldId id="273" r:id="rId25"/>
     <p:sldId id="274" r:id="rId26"/>
+    <p:sldId id="275" r:id="rId27"/>
+    <p:sldId id="276" r:id="rId28"/>
+    <p:sldId id="277" r:id="rId29"/>
+    <p:sldId id="278" r:id="rId30"/>
+    <p:sldId id="279" r:id="rId31"/>
+    <p:sldId id="280" r:id="rId32"/>
+    <p:sldId id="281" r:id="rId33"/>
+    <p:sldId id="282" r:id="rId34"/>
   </p:sldIdLst>
   <p:sldSz cx="12191695" cy="6858000" type="screen4x3"/>
   <p:notesSz cx="6858000" cy="9144000"/>
@@ -520,87 +528,17 @@
           <a:lstStyle/>
           <a:p>
             <a:r>
-              <a:t>Frame Topic 6 as the START of AT2 — the design is signed off; now you build it in the lab. Set the mode</a:t>
-            </a:r>
-          </a:p>
-          <a:p>
-            <a:r>
-              <a:t>and the two conventions (Region substitution, teach→demo→practice); don't teach CloudFormation yet.</a:t>
-            </a:r>
-          </a:p>
-          <a:p>
-            <a:r>
-              <a:t>• First bullet: AT1 is signed off; AT2 begins — you build in the lab, TO the approved design. The design</a:t>
-            </a:r>
-          </a:p>
-          <a:p>
-            <a:r>
-              <a:t>is settled; your job is faithful implementation.</a:t>
-            </a:r>
-          </a:p>
-          <a:p>
-            <a:r>
-              <a:t>• Second bullet: scope today — what IaC is, and OPERATING a template someone else wrote (authoring your</a:t>
-            </a:r>
-          </a:p>
-          <a:p>
-            <a:r>
-              <a:t>own is Topic 7).</a:t>
-            </a:r>
-          </a:p>
-          <a:p>
-            <a:r>
-              <a:t>• Third bullet (say it explicitly): Region substitution starts here — the design targets Sydney/India,</a:t>
-            </a:r>
-          </a:p>
-          <a:p>
-            <a:r>
-              <a:t>but you deploy to us-east-1 in the Learner Lab: [scenario: ap-southeast-2 (Sydney) | deploy: us-east-1].</a:t>
-            </a:r>
-          </a:p>
-          <a:p>
-            <a:r>
-              <a:t>Same build; only the console Region label differs.</a:t>
-            </a:r>
-          </a:p>
-          <a:p>
-            <a:r>
-              <a:t>• Fourth bullet: the rhythm for every AWS practical — teach → demo → practice. Watch the demo, then do it</a:t>
-            </a:r>
-          </a:p>
-          <a:p>
-            <a:r>
-              <a:t>on the practice scenario.</a:t>
-            </a:r>
-          </a:p>
-          <a:p>
-            <a:r>
-              <a:t>Misconception to pre-empt: "us-east-1 means residency doesn't matter." No — the DESIGN still mandates the</a:t>
-            </a:r>
-          </a:p>
-          <a:p>
-            <a:r>
-              <a:t>onshore Region for legal reasons; the lab just can't host it, so we substitute and label it.</a:t>
-            </a:r>
-          </a:p>
-          <a:p>
-            <a:r>
-              <a:t>Question to pose: "Why describe infrastructure in a template at all, instead of just clicking it in the</a:t>
-            </a:r>
-          </a:p>
-          <a:p>
-            <a:r>
-              <a:t>console?" (repeatable, versioned, reviewable — teased here, answered in C1).</a:t>
-            </a:r>
-          </a:p>
-          <a:p>
-            <a:r>
-              <a:t>UoC/AT2 tie: opens the AT2 build arc — ICTCLD505 (IaC) primary; today feeds AT2 §4.2 (operate the</a:t>
-            </a:r>
-          </a:p>
-          <a:p>
-            <a:r>
-              <a:t>provided data-store template).</a:t>
+              <a:t>Start of the AT2 build arc — workbook tasks 1 to 10 today, in order.</a:t>
+            </a:r>
+          </a:p>
+          <a:p>
+            <a:r>
+              <a:t>Say the region substitution out loud: the design still mandates the real region for legal reasons; the lab just can't host it.</a:t>
+            </a:r>
+          </a:p>
+          <a:p>
+            <a:r>
+              <a:t>Misconception: us-east-1 means residency doesn't matter. No — substitute and label it.</a:t>
             </a:r>
           </a:p>
         </p:txBody>
@@ -670,80 +608,27 @@
           <a:lstStyle/>
           <a:p>
             <a:r>
-              <a:t>LIVE DEMONSTRATION (educator-led — screen it live, or your own screen capture; no recorded-demos</a:t>
-            </a:r>
-          </a:p>
-          <a:p>
-            <a:r>
-              <a:t>catalogue in CL2). Walk a DELIBERATELY BROKEN copy of the provided template against the lab-pack, then</a:t>
-            </a:r>
-          </a:p>
-          <a:p>
-            <a:r>
-              <a:t>students replicate on the next slide.</a:t>
-            </a:r>
-          </a:p>
-          <a:p/>
-          <a:p>
-            <a:r>
-              <a:t>WHAT TO DEMONSTRATE (in the Learner Lab, us-east-1):</a:t>
-            </a:r>
-          </a:p>
-          <a:p>
-            <a:r>
-              <a:t>1. Deploy the deliberately broken template; let it fail.</a:t>
-            </a:r>
-          </a:p>
-          <a:p>
-            <a:r>
-              <a:t>2. Open the stack events; scroll to the FIRST CREATE_FAILED and read its reason out loud.</a:t>
-            </a:r>
-          </a:p>
-          <a:p>
-            <a:r>
-              <a:t>3. Diagnose from the message (e.g. a bad !Ref, an invalid property, a name clash — the KE 7 suspects).</a:t>
-            </a:r>
-          </a:p>
-          <a:p>
-            <a:r>
-              <a:t>4. Make the one-line fix in the template; redeploy; confirm it reaches CREATE_COMPLETE.</a:t>
-            </a:r>
-          </a:p>
-          <a:p/>
-          <a:p>
-            <a:r>
-              <a:t>WHAT TO EMPHASISE:</a:t>
-            </a:r>
-          </a:p>
-          <a:p>
-            <a:r>
-              <a:t>• Model reading the error BEFORE touching anything — narrate the diagnosis, don't just fix it silently.</a:t>
-            </a:r>
-          </a:p>
-          <a:p>
-            <a:r>
-              <a:t>• It's the FIRST failure that matters — show how the later failures were downstream of it.</a:t>
-            </a:r>
-          </a:p>
-          <a:p>
-            <a:r>
-              <a:t>• One deliberate fix, then redeploy — reinforce diagnosis over trial-and-error.</a:t>
-            </a:r>
-          </a:p>
-          <a:p>
-            <a:r>
-              <a:t>• Clean up (delete the stack) at the end.</a:t>
-            </a:r>
-          </a:p>
-          <a:p/>
-          <a:p>
-            <a:r>
-              <a:t>PREP: have a broken copy of the provided template ready (a single planted error), the events view</a:t>
-            </a:r>
-          </a:p>
-          <a:p>
-            <a:r>
-              <a:t>familiar, lab open in us-east-1. ~6–8 min to screen + narrate before the activity.</a:t>
+              <a:t>Live demonstration, educator-led (screen it live or your own capture — no recorded-demos catalogue in CL2).</a:t>
+            </a:r>
+          </a:p>
+          <a:p>
+            <a:r>
+              <a:t>Set the region first and say the substitution out loud.</a:t>
+            </a:r>
+          </a:p>
+          <a:p>
+            <a:r>
+              <a:t>Narrate the diagnosis before touching anything — model reading over guessing.</a:t>
+            </a:r>
+          </a:p>
+          <a:p>
+            <a:r>
+              <a:t>Common errors worth naming as you go: a bad reference, a missing permission, an invalid property, a name clash.</a:t>
+            </a:r>
+          </a:p>
+          <a:p>
+            <a:r>
+              <a:t>Prep: clean lab, the practice data-store template to hand. ~8–10 min.</a:t>
             </a:r>
           </a:p>
         </p:txBody>
@@ -813,82 +698,7 @@
           <a:lstStyle/>
           <a:p>
             <a:r>
-              <a:t>Facilitation — the C4 practice; students diagnose and fix the broken template on the practice scenario.</a:t>
-            </a:r>
-          </a:p>
-          <a:p>
-            <a:r>
-              <a:t>They apply the method you just demoed.</a:t>
-            </a:r>
-          </a:p>
-          <a:p>
-            <a:r>
-              <a:t>Tell students, in these words: "On the practice scenario, deploy the broken template, read the error,</a:t>
-            </a:r>
-          </a:p>
-          <a:p>
-            <a:r>
-              <a:t>fix it, and redeploy to success."</a:t>
-            </a:r>
-          </a:p>
-          <a:p>
-            <a:r>
-              <a:t>Steps (put on the board):</a:t>
-            </a:r>
-          </a:p>
-          <a:p>
-            <a:r>
-              <a:t>1. Deploy the broken template in us-east-1; let it fail.</a:t>
-            </a:r>
-          </a:p>
-          <a:p>
-            <a:r>
-              <a:t>2. Open the stack events; find the FIRST CREATE_FAILED and read its reason.</a:t>
-            </a:r>
-          </a:p>
-          <a:p>
-            <a:r>
-              <a:t>3. Diagnose (bad reference / missing permission / invalid property / name clash) and make the fix.</a:t>
-            </a:r>
-          </a:p>
-          <a:p>
-            <a:r>
-              <a:t>4. Redeploy; confirm CREATE_COMPLETE; then delete the stack.</a:t>
-            </a:r>
-          </a:p>
-          <a:p>
-            <a:r>
-              <a:t>Must produce: the once-broken stack redeployed to success, plus a one-line statement of what the error</a:t>
-            </a:r>
-          </a:p>
-          <a:p>
-            <a:r>
-              <a:t>was and how they knew.</a:t>
-            </a:r>
-          </a:p>
-          <a:p>
-            <a:r>
-              <a:t>Timing: ~20 min. Where they get stuck: they read the LAST failure not the first, or start changing</a:t>
-            </a:r>
-          </a:p>
-          <a:p>
-            <a:r>
-              <a:t>random properties — circulate and point them at the first CREATE_FAILED and its message.</a:t>
-            </a:r>
-          </a:p>
-          <a:p>
-            <a:r>
-              <a:t>Share-back prompt: "What did the first failure event actually say, and what did that tell you to fix?"</a:t>
-            </a:r>
-          </a:p>
-          <a:p>
-            <a:r>
-              <a:t>No-leakage note: practice scenario — AT2 assesses troubleshooting on the provided data-store template</a:t>
-            </a:r>
-          </a:p>
-          <a:p>
-            <a:r>
-              <a:t>(comparable, not identical).</a:t>
+              <a:t>Workbook task 8 makes confirmation its own task — treat it as one, not as glancing at the status colour.</a:t>
             </a:r>
           </a:p>
         </p:txBody>
@@ -958,82 +768,312 @@
           <a:lstStyle/>
           <a:p>
             <a:r>
-              <a:t>Bespoke — the shared-foundations KE: the standards and standard products under the build. This is</a:t>
-            </a:r>
-          </a:p>
-          <a:p>
-            <a:r>
-              <a:t>knowledge shared across BOTH units (503 and 505), so teach it once here.</a:t>
-            </a:r>
-          </a:p>
-          <a:p>
-            <a:r>
-              <a:t>• First bullet: industry technology STANDARDS that underpin cloud building — interoperability, security,</a:t>
-            </a:r>
-          </a:p>
-          <a:p>
-            <a:r>
-              <a:t>and management baselines (KE 1). These are the agreed rules that make cloud components work together and</a:t>
-            </a:r>
-          </a:p>
-          <a:p>
-            <a:r>
-              <a:t>stay secure.</a:t>
-            </a:r>
-          </a:p>
-          <a:p>
-            <a:r>
-              <a:t>• Second bullet: standard PRODUCTS the platform is built on (KE 2) — compute families, managed</a:t>
-            </a:r>
-          </a:p>
-          <a:p>
-            <a:r>
-              <a:t>databases, object/block storage. The building blocks you assemble, not things you invent.</a:t>
-            </a:r>
-          </a:p>
-          <a:p>
-            <a:r>
-              <a:t>• Third bullet: this is the shared foundation behind both the IaC strand (505) and the microservice</a:t>
-            </a:r>
-          </a:p>
-          <a:p>
-            <a:r>
-              <a:t>strand (503) — flag that it earns marks in the written KE appendix, assembled in Topic 10.</a:t>
-            </a:r>
-          </a:p>
-          <a:p>
-            <a:r>
-              <a:t>Misconception to pre-empt: "standards are abstract theory with no bearing on my build." No — they're why</a:t>
-            </a:r>
-          </a:p>
-          <a:p>
-            <a:r>
-              <a:t>your template's resources interoperate and why the managed products behave predictably; it's the ground</a:t>
-            </a:r>
-          </a:p>
-          <a:p>
-            <a:r>
-              <a:t>the whole build stands on.</a:t>
-            </a:r>
-          </a:p>
-          <a:p>
-            <a:r>
-              <a:t>Question to pose: "Name a standard PRODUCT you'll use in this build and a standard it depends on." (e.g.</a:t>
-            </a:r>
-          </a:p>
-          <a:p>
-            <a:r>
-              <a:t>a managed database + the security/interoperability baselines it implements).</a:t>
-            </a:r>
-          </a:p>
-          <a:p>
-            <a:r>
-              <a:t>UoC/AT2 tie: ICTCLD503 KE 1/KE 2 + ICTCLD505 KE 1/KE 2 (industry standards + standard hardware/software/</a:t>
-            </a:r>
-          </a:p>
-          <a:p>
-            <a:r>
-              <a:t>storage) → the AT2 written KE appendix (§8, assembled in Topic 10).</a:t>
+              <a:t>Activity = practice workbook tasks 6–8. The failure is planted; hitting it is the exercise, not a mistake.</a:t>
+            </a:r>
+          </a:p>
+          <a:p>
+            <a:r>
+              <a:t>Watch for reading the last failure instead of the first, and for random property-poking instead of diagnosis.</a:t>
+            </a:r>
+          </a:p>
+        </p:txBody>
+      </p:sp>
+      <p:sp>
+        <p:nvSpPr>
+          <p:cNvPr id="4" name="Slide Number Placeholder 3"/>
+          <p:cNvSpPr>
+            <a:spLocks noGrp="1"/>
+          </p:cNvSpPr>
+          <p:nvPr>
+            <p:ph type="sldNum" idx="5" sz="quarter"/>
+          </p:nvPr>
+        </p:nvSpPr>
+        <p:spPr/>
+      </p:sp>
+    </p:spTree>
+  </p:cSld>
+  <p:clrMapOvr>
+    <a:masterClrMapping/>
+  </p:clrMapOvr>
+</p:notes>
+</file>
+
+<file path=ppt/notesSlides/notesSlide13.xml><?xml version="1.0" encoding="utf-8"?>
+<p:notes xmlns:a="http://schemas.openxmlformats.org/drawingml/2006/main" xmlns:p="http://schemas.openxmlformats.org/presentationml/2006/main" xmlns:r="http://schemas.openxmlformats.org/officeDocument/2006/relationships">
+  <p:cSld>
+    <p:spTree>
+      <p:nvGrpSpPr>
+        <p:cNvPr id="1" name=""/>
+        <p:cNvGrpSpPr/>
+        <p:nvPr/>
+      </p:nvGrpSpPr>
+      <p:grpSpPr>
+        <a:xfrm>
+          <a:off x="0" y="0"/>
+          <a:ext cx="0" cy="0"/>
+          <a:chOff x="0" y="0"/>
+          <a:chExt cx="0" cy="0"/>
+        </a:xfrm>
+      </p:grpSpPr>
+      <p:sp>
+        <p:nvSpPr>
+          <p:cNvPr id="2" name="Slide Image Placeholder 1"/>
+          <p:cNvSpPr>
+            <a:spLocks noGrp="1"/>
+          </p:cNvSpPr>
+          <p:nvPr>
+            <p:ph type="sldImg" idx="2"/>
+          </p:nvPr>
+        </p:nvSpPr>
+        <p:spPr/>
+      </p:sp>
+      <p:sp>
+        <p:nvSpPr>
+          <p:cNvPr id="3" name="Notes Placeholder 2"/>
+          <p:cNvSpPr>
+            <a:spLocks noGrp="1"/>
+          </p:cNvSpPr>
+          <p:nvPr>
+            <p:ph type="body" idx="3" sz="quarter"/>
+          </p:nvPr>
+        </p:nvSpPr>
+        <p:spPr/>
+        <p:txBody>
+          <a:bodyPr/>
+          <a:lstStyle/>
+          <a:p>
+            <a:r>
+              <a:t>Workbook task 9. Hand-editing a templated resource is drift — connect back to C1's failure modes.</a:t>
+            </a:r>
+          </a:p>
+          <a:p>
+            <a:r>
+              <a:t>Pause on the change set in any demo; the review-before-run moment is the teaching.</a:t>
+            </a:r>
+          </a:p>
+        </p:txBody>
+      </p:sp>
+      <p:sp>
+        <p:nvSpPr>
+          <p:cNvPr id="4" name="Slide Number Placeholder 3"/>
+          <p:cNvSpPr>
+            <a:spLocks noGrp="1"/>
+          </p:cNvSpPr>
+          <p:nvPr>
+            <p:ph type="sldNum" idx="5" sz="quarter"/>
+          </p:nvPr>
+        </p:nvSpPr>
+        <p:spPr/>
+      </p:sp>
+    </p:spTree>
+  </p:cSld>
+  <p:clrMapOvr>
+    <a:masterClrMapping/>
+  </p:clrMapOvr>
+</p:notes>
+</file>
+
+<file path=ppt/notesSlides/notesSlide14.xml><?xml version="1.0" encoding="utf-8"?>
+<p:notes xmlns:a="http://schemas.openxmlformats.org/drawingml/2006/main" xmlns:p="http://schemas.openxmlformats.org/presentationml/2006/main" xmlns:r="http://schemas.openxmlformats.org/officeDocument/2006/relationships">
+  <p:cSld>
+    <p:spTree>
+      <p:nvGrpSpPr>
+        <p:cNvPr id="1" name=""/>
+        <p:cNvGrpSpPr/>
+        <p:nvPr/>
+      </p:nvGrpSpPr>
+      <p:grpSpPr>
+        <a:xfrm>
+          <a:off x="0" y="0"/>
+          <a:ext cx="0" cy="0"/>
+          <a:chOff x="0" y="0"/>
+          <a:chExt cx="0" cy="0"/>
+        </a:xfrm>
+      </p:grpSpPr>
+      <p:sp>
+        <p:nvSpPr>
+          <p:cNvPr id="2" name="Slide Image Placeholder 1"/>
+          <p:cNvSpPr>
+            <a:spLocks noGrp="1"/>
+          </p:cNvSpPr>
+          <p:nvPr>
+            <p:ph type="sldImg" idx="2"/>
+          </p:nvPr>
+        </p:nvSpPr>
+        <p:spPr/>
+      </p:sp>
+      <p:sp>
+        <p:nvSpPr>
+          <p:cNvPr id="3" name="Notes Placeholder 2"/>
+          <p:cNvSpPr>
+            <a:spLocks noGrp="1"/>
+          </p:cNvSpPr>
+          <p:nvPr>
+            <p:ph type="body" idx="3" sz="quarter"/>
+          </p:nvPr>
+        </p:nvSpPr>
+        <p:spPr/>
+        <p:txBody>
+          <a:bodyPr/>
+          <a:lstStyle/>
+          <a:p>
+            <a:r>
+              <a:t>Workbook task 10 — the reset, done through the tooling, confirmed like everything else.</a:t>
+            </a:r>
+          </a:p>
+          <a:p>
+            <a:r>
+              <a:t>Full removal is a later closeout task; today is about returning to baseline.</a:t>
+            </a:r>
+          </a:p>
+        </p:txBody>
+      </p:sp>
+      <p:sp>
+        <p:nvSpPr>
+          <p:cNvPr id="4" name="Slide Number Placeholder 3"/>
+          <p:cNvSpPr>
+            <a:spLocks noGrp="1"/>
+          </p:cNvSpPr>
+          <p:nvPr>
+            <p:ph type="sldNum" idx="5" sz="quarter"/>
+          </p:nvPr>
+        </p:nvSpPr>
+        <p:spPr/>
+      </p:sp>
+    </p:spTree>
+  </p:cSld>
+  <p:clrMapOvr>
+    <a:masterClrMapping/>
+  </p:clrMapOvr>
+</p:notes>
+</file>
+
+<file path=ppt/notesSlides/notesSlide15.xml><?xml version="1.0" encoding="utf-8"?>
+<p:notes xmlns:a="http://schemas.openxmlformats.org/drawingml/2006/main" xmlns:p="http://schemas.openxmlformats.org/presentationml/2006/main" xmlns:r="http://schemas.openxmlformats.org/officeDocument/2006/relationships">
+  <p:cSld>
+    <p:spTree>
+      <p:nvGrpSpPr>
+        <p:cNvPr id="1" name=""/>
+        <p:cNvGrpSpPr/>
+        <p:nvPr/>
+      </p:nvGrpSpPr>
+      <p:grpSpPr>
+        <a:xfrm>
+          <a:off x="0" y="0"/>
+          <a:ext cx="0" cy="0"/>
+          <a:chOff x="0" y="0"/>
+          <a:chExt cx="0" cy="0"/>
+        </a:xfrm>
+      </p:grpSpPr>
+      <p:sp>
+        <p:nvSpPr>
+          <p:cNvPr id="2" name="Slide Image Placeholder 1"/>
+          <p:cNvSpPr>
+            <a:spLocks noGrp="1"/>
+          </p:cNvSpPr>
+          <p:nvPr>
+            <p:ph type="sldImg" idx="2"/>
+          </p:nvPr>
+        </p:nvSpPr>
+        <p:spPr/>
+      </p:sp>
+      <p:sp>
+        <p:nvSpPr>
+          <p:cNvPr id="3" name="Notes Placeholder 2"/>
+          <p:cNvSpPr>
+            <a:spLocks noGrp="1"/>
+          </p:cNvSpPr>
+          <p:nvPr>
+            <p:ph type="body" idx="3" sz="quarter"/>
+          </p:nvPr>
+        </p:nvSpPr>
+        <p:spPr/>
+        <p:txBody>
+          <a:bodyPr/>
+          <a:lstStyle/>
+          <a:p>
+            <a:r>
+              <a:t>Activity = practice workbook tasks 9–10.</a:t>
+            </a:r>
+          </a:p>
+          <a:p>
+            <a:r>
+              <a:t>Ask each student what their change set listed before they executed it.</a:t>
+            </a:r>
+          </a:p>
+        </p:txBody>
+      </p:sp>
+      <p:sp>
+        <p:nvSpPr>
+          <p:cNvPr id="4" name="Slide Number Placeholder 3"/>
+          <p:cNvSpPr>
+            <a:spLocks noGrp="1"/>
+          </p:cNvSpPr>
+          <p:nvPr>
+            <p:ph type="sldNum" idx="5" sz="quarter"/>
+          </p:nvPr>
+        </p:nvSpPr>
+        <p:spPr/>
+      </p:sp>
+    </p:spTree>
+  </p:cSld>
+  <p:clrMapOvr>
+    <a:masterClrMapping/>
+  </p:clrMapOvr>
+</p:notes>
+</file>
+
+<file path=ppt/notesSlides/notesSlide16.xml><?xml version="1.0" encoding="utf-8"?>
+<p:notes xmlns:a="http://schemas.openxmlformats.org/drawingml/2006/main" xmlns:p="http://schemas.openxmlformats.org/presentationml/2006/main" xmlns:r="http://schemas.openxmlformats.org/officeDocument/2006/relationships">
+  <p:cSld>
+    <p:spTree>
+      <p:nvGrpSpPr>
+        <p:cNvPr id="1" name=""/>
+        <p:cNvGrpSpPr/>
+        <p:nvPr/>
+      </p:nvGrpSpPr>
+      <p:grpSpPr>
+        <a:xfrm>
+          <a:off x="0" y="0"/>
+          <a:ext cx="0" cy="0"/>
+          <a:chOff x="0" y="0"/>
+          <a:chExt cx="0" cy="0"/>
+        </a:xfrm>
+      </p:grpSpPr>
+      <p:sp>
+        <p:nvSpPr>
+          <p:cNvPr id="2" name="Slide Image Placeholder 1"/>
+          <p:cNvSpPr>
+            <a:spLocks noGrp="1"/>
+          </p:cNvSpPr>
+          <p:nvPr>
+            <p:ph type="sldImg" idx="2"/>
+          </p:nvPr>
+        </p:nvSpPr>
+        <p:spPr/>
+      </p:sp>
+      <p:sp>
+        <p:nvSpPr>
+          <p:cNvPr id="3" name="Notes Placeholder 2"/>
+          <p:cNvSpPr>
+            <a:spLocks noGrp="1"/>
+          </p:cNvSpPr>
+          <p:nvPr>
+            <p:ph type="body" idx="3" sz="quarter"/>
+          </p:nvPr>
+        </p:nvSpPr>
+        <p:spPr/>
+        <p:txBody>
+          <a:bodyPr/>
+          <a:lstStyle/>
+          <a:p>
+            <a:r>
+              <a:t>Shared KE across both units, taught once here, assessed in the AT2 written questions at closeout.</a:t>
+            </a:r>
+          </a:p>
+          <a:p>
+            <a:r>
+              <a:t>Make it concrete: name one standard product in this build and a baseline it implements.</a:t>
             </a:r>
           </a:p>
         </p:txBody>
@@ -1103,67 +1143,12 @@
           <a:lstStyle/>
           <a:p>
             <a:r>
-              <a:t>Vendor-neutral primer — install the core idea of IaC before any AWS specifics.</a:t>
-            </a:r>
-          </a:p>
-          <a:p>
-            <a:r>
-              <a:t>• First bullet: IaC describes infrastructure in a TEXT TEMPLATE the platform then provisions for you —</a:t>
-            </a:r>
-          </a:p>
-          <a:p>
-            <a:r>
-              <a:t>you declare what you want, the platform builds it.</a:t>
-            </a:r>
-          </a:p>
-          <a:p>
-            <a:r>
-              <a:t>• Second bullet: walk the benefits over manual console work — repeatable, versioned, reviewable, fast to</a:t>
-            </a:r>
-          </a:p>
-          <a:p>
-            <a:r>
-              <a:t>rebuild. These four are KE 3; say them as the reasons a professional uses IaC.</a:t>
-            </a:r>
-          </a:p>
-          <a:p>
-            <a:r>
-              <a:t>• Third bullet: the same template gives the same result every time — no click-to-click drift between two</a:t>
-            </a:r>
-          </a:p>
-          <a:p>
-            <a:r>
-              <a:t>people or two environments. Determinism is the whole point.</a:t>
-            </a:r>
-          </a:p>
-          <a:p>
-            <a:r>
-              <a:t>Misconception to pre-empt: "IaC is just a faster way to click." No — it's a fundamentally different</a:t>
-            </a:r>
-          </a:p>
-          <a:p>
-            <a:r>
-              <a:t>model: you version and review the DESCRIPTION of infrastructure like source code, and rebuild from it.</a:t>
-            </a:r>
-          </a:p>
-          <a:p>
-            <a:r>
-              <a:t>Question to pose: "You built something perfectly in the console last week and need it again in a new</a:t>
-            </a:r>
-          </a:p>
-          <a:p>
-            <a:r>
-              <a:t>account today — what does the console give you vs a template?" (memory/screenshots vs a repeatable</a:t>
-            </a:r>
-          </a:p>
-          <a:p>
-            <a:r>
-              <a:t>artefact).</a:t>
-            </a:r>
-          </a:p>
-          <a:p>
-            <a:r>
-              <a:t>UoC/AT2 tie: ICTCLD505 PC 1.1 (benefits of IaC) + KE 3 (IaC vs manual provisioning) → AT2 §4.2 / §8.</a:t>
+              <a:t>Workbook task 1's subject — the benefits are the examinable list; say them as the reasons a professional uses IaC.</a:t>
+            </a:r>
+          </a:p>
+          <a:p>
+            <a:r>
+              <a:t>Question to pose: you built it perfectly in the console last week and need it again today — what does the console give you?</a:t>
             </a:r>
           </a:p>
         </p:txBody>
@@ -1233,72 +1218,12 @@
           <a:lstStyle/>
           <a:p>
             <a:r>
-              <a:t>Bespoke — the three remaining C1 ideas: how automation leverages the platform, what can go wrong, and</a:t>
-            </a:r>
-          </a:p>
-          <a:p>
-            <a:r>
-              <a:t>choosing the service. Balance the benefits slide with the risks.</a:t>
-            </a:r>
-          </a:p>
-          <a:p>
-            <a:r>
-              <a:t>• First bullet: automation LEVERAGES the platform — one template stands up many related resources</a:t>
-            </a:r>
-          </a:p>
-          <a:p>
-            <a:r>
-              <a:t>consistently, in the right order, without manual steps.</a:t>
-            </a:r>
-          </a:p>
-          <a:p>
-            <a:r>
-              <a:t>• Second bullet: the potential ISSUES (students must know these, not just the upside) — drift from</a:t>
-            </a:r>
-          </a:p>
-          <a:p>
-            <a:r>
-              <a:t>manual edits, a bad change rolling back a whole stack, permission/quota errors. Name them plainly.</a:t>
-            </a:r>
-          </a:p>
-          <a:p>
-            <a:r>
-              <a:t>• Third bullet: choose an IaC service COMPATIBLE with the platform — on AWS, CloudFormation is native;</a:t>
-            </a:r>
-          </a:p>
-          <a:p>
-            <a:r>
-              <a:t>manage/measure deployments by stack status and change sets.</a:t>
-            </a:r>
-          </a:p>
-          <a:p>
-            <a:r>
-              <a:t>Misconception to pre-empt: "IaC removes all risk." No — it introduces its OWN failure modes (drift,</a:t>
-            </a:r>
-          </a:p>
-          <a:p>
-            <a:r>
-              <a:t>rollbacks, quota/permission errors); knowing them is part of using it well and is examined.</a:t>
-            </a:r>
-          </a:p>
-          <a:p>
-            <a:r>
-              <a:t>Question to pose: "Someone tweaks a resource by hand after it was deployed from a template — what problem</a:t>
-            </a:r>
-          </a:p>
-          <a:p>
-            <a:r>
-              <a:t>have they just created?" (drift — the template and reality no longer match).</a:t>
-            </a:r>
-          </a:p>
-          <a:p>
-            <a:r>
-              <a:t>UoC/AT2 tie: ICTCLD505 PC 1.2 (automation leverages platforms) + PC 1.3 (potential issues) + PC 1.4 /</a:t>
-            </a:r>
-          </a:p>
-          <a:p>
-            <a:r>
-              <a:t>KE 4 (select a compatible service) + KE 11 (manage/measure via stack status, change sets) → AT2 §5/§8.</a:t>
+              <a:t>Workbook tasks 2 and 3 — the upside and the downside, as separate written answers.</a:t>
+            </a:r>
+          </a:p>
+          <a:p>
+            <a:r>
+              <a:t>Drift is the one to make concrete: someone hand-edits a deployed resource and the template no longer tells the truth.</a:t>
             </a:r>
           </a:p>
         </p:txBody>
@@ -1368,67 +1293,7 @@
           <a:lstStyle/>
           <a:p>
             <a:r>
-              <a:t>Primer — the anatomy of a template so students can READ one. Vendor-neutral framing, AWS examples.</a:t>
-            </a:r>
-          </a:p>
-          <a:p>
-            <a:r>
-              <a:t>• First bullet: the parts — Parameters (inputs), Resources (what to create), Outputs (what to share),</a:t>
-            </a:r>
-          </a:p>
-          <a:p>
-            <a:r>
-              <a:t>and intrinsic functions (!Ref, !GetAtt, !Sub) that wire them together. Name each part's job.</a:t>
-            </a:r>
-          </a:p>
-          <a:p>
-            <a:r>
-              <a:t>• Second bullet: resources declare DESIRED STATE — you say what you want to exist; the platform works</a:t>
-            </a:r>
-          </a:p>
-          <a:p>
-            <a:r>
-              <a:t>out how to reach it. This is the declarative mindset (contrast with scripting each step).</a:t>
-            </a:r>
-          </a:p>
-          <a:p>
-            <a:r>
-              <a:t>• Third bullet: read a template TOP-DOWN — inputs → resources → outputs. Give them the reading order</a:t>
-            </a:r>
-          </a:p>
-          <a:p>
-            <a:r>
-              <a:t>they'll use on the provided template next slide.</a:t>
-            </a:r>
-          </a:p>
-          <a:p>
-            <a:r>
-              <a:t>Misconception to pre-empt: "a template is a script that runs line by line." No — it's a DECLARATION of</a:t>
-            </a:r>
-          </a:p>
-          <a:p>
-            <a:r>
-              <a:t>the end state; the platform decides order and method. Order in the file isn't execution order.</a:t>
-            </a:r>
-          </a:p>
-          <a:p>
-            <a:r>
-              <a:t>Question to pose: "If a template just says 'this database and this server should exist,' who decides the</a:t>
-            </a:r>
-          </a:p>
-          <a:p>
-            <a:r>
-              <a:t>order they're created in?" (the platform, from the dependencies/references — not you).</a:t>
-            </a:r>
-          </a:p>
-          <a:p>
-            <a:r>
-              <a:t>UoC/AT2 tie: ICTCLD505 PC 2.1 (template syntax) + KE 5 (template syntax) → AT2 §4.2 (read the provided</a:t>
-            </a:r>
-          </a:p>
-          <a:p>
-            <a:r>
-              <a:t>template before operating it).</a:t>
+              <a:t>Workbook task 4. Native versus third-party is worth naming, but the workbook asks for a justified selection, not a survey.</a:t>
             </a:r>
           </a:p>
         </p:txBody>
@@ -1498,72 +1363,12 @@
           <a:lstStyle/>
           <a:p>
             <a:r>
-              <a:t>Bespoke — the assessed skill of READING a template you were given, before running it. Use the anatomy</a:t>
-            </a:r>
-          </a:p>
-          <a:p>
-            <a:r>
-              <a:t>diagram to point at each part live.</a:t>
-            </a:r>
-          </a:p>
-          <a:p>
-            <a:r>
-              <a:t>• First bullet: review a pre-defined template to determine the RESOURCES it creates and their</a:t>
-            </a:r>
-          </a:p>
-          <a:p>
-            <a:r>
-              <a:t>DEPENDENCIES — what will exist and what relies on what.</a:t>
-            </a:r>
-          </a:p>
-          <a:p>
-            <a:r>
-              <a:t>• Second bullet: trace !Ref / !GetAtt to see what depends on what — the build ORDER falls out of the</a:t>
-            </a:r>
-          </a:p>
-          <a:p>
-            <a:r>
-              <a:t>references, you don't specify it. Follow a reference on the diagram as you say this.</a:t>
-            </a:r>
-          </a:p>
-          <a:p>
-            <a:r>
-              <a:t>• Third bullet (the point): know what a template does BEFORE you deploy it. The provided data-store</a:t>
-            </a:r>
-          </a:p>
-          <a:p>
-            <a:r>
-              <a:t>template is your AT2 case — reading it is the graded skill, not just running it.</a:t>
-            </a:r>
-          </a:p>
-          <a:p>
-            <a:r>
-              <a:t>Misconception to pre-empt: "just deploy it and see what happens." No — a professional reviews the</a:t>
-            </a:r>
-          </a:p>
-          <a:p>
-            <a:r>
-              <a:t>template first; deploying blind into a real account can create cost or clash with existing resources.</a:t>
-            </a:r>
-          </a:p>
-          <a:p>
-            <a:r>
-              <a:t>Question to pose: "How can you tell, from the template alone, that the database must exist before the app</a:t>
-            </a:r>
-          </a:p>
-          <a:p>
-            <a:r>
-              <a:t>server?" (the app resource !Refs the database — the reference creates the dependency).</a:t>
-            </a:r>
-          </a:p>
-          <a:p>
-            <a:r>
-              <a:t>UoC/AT2 tie: ICTCLD505 PC 2.2 (review pre-defined templates; determine resources &amp; dependencies) + KE 5</a:t>
-            </a:r>
-          </a:p>
-          <a:p>
-            <a:r>
-              <a:t>→ AT2 §4.2 (operate the PROVIDED DynamoDB template — criterion D2).</a:t>
+              <a:t>Activity = practice workbook tasks 1–4, all written answers.</a:t>
+            </a:r>
+          </a:p>
+          <a:p>
+            <a:r>
+              <a:t>Push past generic answers — each one is about this job and this platform.</a:t>
             </a:r>
           </a:p>
         </p:txBody>
@@ -1633,72 +1438,12 @@
           <a:lstStyle/>
           <a:p>
             <a:r>
-              <a:t>Primer — the operational lifecycle of a template and the tooling that runs it, right before the demo.</a:t>
-            </a:r>
-          </a:p>
-          <a:p>
-            <a:r>
-              <a:t>• First bullet: the three operations on a stack — create → update (via a CHANGE SET) → delete. That's</a:t>
-            </a:r>
-          </a:p>
-          <a:p>
-            <a:r>
-              <a:t>the whole lifecycle of operating a template.</a:t>
-            </a:r>
-          </a:p>
-          <a:p>
-            <a:r>
-              <a:t>• Second bullet: tooling — the CloudFormation console OR the CLI executes the template; you</a:t>
-            </a:r>
-          </a:p>
-          <a:p>
-            <a:r>
-              <a:t>manage/provision/update via stacks and change sets. Either tool, same operations.</a:t>
-            </a:r>
-          </a:p>
-          <a:p>
-            <a:r>
-              <a:t>• Third bullet (the safety point): every change is a REVIEWABLE DIFF before it runs — a change set shows</a:t>
-            </a:r>
-          </a:p>
-          <a:p>
-            <a:r>
-              <a:t>you exactly what will change before you commit. You look before you leap.</a:t>
-            </a:r>
-          </a:p>
-          <a:p>
-            <a:r>
-              <a:t>Misconception to pre-empt: "updating means editing the live resources directly." No — you edit the</a:t>
-            </a:r>
-          </a:p>
-          <a:p>
-            <a:r>
-              <a:t>template and apply it; the change set computes the diff and the platform makes the changes. Don't</a:t>
-            </a:r>
-          </a:p>
-          <a:p>
-            <a:r>
-              <a:t>hand-edit resources a template owns (that's drift).</a:t>
-            </a:r>
-          </a:p>
-          <a:p>
-            <a:r>
-              <a:t>Question to pose: "Before you apply an update to a running stack, what should you look at first?" (the</a:t>
-            </a:r>
-          </a:p>
-          <a:p>
-            <a:r>
-              <a:t>change set — the diff of what will be added/modified/removed).</a:t>
-            </a:r>
-          </a:p>
-          <a:p>
-            <a:r>
-              <a:t>UoC/AT2 tie: ICTCLD505 PC 2.3–2.5 (deploy/update/delete; confirm; remove) + PE 1 + PE 3 + KE 6/10/11 →</a:t>
-            </a:r>
-          </a:p>
-          <a:p>
-            <a:r>
-              <a:t>AT2 §4.2 (operate the provided template — D2).</a:t>
+              <a:t>The anatomy, so students can read one. Declarative is the mindset shift — file order is not execution order.</a:t>
+            </a:r>
+          </a:p>
+          <a:p>
+            <a:r>
+              <a:t>Question to pose: the template says a database and a server should exist — who decides the creation order? (the references).</a:t>
             </a:r>
           </a:p>
         </p:txBody>
@@ -1768,90 +1513,12 @@
           <a:lstStyle/>
           <a:p>
             <a:r>
-              <a:t>LIVE DEMONSTRATION (educator-led — screen it live in the lab, or a screen capture you record yourself;</a:t>
-            </a:r>
-          </a:p>
-          <a:p>
-            <a:r>
-              <a:t>CL2 has no recorded-demos catalogue). Demonstrate the COURSE'S OWN provided template against the</a:t>
-            </a:r>
-          </a:p>
-          <a:p>
-            <a:r>
-              <a:t>lab-pack, then students replicate on the next slide.</a:t>
-            </a:r>
-          </a:p>
-          <a:p/>
-          <a:p>
-            <a:r>
-              <a:t>WHAT TO DEMONSTRATE (step by step, in the Learner Lab, Region us-east-1 —</a:t>
-            </a:r>
-          </a:p>
-          <a:p>
-            <a:r>
-              <a:t>[scenario: ap-southeast-2 (Sydney) | deploy: us-east-1]):</a:t>
-            </a:r>
-          </a:p>
-          <a:p>
-            <a:r>
-              <a:t>1. Open the provided data-store template; point out its Parameters/Resources/Outputs (tie back to the</a:t>
-            </a:r>
-          </a:p>
-          <a:p>
-            <a:r>
-              <a:t>anatomy slide).</a:t>
-            </a:r>
-          </a:p>
-          <a:p>
-            <a:r>
-              <a:t>2. Create the stack; watch the events to CREATE_COMPLETE; confirm the resource in the console.</a:t>
-            </a:r>
-          </a:p>
-          <a:p>
-            <a:r>
-              <a:t>3. Make a change SET on one parameter, review the diff, then execute it; confirm the resource changed.</a:t>
-            </a:r>
-          </a:p>
-          <a:p>
-            <a:r>
-              <a:t>4. Delete the stack; confirm the resources are removed (no orphans left behind).</a:t>
-            </a:r>
-          </a:p>
-          <a:p/>
-          <a:p>
-            <a:r>
-              <a:t>WHAT TO EMPHASISE:</a:t>
-            </a:r>
-          </a:p>
-          <a:p>
-            <a:r>
-              <a:t>• Set the Region to us-east-1 FIRST and say the substitution out loud — everything is Region-scoped.</a:t>
-            </a:r>
-          </a:p>
-          <a:p>
-            <a:r>
-              <a:t>• The change set is a DIFF you review BEFORE it runs — pause on it deliberately; don't rush past it.</a:t>
-            </a:r>
-          </a:p>
-          <a:p>
-            <a:r>
-              <a:t>• Confirm at each step (console/CLI) rather than assuming — deploy → confirm is the habit.</a:t>
-            </a:r>
-          </a:p>
-          <a:p>
-            <a:r>
-              <a:t>• Delete cleanly at the end — leaving stacks running costs money and clutters the account.</a:t>
-            </a:r>
-          </a:p>
-          <a:p/>
-          <a:p>
-            <a:r>
-              <a:t>PREP: clean Learner Lab open, the provided data-store template to hand, Region already thought about.</a:t>
-            </a:r>
-          </a:p>
-          <a:p>
-            <a:r>
-              <a:t>~8–10 min to screen + narrate before the activity.</a:t>
+              <a:t>Workbook task 5 — the assessed reading skill. Trace one reference live on the diagram.</a:t>
+            </a:r>
+          </a:p>
+          <a:p>
+            <a:r>
+              <a:t>A professional reviews before running; the workbook's table asks for exactly that review.</a:t>
             </a:r>
           </a:p>
         </p:txBody>
@@ -1921,87 +1588,12 @@
           <a:lstStyle/>
           <a:p>
             <a:r>
-              <a:t>Facilitation — the C3 practice; students operate the provided template through its full lifecycle on</a:t>
-            </a:r>
-          </a:p>
-          <a:p>
-            <a:r>
-              <a:t>the practice scenario. They do what you just demoed.</a:t>
-            </a:r>
-          </a:p>
-          <a:p>
-            <a:r>
-              <a:t>Tell students, in these words: "On the practice scenario, deploy the provided template, update a</a:t>
-            </a:r>
-          </a:p>
-          <a:p>
-            <a:r>
-              <a:t>parameter via a change set, confirm it, then remove it. Work in us-east-1 — the deploy Region is the</a:t>
-            </a:r>
-          </a:p>
-          <a:p>
-            <a:r>
-              <a:t>substitute, the process is identical."</a:t>
-            </a:r>
-          </a:p>
-          <a:p>
-            <a:r>
-              <a:t>Steps (put on the board):</a:t>
-            </a:r>
-          </a:p>
-          <a:p>
-            <a:r>
-              <a:t>1. Set the Region to us-east-1 — [scenario: ap-southeast-2 (Sydney) | deploy: us-east-1].</a:t>
-            </a:r>
-          </a:p>
-          <a:p>
-            <a:r>
-              <a:t>2. Deploy the provided template; wait for CREATE_COMPLETE; confirm the resource in the console/CLI.</a:t>
-            </a:r>
-          </a:p>
-          <a:p>
-            <a:r>
-              <a:t>3. Update one parameter via a change set — review the diff, then execute; confirm the change.</a:t>
-            </a:r>
-          </a:p>
-          <a:p>
-            <a:r>
-              <a:t>4. Delete the stack; confirm everything is removed.</a:t>
-            </a:r>
-          </a:p>
-          <a:p>
-            <a:r>
-              <a:t>Must produce: a stack taken cleanly through create → update → delete, confirmed at each step.</a:t>
-            </a:r>
-          </a:p>
-          <a:p>
-            <a:r>
-              <a:t>Timing: ~25 min. Where they get stuck: forgetting to set Region first; and trying to change the resource</a:t>
-            </a:r>
-          </a:p>
-          <a:p>
-            <a:r>
-              <a:t>by hand instead of via a change set — circulate and redirect them to the template/change set.</a:t>
-            </a:r>
-          </a:p>
-          <a:p>
-            <a:r>
-              <a:t>Share-back prompt: "What did the change set show you BEFORE you applied it?" (the diff — reinforce the</a:t>
-            </a:r>
-          </a:p>
-          <a:p>
-            <a:r>
-              <a:t>review-before-run habit).</a:t>
-            </a:r>
-          </a:p>
-          <a:p>
-            <a:r>
-              <a:t>No-leakage note: practice scenario template — AT2 §4.2 operates the provided data-store template on a</a:t>
-            </a:r>
-          </a:p>
-          <a:p>
-            <a:r>
-              <a:t>different case (comparable, not identical); keep them on the practice template here.</a:t>
+              <a:t>Activity = practice workbook task 5, on the practice template.</a:t>
+            </a:r>
+          </a:p>
+          <a:p>
+            <a:r>
+              <a:t>The dependency question is the one to press: how do you know, from the file alone, what must exist first?</a:t>
             </a:r>
           </a:p>
         </p:txBody>
@@ -2071,77 +1663,12 @@
           <a:lstStyle/>
           <a:p>
             <a:r>
-              <a:t>Bespoke — teach diagnosis as a METHOD, not guesswork. This is the thinking behind the "fix a broken</a:t>
-            </a:r>
-          </a:p>
-          <a:p>
-            <a:r>
-              <a:t>template" demo that follows.</a:t>
-            </a:r>
-          </a:p>
-          <a:p>
-            <a:r>
-              <a:t>• First bullet: to troubleshoot, read the FAILURE EVENT — find the FIRST CREATE_FAILED in the stack</a:t>
-            </a:r>
-          </a:p>
-          <a:p>
-            <a:r>
-              <a:t>events and read its reason. The first failure is the cause; the rest are knock-on.</a:t>
-            </a:r>
-          </a:p>
-          <a:p>
-            <a:r>
-              <a:t>• Second bullet: the common errors (KE 7) — a bad reference, a missing permission, an invalid property,</a:t>
-            </a:r>
-          </a:p>
-          <a:p>
-            <a:r>
-              <a:t>a name clash. Knowing the usual suspects speeds diagnosis.</a:t>
-            </a:r>
-          </a:p>
-          <a:p>
-            <a:r>
-              <a:t>• Third bullet: fix the template, redeploy, confirm — diagnosis OVER trial-and-error. You reason from</a:t>
-            </a:r>
-          </a:p>
-          <a:p>
-            <a:r>
-              <a:t>the error message, you don't poke randomly.</a:t>
-            </a:r>
-          </a:p>
-          <a:p>
-            <a:r>
-              <a:t>Misconception to pre-empt: "when a stack fails, start changing things until it works." No — read the</a:t>
-            </a:r>
-          </a:p>
-          <a:p>
-            <a:r>
-              <a:t>first CREATE_FAILED event and its reason; the message usually tells you exactly what's wrong. Random</a:t>
-            </a:r>
-          </a:p>
-          <a:p>
-            <a:r>
-              <a:t>changes create new failures.</a:t>
-            </a:r>
-          </a:p>
-          <a:p>
-            <a:r>
-              <a:t>Question to pose: "A stack shows five failed resources — which one do you read first, and why?" (the</a:t>
-            </a:r>
-          </a:p>
-          <a:p>
-            <a:r>
-              <a:t>FIRST CREATE_FAILED — the others likely failed because it did).</a:t>
-            </a:r>
-          </a:p>
-          <a:p>
-            <a:r>
-              <a:t>UoC/AT2 tie: ICTCLD505 PC 2.6 (test &amp; troubleshoot template errors) + KE 7 (testing/debugging, common</a:t>
-            </a:r>
-          </a:p>
-          <a:p>
-            <a:r>
-              <a:t>errors) → AT2 §4.2 (operate the provided template, incl. recovering from a failure).</a:t>
+              <a:t>Sets up the deploy-fail-fix run the workbook stages: the practice template fails first time by design.</a:t>
+            </a:r>
+          </a:p>
+          <a:p>
+            <a:r>
+              <a:t>The first-CREATE_FAILED discipline is the whole method; the later failures are downstream.</a:t>
             </a:r>
           </a:p>
         </p:txBody>
@@ -5363,7 +4890,7 @@
                 </a:solidFill>
                 <a:latin typeface="Roboto"/>
               </a:rPr>
-              <a:t>The template lifecycle &amp; tooling</a:t>
+              <a:t>Template syntax</a:t>
             </a:r>
           </a:p>
         </p:txBody>
@@ -5383,7 +4910,7 @@
             <a:avLst/>
           </a:prstGeom>
           <a:solidFill>
-            <a:srgbClr val="205F61"/>
+            <a:srgbClr val="27B5CE"/>
           </a:solidFill>
           <a:ln>
             <a:noFill/>
@@ -5461,7 +4988,7 @@
                 </a:solidFill>
                 <a:latin typeface="Roboto"/>
               </a:rPr>
-              <a:t>Create → update (change set) → delete: the three operations on a stack.</a:t>
+              <a:t>The parts: Parameters take inputs, Resources declare what to create, Outputs share results, intrinsic functions wire them together.</a:t>
             </a:r>
           </a:p>
           <a:p>
@@ -5492,7 +5019,7 @@
                 </a:solidFill>
                 <a:latin typeface="Roboto"/>
               </a:rPr>
-              <a:t>Tooling: the CloudFormation console or the CLI executes the template (KE 6); manage/provision/update via stacks and change sets (KE 10).</a:t>
+              <a:t>Resources declare desired state; the platform works out how to reach it.</a:t>
             </a:r>
           </a:p>
           <a:p>
@@ -5523,7 +5050,7 @@
                 </a:solidFill>
                 <a:latin typeface="Roboto"/>
               </a:rPr>
-              <a:t>Every change is a reviewable diff before it runs.</a:t>
+              <a:t>Read top-down: inputs, then resources, then outputs.</a:t>
             </a:r>
           </a:p>
         </p:txBody>
@@ -5543,7 +5070,7 @@
             <a:avLst/>
           </a:prstGeom>
           <a:solidFill>
-            <a:srgbClr val="205F61"/>
+            <a:srgbClr val="27B5CE"/>
           </a:solidFill>
           <a:ln>
             <a:noFill/>
@@ -5645,7 +5172,7 @@
                 </a:solidFill>
                 <a:latin typeface="Roboto"/>
               </a:rPr>
-              <a:t>6</a:t>
+              <a:t>7</a:t>
             </a:r>
           </a:p>
         </p:txBody>
@@ -5678,20 +5205,54 @@
       <p:grpSpPr/>
       <p:sp>
         <p:nvSpPr>
-          <p:cNvPr id="2" name="Rectangle 1"/>
+          <p:cNvPr id="2" name="TextBox 1"/>
+          <p:cNvSpPr txBox="1"/>
+          <p:nvPr/>
+        </p:nvSpPr>
+        <p:spPr>
+          <a:xfrm>
+            <a:off x="640080" y="457200"/>
+            <a:ext cx="10881360" cy="960120"/>
+          </a:xfrm>
+          <a:prstGeom prst="rect">
+            <a:avLst/>
+          </a:prstGeom>
+          <a:noFill/>
+        </p:spPr>
+        <p:txBody>
+          <a:bodyPr wrap="square" anchor="t" lIns="0" rIns="0" tIns="0" bIns="0">
+            <a:spAutoFit/>
+          </a:bodyPr>
+          <a:lstStyle/>
+          <a:p>
+            <a:r>
+              <a:rPr sz="2800" b="1" i="0">
+                <a:solidFill>
+                  <a:srgbClr val="2A2929"/>
+                </a:solidFill>
+                <a:latin typeface="Roboto"/>
+              </a:rPr>
+              <a:t>Review the provided template</a:t>
+            </a:r>
+          </a:p>
+        </p:txBody>
+      </p:sp>
+      <p:sp>
+        <p:nvSpPr>
+          <p:cNvPr id="3" name="Rectangle 2"/>
           <p:cNvSpPr/>
           <p:nvPr/>
         </p:nvSpPr>
         <p:spPr>
           <a:xfrm>
-            <a:off x="0" y="0"/>
-            <a:ext cx="12191695" cy="1234440"/>
+            <a:off x="658368" y="1371600"/>
+            <a:ext cx="1463040" cy="50800"/>
           </a:xfrm>
           <a:prstGeom prst="rect">
             <a:avLst/>
           </a:prstGeom>
           <a:solidFill>
-            <a:srgbClr val="2A2929"/>
+            <a:srgbClr val="27B5CE"/>
           </a:solidFill>
           <a:ln>
             <a:noFill/>
@@ -5722,101 +5283,14 @@
       </p:sp>
       <p:sp>
         <p:nvSpPr>
-          <p:cNvPr id="3" name="Rounded Rectangle 2"/>
-          <p:cNvSpPr/>
-          <p:nvPr/>
-        </p:nvSpPr>
-        <p:spPr>
-          <a:xfrm>
-            <a:off x="640080" y="384048"/>
-            <a:ext cx="2331720" cy="457200"/>
-          </a:xfrm>
-          <a:prstGeom prst="roundRect">
-            <a:avLst/>
-          </a:prstGeom>
-          <a:solidFill>
-            <a:srgbClr val="205F61"/>
-          </a:solidFill>
-          <a:ln>
-            <a:noFill/>
-          </a:ln>
-          <a:effectLst/>
-        </p:spPr>
-        <p:style>
-          <a:lnRef idx="1">
-            <a:schemeClr val="accent1"/>
-          </a:lnRef>
-          <a:fillRef idx="3">
-            <a:schemeClr val="accent1"/>
-          </a:fillRef>
-          <a:effectRef idx="2">
-            <a:schemeClr val="accent1"/>
-          </a:effectRef>
-          <a:fontRef idx="minor">
-            <a:schemeClr val="lt1"/>
-          </a:fontRef>
-        </p:style>
-        <p:txBody>
-          <a:bodyPr rtlCol="0" anchor="ctr"/>
-          <a:lstStyle/>
-          <a:p>
-            <a:pPr algn="ctr"/>
-            <a:r>
-              <a:rPr sz="1300" b="1" i="0">
-                <a:solidFill>
-                  <a:srgbClr val="2A2929"/>
-                </a:solidFill>
-                <a:latin typeface="Roboto"/>
-              </a:rPr>
-              <a:t>RECORDED DEMO</a:t>
-            </a:r>
-          </a:p>
-        </p:txBody>
-      </p:sp>
-      <p:sp>
-        <p:nvSpPr>
           <p:cNvPr id="4" name="TextBox 3"/>
           <p:cNvSpPr txBox="1"/>
           <p:nvPr/>
         </p:nvSpPr>
         <p:spPr>
           <a:xfrm>
-            <a:off x="3200400" y="310896"/>
-            <a:ext cx="8321040" cy="685800"/>
-          </a:xfrm>
-          <a:prstGeom prst="rect">
-            <a:avLst/>
-          </a:prstGeom>
-          <a:noFill/>
-        </p:spPr>
-        <p:txBody>
-          <a:bodyPr wrap="square" anchor="ctr" lIns="0" rIns="0" tIns="0" bIns="0">
-            <a:spAutoFit/>
-          </a:bodyPr>
-          <a:lstStyle/>
-          <a:p>
-            <a:r>
-              <a:rPr sz="2500" b="1" i="0">
-                <a:solidFill>
-                  <a:srgbClr val="FFFFFF"/>
-                </a:solidFill>
-                <a:latin typeface="Roboto"/>
-              </a:rPr>
-              <a:t>Operate the provided template</a:t>
-            </a:r>
-          </a:p>
-        </p:txBody>
-      </p:sp>
-      <p:sp>
-        <p:nvSpPr>
-          <p:cNvPr id="5" name="TextBox 4"/>
-          <p:cNvSpPr txBox="1"/>
-          <p:nvPr/>
-        </p:nvSpPr>
-        <p:spPr>
-          <a:xfrm>
-            <a:off x="658368" y="1554480"/>
-            <a:ext cx="10881360" cy="4297680"/>
+            <a:off x="658368" y="1737360"/>
+            <a:ext cx="5486400" cy="4297680"/>
           </a:xfrm>
           <a:prstGeom prst="rect">
             <a:avLst/>
@@ -5856,7 +5330,7 @@
                 </a:solidFill>
                 <a:latin typeface="Roboto"/>
               </a:rPr>
-              <a:t>Deploy the provided template in the lab (Region us-east-1 — [scenario: ap-southeast-2 (Sydney) | deploy: us-east-1]).</a:t>
+              <a:t>Determine what resources it creates and what depends on what — the build order falls out of the references.</a:t>
             </a:r>
           </a:p>
           <a:p>
@@ -5887,32 +5361,85 @@
                 </a:solidFill>
                 <a:latin typeface="Roboto"/>
               </a:rPr>
-              <a:t>Update a parameter via a change set; confirm the resource in the console/CLI; then delete the stack.</a:t>
-            </a:r>
-          </a:p>
-        </p:txBody>
-      </p:sp>
-      <p:sp>
-        <p:nvSpPr>
-          <p:cNvPr id="6" name="Rounded Rectangle 5"/>
+              <a:t>Know what a template does before you deploy it; deploying blind is how surprises get expensive.</a:t>
+            </a:r>
+          </a:p>
+          <a:p>
+            <a:pPr marL="0" indent="0">
+              <a:lnSpc>
+                <a:spcPct val="105000"/>
+              </a:lnSpc>
+              <a:spcBef>
+                <a:spcPts val="0"/>
+              </a:spcBef>
+              <a:spcAft>
+                <a:spcPts val="1000"/>
+              </a:spcAft>
+            </a:pPr>
+            <a:r>
+              <a:rPr sz="1700" b="1" i="0">
+                <a:solidFill>
+                  <a:srgbClr val="EDAB0C"/>
+                </a:solidFill>
+                <a:latin typeface="Roboto"/>
+              </a:rPr>
+              <a:t>■  </a:t>
+            </a:r>
+            <a:r>
+              <a:rPr sz="1700" b="0" i="0">
+                <a:solidFill>
+                  <a:srgbClr val="2A2929"/>
+                </a:solidFill>
+                <a:latin typeface="Roboto"/>
+              </a:rPr>
+              <a:t>The provided data-store template is the case: read it, list its resources, trace its references.</a:t>
+            </a:r>
+          </a:p>
+        </p:txBody>
+      </p:sp>
+      <p:pic>
+        <p:nvPicPr>
+          <p:cNvPr id="5" name="Picture 4" descr="cfn-template-anatomy.png"/>
+          <p:cNvPicPr>
+            <a:picLocks noChangeAspect="1"/>
+          </p:cNvPicPr>
+          <p:nvPr/>
+        </p:nvPicPr>
+        <p:blipFill>
+          <a:blip r:embed="rId2"/>
+          <a:stretch>
+            <a:fillRect/>
+          </a:stretch>
+        </p:blipFill>
+        <p:spPr>
+          <a:xfrm>
+            <a:off x="6400800" y="1828800"/>
+            <a:ext cx="5120640" cy="3931920"/>
+          </a:xfrm>
+          <a:prstGeom prst="rect">
+            <a:avLst/>
+          </a:prstGeom>
+        </p:spPr>
+      </p:pic>
+      <p:sp>
+        <p:nvSpPr>
+          <p:cNvPr id="6" name="Rectangle 5"/>
           <p:cNvSpPr/>
           <p:nvPr/>
         </p:nvSpPr>
         <p:spPr>
           <a:xfrm>
-            <a:off x="640080" y="5897880"/>
-            <a:ext cx="7863840" cy="457200"/>
-          </a:xfrm>
-          <a:prstGeom prst="roundRect">
+            <a:off x="0" y="6565392"/>
+            <a:ext cx="12191695" cy="38100"/>
+          </a:xfrm>
+          <a:prstGeom prst="rect">
             <a:avLst/>
           </a:prstGeom>
           <a:solidFill>
-            <a:srgbClr val="F9F9F9"/>
+            <a:srgbClr val="27B5CE"/>
           </a:solidFill>
-          <a:ln w="12700">
-            <a:solidFill>
-              <a:srgbClr val="CCCCCC"/>
-            </a:solidFill>
+          <a:ln>
+            <a:noFill/>
           </a:ln>
           <a:effectLst/>
         </p:spPr>
@@ -5946,84 +5473,6 @@
         </p:nvSpPr>
         <p:spPr>
           <a:xfrm>
-            <a:off x="822960" y="5943600"/>
-            <a:ext cx="7498080" cy="365760"/>
-          </a:xfrm>
-          <a:prstGeom prst="rect">
-            <a:avLst/>
-          </a:prstGeom>
-          <a:noFill/>
-        </p:spPr>
-        <p:txBody>
-          <a:bodyPr wrap="square" anchor="ctr" lIns="0" rIns="0" tIns="0" bIns="0">
-            <a:spAutoFit/>
-          </a:bodyPr>
-          <a:lstStyle/>
-          <a:p>
-            <a:r>
-              <a:rPr sz="1400" b="1" i="0">
-                <a:solidFill>
-                  <a:srgbClr val="2A2929"/>
-                </a:solidFill>
-                <a:latin typeface="Roboto"/>
-              </a:rPr>
-              <a:t>▶  Play the AWS recorded demo (recorded/live demo) — you do this next</a:t>
-            </a:r>
-          </a:p>
-        </p:txBody>
-      </p:sp>
-      <p:sp>
-        <p:nvSpPr>
-          <p:cNvPr id="8" name="Rectangle 7"/>
-          <p:cNvSpPr/>
-          <p:nvPr/>
-        </p:nvSpPr>
-        <p:spPr>
-          <a:xfrm>
-            <a:off x="0" y="6565392"/>
-            <a:ext cx="12191695" cy="38100"/>
-          </a:xfrm>
-          <a:prstGeom prst="rect">
-            <a:avLst/>
-          </a:prstGeom>
-          <a:solidFill>
-            <a:srgbClr val="205F61"/>
-          </a:solidFill>
-          <a:ln>
-            <a:noFill/>
-          </a:ln>
-          <a:effectLst/>
-        </p:spPr>
-        <p:style>
-          <a:lnRef idx="1">
-            <a:schemeClr val="accent1"/>
-          </a:lnRef>
-          <a:fillRef idx="3">
-            <a:schemeClr val="accent1"/>
-          </a:fillRef>
-          <a:effectRef idx="2">
-            <a:schemeClr val="accent1"/>
-          </a:effectRef>
-          <a:fontRef idx="minor">
-            <a:schemeClr val="lt1"/>
-          </a:fontRef>
-        </p:style>
-        <p:txBody>
-          <a:bodyPr rtlCol="0" anchor="ctr"/>
-          <a:lstStyle/>
-          <a:p>
-            <a:pPr algn="ctr"/>
-          </a:p>
-        </p:txBody>
-      </p:sp>
-      <p:sp>
-        <p:nvSpPr>
-          <p:cNvPr id="9" name="TextBox 8"/>
-          <p:cNvSpPr txBox="1"/>
-          <p:nvPr/>
-        </p:nvSpPr>
-        <p:spPr>
-          <a:xfrm>
             <a:off x="502920" y="6400800"/>
             <a:ext cx="5486400" cy="320040"/>
           </a:xfrm>
@@ -6061,7 +5510,7 @@
       </p:sp>
       <p:sp>
         <p:nvSpPr>
-          <p:cNvPr id="10" name="TextBox 9"/>
+          <p:cNvPr id="8" name="TextBox 7"/>
           <p:cNvSpPr txBox="1"/>
           <p:nvPr/>
         </p:nvSpPr>
@@ -6089,7 +5538,7 @@
                 </a:solidFill>
                 <a:latin typeface="Roboto"/>
               </a:rPr>
-              <a:t>7</a:t>
+              <a:t>8</a:t>
             </a:r>
           </a:p>
         </p:txBody>
@@ -6135,7 +5584,7 @@
             <a:avLst/>
           </a:prstGeom>
           <a:solidFill>
-            <a:srgbClr val="205F61"/>
+            <a:srgbClr val="27B5CE"/>
           </a:solidFill>
           <a:ln>
             <a:noFill/>
@@ -6246,7 +5695,7 @@
                 </a:solidFill>
                 <a:latin typeface="Roboto"/>
               </a:rPr>
-              <a:t>Deploy, update, delete</a:t>
+              <a:t>Review the data-store template</a:t>
             </a:r>
           </a:p>
         </p:txBody>
@@ -6300,7 +5749,7 @@
                 </a:solidFill>
                 <a:latin typeface="Roboto"/>
               </a:rPr>
-              <a:t>On the practice scenario, deploy the provided template, update a parameter, confirm it, then remove it.</a:t>
+              <a:t>Workbook — task 5.</a:t>
             </a:r>
           </a:p>
           <a:p>
@@ -6331,7 +5780,7 @@
                 </a:solidFill>
                 <a:latin typeface="Roboto"/>
               </a:rPr>
-              <a:t>Work in us-east-1; the deploy Region is the substitute, the process is identical.</a:t>
+              <a:t>Review the provided template: the resources it creates, their dependencies, and what the parameters control.</a:t>
             </a:r>
           </a:p>
         </p:txBody>
@@ -6411,7 +5860,7 @@
                 </a:solidFill>
                 <a:latin typeface="Roboto"/>
               </a:rPr>
-              <a:t>⏱  ~25 min</a:t>
+              <a:t>⏱  ~20 min</a:t>
             </a:r>
           </a:p>
         </p:txBody>
@@ -6431,7 +5880,7 @@
             <a:avLst/>
           </a:prstGeom>
           <a:solidFill>
-            <a:srgbClr val="205F61"/>
+            <a:srgbClr val="27B5CE"/>
           </a:solidFill>
           <a:ln>
             <a:noFill/>
@@ -6533,7 +5982,7 @@
                 </a:solidFill>
                 <a:latin typeface="Roboto"/>
               </a:rPr>
-              <a:t>8</a:t>
+              <a:t>9</a:t>
             </a:r>
           </a:p>
         </p:txBody>
@@ -6552,7 +6001,7 @@
     <p:bg>
       <p:bgPr>
         <a:solidFill>
-          <a:srgbClr val="FFFFFF"/>
+          <a:srgbClr val="F9F9F9"/>
         </a:solidFill>
         <a:effectLst/>
       </p:bgPr>
@@ -6566,20 +6015,70 @@
       <p:grpSpPr/>
       <p:sp>
         <p:nvSpPr>
-          <p:cNvPr id="2" name="Rectangle 1"/>
+          <p:cNvPr id="2" name="TextBox 1"/>
+          <p:cNvSpPr txBox="1"/>
+          <p:nvPr/>
+        </p:nvSpPr>
+        <p:spPr>
+          <a:xfrm>
+            <a:off x="640080" y="548640"/>
+            <a:ext cx="10881360" cy="1097280"/>
+          </a:xfrm>
+          <a:prstGeom prst="rect">
+            <a:avLst/>
+          </a:prstGeom>
+          <a:noFill/>
+        </p:spPr>
+        <p:txBody>
+          <a:bodyPr wrap="square" anchor="t" lIns="0" rIns="0" tIns="0" bIns="0">
+            <a:spAutoFit/>
+          </a:bodyPr>
+          <a:lstStyle/>
+          <a:p>
+            <a:r>
+              <a:rPr sz="3200" b="1" i="0">
+                <a:solidFill>
+                  <a:srgbClr val="2A2929"/>
+                </a:solidFill>
+                <a:latin typeface="Roboto"/>
+              </a:rPr>
+              <a:t>Key takeaways</a:t>
+            </a:r>
+          </a:p>
+          <a:p>
+            <a:pPr>
+              <a:spcBef>
+                <a:spcPts val="200"/>
+              </a:spcBef>
+            </a:pPr>
+            <a:r>
+              <a:rPr sz="1800" b="1" i="0">
+                <a:solidFill>
+                  <a:srgbClr val="27B5CE"/>
+                </a:solidFill>
+                <a:latin typeface="Roboto"/>
+              </a:rPr>
+              <a:t>Section 2 · Reading</a:t>
+            </a:r>
+          </a:p>
+        </p:txBody>
+      </p:sp>
+      <p:sp>
+        <p:nvSpPr>
+          <p:cNvPr id="3" name="Rectangle 2"/>
           <p:cNvSpPr/>
           <p:nvPr/>
         </p:nvSpPr>
         <p:spPr>
           <a:xfrm>
-            <a:off x="0" y="0"/>
-            <a:ext cx="3931920" cy="6858000"/>
+            <a:off x="658368" y="1600200"/>
+            <a:ext cx="1463040" cy="50800"/>
           </a:xfrm>
           <a:prstGeom prst="rect">
             <a:avLst/>
           </a:prstGeom>
           <a:solidFill>
-            <a:srgbClr val="004488"/>
+            <a:srgbClr val="27B5CE"/>
           </a:solidFill>
           <a:ln>
             <a:noFill/>
@@ -6610,101 +6109,47 @@
       </p:sp>
       <p:sp>
         <p:nvSpPr>
-          <p:cNvPr id="3" name="TextBox 2"/>
-          <p:cNvSpPr txBox="1"/>
-          <p:nvPr/>
-        </p:nvSpPr>
-        <p:spPr>
-          <a:xfrm>
-            <a:off x="365760" y="2103120"/>
-            <a:ext cx="3291840" cy="2194560"/>
-          </a:xfrm>
-          <a:prstGeom prst="rect">
-            <a:avLst/>
-          </a:prstGeom>
-          <a:noFill/>
-        </p:spPr>
-        <p:txBody>
-          <a:bodyPr wrap="square" anchor="t" lIns="0" rIns="0" tIns="0" bIns="0">
-            <a:spAutoFit/>
-          </a:bodyPr>
-          <a:lstStyle/>
-          <a:p>
-            <a:r>
-              <a:rPr sz="13000" b="1" i="0">
-                <a:solidFill>
-                  <a:srgbClr val="FFFFFF"/>
-                </a:solidFill>
-                <a:latin typeface="Roboto"/>
-              </a:rPr>
-              <a:t>04</a:t>
-            </a:r>
-          </a:p>
-        </p:txBody>
-      </p:sp>
-      <p:sp>
-        <p:nvSpPr>
-          <p:cNvPr id="4" name="TextBox 3"/>
-          <p:cNvSpPr txBox="1"/>
-          <p:nvPr/>
-        </p:nvSpPr>
-        <p:spPr>
-          <a:xfrm>
-            <a:off x="4480560" y="2468880"/>
-            <a:ext cx="7132320" cy="2194560"/>
-          </a:xfrm>
-          <a:prstGeom prst="rect">
-            <a:avLst/>
-          </a:prstGeom>
-          <a:noFill/>
-        </p:spPr>
-        <p:txBody>
-          <a:bodyPr wrap="square" anchor="t" lIns="0" rIns="0" tIns="0" bIns="0">
-            <a:spAutoFit/>
-          </a:bodyPr>
-          <a:lstStyle/>
-          <a:p>
-            <a:r>
-              <a:rPr sz="1600" b="1" i="0">
-                <a:solidFill>
-                  <a:srgbClr val="004488"/>
-                </a:solidFill>
-                <a:latin typeface="Roboto"/>
-              </a:rPr>
-              <a:t>SECTION</a:t>
-            </a:r>
-          </a:p>
-          <a:p>
-            <a:pPr>
-              <a:spcBef>
-                <a:spcPts val="600"/>
-              </a:spcBef>
-            </a:pPr>
-            <a:r>
-              <a:rPr sz="3800" b="1" i="0">
-                <a:solidFill>
-                  <a:srgbClr val="2A2929"/>
-                </a:solidFill>
-                <a:latin typeface="Roboto"/>
-              </a:rPr>
-              <a:t>Troubleshooting templates</a:t>
-            </a:r>
-          </a:p>
-          <a:p>
-            <a:pPr>
-              <a:spcBef>
-                <a:spcPts val="1000"/>
-              </a:spcBef>
-            </a:pPr>
-            <a:r>
-              <a:rPr sz="2000" b="0" i="1">
-                <a:solidFill>
-                  <a:srgbClr val="484848"/>
-                </a:solidFill>
-                <a:latin typeface="Roboto Light"/>
-              </a:rPr>
-              <a:t>read the error, don't guess</a:t>
-            </a:r>
+          <p:cNvPr id="4" name="Rectangle 3"/>
+          <p:cNvSpPr/>
+          <p:nvPr/>
+        </p:nvSpPr>
+        <p:spPr>
+          <a:xfrm>
+            <a:off x="640080" y="1965960"/>
+            <a:ext cx="10927080" cy="841248"/>
+          </a:xfrm>
+          <a:prstGeom prst="rect">
+            <a:avLst/>
+          </a:prstGeom>
+          <a:solidFill>
+            <a:srgbClr val="FFFFFF"/>
+          </a:solidFill>
+          <a:ln w="12700">
+            <a:solidFill>
+              <a:srgbClr val="CCCCCC"/>
+            </a:solidFill>
+          </a:ln>
+          <a:effectLst/>
+        </p:spPr>
+        <p:style>
+          <a:lnRef idx="1">
+            <a:schemeClr val="accent1"/>
+          </a:lnRef>
+          <a:fillRef idx="3">
+            <a:schemeClr val="accent1"/>
+          </a:fillRef>
+          <a:effectRef idx="2">
+            <a:schemeClr val="accent1"/>
+          </a:effectRef>
+          <a:fontRef idx="minor">
+            <a:schemeClr val="lt1"/>
+          </a:fontRef>
+        </p:style>
+        <p:txBody>
+          <a:bodyPr rtlCol="0" anchor="ctr"/>
+          <a:lstStyle/>
+          <a:p>
+            <a:pPr algn="ctr"/>
           </a:p>
         </p:txBody>
       </p:sp>
@@ -6716,14 +6161,14 @@
         </p:nvSpPr>
         <p:spPr>
           <a:xfrm>
-            <a:off x="0" y="6565392"/>
-            <a:ext cx="12191695" cy="38100"/>
+            <a:off x="640080" y="1965960"/>
+            <a:ext cx="109728" cy="841248"/>
           </a:xfrm>
           <a:prstGeom prst="rect">
             <a:avLst/>
           </a:prstGeom>
           <a:solidFill>
-            <a:srgbClr val="004488"/>
+            <a:srgbClr val="27B5CE"/>
           </a:solidFill>
           <a:ln>
             <a:noFill/>
@@ -6760,6 +6205,347 @@
         </p:nvSpPr>
         <p:spPr>
           <a:xfrm>
+            <a:off x="960120" y="1965960"/>
+            <a:ext cx="10424160" cy="841248"/>
+          </a:xfrm>
+          <a:prstGeom prst="rect">
+            <a:avLst/>
+          </a:prstGeom>
+          <a:noFill/>
+        </p:spPr>
+        <p:txBody>
+          <a:bodyPr wrap="square" anchor="ctr" lIns="0" rIns="0" tIns="0" bIns="0">
+            <a:spAutoFit/>
+          </a:bodyPr>
+          <a:lstStyle/>
+          <a:p>
+            <a:pPr>
+              <a:lnSpc>
+                <a:spcPct val="100000"/>
+              </a:lnSpc>
+            </a:pPr>
+            <a:r>
+              <a:rPr sz="1700" b="0" i="0">
+                <a:solidFill>
+                  <a:srgbClr val="2A2929"/>
+                </a:solidFill>
+                <a:latin typeface="Roboto"/>
+              </a:rPr>
+              <a:t>Parameters, resources, outputs — read top-down.</a:t>
+            </a:r>
+          </a:p>
+        </p:txBody>
+      </p:sp>
+      <p:sp>
+        <p:nvSpPr>
+          <p:cNvPr id="7" name="Rectangle 6"/>
+          <p:cNvSpPr/>
+          <p:nvPr/>
+        </p:nvSpPr>
+        <p:spPr>
+          <a:xfrm>
+            <a:off x="640080" y="2916936"/>
+            <a:ext cx="10927080" cy="841248"/>
+          </a:xfrm>
+          <a:prstGeom prst="rect">
+            <a:avLst/>
+          </a:prstGeom>
+          <a:solidFill>
+            <a:srgbClr val="FFFFFF"/>
+          </a:solidFill>
+          <a:ln w="12700">
+            <a:solidFill>
+              <a:srgbClr val="CCCCCC"/>
+            </a:solidFill>
+          </a:ln>
+          <a:effectLst/>
+        </p:spPr>
+        <p:style>
+          <a:lnRef idx="1">
+            <a:schemeClr val="accent1"/>
+          </a:lnRef>
+          <a:fillRef idx="3">
+            <a:schemeClr val="accent1"/>
+          </a:fillRef>
+          <a:effectRef idx="2">
+            <a:schemeClr val="accent1"/>
+          </a:effectRef>
+          <a:fontRef idx="minor">
+            <a:schemeClr val="lt1"/>
+          </a:fontRef>
+        </p:style>
+        <p:txBody>
+          <a:bodyPr rtlCol="0" anchor="ctr"/>
+          <a:lstStyle/>
+          <a:p>
+            <a:pPr algn="ctr"/>
+          </a:p>
+        </p:txBody>
+      </p:sp>
+      <p:sp>
+        <p:nvSpPr>
+          <p:cNvPr id="8" name="Rectangle 7"/>
+          <p:cNvSpPr/>
+          <p:nvPr/>
+        </p:nvSpPr>
+        <p:spPr>
+          <a:xfrm>
+            <a:off x="640080" y="2916936"/>
+            <a:ext cx="109728" cy="841248"/>
+          </a:xfrm>
+          <a:prstGeom prst="rect">
+            <a:avLst/>
+          </a:prstGeom>
+          <a:solidFill>
+            <a:srgbClr val="27B5CE"/>
+          </a:solidFill>
+          <a:ln>
+            <a:noFill/>
+          </a:ln>
+          <a:effectLst/>
+        </p:spPr>
+        <p:style>
+          <a:lnRef idx="1">
+            <a:schemeClr val="accent1"/>
+          </a:lnRef>
+          <a:fillRef idx="3">
+            <a:schemeClr val="accent1"/>
+          </a:fillRef>
+          <a:effectRef idx="2">
+            <a:schemeClr val="accent1"/>
+          </a:effectRef>
+          <a:fontRef idx="minor">
+            <a:schemeClr val="lt1"/>
+          </a:fontRef>
+        </p:style>
+        <p:txBody>
+          <a:bodyPr rtlCol="0" anchor="ctr"/>
+          <a:lstStyle/>
+          <a:p>
+            <a:pPr algn="ctr"/>
+          </a:p>
+        </p:txBody>
+      </p:sp>
+      <p:sp>
+        <p:nvSpPr>
+          <p:cNvPr id="9" name="TextBox 8"/>
+          <p:cNvSpPr txBox="1"/>
+          <p:nvPr/>
+        </p:nvSpPr>
+        <p:spPr>
+          <a:xfrm>
+            <a:off x="960120" y="2916936"/>
+            <a:ext cx="10424160" cy="841248"/>
+          </a:xfrm>
+          <a:prstGeom prst="rect">
+            <a:avLst/>
+          </a:prstGeom>
+          <a:noFill/>
+        </p:spPr>
+        <p:txBody>
+          <a:bodyPr wrap="square" anchor="ctr" lIns="0" rIns="0" tIns="0" bIns="0">
+            <a:spAutoFit/>
+          </a:bodyPr>
+          <a:lstStyle/>
+          <a:p>
+            <a:pPr>
+              <a:lnSpc>
+                <a:spcPct val="100000"/>
+              </a:lnSpc>
+            </a:pPr>
+            <a:r>
+              <a:rPr sz="1700" b="0" i="0">
+                <a:solidFill>
+                  <a:srgbClr val="2A2929"/>
+                </a:solidFill>
+                <a:latin typeface="Roboto"/>
+              </a:rPr>
+              <a:t>Desired state, not steps; references make the order.</a:t>
+            </a:r>
+          </a:p>
+        </p:txBody>
+      </p:sp>
+      <p:sp>
+        <p:nvSpPr>
+          <p:cNvPr id="10" name="Rectangle 9"/>
+          <p:cNvSpPr/>
+          <p:nvPr/>
+        </p:nvSpPr>
+        <p:spPr>
+          <a:xfrm>
+            <a:off x="640080" y="3867912"/>
+            <a:ext cx="10927080" cy="841248"/>
+          </a:xfrm>
+          <a:prstGeom prst="rect">
+            <a:avLst/>
+          </a:prstGeom>
+          <a:solidFill>
+            <a:srgbClr val="FFFFFF"/>
+          </a:solidFill>
+          <a:ln w="12700">
+            <a:solidFill>
+              <a:srgbClr val="CCCCCC"/>
+            </a:solidFill>
+          </a:ln>
+          <a:effectLst/>
+        </p:spPr>
+        <p:style>
+          <a:lnRef idx="1">
+            <a:schemeClr val="accent1"/>
+          </a:lnRef>
+          <a:fillRef idx="3">
+            <a:schemeClr val="accent1"/>
+          </a:fillRef>
+          <a:effectRef idx="2">
+            <a:schemeClr val="accent1"/>
+          </a:effectRef>
+          <a:fontRef idx="minor">
+            <a:schemeClr val="lt1"/>
+          </a:fontRef>
+        </p:style>
+        <p:txBody>
+          <a:bodyPr rtlCol="0" anchor="ctr"/>
+          <a:lstStyle/>
+          <a:p>
+            <a:pPr algn="ctr"/>
+          </a:p>
+        </p:txBody>
+      </p:sp>
+      <p:sp>
+        <p:nvSpPr>
+          <p:cNvPr id="11" name="Rectangle 10"/>
+          <p:cNvSpPr/>
+          <p:nvPr/>
+        </p:nvSpPr>
+        <p:spPr>
+          <a:xfrm>
+            <a:off x="640080" y="3867912"/>
+            <a:ext cx="109728" cy="841248"/>
+          </a:xfrm>
+          <a:prstGeom prst="rect">
+            <a:avLst/>
+          </a:prstGeom>
+          <a:solidFill>
+            <a:srgbClr val="27B5CE"/>
+          </a:solidFill>
+          <a:ln>
+            <a:noFill/>
+          </a:ln>
+          <a:effectLst/>
+        </p:spPr>
+        <p:style>
+          <a:lnRef idx="1">
+            <a:schemeClr val="accent1"/>
+          </a:lnRef>
+          <a:fillRef idx="3">
+            <a:schemeClr val="accent1"/>
+          </a:fillRef>
+          <a:effectRef idx="2">
+            <a:schemeClr val="accent1"/>
+          </a:effectRef>
+          <a:fontRef idx="minor">
+            <a:schemeClr val="lt1"/>
+          </a:fontRef>
+        </p:style>
+        <p:txBody>
+          <a:bodyPr rtlCol="0" anchor="ctr"/>
+          <a:lstStyle/>
+          <a:p>
+            <a:pPr algn="ctr"/>
+          </a:p>
+        </p:txBody>
+      </p:sp>
+      <p:sp>
+        <p:nvSpPr>
+          <p:cNvPr id="12" name="TextBox 11"/>
+          <p:cNvSpPr txBox="1"/>
+          <p:nvPr/>
+        </p:nvSpPr>
+        <p:spPr>
+          <a:xfrm>
+            <a:off x="960120" y="3867912"/>
+            <a:ext cx="10424160" cy="841248"/>
+          </a:xfrm>
+          <a:prstGeom prst="rect">
+            <a:avLst/>
+          </a:prstGeom>
+          <a:noFill/>
+        </p:spPr>
+        <p:txBody>
+          <a:bodyPr wrap="square" anchor="ctr" lIns="0" rIns="0" tIns="0" bIns="0">
+            <a:spAutoFit/>
+          </a:bodyPr>
+          <a:lstStyle/>
+          <a:p>
+            <a:pPr>
+              <a:lnSpc>
+                <a:spcPct val="100000"/>
+              </a:lnSpc>
+            </a:pPr>
+            <a:r>
+              <a:rPr sz="1700" b="0" i="0">
+                <a:solidFill>
+                  <a:srgbClr val="2A2929"/>
+                </a:solidFill>
+                <a:latin typeface="Roboto"/>
+              </a:rPr>
+              <a:t>Never deploy what you haven't read.</a:t>
+            </a:r>
+          </a:p>
+        </p:txBody>
+      </p:sp>
+      <p:sp>
+        <p:nvSpPr>
+          <p:cNvPr id="13" name="Rectangle 12"/>
+          <p:cNvSpPr/>
+          <p:nvPr/>
+        </p:nvSpPr>
+        <p:spPr>
+          <a:xfrm>
+            <a:off x="0" y="6565392"/>
+            <a:ext cx="12191695" cy="38100"/>
+          </a:xfrm>
+          <a:prstGeom prst="rect">
+            <a:avLst/>
+          </a:prstGeom>
+          <a:solidFill>
+            <a:srgbClr val="27B5CE"/>
+          </a:solidFill>
+          <a:ln>
+            <a:noFill/>
+          </a:ln>
+          <a:effectLst/>
+        </p:spPr>
+        <p:style>
+          <a:lnRef idx="1">
+            <a:schemeClr val="accent1"/>
+          </a:lnRef>
+          <a:fillRef idx="3">
+            <a:schemeClr val="accent1"/>
+          </a:fillRef>
+          <a:effectRef idx="2">
+            <a:schemeClr val="accent1"/>
+          </a:effectRef>
+          <a:fontRef idx="minor">
+            <a:schemeClr val="lt1"/>
+          </a:fontRef>
+        </p:style>
+        <p:txBody>
+          <a:bodyPr rtlCol="0" anchor="ctr"/>
+          <a:lstStyle/>
+          <a:p>
+            <a:pPr algn="ctr"/>
+          </a:p>
+        </p:txBody>
+      </p:sp>
+      <p:sp>
+        <p:nvSpPr>
+          <p:cNvPr id="14" name="TextBox 13"/>
+          <p:cNvSpPr txBox="1"/>
+          <p:nvPr/>
+        </p:nvSpPr>
+        <p:spPr>
+          <a:xfrm>
             <a:off x="502920" y="6400800"/>
             <a:ext cx="5486400" cy="320040"/>
           </a:xfrm>
@@ -6797,7 +6583,7 @@
       </p:sp>
       <p:sp>
         <p:nvSpPr>
-          <p:cNvPr id="7" name="TextBox 6"/>
+          <p:cNvPr id="15" name="TextBox 14"/>
           <p:cNvSpPr txBox="1"/>
           <p:nvPr/>
         </p:nvSpPr>
@@ -6825,7 +6611,7 @@
                 </a:solidFill>
                 <a:latin typeface="Roboto"/>
               </a:rPr>
-              <a:t/>
+              <a:t>10</a:t>
             </a:r>
           </a:p>
         </p:txBody>
@@ -6858,54 +6644,20 @@
       <p:grpSpPr/>
       <p:sp>
         <p:nvSpPr>
-          <p:cNvPr id="2" name="TextBox 1"/>
-          <p:cNvSpPr txBox="1"/>
-          <p:nvPr/>
-        </p:nvSpPr>
-        <p:spPr>
-          <a:xfrm>
-            <a:off x="640080" y="457200"/>
-            <a:ext cx="10881360" cy="960120"/>
-          </a:xfrm>
-          <a:prstGeom prst="rect">
-            <a:avLst/>
-          </a:prstGeom>
-          <a:noFill/>
-        </p:spPr>
-        <p:txBody>
-          <a:bodyPr wrap="square" anchor="t" lIns="0" rIns="0" tIns="0" bIns="0">
-            <a:spAutoFit/>
-          </a:bodyPr>
-          <a:lstStyle/>
-          <a:p>
-            <a:r>
-              <a:rPr sz="2800" b="1" i="0">
-                <a:solidFill>
-                  <a:srgbClr val="2A2929"/>
-                </a:solidFill>
-                <a:latin typeface="Roboto"/>
-              </a:rPr>
-              <a:t>Diagnose a template error</a:t>
-            </a:r>
-          </a:p>
-        </p:txBody>
-      </p:sp>
-      <p:sp>
-        <p:nvSpPr>
-          <p:cNvPr id="3" name="Rectangle 2"/>
+          <p:cNvPr id="2" name="Rectangle 1"/>
           <p:cNvSpPr/>
           <p:nvPr/>
         </p:nvSpPr>
         <p:spPr>
           <a:xfrm>
-            <a:off x="658368" y="1371600"/>
-            <a:ext cx="1463040" cy="50800"/>
+            <a:off x="0" y="0"/>
+            <a:ext cx="3931920" cy="6858000"/>
           </a:xfrm>
           <a:prstGeom prst="rect">
             <a:avLst/>
           </a:prstGeom>
           <a:solidFill>
-            <a:srgbClr val="004488"/>
+            <a:srgbClr val="205F61"/>
           </a:solidFill>
           <a:ln>
             <a:noFill/>
@@ -6936,14 +6688,48 @@
       </p:sp>
       <p:sp>
         <p:nvSpPr>
+          <p:cNvPr id="3" name="TextBox 2"/>
+          <p:cNvSpPr txBox="1"/>
+          <p:nvPr/>
+        </p:nvSpPr>
+        <p:spPr>
+          <a:xfrm>
+            <a:off x="365760" y="2103120"/>
+            <a:ext cx="3291840" cy="2194560"/>
+          </a:xfrm>
+          <a:prstGeom prst="rect">
+            <a:avLst/>
+          </a:prstGeom>
+          <a:noFill/>
+        </p:spPr>
+        <p:txBody>
+          <a:bodyPr wrap="square" anchor="t" lIns="0" rIns="0" tIns="0" bIns="0">
+            <a:spAutoFit/>
+          </a:bodyPr>
+          <a:lstStyle/>
+          <a:p>
+            <a:r>
+              <a:rPr sz="13000" b="1" i="0">
+                <a:solidFill>
+                  <a:srgbClr val="FFFFFF"/>
+                </a:solidFill>
+                <a:latin typeface="Roboto"/>
+              </a:rPr>
+              <a:t>03</a:t>
+            </a:r>
+          </a:p>
+        </p:txBody>
+      </p:sp>
+      <p:sp>
+        <p:nvSpPr>
           <p:cNvPr id="4" name="TextBox 3"/>
           <p:cNvSpPr txBox="1"/>
           <p:nvPr/>
         </p:nvSpPr>
         <p:spPr>
           <a:xfrm>
-            <a:off x="658368" y="1691640"/>
-            <a:ext cx="10881360" cy="4480560"/>
+            <a:off x="4480560" y="2468880"/>
+            <a:ext cx="7132320" cy="2194560"/>
           </a:xfrm>
           <a:prstGeom prst="rect">
             <a:avLst/>
@@ -6951,101 +6737,51 @@
           <a:noFill/>
         </p:spPr>
         <p:txBody>
-          <a:bodyPr wrap="square" anchor="ctr" lIns="0" rIns="0" tIns="0" bIns="0">
+          <a:bodyPr wrap="square" anchor="t" lIns="0" rIns="0" tIns="0" bIns="0">
             <a:spAutoFit/>
           </a:bodyPr>
           <a:lstStyle/>
           <a:p>
-            <a:pPr marL="0" indent="0">
-              <a:lnSpc>
-                <a:spcPct val="105000"/>
-              </a:lnSpc>
+            <a:r>
+              <a:rPr sz="1600" b="1" i="0">
+                <a:solidFill>
+                  <a:srgbClr val="205F61"/>
+                </a:solidFill>
+                <a:latin typeface="Roboto"/>
+              </a:rPr>
+              <a:t>SECTION</a:t>
+            </a:r>
+          </a:p>
+          <a:p>
+            <a:pPr>
               <a:spcBef>
-                <a:spcPts val="0"/>
+                <a:spcPts val="600"/>
               </a:spcBef>
-              <a:spcAft>
+            </a:pPr>
+            <a:r>
+              <a:rPr sz="3800" b="1" i="0">
+                <a:solidFill>
+                  <a:srgbClr val="2A2929"/>
+                </a:solidFill>
+                <a:latin typeface="Roboto"/>
+              </a:rPr>
+              <a:t>Deploy it, fix it, confirm it</a:t>
+            </a:r>
+          </a:p>
+          <a:p>
+            <a:pPr>
+              <a:spcBef>
                 <a:spcPts val="1000"/>
-              </a:spcAft>
+              </a:spcBef>
             </a:pPr>
             <a:r>
-              <a:rPr sz="2400" b="1" i="0">
-                <a:solidFill>
-                  <a:srgbClr val="EDAB0C"/>
-                </a:solidFill>
-                <a:latin typeface="Roboto"/>
-              </a:rPr>
-              <a:t>■  </a:t>
-            </a:r>
-            <a:r>
-              <a:rPr sz="2400" b="0" i="0">
-                <a:solidFill>
-                  <a:srgbClr val="2A2929"/>
-                </a:solidFill>
-                <a:latin typeface="Roboto"/>
-              </a:rPr>
-              <a:t>Test and troubleshoot template errors: read the failure event, find the first CREATE_FAILED, read its reason.</a:t>
-            </a:r>
-          </a:p>
-          <a:p>
-            <a:pPr marL="0" indent="0">
-              <a:lnSpc>
-                <a:spcPct val="105000"/>
-              </a:lnSpc>
-              <a:spcBef>
-                <a:spcPts val="0"/>
-              </a:spcBef>
-              <a:spcAft>
-                <a:spcPts val="1000"/>
-              </a:spcAft>
-            </a:pPr>
-            <a:r>
-              <a:rPr sz="2400" b="1" i="0">
-                <a:solidFill>
-                  <a:srgbClr val="EDAB0C"/>
-                </a:solidFill>
-                <a:latin typeface="Roboto"/>
-              </a:rPr>
-              <a:t>■  </a:t>
-            </a:r>
-            <a:r>
-              <a:rPr sz="2400" b="0" i="0">
-                <a:solidFill>
-                  <a:srgbClr val="2A2929"/>
-                </a:solidFill>
-                <a:latin typeface="Roboto"/>
-              </a:rPr>
-              <a:t>Common errors: a bad reference, a missing permission, an invalid property, a name clash (KE 7).</a:t>
-            </a:r>
-          </a:p>
-          <a:p>
-            <a:pPr marL="0" indent="0">
-              <a:lnSpc>
-                <a:spcPct val="105000"/>
-              </a:lnSpc>
-              <a:spcBef>
-                <a:spcPts val="0"/>
-              </a:spcBef>
-              <a:spcAft>
-                <a:spcPts val="1000"/>
-              </a:spcAft>
-            </a:pPr>
-            <a:r>
-              <a:rPr sz="2400" b="1" i="0">
-                <a:solidFill>
-                  <a:srgbClr val="EDAB0C"/>
-                </a:solidFill>
-                <a:latin typeface="Roboto"/>
-              </a:rPr>
-              <a:t>■  </a:t>
-            </a:r>
-            <a:r>
-              <a:rPr sz="2400" b="0" i="0">
-                <a:solidFill>
-                  <a:srgbClr val="2A2929"/>
-                </a:solidFill>
-                <a:latin typeface="Roboto"/>
-              </a:rPr>
-              <a:t>Fix the template, redeploy, confirm — diagnosis over trial-and-error.</a:t>
+              <a:rPr sz="2000" b="0" i="1">
+                <a:solidFill>
+                  <a:srgbClr val="484848"/>
+                </a:solidFill>
+                <a:latin typeface="Roboto Light"/>
+              </a:rPr>
+              <a:t>the first failure is the cause</a:t>
             </a:r>
           </a:p>
         </p:txBody>
@@ -7065,7 +6801,7 @@
             <a:avLst/>
           </a:prstGeom>
           <a:solidFill>
-            <a:srgbClr val="004488"/>
+            <a:srgbClr val="205F61"/>
           </a:solidFill>
           <a:ln>
             <a:noFill/>
@@ -7167,7 +6903,7 @@
                 </a:solidFill>
                 <a:latin typeface="Roboto"/>
               </a:rPr>
-              <a:t>9</a:t>
+              <a:t/>
             </a:r>
           </a:p>
         </p:txBody>
@@ -7200,20 +6936,54 @@
       <p:grpSpPr/>
       <p:sp>
         <p:nvSpPr>
-          <p:cNvPr id="2" name="Rectangle 1"/>
+          <p:cNvPr id="2" name="TextBox 1"/>
+          <p:cNvSpPr txBox="1"/>
+          <p:nvPr/>
+        </p:nvSpPr>
+        <p:spPr>
+          <a:xfrm>
+            <a:off x="640080" y="457200"/>
+            <a:ext cx="10881360" cy="960120"/>
+          </a:xfrm>
+          <a:prstGeom prst="rect">
+            <a:avLst/>
+          </a:prstGeom>
+          <a:noFill/>
+        </p:spPr>
+        <p:txBody>
+          <a:bodyPr wrap="square" anchor="t" lIns="0" rIns="0" tIns="0" bIns="0">
+            <a:spAutoFit/>
+          </a:bodyPr>
+          <a:lstStyle/>
+          <a:p>
+            <a:r>
+              <a:rPr sz="2800" b="1" i="0">
+                <a:solidFill>
+                  <a:srgbClr val="2A2929"/>
+                </a:solidFill>
+                <a:latin typeface="Roboto"/>
+              </a:rPr>
+              <a:t>The tooling, and what failure looks like</a:t>
+            </a:r>
+          </a:p>
+        </p:txBody>
+      </p:sp>
+      <p:sp>
+        <p:nvSpPr>
+          <p:cNvPr id="3" name="Rectangle 2"/>
           <p:cNvSpPr/>
           <p:nvPr/>
         </p:nvSpPr>
         <p:spPr>
           <a:xfrm>
-            <a:off x="0" y="0"/>
-            <a:ext cx="12191695" cy="1234440"/>
+            <a:off x="658368" y="1371600"/>
+            <a:ext cx="1463040" cy="50800"/>
           </a:xfrm>
           <a:prstGeom prst="rect">
             <a:avLst/>
           </a:prstGeom>
           <a:solidFill>
-            <a:srgbClr val="2A2929"/>
+            <a:srgbClr val="205F61"/>
           </a:solidFill>
           <a:ln>
             <a:noFill/>
@@ -7244,67 +7014,14 @@
       </p:sp>
       <p:sp>
         <p:nvSpPr>
-          <p:cNvPr id="3" name="Rounded Rectangle 2"/>
-          <p:cNvSpPr/>
-          <p:nvPr/>
-        </p:nvSpPr>
-        <p:spPr>
-          <a:xfrm>
-            <a:off x="640080" y="384048"/>
-            <a:ext cx="2331720" cy="457200"/>
-          </a:xfrm>
-          <a:prstGeom prst="roundRect">
-            <a:avLst/>
-          </a:prstGeom>
-          <a:solidFill>
-            <a:srgbClr val="004488"/>
-          </a:solidFill>
-          <a:ln>
-            <a:noFill/>
-          </a:ln>
-          <a:effectLst/>
-        </p:spPr>
-        <p:style>
-          <a:lnRef idx="1">
-            <a:schemeClr val="accent1"/>
-          </a:lnRef>
-          <a:fillRef idx="3">
-            <a:schemeClr val="accent1"/>
-          </a:fillRef>
-          <a:effectRef idx="2">
-            <a:schemeClr val="accent1"/>
-          </a:effectRef>
-          <a:fontRef idx="minor">
-            <a:schemeClr val="lt1"/>
-          </a:fontRef>
-        </p:style>
-        <p:txBody>
-          <a:bodyPr rtlCol="0" anchor="ctr"/>
-          <a:lstStyle/>
-          <a:p>
-            <a:pPr algn="ctr"/>
-            <a:r>
-              <a:rPr sz="1300" b="1" i="0">
-                <a:solidFill>
-                  <a:srgbClr val="2A2929"/>
-                </a:solidFill>
-                <a:latin typeface="Roboto"/>
-              </a:rPr>
-              <a:t>RECORDED DEMO</a:t>
-            </a:r>
-          </a:p>
-        </p:txBody>
-      </p:sp>
-      <p:sp>
-        <p:nvSpPr>
           <p:cNvPr id="4" name="TextBox 3"/>
           <p:cNvSpPr txBox="1"/>
           <p:nvPr/>
         </p:nvSpPr>
         <p:spPr>
           <a:xfrm>
-            <a:off x="3200400" y="310896"/>
-            <a:ext cx="8321040" cy="685800"/>
+            <a:off x="658368" y="1691640"/>
+            <a:ext cx="10881360" cy="4480560"/>
           </a:xfrm>
           <a:prstGeom prst="rect">
             <a:avLst/>
@@ -7313,40 +7030,6 @@
         </p:spPr>
         <p:txBody>
           <a:bodyPr wrap="square" anchor="ctr" lIns="0" rIns="0" tIns="0" bIns="0">
-            <a:spAutoFit/>
-          </a:bodyPr>
-          <a:lstStyle/>
-          <a:p>
-            <a:r>
-              <a:rPr sz="2500" b="1" i="0">
-                <a:solidFill>
-                  <a:srgbClr val="FFFFFF"/>
-                </a:solidFill>
-                <a:latin typeface="Roboto"/>
-              </a:rPr>
-              <a:t>Fix a broken template</a:t>
-            </a:r>
-          </a:p>
-        </p:txBody>
-      </p:sp>
-      <p:sp>
-        <p:nvSpPr>
-          <p:cNvPr id="5" name="TextBox 4"/>
-          <p:cNvSpPr txBox="1"/>
-          <p:nvPr/>
-        </p:nvSpPr>
-        <p:spPr>
-          <a:xfrm>
-            <a:off x="658368" y="1554480"/>
-            <a:ext cx="10881360" cy="4297680"/>
-          </a:xfrm>
-          <a:prstGeom prst="rect">
-            <a:avLst/>
-          </a:prstGeom>
-          <a:noFill/>
-        </p:spPr>
-        <p:txBody>
-          <a:bodyPr wrap="square" anchor="t" lIns="0" rIns="0" tIns="0" bIns="0">
             <a:spAutoFit/>
           </a:bodyPr>
           <a:lstStyle/>
@@ -7363,7 +7046,7 @@
               </a:spcAft>
             </a:pPr>
             <a:r>
-              <a:rPr sz="1700" b="1" i="0">
+              <a:rPr sz="2400" b="1" i="0">
                 <a:solidFill>
                   <a:srgbClr val="EDAB0C"/>
                 </a:solidFill>
@@ -7372,38 +7055,98 @@
               <a:t>■  </a:t>
             </a:r>
             <a:r>
-              <a:rPr sz="1700" b="0" i="0">
+              <a:rPr sz="2400" b="0" i="0">
                 <a:solidFill>
                   <a:srgbClr val="2A2929"/>
                 </a:solidFill>
                 <a:latin typeface="Roboto"/>
               </a:rPr>
-              <a:t>Walk a deliberately broken copy: the error event, the diagnosis, the one-line fix, the redeploy.</a:t>
-            </a:r>
-          </a:p>
-        </p:txBody>
-      </p:sp>
-      <p:sp>
-        <p:nvSpPr>
-          <p:cNvPr id="6" name="Rounded Rectangle 5"/>
+              <a:t>The console or the CLI executes the template — either tool, same operations.</a:t>
+            </a:r>
+          </a:p>
+          <a:p>
+            <a:pPr marL="0" indent="0">
+              <a:lnSpc>
+                <a:spcPct val="105000"/>
+              </a:lnSpc>
+              <a:spcBef>
+                <a:spcPts val="0"/>
+              </a:spcBef>
+              <a:spcAft>
+                <a:spcPts val="1000"/>
+              </a:spcAft>
+            </a:pPr>
+            <a:r>
+              <a:rPr sz="2400" b="1" i="0">
+                <a:solidFill>
+                  <a:srgbClr val="EDAB0C"/>
+                </a:solidFill>
+                <a:latin typeface="Roboto"/>
+              </a:rPr>
+              <a:t>■  </a:t>
+            </a:r>
+            <a:r>
+              <a:rPr sz="2400" b="0" i="0">
+                <a:solidFill>
+                  <a:srgbClr val="2A2929"/>
+                </a:solidFill>
+                <a:latin typeface="Roboto"/>
+              </a:rPr>
+              <a:t>When a deployment fails it rolls back, and the rollback fills the log with consequences, not causes.</a:t>
+            </a:r>
+          </a:p>
+          <a:p>
+            <a:pPr marL="0" indent="0">
+              <a:lnSpc>
+                <a:spcPct val="105000"/>
+              </a:lnSpc>
+              <a:spcBef>
+                <a:spcPts val="0"/>
+              </a:spcBef>
+              <a:spcAft>
+                <a:spcPts val="1000"/>
+              </a:spcAft>
+            </a:pPr>
+            <a:r>
+              <a:rPr sz="2400" b="1" i="0">
+                <a:solidFill>
+                  <a:srgbClr val="EDAB0C"/>
+                </a:solidFill>
+                <a:latin typeface="Roboto"/>
+              </a:rPr>
+              <a:t>■  </a:t>
+            </a:r>
+            <a:r>
+              <a:rPr sz="2400" b="0" i="0">
+                <a:solidFill>
+                  <a:srgbClr val="2A2929"/>
+                </a:solidFill>
+                <a:latin typeface="Roboto"/>
+              </a:rPr>
+              <a:t>Find the first failure event and read its reason — that one is the cause.</a:t>
+            </a:r>
+          </a:p>
+        </p:txBody>
+      </p:sp>
+      <p:sp>
+        <p:nvSpPr>
+          <p:cNvPr id="5" name="Rectangle 4"/>
           <p:cNvSpPr/>
           <p:nvPr/>
         </p:nvSpPr>
         <p:spPr>
           <a:xfrm>
-            <a:off x="640080" y="5897880"/>
-            <a:ext cx="7863840" cy="457200"/>
-          </a:xfrm>
-          <a:prstGeom prst="roundRect">
+            <a:off x="0" y="6565392"/>
+            <a:ext cx="12191695" cy="38100"/>
+          </a:xfrm>
+          <a:prstGeom prst="rect">
             <a:avLst/>
           </a:prstGeom>
           <a:solidFill>
-            <a:srgbClr val="F9F9F9"/>
+            <a:srgbClr val="205F61"/>
           </a:solidFill>
-          <a:ln w="12700">
-            <a:solidFill>
-              <a:srgbClr val="CCCCCC"/>
-            </a:solidFill>
+          <a:ln>
+            <a:noFill/>
           </a:ln>
           <a:effectLst/>
         </p:spPr>
@@ -7431,85 +7174,7 @@
       </p:sp>
       <p:sp>
         <p:nvSpPr>
-          <p:cNvPr id="7" name="TextBox 6"/>
-          <p:cNvSpPr txBox="1"/>
-          <p:nvPr/>
-        </p:nvSpPr>
-        <p:spPr>
-          <a:xfrm>
-            <a:off x="822960" y="5943600"/>
-            <a:ext cx="7498080" cy="365760"/>
-          </a:xfrm>
-          <a:prstGeom prst="rect">
-            <a:avLst/>
-          </a:prstGeom>
-          <a:noFill/>
-        </p:spPr>
-        <p:txBody>
-          <a:bodyPr wrap="square" anchor="ctr" lIns="0" rIns="0" tIns="0" bIns="0">
-            <a:spAutoFit/>
-          </a:bodyPr>
-          <a:lstStyle/>
-          <a:p>
-            <a:r>
-              <a:rPr sz="1400" b="1" i="0">
-                <a:solidFill>
-                  <a:srgbClr val="2A2929"/>
-                </a:solidFill>
-                <a:latin typeface="Roboto"/>
-              </a:rPr>
-              <a:t>▶  Play the AWS recorded demo (recorded/live demo) — you do this next</a:t>
-            </a:r>
-          </a:p>
-        </p:txBody>
-      </p:sp>
-      <p:sp>
-        <p:nvSpPr>
-          <p:cNvPr id="8" name="Rectangle 7"/>
-          <p:cNvSpPr/>
-          <p:nvPr/>
-        </p:nvSpPr>
-        <p:spPr>
-          <a:xfrm>
-            <a:off x="0" y="6565392"/>
-            <a:ext cx="12191695" cy="38100"/>
-          </a:xfrm>
-          <a:prstGeom prst="rect">
-            <a:avLst/>
-          </a:prstGeom>
-          <a:solidFill>
-            <a:srgbClr val="004488"/>
-          </a:solidFill>
-          <a:ln>
-            <a:noFill/>
-          </a:ln>
-          <a:effectLst/>
-        </p:spPr>
-        <p:style>
-          <a:lnRef idx="1">
-            <a:schemeClr val="accent1"/>
-          </a:lnRef>
-          <a:fillRef idx="3">
-            <a:schemeClr val="accent1"/>
-          </a:fillRef>
-          <a:effectRef idx="2">
-            <a:schemeClr val="accent1"/>
-          </a:effectRef>
-          <a:fontRef idx="minor">
-            <a:schemeClr val="lt1"/>
-          </a:fontRef>
-        </p:style>
-        <p:txBody>
-          <a:bodyPr rtlCol="0" anchor="ctr"/>
-          <a:lstStyle/>
-          <a:p>
-            <a:pPr algn="ctr"/>
-          </a:p>
-        </p:txBody>
-      </p:sp>
-      <p:sp>
-        <p:nvSpPr>
-          <p:cNvPr id="9" name="TextBox 8"/>
+          <p:cNvPr id="6" name="TextBox 5"/>
           <p:cNvSpPr txBox="1"/>
           <p:nvPr/>
         </p:nvSpPr>
@@ -7552,7 +7217,7 @@
       </p:sp>
       <p:sp>
         <p:nvSpPr>
-          <p:cNvPr id="10" name="TextBox 9"/>
+          <p:cNvPr id="7" name="TextBox 6"/>
           <p:cNvSpPr txBox="1"/>
           <p:nvPr/>
         </p:nvSpPr>
@@ -7580,7 +7245,7 @@
                 </a:solidFill>
                 <a:latin typeface="Roboto"/>
               </a:rPr>
-              <a:t>10</a:t>
+              <a:t>11</a:t>
             </a:r>
           </a:p>
         </p:txBody>
@@ -7626,50 +7291,6 @@
             <a:avLst/>
           </a:prstGeom>
           <a:solidFill>
-            <a:srgbClr val="004488"/>
-          </a:solidFill>
-          <a:ln>
-            <a:noFill/>
-          </a:ln>
-          <a:effectLst/>
-        </p:spPr>
-        <p:style>
-          <a:lnRef idx="1">
-            <a:schemeClr val="accent1"/>
-          </a:lnRef>
-          <a:fillRef idx="3">
-            <a:schemeClr val="accent1"/>
-          </a:fillRef>
-          <a:effectRef idx="2">
-            <a:schemeClr val="accent1"/>
-          </a:effectRef>
-          <a:fontRef idx="minor">
-            <a:schemeClr val="lt1"/>
-          </a:fontRef>
-        </p:style>
-        <p:txBody>
-          <a:bodyPr rtlCol="0" anchor="ctr"/>
-          <a:lstStyle/>
-          <a:p>
-            <a:pPr algn="ctr"/>
-          </a:p>
-        </p:txBody>
-      </p:sp>
-      <p:sp>
-        <p:nvSpPr>
-          <p:cNvPr id="3" name="Rounded Rectangle 2"/>
-          <p:cNvSpPr/>
-          <p:nvPr/>
-        </p:nvSpPr>
-        <p:spPr>
-          <a:xfrm>
-            <a:off x="640080" y="384048"/>
-            <a:ext cx="1691640" cy="457200"/>
-          </a:xfrm>
-          <a:prstGeom prst="roundRect">
-            <a:avLst/>
-          </a:prstGeom>
-          <a:solidFill>
             <a:srgbClr val="2A2929"/>
           </a:solidFill>
           <a:ln>
@@ -7696,14 +7317,58 @@
           <a:lstStyle/>
           <a:p>
             <a:pPr algn="ctr"/>
-            <a:r>
-              <a:rPr sz="1400" b="1" i="0">
-                <a:solidFill>
-                  <a:srgbClr val="FBB900"/>
-                </a:solidFill>
-                <a:latin typeface="Roboto"/>
-              </a:rPr>
-              <a:t>ACTIVITY</a:t>
+          </a:p>
+        </p:txBody>
+      </p:sp>
+      <p:sp>
+        <p:nvSpPr>
+          <p:cNvPr id="3" name="Rounded Rectangle 2"/>
+          <p:cNvSpPr/>
+          <p:nvPr/>
+        </p:nvSpPr>
+        <p:spPr>
+          <a:xfrm>
+            <a:off x="640080" y="384048"/>
+            <a:ext cx="2331720" cy="457200"/>
+          </a:xfrm>
+          <a:prstGeom prst="roundRect">
+            <a:avLst/>
+          </a:prstGeom>
+          <a:solidFill>
+            <a:srgbClr val="205F61"/>
+          </a:solidFill>
+          <a:ln>
+            <a:noFill/>
+          </a:ln>
+          <a:effectLst/>
+        </p:spPr>
+        <p:style>
+          <a:lnRef idx="1">
+            <a:schemeClr val="accent1"/>
+          </a:lnRef>
+          <a:fillRef idx="3">
+            <a:schemeClr val="accent1"/>
+          </a:fillRef>
+          <a:effectRef idx="2">
+            <a:schemeClr val="accent1"/>
+          </a:effectRef>
+          <a:fontRef idx="minor">
+            <a:schemeClr val="lt1"/>
+          </a:fontRef>
+        </p:style>
+        <p:txBody>
+          <a:bodyPr rtlCol="0" anchor="ctr"/>
+          <a:lstStyle/>
+          <a:p>
+            <a:pPr algn="ctr"/>
+            <a:r>
+              <a:rPr sz="1300" b="1" i="0">
+                <a:solidFill>
+                  <a:srgbClr val="2A2929"/>
+                </a:solidFill>
+                <a:latin typeface="Roboto"/>
+              </a:rPr>
+              <a:t>RECORDED DEMO</a:t>
             </a:r>
           </a:p>
         </p:txBody>
@@ -7716,8 +7381,8 @@
         </p:nvSpPr>
         <p:spPr>
           <a:xfrm>
-            <a:off x="2560320" y="310896"/>
-            <a:ext cx="8961120" cy="685800"/>
+            <a:off x="3200400" y="310896"/>
+            <a:ext cx="8321040" cy="685800"/>
           </a:xfrm>
           <a:prstGeom prst="rect">
             <a:avLst/>
@@ -7731,13 +7396,13 @@
           <a:lstStyle/>
           <a:p>
             <a:r>
-              <a:rPr sz="2600" b="1" i="0">
+              <a:rPr sz="2500" b="1" i="0">
                 <a:solidFill>
                   <a:srgbClr val="FFFFFF"/>
                 </a:solidFill>
                 <a:latin typeface="Roboto"/>
               </a:rPr>
-              <a:t>Troubleshoot the broken copy</a:t>
+              <a:t>Deploy, hit the failure, fix it</a:t>
             </a:r>
           </a:p>
         </p:txBody>
@@ -7791,7 +7456,69 @@
                 </a:solidFill>
                 <a:latin typeface="Roboto"/>
               </a:rPr>
-              <a:t>On the practice scenario, deploy the broken template, read the error, fix it, and redeploy to success.</a:t>
+              <a:t>Deploy the provided template in the lab and let it fail.</a:t>
+            </a:r>
+          </a:p>
+          <a:p>
+            <a:pPr marL="0" indent="0">
+              <a:lnSpc>
+                <a:spcPct val="105000"/>
+              </a:lnSpc>
+              <a:spcBef>
+                <a:spcPts val="0"/>
+              </a:spcBef>
+              <a:spcAft>
+                <a:spcPts val="1000"/>
+              </a:spcAft>
+            </a:pPr>
+            <a:r>
+              <a:rPr sz="1700" b="1" i="0">
+                <a:solidFill>
+                  <a:srgbClr val="EDAB0C"/>
+                </a:solidFill>
+                <a:latin typeface="Roboto"/>
+              </a:rPr>
+              <a:t>■  </a:t>
+            </a:r>
+            <a:r>
+              <a:rPr sz="1700" b="0" i="0">
+                <a:solidFill>
+                  <a:srgbClr val="2A2929"/>
+                </a:solidFill>
+                <a:latin typeface="Roboto"/>
+              </a:rPr>
+              <a:t>Find the first failure event, read its reason aloud, make the one-line fix, redeploy to success.</a:t>
+            </a:r>
+          </a:p>
+          <a:p>
+            <a:pPr marL="0" indent="0">
+              <a:lnSpc>
+                <a:spcPct val="105000"/>
+              </a:lnSpc>
+              <a:spcBef>
+                <a:spcPts val="0"/>
+              </a:spcBef>
+              <a:spcAft>
+                <a:spcPts val="1000"/>
+              </a:spcAft>
+            </a:pPr>
+            <a:r>
+              <a:rPr sz="1700" b="1" i="0">
+                <a:solidFill>
+                  <a:srgbClr val="EDAB0C"/>
+                </a:solidFill>
+                <a:latin typeface="Roboto"/>
+              </a:rPr>
+              <a:t>■  </a:t>
+            </a:r>
+            <a:r>
+              <a:rPr sz="1700" b="0" i="0">
+                <a:solidFill>
+                  <a:srgbClr val="2A2929"/>
+                </a:solidFill>
+                <a:latin typeface="Roboto"/>
+              </a:rPr>
+              <a:t>Confirm the resource exists using the console or CLI — deploy then confirm, every time.</a:t>
             </a:r>
           </a:p>
         </p:txBody>
@@ -7805,7 +7532,7 @@
         <p:spPr>
           <a:xfrm>
             <a:off x="640080" y="5897880"/>
-            <a:ext cx="4023360" cy="457200"/>
+            <a:ext cx="7863840" cy="457200"/>
           </a:xfrm>
           <a:prstGeom prst="roundRect">
             <a:avLst/>
@@ -7851,7 +7578,7 @@
         <p:spPr>
           <a:xfrm>
             <a:off x="822960" y="5943600"/>
-            <a:ext cx="3657600" cy="365760"/>
+            <a:ext cx="7498080" cy="365760"/>
           </a:xfrm>
           <a:prstGeom prst="rect">
             <a:avLst/>
@@ -7865,13 +7592,13 @@
           <a:lstStyle/>
           <a:p>
             <a:r>
-              <a:rPr sz="1500" b="1" i="0">
+              <a:rPr sz="1400" b="1" i="0">
                 <a:solidFill>
                   <a:srgbClr val="2A2929"/>
                 </a:solidFill>
                 <a:latin typeface="Roboto"/>
               </a:rPr>
-              <a:t>⏱  ~20 min</a:t>
+              <a:t>▶  Play the AWS recorded demo (recorded/live demo) — you do this next</a:t>
             </a:r>
           </a:p>
         </p:txBody>
@@ -7891,7 +7618,7 @@
             <a:avLst/>
           </a:prstGeom>
           <a:solidFill>
-            <a:srgbClr val="004488"/>
+            <a:srgbClr val="205F61"/>
           </a:solidFill>
           <a:ln>
             <a:noFill/>
@@ -7993,7 +7720,7 @@
                 </a:solidFill>
                 <a:latin typeface="Roboto"/>
               </a:rPr>
-              <a:t>11</a:t>
+              <a:t>12</a:t>
             </a:r>
           </a:p>
         </p:txBody>
@@ -8026,20 +7753,54 @@
       <p:grpSpPr/>
       <p:sp>
         <p:nvSpPr>
-          <p:cNvPr id="2" name="Rectangle 1"/>
+          <p:cNvPr id="2" name="TextBox 1"/>
+          <p:cNvSpPr txBox="1"/>
+          <p:nvPr/>
+        </p:nvSpPr>
+        <p:spPr>
+          <a:xfrm>
+            <a:off x="640080" y="457200"/>
+            <a:ext cx="10881360" cy="960120"/>
+          </a:xfrm>
+          <a:prstGeom prst="rect">
+            <a:avLst/>
+          </a:prstGeom>
+          <a:noFill/>
+        </p:spPr>
+        <p:txBody>
+          <a:bodyPr wrap="square" anchor="t" lIns="0" rIns="0" tIns="0" bIns="0">
+            <a:spAutoFit/>
+          </a:bodyPr>
+          <a:lstStyle/>
+          <a:p>
+            <a:r>
+              <a:rPr sz="2800" b="1" i="0">
+                <a:solidFill>
+                  <a:srgbClr val="2A2929"/>
+                </a:solidFill>
+                <a:latin typeface="Roboto"/>
+              </a:rPr>
+              <a:t>Confirming a deployment</a:t>
+            </a:r>
+          </a:p>
+        </p:txBody>
+      </p:sp>
+      <p:sp>
+        <p:nvSpPr>
+          <p:cNvPr id="3" name="Rectangle 2"/>
           <p:cNvSpPr/>
           <p:nvPr/>
         </p:nvSpPr>
         <p:spPr>
           <a:xfrm>
-            <a:off x="0" y="0"/>
-            <a:ext cx="3931920" cy="6858000"/>
+            <a:off x="658368" y="1371600"/>
+            <a:ext cx="1463040" cy="50800"/>
           </a:xfrm>
           <a:prstGeom prst="rect">
             <a:avLst/>
           </a:prstGeom>
           <a:solidFill>
-            <a:srgbClr val="92268F"/>
+            <a:srgbClr val="205F61"/>
           </a:solidFill>
           <a:ln>
             <a:noFill/>
@@ -8070,14 +7831,14 @@
       </p:sp>
       <p:sp>
         <p:nvSpPr>
-          <p:cNvPr id="3" name="TextBox 2"/>
+          <p:cNvPr id="4" name="TextBox 3"/>
           <p:cNvSpPr txBox="1"/>
           <p:nvPr/>
         </p:nvSpPr>
         <p:spPr>
           <a:xfrm>
-            <a:off x="365760" y="2103120"/>
-            <a:ext cx="3291840" cy="2194560"/>
+            <a:off x="658368" y="1691640"/>
+            <a:ext cx="10881360" cy="4480560"/>
           </a:xfrm>
           <a:prstGeom prst="rect">
             <a:avLst/>
@@ -8085,85 +7846,101 @@
           <a:noFill/>
         </p:spPr>
         <p:txBody>
-          <a:bodyPr wrap="square" anchor="t" lIns="0" rIns="0" tIns="0" bIns="0">
+          <a:bodyPr wrap="square" anchor="ctr" lIns="0" rIns="0" tIns="0" bIns="0">
             <a:spAutoFit/>
           </a:bodyPr>
           <a:lstStyle/>
           <a:p>
-            <a:r>
-              <a:rPr sz="13000" b="1" i="0">
-                <a:solidFill>
-                  <a:srgbClr val="FFFFFF"/>
-                </a:solidFill>
-                <a:latin typeface="Roboto"/>
-              </a:rPr>
-              <a:t>05</a:t>
-            </a:r>
-          </a:p>
-        </p:txBody>
-      </p:sp>
-      <p:sp>
-        <p:nvSpPr>
-          <p:cNvPr id="4" name="TextBox 3"/>
-          <p:cNvSpPr txBox="1"/>
-          <p:nvPr/>
-        </p:nvSpPr>
-        <p:spPr>
-          <a:xfrm>
-            <a:off x="4480560" y="2468880"/>
-            <a:ext cx="7132320" cy="2194560"/>
-          </a:xfrm>
-          <a:prstGeom prst="rect">
-            <a:avLst/>
-          </a:prstGeom>
-          <a:noFill/>
-        </p:spPr>
-        <p:txBody>
-          <a:bodyPr wrap="square" anchor="t" lIns="0" rIns="0" tIns="0" bIns="0">
-            <a:spAutoFit/>
-          </a:bodyPr>
-          <a:lstStyle/>
-          <a:p>
-            <a:r>
-              <a:rPr sz="1600" b="1" i="0">
-                <a:solidFill>
-                  <a:srgbClr val="92268F"/>
-                </a:solidFill>
-                <a:latin typeface="Roboto"/>
-              </a:rPr>
-              <a:t>SECTION</a:t>
-            </a:r>
-          </a:p>
-          <a:p>
-            <a:pPr>
+            <a:pPr marL="0" indent="0">
+              <a:lnSpc>
+                <a:spcPct val="105000"/>
+              </a:lnSpc>
               <a:spcBef>
-                <a:spcPts val="600"/>
+                <a:spcPts val="0"/>
               </a:spcBef>
+              <a:spcAft>
+                <a:spcPts val="1000"/>
+              </a:spcAft>
             </a:pPr>
             <a:r>
-              <a:rPr sz="3800" b="1" i="0">
+              <a:rPr sz="2400" b="1" i="0">
+                <a:solidFill>
+                  <a:srgbClr val="EDAB0C"/>
+                </a:solidFill>
+                <a:latin typeface="Roboto"/>
+              </a:rPr>
+              <a:t>■  </a:t>
+            </a:r>
+            <a:r>
+              <a:rPr sz="2400" b="0" i="0">
                 <a:solidFill>
                   <a:srgbClr val="2A2929"/>
                 </a:solidFill>
                 <a:latin typeface="Roboto"/>
               </a:rPr>
-              <a:t>Shared cloud foundations</a:t>
-            </a:r>
-          </a:p>
-          <a:p>
-            <a:pPr>
+              <a:t>A green status is the platform's claim; confirmation is you checking the resource itself.</a:t>
+            </a:r>
+          </a:p>
+          <a:p>
+            <a:pPr marL="0" indent="0">
+              <a:lnSpc>
+                <a:spcPct val="105000"/>
+              </a:lnSpc>
               <a:spcBef>
+                <a:spcPts val="0"/>
+              </a:spcBef>
+              <a:spcAft>
                 <a:spcPts val="1000"/>
+              </a:spcAft>
+            </a:pPr>
+            <a:r>
+              <a:rPr sz="2400" b="1" i="0">
+                <a:solidFill>
+                  <a:srgbClr val="EDAB0C"/>
+                </a:solidFill>
+                <a:latin typeface="Roboto"/>
+              </a:rPr>
+              <a:t>■  </a:t>
+            </a:r>
+            <a:r>
+              <a:rPr sz="2400" b="0" i="0">
+                <a:solidFill>
+                  <a:srgbClr val="2A2929"/>
+                </a:solidFill>
+                <a:latin typeface="Roboto"/>
+              </a:rPr>
+              <a:t>Use the console or the CLI: does the resource exist, with the properties the template declared?</a:t>
+            </a:r>
+          </a:p>
+          <a:p>
+            <a:pPr marL="0" indent="0">
+              <a:lnSpc>
+                <a:spcPct val="105000"/>
+              </a:lnSpc>
+              <a:spcBef>
+                <a:spcPts val="0"/>
               </a:spcBef>
+              <a:spcAft>
+                <a:spcPts val="1000"/>
+              </a:spcAft>
             </a:pPr>
             <a:r>
-              <a:rPr sz="2000" b="0" i="1">
-                <a:solidFill>
-                  <a:srgbClr val="484848"/>
-                </a:solidFill>
-                <a:latin typeface="Roboto Light"/>
-              </a:rPr>
-              <a:t>the standards under the build</a:t>
+              <a:rPr sz="2400" b="1" i="0">
+                <a:solidFill>
+                  <a:srgbClr val="EDAB0C"/>
+                </a:solidFill>
+                <a:latin typeface="Roboto"/>
+              </a:rPr>
+              <a:t>■  </a:t>
+            </a:r>
+            <a:r>
+              <a:rPr sz="2400" b="0" i="0">
+                <a:solidFill>
+                  <a:srgbClr val="2A2929"/>
+                </a:solidFill>
+                <a:latin typeface="Roboto"/>
+              </a:rPr>
+              <a:t>Deploy, then confirm — the habit that catches the gap between claimed and real.</a:t>
             </a:r>
           </a:p>
         </p:txBody>
@@ -8183,7 +7960,7 @@
             <a:avLst/>
           </a:prstGeom>
           <a:solidFill>
-            <a:srgbClr val="92268F"/>
+            <a:srgbClr val="205F61"/>
           </a:solidFill>
           <a:ln>
             <a:noFill/>
@@ -8285,7 +8062,7 @@
                 </a:solidFill>
                 <a:latin typeface="Roboto"/>
               </a:rPr>
-              <a:t/>
+              <a:t>13</a:t>
             </a:r>
           </a:p>
         </p:txBody>
@@ -8318,54 +8095,20 @@
       <p:grpSpPr/>
       <p:sp>
         <p:nvSpPr>
-          <p:cNvPr id="2" name="TextBox 1"/>
-          <p:cNvSpPr txBox="1"/>
-          <p:nvPr/>
-        </p:nvSpPr>
-        <p:spPr>
-          <a:xfrm>
-            <a:off x="640080" y="457200"/>
-            <a:ext cx="10881360" cy="960120"/>
-          </a:xfrm>
-          <a:prstGeom prst="rect">
-            <a:avLst/>
-          </a:prstGeom>
-          <a:noFill/>
-        </p:spPr>
-        <p:txBody>
-          <a:bodyPr wrap="square" anchor="t" lIns="0" rIns="0" tIns="0" bIns="0">
-            <a:spAutoFit/>
-          </a:bodyPr>
-          <a:lstStyle/>
-          <a:p>
-            <a:r>
-              <a:rPr sz="2800" b="1" i="0">
-                <a:solidFill>
-                  <a:srgbClr val="2A2929"/>
-                </a:solidFill>
-                <a:latin typeface="Roboto"/>
-              </a:rPr>
-              <a:t>Standards &amp; standard products</a:t>
-            </a:r>
-          </a:p>
-        </p:txBody>
-      </p:sp>
-      <p:sp>
-        <p:nvSpPr>
-          <p:cNvPr id="3" name="Rectangle 2"/>
+          <p:cNvPr id="2" name="Rectangle 1"/>
           <p:cNvSpPr/>
           <p:nvPr/>
         </p:nvSpPr>
         <p:spPr>
           <a:xfrm>
-            <a:off x="658368" y="1371600"/>
-            <a:ext cx="1463040" cy="50800"/>
+            <a:off x="0" y="0"/>
+            <a:ext cx="12191695" cy="1234440"/>
           </a:xfrm>
           <a:prstGeom prst="rect">
             <a:avLst/>
           </a:prstGeom>
           <a:solidFill>
-            <a:srgbClr val="92268F"/>
+            <a:srgbClr val="205F61"/>
           </a:solidFill>
           <a:ln>
             <a:noFill/>
@@ -8396,14 +8139,67 @@
       </p:sp>
       <p:sp>
         <p:nvSpPr>
+          <p:cNvPr id="3" name="Rounded Rectangle 2"/>
+          <p:cNvSpPr/>
+          <p:nvPr/>
+        </p:nvSpPr>
+        <p:spPr>
+          <a:xfrm>
+            <a:off x="640080" y="384048"/>
+            <a:ext cx="1691640" cy="457200"/>
+          </a:xfrm>
+          <a:prstGeom prst="roundRect">
+            <a:avLst/>
+          </a:prstGeom>
+          <a:solidFill>
+            <a:srgbClr val="2A2929"/>
+          </a:solidFill>
+          <a:ln>
+            <a:noFill/>
+          </a:ln>
+          <a:effectLst/>
+        </p:spPr>
+        <p:style>
+          <a:lnRef idx="1">
+            <a:schemeClr val="accent1"/>
+          </a:lnRef>
+          <a:fillRef idx="3">
+            <a:schemeClr val="accent1"/>
+          </a:fillRef>
+          <a:effectRef idx="2">
+            <a:schemeClr val="accent1"/>
+          </a:effectRef>
+          <a:fontRef idx="minor">
+            <a:schemeClr val="lt1"/>
+          </a:fontRef>
+        </p:style>
+        <p:txBody>
+          <a:bodyPr rtlCol="0" anchor="ctr"/>
+          <a:lstStyle/>
+          <a:p>
+            <a:pPr algn="ctr"/>
+            <a:r>
+              <a:rPr sz="1400" b="1" i="0">
+                <a:solidFill>
+                  <a:srgbClr val="FBB900"/>
+                </a:solidFill>
+                <a:latin typeface="Roboto"/>
+              </a:rPr>
+              <a:t>ACTIVITY</a:t>
+            </a:r>
+          </a:p>
+        </p:txBody>
+      </p:sp>
+      <p:sp>
+        <p:nvSpPr>
           <p:cNvPr id="4" name="TextBox 3"/>
           <p:cNvSpPr txBox="1"/>
           <p:nvPr/>
         </p:nvSpPr>
         <p:spPr>
           <a:xfrm>
-            <a:off x="658368" y="1691640"/>
-            <a:ext cx="10881360" cy="4480560"/>
+            <a:off x="2560320" y="310896"/>
+            <a:ext cx="8961120" cy="685800"/>
           </a:xfrm>
           <a:prstGeom prst="rect">
             <a:avLst/>
@@ -8412,6 +8208,40 @@
         </p:spPr>
         <p:txBody>
           <a:bodyPr wrap="square" anchor="ctr" lIns="0" rIns="0" tIns="0" bIns="0">
+            <a:spAutoFit/>
+          </a:bodyPr>
+          <a:lstStyle/>
+          <a:p>
+            <a:r>
+              <a:rPr sz="2600" b="1" i="0">
+                <a:solidFill>
+                  <a:srgbClr val="FFFFFF"/>
+                </a:solidFill>
+                <a:latin typeface="Roboto"/>
+              </a:rPr>
+              <a:t>Deploy, diagnose, fix, confirm</a:t>
+            </a:r>
+          </a:p>
+        </p:txBody>
+      </p:sp>
+      <p:sp>
+        <p:nvSpPr>
+          <p:cNvPr id="5" name="TextBox 4"/>
+          <p:cNvSpPr txBox="1"/>
+          <p:nvPr/>
+        </p:nvSpPr>
+        <p:spPr>
+          <a:xfrm>
+            <a:off x="658368" y="1554480"/>
+            <a:ext cx="10881360" cy="4297680"/>
+          </a:xfrm>
+          <a:prstGeom prst="rect">
+            <a:avLst/>
+          </a:prstGeom>
+          <a:noFill/>
+        </p:spPr>
+        <p:txBody>
+          <a:bodyPr wrap="square" anchor="t" lIns="0" rIns="0" tIns="0" bIns="0">
             <a:spAutoFit/>
           </a:bodyPr>
           <a:lstStyle/>
@@ -8428,7 +8258,7 @@
               </a:spcAft>
             </a:pPr>
             <a:r>
-              <a:rPr sz="2400" b="1" i="0">
+              <a:rPr sz="1700" b="1" i="0">
                 <a:solidFill>
                   <a:srgbClr val="EDAB0C"/>
                 </a:solidFill>
@@ -8437,13 +8267,13 @@
               <a:t>■  </a:t>
             </a:r>
             <a:r>
-              <a:rPr sz="2400" b="0" i="0">
+              <a:rPr sz="1700" b="0" i="0">
                 <a:solidFill>
                   <a:srgbClr val="2A2929"/>
                 </a:solidFill>
                 <a:latin typeface="Roboto"/>
               </a:rPr>
-              <a:t>Industry technology standards that underpin cloud building — interoperability, security, and management baselines (KE 1).</a:t>
+              <a:t>Workbook — tasks 6, 7 and 8.</a:t>
             </a:r>
           </a:p>
           <a:p>
@@ -8459,7 +8289,7 @@
               </a:spcAft>
             </a:pPr>
             <a:r>
-              <a:rPr sz="2400" b="1" i="0">
+              <a:rPr sz="1700" b="1" i="0">
                 <a:solidFill>
                   <a:srgbClr val="EDAB0C"/>
                 </a:solidFill>
@@ -8468,51 +8298,100 @@
               <a:t>■  </a:t>
             </a:r>
             <a:r>
-              <a:rPr sz="2400" b="0" i="0">
+              <a:rPr sz="1700" b="0" i="0">
                 <a:solidFill>
                   <a:srgbClr val="2A2929"/>
                 </a:solidFill>
                 <a:latin typeface="Roboto"/>
               </a:rPr>
-              <a:t>Standard hardware/software/storage products the platform is built on — compute families, managed databases, object/block storage (KE 2).</a:t>
-            </a:r>
-          </a:p>
-          <a:p>
-            <a:pPr marL="0" indent="0">
-              <a:lnSpc>
-                <a:spcPct val="105000"/>
-              </a:lnSpc>
-              <a:spcBef>
-                <a:spcPts val="0"/>
-              </a:spcBef>
-              <a:spcAft>
-                <a:spcPts val="1000"/>
-              </a:spcAft>
-            </a:pPr>
-            <a:r>
-              <a:rPr sz="2400" b="1" i="0">
-                <a:solidFill>
-                  <a:srgbClr val="EDAB0C"/>
-                </a:solidFill>
-                <a:latin typeface="Roboto"/>
-              </a:rPr>
-              <a:t>■  </a:t>
-            </a:r>
-            <a:r>
-              <a:rPr sz="2400" b="0" i="0">
+              <a:t>Deploy the provided template, diagnose and fix the failure it hits, redeploy, and confirm the deployment properly.</a:t>
+            </a:r>
+          </a:p>
+        </p:txBody>
+      </p:sp>
+      <p:sp>
+        <p:nvSpPr>
+          <p:cNvPr id="6" name="Rounded Rectangle 5"/>
+          <p:cNvSpPr/>
+          <p:nvPr/>
+        </p:nvSpPr>
+        <p:spPr>
+          <a:xfrm>
+            <a:off x="640080" y="5897880"/>
+            <a:ext cx="4023360" cy="457200"/>
+          </a:xfrm>
+          <a:prstGeom prst="roundRect">
+            <a:avLst/>
+          </a:prstGeom>
+          <a:solidFill>
+            <a:srgbClr val="F9F9F9"/>
+          </a:solidFill>
+          <a:ln w="12700">
+            <a:solidFill>
+              <a:srgbClr val="CCCCCC"/>
+            </a:solidFill>
+          </a:ln>
+          <a:effectLst/>
+        </p:spPr>
+        <p:style>
+          <a:lnRef idx="1">
+            <a:schemeClr val="accent1"/>
+          </a:lnRef>
+          <a:fillRef idx="3">
+            <a:schemeClr val="accent1"/>
+          </a:fillRef>
+          <a:effectRef idx="2">
+            <a:schemeClr val="accent1"/>
+          </a:effectRef>
+          <a:fontRef idx="minor">
+            <a:schemeClr val="lt1"/>
+          </a:fontRef>
+        </p:style>
+        <p:txBody>
+          <a:bodyPr rtlCol="0" anchor="ctr"/>
+          <a:lstStyle/>
+          <a:p>
+            <a:pPr algn="ctr"/>
+          </a:p>
+        </p:txBody>
+      </p:sp>
+      <p:sp>
+        <p:nvSpPr>
+          <p:cNvPr id="7" name="TextBox 6"/>
+          <p:cNvSpPr txBox="1"/>
+          <p:nvPr/>
+        </p:nvSpPr>
+        <p:spPr>
+          <a:xfrm>
+            <a:off x="822960" y="5943600"/>
+            <a:ext cx="3657600" cy="365760"/>
+          </a:xfrm>
+          <a:prstGeom prst="rect">
+            <a:avLst/>
+          </a:prstGeom>
+          <a:noFill/>
+        </p:spPr>
+        <p:txBody>
+          <a:bodyPr wrap="square" anchor="ctr" lIns="0" rIns="0" tIns="0" bIns="0">
+            <a:spAutoFit/>
+          </a:bodyPr>
+          <a:lstStyle/>
+          <a:p>
+            <a:r>
+              <a:rPr sz="1500" b="1" i="0">
                 <a:solidFill>
                   <a:srgbClr val="2A2929"/>
                 </a:solidFill>
                 <a:latin typeface="Roboto"/>
               </a:rPr>
-              <a:t>This is the shared foundation behind both the IaC (505) and the microservice (503) strands.</a:t>
-            </a:r>
-          </a:p>
-        </p:txBody>
-      </p:sp>
-      <p:sp>
-        <p:nvSpPr>
-          <p:cNvPr id="5" name="Rectangle 4"/>
+              <a:t>⏱  ~30 min</a:t>
+            </a:r>
+          </a:p>
+        </p:txBody>
+      </p:sp>
+      <p:sp>
+        <p:nvSpPr>
+          <p:cNvPr id="8" name="Rectangle 7"/>
           <p:cNvSpPr/>
           <p:nvPr/>
         </p:nvSpPr>
@@ -8525,7 +8404,7 @@
             <a:avLst/>
           </a:prstGeom>
           <a:solidFill>
-            <a:srgbClr val="92268F"/>
+            <a:srgbClr val="205F61"/>
           </a:solidFill>
           <a:ln>
             <a:noFill/>
@@ -8556,7 +8435,7 @@
       </p:sp>
       <p:sp>
         <p:nvSpPr>
-          <p:cNvPr id="6" name="TextBox 5"/>
+          <p:cNvPr id="9" name="TextBox 8"/>
           <p:cNvSpPr txBox="1"/>
           <p:nvPr/>
         </p:nvSpPr>
@@ -8599,7 +8478,7 @@
       </p:sp>
       <p:sp>
         <p:nvSpPr>
-          <p:cNvPr id="7" name="TextBox 6"/>
+          <p:cNvPr id="10" name="TextBox 9"/>
           <p:cNvSpPr txBox="1"/>
           <p:nvPr/>
         </p:nvSpPr>
@@ -8627,7 +8506,7 @@
                 </a:solidFill>
                 <a:latin typeface="Roboto"/>
               </a:rPr>
-              <a:t>12</a:t>
+              <a:t>14</a:t>
             </a:r>
           </a:p>
         </p:txBody>
@@ -8646,7 +8525,7 @@
     <p:bg>
       <p:bgPr>
         <a:solidFill>
-          <a:srgbClr val="2A2929"/>
+          <a:srgbClr val="F9F9F9"/>
         </a:solidFill>
         <a:effectLst/>
       </p:bgPr>
@@ -8660,20 +8539,70 @@
       <p:grpSpPr/>
       <p:sp>
         <p:nvSpPr>
-          <p:cNvPr id="2" name="Rectangle 1"/>
+          <p:cNvPr id="2" name="TextBox 1"/>
+          <p:cNvSpPr txBox="1"/>
+          <p:nvPr/>
+        </p:nvSpPr>
+        <p:spPr>
+          <a:xfrm>
+            <a:off x="640080" y="548640"/>
+            <a:ext cx="10881360" cy="1097280"/>
+          </a:xfrm>
+          <a:prstGeom prst="rect">
+            <a:avLst/>
+          </a:prstGeom>
+          <a:noFill/>
+        </p:spPr>
+        <p:txBody>
+          <a:bodyPr wrap="square" anchor="t" lIns="0" rIns="0" tIns="0" bIns="0">
+            <a:spAutoFit/>
+          </a:bodyPr>
+          <a:lstStyle/>
+          <a:p>
+            <a:r>
+              <a:rPr sz="3200" b="1" i="0">
+                <a:solidFill>
+                  <a:srgbClr val="2A2929"/>
+                </a:solidFill>
+                <a:latin typeface="Roboto"/>
+              </a:rPr>
+              <a:t>Key takeaways</a:t>
+            </a:r>
+          </a:p>
+          <a:p>
+            <a:pPr>
+              <a:spcBef>
+                <a:spcPts val="200"/>
+              </a:spcBef>
+            </a:pPr>
+            <a:r>
+              <a:rPr sz="1800" b="1" i="0">
+                <a:solidFill>
+                  <a:srgbClr val="205F61"/>
+                </a:solidFill>
+                <a:latin typeface="Roboto"/>
+              </a:rPr>
+              <a:t>Section 3 · Deploy and fix</a:t>
+            </a:r>
+          </a:p>
+        </p:txBody>
+      </p:sp>
+      <p:sp>
+        <p:nvSpPr>
+          <p:cNvPr id="3" name="Rectangle 2"/>
           <p:cNvSpPr/>
           <p:nvPr/>
         </p:nvSpPr>
         <p:spPr>
           <a:xfrm>
-            <a:off x="0" y="0"/>
-            <a:ext cx="411480" cy="6858000"/>
+            <a:off x="658368" y="1600200"/>
+            <a:ext cx="1463040" cy="50800"/>
           </a:xfrm>
           <a:prstGeom prst="rect">
             <a:avLst/>
           </a:prstGeom>
           <a:solidFill>
-            <a:srgbClr val="EDAB0C"/>
+            <a:srgbClr val="205F61"/>
           </a:solidFill>
           <a:ln>
             <a:noFill/>
@@ -8704,14 +8633,445 @@
       </p:sp>
       <p:sp>
         <p:nvSpPr>
-          <p:cNvPr id="3" name="TextBox 2"/>
+          <p:cNvPr id="4" name="Rectangle 3"/>
+          <p:cNvSpPr/>
+          <p:nvPr/>
+        </p:nvSpPr>
+        <p:spPr>
+          <a:xfrm>
+            <a:off x="640080" y="1965960"/>
+            <a:ext cx="10927080" cy="841248"/>
+          </a:xfrm>
+          <a:prstGeom prst="rect">
+            <a:avLst/>
+          </a:prstGeom>
+          <a:solidFill>
+            <a:srgbClr val="FFFFFF"/>
+          </a:solidFill>
+          <a:ln w="12700">
+            <a:solidFill>
+              <a:srgbClr val="CCCCCC"/>
+            </a:solidFill>
+          </a:ln>
+          <a:effectLst/>
+        </p:spPr>
+        <p:style>
+          <a:lnRef idx="1">
+            <a:schemeClr val="accent1"/>
+          </a:lnRef>
+          <a:fillRef idx="3">
+            <a:schemeClr val="accent1"/>
+          </a:fillRef>
+          <a:effectRef idx="2">
+            <a:schemeClr val="accent1"/>
+          </a:effectRef>
+          <a:fontRef idx="minor">
+            <a:schemeClr val="lt1"/>
+          </a:fontRef>
+        </p:style>
+        <p:txBody>
+          <a:bodyPr rtlCol="0" anchor="ctr"/>
+          <a:lstStyle/>
+          <a:p>
+            <a:pPr algn="ctr"/>
+          </a:p>
+        </p:txBody>
+      </p:sp>
+      <p:sp>
+        <p:nvSpPr>
+          <p:cNvPr id="5" name="Rectangle 4"/>
+          <p:cNvSpPr/>
+          <p:nvPr/>
+        </p:nvSpPr>
+        <p:spPr>
+          <a:xfrm>
+            <a:off x="640080" y="1965960"/>
+            <a:ext cx="109728" cy="841248"/>
+          </a:xfrm>
+          <a:prstGeom prst="rect">
+            <a:avLst/>
+          </a:prstGeom>
+          <a:solidFill>
+            <a:srgbClr val="205F61"/>
+          </a:solidFill>
+          <a:ln>
+            <a:noFill/>
+          </a:ln>
+          <a:effectLst/>
+        </p:spPr>
+        <p:style>
+          <a:lnRef idx="1">
+            <a:schemeClr val="accent1"/>
+          </a:lnRef>
+          <a:fillRef idx="3">
+            <a:schemeClr val="accent1"/>
+          </a:fillRef>
+          <a:effectRef idx="2">
+            <a:schemeClr val="accent1"/>
+          </a:effectRef>
+          <a:fontRef idx="minor">
+            <a:schemeClr val="lt1"/>
+          </a:fontRef>
+        </p:style>
+        <p:txBody>
+          <a:bodyPr rtlCol="0" anchor="ctr"/>
+          <a:lstStyle/>
+          <a:p>
+            <a:pPr algn="ctr"/>
+          </a:p>
+        </p:txBody>
+      </p:sp>
+      <p:sp>
+        <p:nvSpPr>
+          <p:cNvPr id="6" name="TextBox 5"/>
           <p:cNvSpPr txBox="1"/>
           <p:nvPr/>
         </p:nvSpPr>
         <p:spPr>
           <a:xfrm>
-            <a:off x="914400" y="1463040"/>
-            <a:ext cx="10515600" cy="4023360"/>
+            <a:off x="960120" y="1965960"/>
+            <a:ext cx="10424160" cy="841248"/>
+          </a:xfrm>
+          <a:prstGeom prst="rect">
+            <a:avLst/>
+          </a:prstGeom>
+          <a:noFill/>
+        </p:spPr>
+        <p:txBody>
+          <a:bodyPr wrap="square" anchor="ctr" lIns="0" rIns="0" tIns="0" bIns="0">
+            <a:spAutoFit/>
+          </a:bodyPr>
+          <a:lstStyle/>
+          <a:p>
+            <a:pPr>
+              <a:lnSpc>
+                <a:spcPct val="100000"/>
+              </a:lnSpc>
+            </a:pPr>
+            <a:r>
+              <a:rPr sz="1700" b="0" i="0">
+                <a:solidFill>
+                  <a:srgbClr val="2A2929"/>
+                </a:solidFill>
+                <a:latin typeface="Roboto"/>
+              </a:rPr>
+              <a:t>Read the first failure event; the rest is rollback noise.</a:t>
+            </a:r>
+          </a:p>
+        </p:txBody>
+      </p:sp>
+      <p:sp>
+        <p:nvSpPr>
+          <p:cNvPr id="7" name="Rectangle 6"/>
+          <p:cNvSpPr/>
+          <p:nvPr/>
+        </p:nvSpPr>
+        <p:spPr>
+          <a:xfrm>
+            <a:off x="640080" y="2916936"/>
+            <a:ext cx="10927080" cy="841248"/>
+          </a:xfrm>
+          <a:prstGeom prst="rect">
+            <a:avLst/>
+          </a:prstGeom>
+          <a:solidFill>
+            <a:srgbClr val="FFFFFF"/>
+          </a:solidFill>
+          <a:ln w="12700">
+            <a:solidFill>
+              <a:srgbClr val="CCCCCC"/>
+            </a:solidFill>
+          </a:ln>
+          <a:effectLst/>
+        </p:spPr>
+        <p:style>
+          <a:lnRef idx="1">
+            <a:schemeClr val="accent1"/>
+          </a:lnRef>
+          <a:fillRef idx="3">
+            <a:schemeClr val="accent1"/>
+          </a:fillRef>
+          <a:effectRef idx="2">
+            <a:schemeClr val="accent1"/>
+          </a:effectRef>
+          <a:fontRef idx="minor">
+            <a:schemeClr val="lt1"/>
+          </a:fontRef>
+        </p:style>
+        <p:txBody>
+          <a:bodyPr rtlCol="0" anchor="ctr"/>
+          <a:lstStyle/>
+          <a:p>
+            <a:pPr algn="ctr"/>
+          </a:p>
+        </p:txBody>
+      </p:sp>
+      <p:sp>
+        <p:nvSpPr>
+          <p:cNvPr id="8" name="Rectangle 7"/>
+          <p:cNvSpPr/>
+          <p:nvPr/>
+        </p:nvSpPr>
+        <p:spPr>
+          <a:xfrm>
+            <a:off x="640080" y="2916936"/>
+            <a:ext cx="109728" cy="841248"/>
+          </a:xfrm>
+          <a:prstGeom prst="rect">
+            <a:avLst/>
+          </a:prstGeom>
+          <a:solidFill>
+            <a:srgbClr val="205F61"/>
+          </a:solidFill>
+          <a:ln>
+            <a:noFill/>
+          </a:ln>
+          <a:effectLst/>
+        </p:spPr>
+        <p:style>
+          <a:lnRef idx="1">
+            <a:schemeClr val="accent1"/>
+          </a:lnRef>
+          <a:fillRef idx="3">
+            <a:schemeClr val="accent1"/>
+          </a:fillRef>
+          <a:effectRef idx="2">
+            <a:schemeClr val="accent1"/>
+          </a:effectRef>
+          <a:fontRef idx="minor">
+            <a:schemeClr val="lt1"/>
+          </a:fontRef>
+        </p:style>
+        <p:txBody>
+          <a:bodyPr rtlCol="0" anchor="ctr"/>
+          <a:lstStyle/>
+          <a:p>
+            <a:pPr algn="ctr"/>
+          </a:p>
+        </p:txBody>
+      </p:sp>
+      <p:sp>
+        <p:nvSpPr>
+          <p:cNvPr id="9" name="TextBox 8"/>
+          <p:cNvSpPr txBox="1"/>
+          <p:nvPr/>
+        </p:nvSpPr>
+        <p:spPr>
+          <a:xfrm>
+            <a:off x="960120" y="2916936"/>
+            <a:ext cx="10424160" cy="841248"/>
+          </a:xfrm>
+          <a:prstGeom prst="rect">
+            <a:avLst/>
+          </a:prstGeom>
+          <a:noFill/>
+        </p:spPr>
+        <p:txBody>
+          <a:bodyPr wrap="square" anchor="ctr" lIns="0" rIns="0" tIns="0" bIns="0">
+            <a:spAutoFit/>
+          </a:bodyPr>
+          <a:lstStyle/>
+          <a:p>
+            <a:pPr>
+              <a:lnSpc>
+                <a:spcPct val="100000"/>
+              </a:lnSpc>
+            </a:pPr>
+            <a:r>
+              <a:rPr sz="1700" b="0" i="0">
+                <a:solidFill>
+                  <a:srgbClr val="2A2929"/>
+                </a:solidFill>
+                <a:latin typeface="Roboto"/>
+              </a:rPr>
+              <a:t>One deliberate fix, then redeploy — diagnosis over trial and error.</a:t>
+            </a:r>
+          </a:p>
+        </p:txBody>
+      </p:sp>
+      <p:sp>
+        <p:nvSpPr>
+          <p:cNvPr id="10" name="Rectangle 9"/>
+          <p:cNvSpPr/>
+          <p:nvPr/>
+        </p:nvSpPr>
+        <p:spPr>
+          <a:xfrm>
+            <a:off x="640080" y="3867912"/>
+            <a:ext cx="10927080" cy="841248"/>
+          </a:xfrm>
+          <a:prstGeom prst="rect">
+            <a:avLst/>
+          </a:prstGeom>
+          <a:solidFill>
+            <a:srgbClr val="FFFFFF"/>
+          </a:solidFill>
+          <a:ln w="12700">
+            <a:solidFill>
+              <a:srgbClr val="CCCCCC"/>
+            </a:solidFill>
+          </a:ln>
+          <a:effectLst/>
+        </p:spPr>
+        <p:style>
+          <a:lnRef idx="1">
+            <a:schemeClr val="accent1"/>
+          </a:lnRef>
+          <a:fillRef idx="3">
+            <a:schemeClr val="accent1"/>
+          </a:fillRef>
+          <a:effectRef idx="2">
+            <a:schemeClr val="accent1"/>
+          </a:effectRef>
+          <a:fontRef idx="minor">
+            <a:schemeClr val="lt1"/>
+          </a:fontRef>
+        </p:style>
+        <p:txBody>
+          <a:bodyPr rtlCol="0" anchor="ctr"/>
+          <a:lstStyle/>
+          <a:p>
+            <a:pPr algn="ctr"/>
+          </a:p>
+        </p:txBody>
+      </p:sp>
+      <p:sp>
+        <p:nvSpPr>
+          <p:cNvPr id="11" name="Rectangle 10"/>
+          <p:cNvSpPr/>
+          <p:nvPr/>
+        </p:nvSpPr>
+        <p:spPr>
+          <a:xfrm>
+            <a:off x="640080" y="3867912"/>
+            <a:ext cx="109728" cy="841248"/>
+          </a:xfrm>
+          <a:prstGeom prst="rect">
+            <a:avLst/>
+          </a:prstGeom>
+          <a:solidFill>
+            <a:srgbClr val="205F61"/>
+          </a:solidFill>
+          <a:ln>
+            <a:noFill/>
+          </a:ln>
+          <a:effectLst/>
+        </p:spPr>
+        <p:style>
+          <a:lnRef idx="1">
+            <a:schemeClr val="accent1"/>
+          </a:lnRef>
+          <a:fillRef idx="3">
+            <a:schemeClr val="accent1"/>
+          </a:fillRef>
+          <a:effectRef idx="2">
+            <a:schemeClr val="accent1"/>
+          </a:effectRef>
+          <a:fontRef idx="minor">
+            <a:schemeClr val="lt1"/>
+          </a:fontRef>
+        </p:style>
+        <p:txBody>
+          <a:bodyPr rtlCol="0" anchor="ctr"/>
+          <a:lstStyle/>
+          <a:p>
+            <a:pPr algn="ctr"/>
+          </a:p>
+        </p:txBody>
+      </p:sp>
+      <p:sp>
+        <p:nvSpPr>
+          <p:cNvPr id="12" name="TextBox 11"/>
+          <p:cNvSpPr txBox="1"/>
+          <p:nvPr/>
+        </p:nvSpPr>
+        <p:spPr>
+          <a:xfrm>
+            <a:off x="960120" y="3867912"/>
+            <a:ext cx="10424160" cy="841248"/>
+          </a:xfrm>
+          <a:prstGeom prst="rect">
+            <a:avLst/>
+          </a:prstGeom>
+          <a:noFill/>
+        </p:spPr>
+        <p:txBody>
+          <a:bodyPr wrap="square" anchor="ctr" lIns="0" rIns="0" tIns="0" bIns="0">
+            <a:spAutoFit/>
+          </a:bodyPr>
+          <a:lstStyle/>
+          <a:p>
+            <a:pPr>
+              <a:lnSpc>
+                <a:spcPct val="100000"/>
+              </a:lnSpc>
+            </a:pPr>
+            <a:r>
+              <a:rPr sz="1700" b="0" i="0">
+                <a:solidFill>
+                  <a:srgbClr val="2A2929"/>
+                </a:solidFill>
+                <a:latin typeface="Roboto"/>
+              </a:rPr>
+              <a:t>Confirm the resource, not the status colour.</a:t>
+            </a:r>
+          </a:p>
+        </p:txBody>
+      </p:sp>
+      <p:sp>
+        <p:nvSpPr>
+          <p:cNvPr id="13" name="Rectangle 12"/>
+          <p:cNvSpPr/>
+          <p:nvPr/>
+        </p:nvSpPr>
+        <p:spPr>
+          <a:xfrm>
+            <a:off x="0" y="6565392"/>
+            <a:ext cx="12191695" cy="38100"/>
+          </a:xfrm>
+          <a:prstGeom prst="rect">
+            <a:avLst/>
+          </a:prstGeom>
+          <a:solidFill>
+            <a:srgbClr val="205F61"/>
+          </a:solidFill>
+          <a:ln>
+            <a:noFill/>
+          </a:ln>
+          <a:effectLst/>
+        </p:spPr>
+        <p:style>
+          <a:lnRef idx="1">
+            <a:schemeClr val="accent1"/>
+          </a:lnRef>
+          <a:fillRef idx="3">
+            <a:schemeClr val="accent1"/>
+          </a:fillRef>
+          <a:effectRef idx="2">
+            <a:schemeClr val="accent1"/>
+          </a:effectRef>
+          <a:fontRef idx="minor">
+            <a:schemeClr val="lt1"/>
+          </a:fontRef>
+        </p:style>
+        <p:txBody>
+          <a:bodyPr rtlCol="0" anchor="ctr"/>
+          <a:lstStyle/>
+          <a:p>
+            <a:pPr algn="ctr"/>
+          </a:p>
+        </p:txBody>
+      </p:sp>
+      <p:sp>
+        <p:nvSpPr>
+          <p:cNvPr id="14" name="TextBox 13"/>
+          <p:cNvSpPr txBox="1"/>
+          <p:nvPr/>
+        </p:nvSpPr>
+        <p:spPr>
+          <a:xfrm>
+            <a:off x="502920" y="6400800"/>
+            <a:ext cx="5486400" cy="320040"/>
           </a:xfrm>
           <a:prstGeom prst="rect">
             <a:avLst/>
@@ -8725,51 +9085,57 @@
           <a:lstStyle/>
           <a:p>
             <a:r>
-              <a:rPr sz="4000" b="1" i="0">
-                <a:solidFill>
-                  <a:srgbClr val="FFFFFF"/>
-                </a:solidFill>
-                <a:latin typeface="Roboto"/>
-              </a:rPr>
-              <a:t>Next: Topic 7 — author your own template</a:t>
-            </a:r>
-          </a:p>
-          <a:p>
-            <a:pPr>
-              <a:lnSpc>
-                <a:spcPct val="105000"/>
-              </a:lnSpc>
-              <a:spcBef>
-                <a:spcPts val="1200"/>
-              </a:spcBef>
-            </a:pPr>
-            <a:r>
-              <a:rPr sz="1900" b="0" i="0">
-                <a:solidFill>
-                  <a:srgbClr val="E8E8E8"/>
-                </a:solidFill>
-                <a:latin typeface="Roboto Light"/>
-              </a:rPr>
-              <a:t>You can now read and operate a provided template; next you write one from scratch.</a:t>
-            </a:r>
-          </a:p>
-          <a:p>
-            <a:pPr>
-              <a:lnSpc>
-                <a:spcPct val="105000"/>
-              </a:lnSpc>
-              <a:spcBef>
-                <a:spcPts val="1200"/>
-              </a:spcBef>
-            </a:pPr>
-            <a:r>
-              <a:rPr sz="1900" b="0" i="0">
-                <a:solidFill>
-                  <a:srgbClr val="E8E8E8"/>
-                </a:solidFill>
-                <a:latin typeface="Roboto Light"/>
-              </a:rPr>
-              <a:t>Same tooling, same lifecycle — this time you author the resources.</a:t>
+              <a:rPr sz="1100" b="1" i="0">
+                <a:solidFill>
+                  <a:srgbClr val="2A2929"/>
+                </a:solidFill>
+                <a:latin typeface="Roboto"/>
+              </a:rPr>
+              <a:t>Kangan </a:t>
+            </a:r>
+            <a:r>
+              <a:rPr sz="1100" b="1" i="0">
+                <a:solidFill>
+                  <a:srgbClr val="D68E10"/>
+                </a:solidFill>
+                <a:latin typeface="Roboto"/>
+              </a:rPr>
+              <a:t>Institute</a:t>
+            </a:r>
+          </a:p>
+        </p:txBody>
+      </p:sp>
+      <p:sp>
+        <p:nvSpPr>
+          <p:cNvPr id="15" name="TextBox 14"/>
+          <p:cNvSpPr txBox="1"/>
+          <p:nvPr/>
+        </p:nvSpPr>
+        <p:spPr>
+          <a:xfrm>
+            <a:off x="10515600" y="6400800"/>
+            <a:ext cx="1188720" cy="320040"/>
+          </a:xfrm>
+          <a:prstGeom prst="rect">
+            <a:avLst/>
+          </a:prstGeom>
+          <a:noFill/>
+        </p:spPr>
+        <p:txBody>
+          <a:bodyPr wrap="square" anchor="t" lIns="0" rIns="0" tIns="0" bIns="0">
+            <a:spAutoFit/>
+          </a:bodyPr>
+          <a:lstStyle/>
+          <a:p>
+            <a:pPr algn="r"/>
+            <a:r>
+              <a:rPr sz="1100" b="0" i="0">
+                <a:solidFill>
+                  <a:srgbClr val="7A7A7A"/>
+                </a:solidFill>
+                <a:latin typeface="Roboto"/>
+              </a:rPr>
+              <a:t>15</a:t>
             </a:r>
           </a:p>
         </p:txBody>
@@ -8958,7 +9324,7 @@
                 </a:solidFill>
                 <a:latin typeface="Roboto"/>
               </a:rPr>
-              <a:t>This Topic: what IaC is, and operating a template someone else wrote.</a:t>
+              <a:t>This Topic: what IaC is, then operating a template someone else wrote — including when it fails.</a:t>
             </a:r>
           </a:p>
           <a:p>
@@ -8989,7 +9355,7 @@
                 </a:solidFill>
                 <a:latin typeface="Roboto"/>
               </a:rPr>
-              <a:t>Region substitution starts here: the design targets Sydney/India, but you deploy to us-east-1 — [scenario: ap-southeast-2 (Sydney) | deploy: us-east-1]. Same build, only the console Region differs.</a:t>
+              <a:t>Region substitution starts here: the design names its real region, but you deploy to us-east-1 in the lab. Same build, only the console region differs.</a:t>
             </a:r>
           </a:p>
           <a:p>
@@ -9020,7 +9386,7 @@
                 </a:solidFill>
                 <a:latin typeface="Roboto"/>
               </a:rPr>
-              <a:t>teach → demo → practice: watch the demo, then do it on the practice scenario.</a:t>
+              <a:t>teach, demo, practice: watch the demo, then do it on the practice workbook.</a:t>
             </a:r>
           </a:p>
         </p:txBody>
@@ -9167,6 +9533,2831 @@
                 <a:latin typeface="Roboto"/>
               </a:rPr>
               <a:t>1</a:t>
+            </a:r>
+          </a:p>
+        </p:txBody>
+      </p:sp>
+    </p:spTree>
+  </p:cSld>
+  <p:clrMapOvr>
+    <a:masterClrMapping/>
+  </p:clrMapOvr>
+</p:sld>
+</file>
+
+<file path=ppt/slides/slide20.xml><?xml version="1.0" encoding="utf-8"?>
+<p:sld xmlns:a="http://schemas.openxmlformats.org/drawingml/2006/main" xmlns:p="http://schemas.openxmlformats.org/presentationml/2006/main" xmlns:r="http://schemas.openxmlformats.org/officeDocument/2006/relationships">
+  <p:cSld>
+    <p:bg>
+      <p:bgPr>
+        <a:solidFill>
+          <a:srgbClr val="FFFFFF"/>
+        </a:solidFill>
+        <a:effectLst/>
+      </p:bgPr>
+    </p:bg>
+    <p:spTree>
+      <p:nvGrpSpPr>
+        <p:cNvPr id="1" name=""/>
+        <p:cNvGrpSpPr/>
+        <p:nvPr/>
+      </p:nvGrpSpPr>
+      <p:grpSpPr/>
+      <p:sp>
+        <p:nvSpPr>
+          <p:cNvPr id="2" name="Rectangle 1"/>
+          <p:cNvSpPr/>
+          <p:nvPr/>
+        </p:nvSpPr>
+        <p:spPr>
+          <a:xfrm>
+            <a:off x="0" y="0"/>
+            <a:ext cx="3931920" cy="6858000"/>
+          </a:xfrm>
+          <a:prstGeom prst="rect">
+            <a:avLst/>
+          </a:prstGeom>
+          <a:solidFill>
+            <a:srgbClr val="004488"/>
+          </a:solidFill>
+          <a:ln>
+            <a:noFill/>
+          </a:ln>
+          <a:effectLst/>
+        </p:spPr>
+        <p:style>
+          <a:lnRef idx="1">
+            <a:schemeClr val="accent1"/>
+          </a:lnRef>
+          <a:fillRef idx="3">
+            <a:schemeClr val="accent1"/>
+          </a:fillRef>
+          <a:effectRef idx="2">
+            <a:schemeClr val="accent1"/>
+          </a:effectRef>
+          <a:fontRef idx="minor">
+            <a:schemeClr val="lt1"/>
+          </a:fontRef>
+        </p:style>
+        <p:txBody>
+          <a:bodyPr rtlCol="0" anchor="ctr"/>
+          <a:lstStyle/>
+          <a:p>
+            <a:pPr algn="ctr"/>
+          </a:p>
+        </p:txBody>
+      </p:sp>
+      <p:sp>
+        <p:nvSpPr>
+          <p:cNvPr id="3" name="TextBox 2"/>
+          <p:cNvSpPr txBox="1"/>
+          <p:nvPr/>
+        </p:nvSpPr>
+        <p:spPr>
+          <a:xfrm>
+            <a:off x="365760" y="2103120"/>
+            <a:ext cx="3291840" cy="2194560"/>
+          </a:xfrm>
+          <a:prstGeom prst="rect">
+            <a:avLst/>
+          </a:prstGeom>
+          <a:noFill/>
+        </p:spPr>
+        <p:txBody>
+          <a:bodyPr wrap="square" anchor="t" lIns="0" rIns="0" tIns="0" bIns="0">
+            <a:spAutoFit/>
+          </a:bodyPr>
+          <a:lstStyle/>
+          <a:p>
+            <a:r>
+              <a:rPr sz="13000" b="1" i="0">
+                <a:solidFill>
+                  <a:srgbClr val="FFFFFF"/>
+                </a:solidFill>
+                <a:latin typeface="Roboto"/>
+              </a:rPr>
+              <a:t>04</a:t>
+            </a:r>
+          </a:p>
+        </p:txBody>
+      </p:sp>
+      <p:sp>
+        <p:nvSpPr>
+          <p:cNvPr id="4" name="TextBox 3"/>
+          <p:cNvSpPr txBox="1"/>
+          <p:nvPr/>
+        </p:nvSpPr>
+        <p:spPr>
+          <a:xfrm>
+            <a:off x="4480560" y="2468880"/>
+            <a:ext cx="7132320" cy="2194560"/>
+          </a:xfrm>
+          <a:prstGeom prst="rect">
+            <a:avLst/>
+          </a:prstGeom>
+          <a:noFill/>
+        </p:spPr>
+        <p:txBody>
+          <a:bodyPr wrap="square" anchor="t" lIns="0" rIns="0" tIns="0" bIns="0">
+            <a:spAutoFit/>
+          </a:bodyPr>
+          <a:lstStyle/>
+          <a:p>
+            <a:r>
+              <a:rPr sz="1600" b="1" i="0">
+                <a:solidFill>
+                  <a:srgbClr val="004488"/>
+                </a:solidFill>
+                <a:latin typeface="Roboto"/>
+              </a:rPr>
+              <a:t>SECTION</a:t>
+            </a:r>
+          </a:p>
+          <a:p>
+            <a:pPr>
+              <a:spcBef>
+                <a:spcPts val="600"/>
+              </a:spcBef>
+            </a:pPr>
+            <a:r>
+              <a:rPr sz="3800" b="1" i="0">
+                <a:solidFill>
+                  <a:srgbClr val="2A2929"/>
+                </a:solidFill>
+                <a:latin typeface="Roboto"/>
+              </a:rPr>
+              <a:t>Update it, and put it back</a:t>
+            </a:r>
+          </a:p>
+          <a:p>
+            <a:pPr>
+              <a:spcBef>
+                <a:spcPts val="1000"/>
+              </a:spcBef>
+            </a:pPr>
+            <a:r>
+              <a:rPr sz="2000" b="0" i="1">
+                <a:solidFill>
+                  <a:srgbClr val="484848"/>
+                </a:solidFill>
+                <a:latin typeface="Roboto Light"/>
+              </a:rPr>
+              <a:t>every change is a reviewable diff</a:t>
+            </a:r>
+          </a:p>
+        </p:txBody>
+      </p:sp>
+      <p:sp>
+        <p:nvSpPr>
+          <p:cNvPr id="5" name="Rectangle 4"/>
+          <p:cNvSpPr/>
+          <p:nvPr/>
+        </p:nvSpPr>
+        <p:spPr>
+          <a:xfrm>
+            <a:off x="0" y="6565392"/>
+            <a:ext cx="12191695" cy="38100"/>
+          </a:xfrm>
+          <a:prstGeom prst="rect">
+            <a:avLst/>
+          </a:prstGeom>
+          <a:solidFill>
+            <a:srgbClr val="004488"/>
+          </a:solidFill>
+          <a:ln>
+            <a:noFill/>
+          </a:ln>
+          <a:effectLst/>
+        </p:spPr>
+        <p:style>
+          <a:lnRef idx="1">
+            <a:schemeClr val="accent1"/>
+          </a:lnRef>
+          <a:fillRef idx="3">
+            <a:schemeClr val="accent1"/>
+          </a:fillRef>
+          <a:effectRef idx="2">
+            <a:schemeClr val="accent1"/>
+          </a:effectRef>
+          <a:fontRef idx="minor">
+            <a:schemeClr val="lt1"/>
+          </a:fontRef>
+        </p:style>
+        <p:txBody>
+          <a:bodyPr rtlCol="0" anchor="ctr"/>
+          <a:lstStyle/>
+          <a:p>
+            <a:pPr algn="ctr"/>
+          </a:p>
+        </p:txBody>
+      </p:sp>
+      <p:sp>
+        <p:nvSpPr>
+          <p:cNvPr id="6" name="TextBox 5"/>
+          <p:cNvSpPr txBox="1"/>
+          <p:nvPr/>
+        </p:nvSpPr>
+        <p:spPr>
+          <a:xfrm>
+            <a:off x="502920" y="6400800"/>
+            <a:ext cx="5486400" cy="320040"/>
+          </a:xfrm>
+          <a:prstGeom prst="rect">
+            <a:avLst/>
+          </a:prstGeom>
+          <a:noFill/>
+        </p:spPr>
+        <p:txBody>
+          <a:bodyPr wrap="square" anchor="t" lIns="0" rIns="0" tIns="0" bIns="0">
+            <a:spAutoFit/>
+          </a:bodyPr>
+          <a:lstStyle/>
+          <a:p>
+            <a:r>
+              <a:rPr sz="1100" b="1" i="0">
+                <a:solidFill>
+                  <a:srgbClr val="2A2929"/>
+                </a:solidFill>
+                <a:latin typeface="Roboto"/>
+              </a:rPr>
+              <a:t>Kangan </a:t>
+            </a:r>
+            <a:r>
+              <a:rPr sz="1100" b="1" i="0">
+                <a:solidFill>
+                  <a:srgbClr val="D68E10"/>
+                </a:solidFill>
+                <a:latin typeface="Roboto"/>
+              </a:rPr>
+              <a:t>Institute</a:t>
+            </a:r>
+          </a:p>
+        </p:txBody>
+      </p:sp>
+      <p:sp>
+        <p:nvSpPr>
+          <p:cNvPr id="7" name="TextBox 6"/>
+          <p:cNvSpPr txBox="1"/>
+          <p:nvPr/>
+        </p:nvSpPr>
+        <p:spPr>
+          <a:xfrm>
+            <a:off x="10515600" y="6400800"/>
+            <a:ext cx="1188720" cy="320040"/>
+          </a:xfrm>
+          <a:prstGeom prst="rect">
+            <a:avLst/>
+          </a:prstGeom>
+          <a:noFill/>
+        </p:spPr>
+        <p:txBody>
+          <a:bodyPr wrap="square" anchor="t" lIns="0" rIns="0" tIns="0" bIns="0">
+            <a:spAutoFit/>
+          </a:bodyPr>
+          <a:lstStyle/>
+          <a:p>
+            <a:pPr algn="r"/>
+            <a:r>
+              <a:rPr sz="1100" b="0" i="0">
+                <a:solidFill>
+                  <a:srgbClr val="7A7A7A"/>
+                </a:solidFill>
+                <a:latin typeface="Roboto"/>
+              </a:rPr>
+              <a:t/>
+            </a:r>
+          </a:p>
+        </p:txBody>
+      </p:sp>
+    </p:spTree>
+  </p:cSld>
+  <p:clrMapOvr>
+    <a:masterClrMapping/>
+  </p:clrMapOvr>
+</p:sld>
+</file>
+
+<file path=ppt/slides/slide21.xml><?xml version="1.0" encoding="utf-8"?>
+<p:sld xmlns:a="http://schemas.openxmlformats.org/drawingml/2006/main" xmlns:p="http://schemas.openxmlformats.org/presentationml/2006/main" xmlns:r="http://schemas.openxmlformats.org/officeDocument/2006/relationships">
+  <p:cSld>
+    <p:bg>
+      <p:bgPr>
+        <a:solidFill>
+          <a:srgbClr val="FFFFFF"/>
+        </a:solidFill>
+        <a:effectLst/>
+      </p:bgPr>
+    </p:bg>
+    <p:spTree>
+      <p:nvGrpSpPr>
+        <p:cNvPr id="1" name=""/>
+        <p:cNvGrpSpPr/>
+        <p:nvPr/>
+      </p:nvGrpSpPr>
+      <p:grpSpPr/>
+      <p:sp>
+        <p:nvSpPr>
+          <p:cNvPr id="2" name="TextBox 1"/>
+          <p:cNvSpPr txBox="1"/>
+          <p:nvPr/>
+        </p:nvSpPr>
+        <p:spPr>
+          <a:xfrm>
+            <a:off x="640080" y="457200"/>
+            <a:ext cx="10881360" cy="960120"/>
+          </a:xfrm>
+          <a:prstGeom prst="rect">
+            <a:avLst/>
+          </a:prstGeom>
+          <a:noFill/>
+        </p:spPr>
+        <p:txBody>
+          <a:bodyPr wrap="square" anchor="t" lIns="0" rIns="0" tIns="0" bIns="0">
+            <a:spAutoFit/>
+          </a:bodyPr>
+          <a:lstStyle/>
+          <a:p>
+            <a:r>
+              <a:rPr sz="2800" b="1" i="0">
+                <a:solidFill>
+                  <a:srgbClr val="2A2929"/>
+                </a:solidFill>
+                <a:latin typeface="Roboto"/>
+              </a:rPr>
+              <a:t>Updating through the template</a:t>
+            </a:r>
+          </a:p>
+        </p:txBody>
+      </p:sp>
+      <p:sp>
+        <p:nvSpPr>
+          <p:cNvPr id="3" name="Rectangle 2"/>
+          <p:cNvSpPr/>
+          <p:nvPr/>
+        </p:nvSpPr>
+        <p:spPr>
+          <a:xfrm>
+            <a:off x="658368" y="1371600"/>
+            <a:ext cx="1463040" cy="50800"/>
+          </a:xfrm>
+          <a:prstGeom prst="rect">
+            <a:avLst/>
+          </a:prstGeom>
+          <a:solidFill>
+            <a:srgbClr val="004488"/>
+          </a:solidFill>
+          <a:ln>
+            <a:noFill/>
+          </a:ln>
+          <a:effectLst/>
+        </p:spPr>
+        <p:style>
+          <a:lnRef idx="1">
+            <a:schemeClr val="accent1"/>
+          </a:lnRef>
+          <a:fillRef idx="3">
+            <a:schemeClr val="accent1"/>
+          </a:fillRef>
+          <a:effectRef idx="2">
+            <a:schemeClr val="accent1"/>
+          </a:effectRef>
+          <a:fontRef idx="minor">
+            <a:schemeClr val="lt1"/>
+          </a:fontRef>
+        </p:style>
+        <p:txBody>
+          <a:bodyPr rtlCol="0" anchor="ctr"/>
+          <a:lstStyle/>
+          <a:p>
+            <a:pPr algn="ctr"/>
+          </a:p>
+        </p:txBody>
+      </p:sp>
+      <p:sp>
+        <p:nvSpPr>
+          <p:cNvPr id="4" name="TextBox 3"/>
+          <p:cNvSpPr txBox="1"/>
+          <p:nvPr/>
+        </p:nvSpPr>
+        <p:spPr>
+          <a:xfrm>
+            <a:off x="658368" y="1691640"/>
+            <a:ext cx="10881360" cy="4480560"/>
+          </a:xfrm>
+          <a:prstGeom prst="rect">
+            <a:avLst/>
+          </a:prstGeom>
+          <a:noFill/>
+        </p:spPr>
+        <p:txBody>
+          <a:bodyPr wrap="square" anchor="ctr" lIns="0" rIns="0" tIns="0" bIns="0">
+            <a:spAutoFit/>
+          </a:bodyPr>
+          <a:lstStyle/>
+          <a:p>
+            <a:pPr marL="0" indent="0">
+              <a:lnSpc>
+                <a:spcPct val="105000"/>
+              </a:lnSpc>
+              <a:spcBef>
+                <a:spcPts val="0"/>
+              </a:spcBef>
+              <a:spcAft>
+                <a:spcPts val="1000"/>
+              </a:spcAft>
+            </a:pPr>
+            <a:r>
+              <a:rPr sz="2400" b="1" i="0">
+                <a:solidFill>
+                  <a:srgbClr val="EDAB0C"/>
+                </a:solidFill>
+                <a:latin typeface="Roboto"/>
+              </a:rPr>
+              <a:t>■  </a:t>
+            </a:r>
+            <a:r>
+              <a:rPr sz="2400" b="0" i="0">
+                <a:solidFill>
+                  <a:srgbClr val="2A2929"/>
+                </a:solidFill>
+                <a:latin typeface="Roboto"/>
+              </a:rPr>
+              <a:t>To change a deployed stack, change the template — never the live resources by hand.</a:t>
+            </a:r>
+          </a:p>
+          <a:p>
+            <a:pPr marL="0" indent="0">
+              <a:lnSpc>
+                <a:spcPct val="105000"/>
+              </a:lnSpc>
+              <a:spcBef>
+                <a:spcPts val="0"/>
+              </a:spcBef>
+              <a:spcAft>
+                <a:spcPts val="1000"/>
+              </a:spcAft>
+            </a:pPr>
+            <a:r>
+              <a:rPr sz="2400" b="1" i="0">
+                <a:solidFill>
+                  <a:srgbClr val="EDAB0C"/>
+                </a:solidFill>
+                <a:latin typeface="Roboto"/>
+              </a:rPr>
+              <a:t>■  </a:t>
+            </a:r>
+            <a:r>
+              <a:rPr sz="2400" b="0" i="0">
+                <a:solidFill>
+                  <a:srgbClr val="2A2929"/>
+                </a:solidFill>
+                <a:latin typeface="Roboto"/>
+              </a:rPr>
+              <a:t>A change set shows the diff before it runs: what will be added, modified, replaced.</a:t>
+            </a:r>
+          </a:p>
+          <a:p>
+            <a:pPr marL="0" indent="0">
+              <a:lnSpc>
+                <a:spcPct val="105000"/>
+              </a:lnSpc>
+              <a:spcBef>
+                <a:spcPts val="0"/>
+              </a:spcBef>
+              <a:spcAft>
+                <a:spcPts val="1000"/>
+              </a:spcAft>
+            </a:pPr>
+            <a:r>
+              <a:rPr sz="2400" b="1" i="0">
+                <a:solidFill>
+                  <a:srgbClr val="EDAB0C"/>
+                </a:solidFill>
+                <a:latin typeface="Roboto"/>
+              </a:rPr>
+              <a:t>■  </a:t>
+            </a:r>
+            <a:r>
+              <a:rPr sz="2400" b="0" i="0">
+                <a:solidFill>
+                  <a:srgbClr val="2A2929"/>
+                </a:solidFill>
+                <a:latin typeface="Roboto"/>
+              </a:rPr>
+              <a:t>Review the diff, execute, confirm — the same confirm habit as the deploy.</a:t>
+            </a:r>
+          </a:p>
+        </p:txBody>
+      </p:sp>
+      <p:sp>
+        <p:nvSpPr>
+          <p:cNvPr id="5" name="Rectangle 4"/>
+          <p:cNvSpPr/>
+          <p:nvPr/>
+        </p:nvSpPr>
+        <p:spPr>
+          <a:xfrm>
+            <a:off x="0" y="6565392"/>
+            <a:ext cx="12191695" cy="38100"/>
+          </a:xfrm>
+          <a:prstGeom prst="rect">
+            <a:avLst/>
+          </a:prstGeom>
+          <a:solidFill>
+            <a:srgbClr val="004488"/>
+          </a:solidFill>
+          <a:ln>
+            <a:noFill/>
+          </a:ln>
+          <a:effectLst/>
+        </p:spPr>
+        <p:style>
+          <a:lnRef idx="1">
+            <a:schemeClr val="accent1"/>
+          </a:lnRef>
+          <a:fillRef idx="3">
+            <a:schemeClr val="accent1"/>
+          </a:fillRef>
+          <a:effectRef idx="2">
+            <a:schemeClr val="accent1"/>
+          </a:effectRef>
+          <a:fontRef idx="minor">
+            <a:schemeClr val="lt1"/>
+          </a:fontRef>
+        </p:style>
+        <p:txBody>
+          <a:bodyPr rtlCol="0" anchor="ctr"/>
+          <a:lstStyle/>
+          <a:p>
+            <a:pPr algn="ctr"/>
+          </a:p>
+        </p:txBody>
+      </p:sp>
+      <p:sp>
+        <p:nvSpPr>
+          <p:cNvPr id="6" name="TextBox 5"/>
+          <p:cNvSpPr txBox="1"/>
+          <p:nvPr/>
+        </p:nvSpPr>
+        <p:spPr>
+          <a:xfrm>
+            <a:off x="502920" y="6400800"/>
+            <a:ext cx="5486400" cy="320040"/>
+          </a:xfrm>
+          <a:prstGeom prst="rect">
+            <a:avLst/>
+          </a:prstGeom>
+          <a:noFill/>
+        </p:spPr>
+        <p:txBody>
+          <a:bodyPr wrap="square" anchor="t" lIns="0" rIns="0" tIns="0" bIns="0">
+            <a:spAutoFit/>
+          </a:bodyPr>
+          <a:lstStyle/>
+          <a:p>
+            <a:r>
+              <a:rPr sz="1100" b="1" i="0">
+                <a:solidFill>
+                  <a:srgbClr val="2A2929"/>
+                </a:solidFill>
+                <a:latin typeface="Roboto"/>
+              </a:rPr>
+              <a:t>Kangan </a:t>
+            </a:r>
+            <a:r>
+              <a:rPr sz="1100" b="1" i="0">
+                <a:solidFill>
+                  <a:srgbClr val="D68E10"/>
+                </a:solidFill>
+                <a:latin typeface="Roboto"/>
+              </a:rPr>
+              <a:t>Institute</a:t>
+            </a:r>
+          </a:p>
+        </p:txBody>
+      </p:sp>
+      <p:sp>
+        <p:nvSpPr>
+          <p:cNvPr id="7" name="TextBox 6"/>
+          <p:cNvSpPr txBox="1"/>
+          <p:nvPr/>
+        </p:nvSpPr>
+        <p:spPr>
+          <a:xfrm>
+            <a:off x="10515600" y="6400800"/>
+            <a:ext cx="1188720" cy="320040"/>
+          </a:xfrm>
+          <a:prstGeom prst="rect">
+            <a:avLst/>
+          </a:prstGeom>
+          <a:noFill/>
+        </p:spPr>
+        <p:txBody>
+          <a:bodyPr wrap="square" anchor="t" lIns="0" rIns="0" tIns="0" bIns="0">
+            <a:spAutoFit/>
+          </a:bodyPr>
+          <a:lstStyle/>
+          <a:p>
+            <a:pPr algn="r"/>
+            <a:r>
+              <a:rPr sz="1100" b="0" i="0">
+                <a:solidFill>
+                  <a:srgbClr val="7A7A7A"/>
+                </a:solidFill>
+                <a:latin typeface="Roboto"/>
+              </a:rPr>
+              <a:t>16</a:t>
+            </a:r>
+          </a:p>
+        </p:txBody>
+      </p:sp>
+    </p:spTree>
+  </p:cSld>
+  <p:clrMapOvr>
+    <a:masterClrMapping/>
+  </p:clrMapOvr>
+</p:sld>
+</file>
+
+<file path=ppt/slides/slide22.xml><?xml version="1.0" encoding="utf-8"?>
+<p:sld xmlns:a="http://schemas.openxmlformats.org/drawingml/2006/main" xmlns:p="http://schemas.openxmlformats.org/presentationml/2006/main" xmlns:r="http://schemas.openxmlformats.org/officeDocument/2006/relationships">
+  <p:cSld>
+    <p:bg>
+      <p:bgPr>
+        <a:solidFill>
+          <a:srgbClr val="FFFFFF"/>
+        </a:solidFill>
+        <a:effectLst/>
+      </p:bgPr>
+    </p:bg>
+    <p:spTree>
+      <p:nvGrpSpPr>
+        <p:cNvPr id="1" name=""/>
+        <p:cNvGrpSpPr/>
+        <p:nvPr/>
+      </p:nvGrpSpPr>
+      <p:grpSpPr/>
+      <p:sp>
+        <p:nvSpPr>
+          <p:cNvPr id="2" name="TextBox 1"/>
+          <p:cNvSpPr txBox="1"/>
+          <p:nvPr/>
+        </p:nvSpPr>
+        <p:spPr>
+          <a:xfrm>
+            <a:off x="640080" y="457200"/>
+            <a:ext cx="10881360" cy="960120"/>
+          </a:xfrm>
+          <a:prstGeom prst="rect">
+            <a:avLst/>
+          </a:prstGeom>
+          <a:noFill/>
+        </p:spPr>
+        <p:txBody>
+          <a:bodyPr wrap="square" anchor="t" lIns="0" rIns="0" tIns="0" bIns="0">
+            <a:spAutoFit/>
+          </a:bodyPr>
+          <a:lstStyle/>
+          <a:p>
+            <a:r>
+              <a:rPr sz="2800" b="1" i="0">
+                <a:solidFill>
+                  <a:srgbClr val="2A2929"/>
+                </a:solidFill>
+                <a:latin typeface="Roboto"/>
+              </a:rPr>
+              <a:t>Return it to a known state</a:t>
+            </a:r>
+          </a:p>
+        </p:txBody>
+      </p:sp>
+      <p:sp>
+        <p:nvSpPr>
+          <p:cNvPr id="3" name="Rectangle 2"/>
+          <p:cNvSpPr/>
+          <p:nvPr/>
+        </p:nvSpPr>
+        <p:spPr>
+          <a:xfrm>
+            <a:off x="658368" y="1371600"/>
+            <a:ext cx="1463040" cy="50800"/>
+          </a:xfrm>
+          <a:prstGeom prst="rect">
+            <a:avLst/>
+          </a:prstGeom>
+          <a:solidFill>
+            <a:srgbClr val="004488"/>
+          </a:solidFill>
+          <a:ln>
+            <a:noFill/>
+          </a:ln>
+          <a:effectLst/>
+        </p:spPr>
+        <p:style>
+          <a:lnRef idx="1">
+            <a:schemeClr val="accent1"/>
+          </a:lnRef>
+          <a:fillRef idx="3">
+            <a:schemeClr val="accent1"/>
+          </a:fillRef>
+          <a:effectRef idx="2">
+            <a:schemeClr val="accent1"/>
+          </a:effectRef>
+          <a:fontRef idx="minor">
+            <a:schemeClr val="lt1"/>
+          </a:fontRef>
+        </p:style>
+        <p:txBody>
+          <a:bodyPr rtlCol="0" anchor="ctr"/>
+          <a:lstStyle/>
+          <a:p>
+            <a:pPr algn="ctr"/>
+          </a:p>
+        </p:txBody>
+      </p:sp>
+      <p:sp>
+        <p:nvSpPr>
+          <p:cNvPr id="4" name="TextBox 3"/>
+          <p:cNvSpPr txBox="1"/>
+          <p:nvPr/>
+        </p:nvSpPr>
+        <p:spPr>
+          <a:xfrm>
+            <a:off x="658368" y="1691640"/>
+            <a:ext cx="10881360" cy="4480560"/>
+          </a:xfrm>
+          <a:prstGeom prst="rect">
+            <a:avLst/>
+          </a:prstGeom>
+          <a:noFill/>
+        </p:spPr>
+        <p:txBody>
+          <a:bodyPr wrap="square" anchor="ctr" lIns="0" rIns="0" tIns="0" bIns="0">
+            <a:spAutoFit/>
+          </a:bodyPr>
+          <a:lstStyle/>
+          <a:p>
+            <a:pPr marL="0" indent="0">
+              <a:lnSpc>
+                <a:spcPct val="105000"/>
+              </a:lnSpc>
+              <a:spcBef>
+                <a:spcPts val="0"/>
+              </a:spcBef>
+              <a:spcAft>
+                <a:spcPts val="1000"/>
+              </a:spcAft>
+            </a:pPr>
+            <a:r>
+              <a:rPr sz="2400" b="1" i="0">
+                <a:solidFill>
+                  <a:srgbClr val="EDAB0C"/>
+                </a:solidFill>
+                <a:latin typeface="Roboto"/>
+              </a:rPr>
+              <a:t>■  </a:t>
+            </a:r>
+            <a:r>
+              <a:rPr sz="2400" b="0" i="0">
+                <a:solidFill>
+                  <a:srgbClr val="2A2929"/>
+                </a:solidFill>
+                <a:latin typeface="Roboto"/>
+              </a:rPr>
+              <a:t>A practice environment ends where it began: return the store to its known state.</a:t>
+            </a:r>
+          </a:p>
+          <a:p>
+            <a:pPr marL="0" indent="0">
+              <a:lnSpc>
+                <a:spcPct val="105000"/>
+              </a:lnSpc>
+              <a:spcBef>
+                <a:spcPts val="0"/>
+              </a:spcBef>
+              <a:spcAft>
+                <a:spcPts val="1000"/>
+              </a:spcAft>
+            </a:pPr>
+            <a:r>
+              <a:rPr sz="2400" b="1" i="0">
+                <a:solidFill>
+                  <a:srgbClr val="EDAB0C"/>
+                </a:solidFill>
+                <a:latin typeface="Roboto"/>
+              </a:rPr>
+              <a:t>■  </a:t>
+            </a:r>
+            <a:r>
+              <a:rPr sz="2400" b="0" i="0">
+                <a:solidFill>
+                  <a:srgbClr val="2A2929"/>
+                </a:solidFill>
+                <a:latin typeface="Roboto"/>
+              </a:rPr>
+              <a:t>Known state means provable — the template and the deployed reality agree again, and you can say how you know.</a:t>
+            </a:r>
+          </a:p>
+          <a:p>
+            <a:pPr marL="0" indent="0">
+              <a:lnSpc>
+                <a:spcPct val="105000"/>
+              </a:lnSpc>
+              <a:spcBef>
+                <a:spcPts val="0"/>
+              </a:spcBef>
+              <a:spcAft>
+                <a:spcPts val="1000"/>
+              </a:spcAft>
+            </a:pPr>
+            <a:r>
+              <a:rPr sz="2400" b="1" i="0">
+                <a:solidFill>
+                  <a:srgbClr val="EDAB0C"/>
+                </a:solidFill>
+                <a:latin typeface="Roboto"/>
+              </a:rPr>
+              <a:t>■  </a:t>
+            </a:r>
+            <a:r>
+              <a:rPr sz="2400" b="0" i="0">
+                <a:solidFill>
+                  <a:srgbClr val="2A2929"/>
+                </a:solidFill>
+                <a:latin typeface="Roboto"/>
+              </a:rPr>
+              <a:t>Stacks you manage through templates go up and come back down the same way.</a:t>
+            </a:r>
+          </a:p>
+        </p:txBody>
+      </p:sp>
+      <p:sp>
+        <p:nvSpPr>
+          <p:cNvPr id="5" name="Rectangle 4"/>
+          <p:cNvSpPr/>
+          <p:nvPr/>
+        </p:nvSpPr>
+        <p:spPr>
+          <a:xfrm>
+            <a:off x="0" y="6565392"/>
+            <a:ext cx="12191695" cy="38100"/>
+          </a:xfrm>
+          <a:prstGeom prst="rect">
+            <a:avLst/>
+          </a:prstGeom>
+          <a:solidFill>
+            <a:srgbClr val="004488"/>
+          </a:solidFill>
+          <a:ln>
+            <a:noFill/>
+          </a:ln>
+          <a:effectLst/>
+        </p:spPr>
+        <p:style>
+          <a:lnRef idx="1">
+            <a:schemeClr val="accent1"/>
+          </a:lnRef>
+          <a:fillRef idx="3">
+            <a:schemeClr val="accent1"/>
+          </a:fillRef>
+          <a:effectRef idx="2">
+            <a:schemeClr val="accent1"/>
+          </a:effectRef>
+          <a:fontRef idx="minor">
+            <a:schemeClr val="lt1"/>
+          </a:fontRef>
+        </p:style>
+        <p:txBody>
+          <a:bodyPr rtlCol="0" anchor="ctr"/>
+          <a:lstStyle/>
+          <a:p>
+            <a:pPr algn="ctr"/>
+          </a:p>
+        </p:txBody>
+      </p:sp>
+      <p:sp>
+        <p:nvSpPr>
+          <p:cNvPr id="6" name="TextBox 5"/>
+          <p:cNvSpPr txBox="1"/>
+          <p:nvPr/>
+        </p:nvSpPr>
+        <p:spPr>
+          <a:xfrm>
+            <a:off x="502920" y="6400800"/>
+            <a:ext cx="5486400" cy="320040"/>
+          </a:xfrm>
+          <a:prstGeom prst="rect">
+            <a:avLst/>
+          </a:prstGeom>
+          <a:noFill/>
+        </p:spPr>
+        <p:txBody>
+          <a:bodyPr wrap="square" anchor="t" lIns="0" rIns="0" tIns="0" bIns="0">
+            <a:spAutoFit/>
+          </a:bodyPr>
+          <a:lstStyle/>
+          <a:p>
+            <a:r>
+              <a:rPr sz="1100" b="1" i="0">
+                <a:solidFill>
+                  <a:srgbClr val="2A2929"/>
+                </a:solidFill>
+                <a:latin typeface="Roboto"/>
+              </a:rPr>
+              <a:t>Kangan </a:t>
+            </a:r>
+            <a:r>
+              <a:rPr sz="1100" b="1" i="0">
+                <a:solidFill>
+                  <a:srgbClr val="D68E10"/>
+                </a:solidFill>
+                <a:latin typeface="Roboto"/>
+              </a:rPr>
+              <a:t>Institute</a:t>
+            </a:r>
+          </a:p>
+        </p:txBody>
+      </p:sp>
+      <p:sp>
+        <p:nvSpPr>
+          <p:cNvPr id="7" name="TextBox 6"/>
+          <p:cNvSpPr txBox="1"/>
+          <p:nvPr/>
+        </p:nvSpPr>
+        <p:spPr>
+          <a:xfrm>
+            <a:off x="10515600" y="6400800"/>
+            <a:ext cx="1188720" cy="320040"/>
+          </a:xfrm>
+          <a:prstGeom prst="rect">
+            <a:avLst/>
+          </a:prstGeom>
+          <a:noFill/>
+        </p:spPr>
+        <p:txBody>
+          <a:bodyPr wrap="square" anchor="t" lIns="0" rIns="0" tIns="0" bIns="0">
+            <a:spAutoFit/>
+          </a:bodyPr>
+          <a:lstStyle/>
+          <a:p>
+            <a:pPr algn="r"/>
+            <a:r>
+              <a:rPr sz="1100" b="0" i="0">
+                <a:solidFill>
+                  <a:srgbClr val="7A7A7A"/>
+                </a:solidFill>
+                <a:latin typeface="Roboto"/>
+              </a:rPr>
+              <a:t>17</a:t>
+            </a:r>
+          </a:p>
+        </p:txBody>
+      </p:sp>
+    </p:spTree>
+  </p:cSld>
+  <p:clrMapOvr>
+    <a:masterClrMapping/>
+  </p:clrMapOvr>
+</p:sld>
+</file>
+
+<file path=ppt/slides/slide23.xml><?xml version="1.0" encoding="utf-8"?>
+<p:sld xmlns:a="http://schemas.openxmlformats.org/drawingml/2006/main" xmlns:p="http://schemas.openxmlformats.org/presentationml/2006/main" xmlns:r="http://schemas.openxmlformats.org/officeDocument/2006/relationships">
+  <p:cSld>
+    <p:bg>
+      <p:bgPr>
+        <a:solidFill>
+          <a:srgbClr val="FFFFFF"/>
+        </a:solidFill>
+        <a:effectLst/>
+      </p:bgPr>
+    </p:bg>
+    <p:spTree>
+      <p:nvGrpSpPr>
+        <p:cNvPr id="1" name=""/>
+        <p:cNvGrpSpPr/>
+        <p:nvPr/>
+      </p:nvGrpSpPr>
+      <p:grpSpPr/>
+      <p:sp>
+        <p:nvSpPr>
+          <p:cNvPr id="2" name="Rectangle 1"/>
+          <p:cNvSpPr/>
+          <p:nvPr/>
+        </p:nvSpPr>
+        <p:spPr>
+          <a:xfrm>
+            <a:off x="0" y="0"/>
+            <a:ext cx="12191695" cy="1234440"/>
+          </a:xfrm>
+          <a:prstGeom prst="rect">
+            <a:avLst/>
+          </a:prstGeom>
+          <a:solidFill>
+            <a:srgbClr val="004488"/>
+          </a:solidFill>
+          <a:ln>
+            <a:noFill/>
+          </a:ln>
+          <a:effectLst/>
+        </p:spPr>
+        <p:style>
+          <a:lnRef idx="1">
+            <a:schemeClr val="accent1"/>
+          </a:lnRef>
+          <a:fillRef idx="3">
+            <a:schemeClr val="accent1"/>
+          </a:fillRef>
+          <a:effectRef idx="2">
+            <a:schemeClr val="accent1"/>
+          </a:effectRef>
+          <a:fontRef idx="minor">
+            <a:schemeClr val="lt1"/>
+          </a:fontRef>
+        </p:style>
+        <p:txBody>
+          <a:bodyPr rtlCol="0" anchor="ctr"/>
+          <a:lstStyle/>
+          <a:p>
+            <a:pPr algn="ctr"/>
+          </a:p>
+        </p:txBody>
+      </p:sp>
+      <p:sp>
+        <p:nvSpPr>
+          <p:cNvPr id="3" name="Rounded Rectangle 2"/>
+          <p:cNvSpPr/>
+          <p:nvPr/>
+        </p:nvSpPr>
+        <p:spPr>
+          <a:xfrm>
+            <a:off x="640080" y="384048"/>
+            <a:ext cx="1691640" cy="457200"/>
+          </a:xfrm>
+          <a:prstGeom prst="roundRect">
+            <a:avLst/>
+          </a:prstGeom>
+          <a:solidFill>
+            <a:srgbClr val="2A2929"/>
+          </a:solidFill>
+          <a:ln>
+            <a:noFill/>
+          </a:ln>
+          <a:effectLst/>
+        </p:spPr>
+        <p:style>
+          <a:lnRef idx="1">
+            <a:schemeClr val="accent1"/>
+          </a:lnRef>
+          <a:fillRef idx="3">
+            <a:schemeClr val="accent1"/>
+          </a:fillRef>
+          <a:effectRef idx="2">
+            <a:schemeClr val="accent1"/>
+          </a:effectRef>
+          <a:fontRef idx="minor">
+            <a:schemeClr val="lt1"/>
+          </a:fontRef>
+        </p:style>
+        <p:txBody>
+          <a:bodyPr rtlCol="0" anchor="ctr"/>
+          <a:lstStyle/>
+          <a:p>
+            <a:pPr algn="ctr"/>
+            <a:r>
+              <a:rPr sz="1400" b="1" i="0">
+                <a:solidFill>
+                  <a:srgbClr val="FBB900"/>
+                </a:solidFill>
+                <a:latin typeface="Roboto"/>
+              </a:rPr>
+              <a:t>ACTIVITY</a:t>
+            </a:r>
+          </a:p>
+        </p:txBody>
+      </p:sp>
+      <p:sp>
+        <p:nvSpPr>
+          <p:cNvPr id="4" name="TextBox 3"/>
+          <p:cNvSpPr txBox="1"/>
+          <p:nvPr/>
+        </p:nvSpPr>
+        <p:spPr>
+          <a:xfrm>
+            <a:off x="2560320" y="310896"/>
+            <a:ext cx="8961120" cy="685800"/>
+          </a:xfrm>
+          <a:prstGeom prst="rect">
+            <a:avLst/>
+          </a:prstGeom>
+          <a:noFill/>
+        </p:spPr>
+        <p:txBody>
+          <a:bodyPr wrap="square" anchor="ctr" lIns="0" rIns="0" tIns="0" bIns="0">
+            <a:spAutoFit/>
+          </a:bodyPr>
+          <a:lstStyle/>
+          <a:p>
+            <a:r>
+              <a:rPr sz="2600" b="1" i="0">
+                <a:solidFill>
+                  <a:srgbClr val="FFFFFF"/>
+                </a:solidFill>
+                <a:latin typeface="Roboto"/>
+              </a:rPr>
+              <a:t>Update and reset</a:t>
+            </a:r>
+          </a:p>
+        </p:txBody>
+      </p:sp>
+      <p:sp>
+        <p:nvSpPr>
+          <p:cNvPr id="5" name="TextBox 4"/>
+          <p:cNvSpPr txBox="1"/>
+          <p:nvPr/>
+        </p:nvSpPr>
+        <p:spPr>
+          <a:xfrm>
+            <a:off x="658368" y="1554480"/>
+            <a:ext cx="10881360" cy="4297680"/>
+          </a:xfrm>
+          <a:prstGeom prst="rect">
+            <a:avLst/>
+          </a:prstGeom>
+          <a:noFill/>
+        </p:spPr>
+        <p:txBody>
+          <a:bodyPr wrap="square" anchor="t" lIns="0" rIns="0" tIns="0" bIns="0">
+            <a:spAutoFit/>
+          </a:bodyPr>
+          <a:lstStyle/>
+          <a:p>
+            <a:pPr marL="0" indent="0">
+              <a:lnSpc>
+                <a:spcPct val="105000"/>
+              </a:lnSpc>
+              <a:spcBef>
+                <a:spcPts val="0"/>
+              </a:spcBef>
+              <a:spcAft>
+                <a:spcPts val="1000"/>
+              </a:spcAft>
+            </a:pPr>
+            <a:r>
+              <a:rPr sz="1700" b="1" i="0">
+                <a:solidFill>
+                  <a:srgbClr val="EDAB0C"/>
+                </a:solidFill>
+                <a:latin typeface="Roboto"/>
+              </a:rPr>
+              <a:t>■  </a:t>
+            </a:r>
+            <a:r>
+              <a:rPr sz="1700" b="0" i="0">
+                <a:solidFill>
+                  <a:srgbClr val="2A2929"/>
+                </a:solidFill>
+                <a:latin typeface="Roboto"/>
+              </a:rPr>
+              <a:t>Workbook — tasks 9 and 10.</a:t>
+            </a:r>
+          </a:p>
+          <a:p>
+            <a:pPr marL="0" indent="0">
+              <a:lnSpc>
+                <a:spcPct val="105000"/>
+              </a:lnSpc>
+              <a:spcBef>
+                <a:spcPts val="0"/>
+              </a:spcBef>
+              <a:spcAft>
+                <a:spcPts val="1000"/>
+              </a:spcAft>
+            </a:pPr>
+            <a:r>
+              <a:rPr sz="1700" b="1" i="0">
+                <a:solidFill>
+                  <a:srgbClr val="EDAB0C"/>
+                </a:solidFill>
+                <a:latin typeface="Roboto"/>
+              </a:rPr>
+              <a:t>■  </a:t>
+            </a:r>
+            <a:r>
+              <a:rPr sz="1700" b="0" i="0">
+                <a:solidFill>
+                  <a:srgbClr val="2A2929"/>
+                </a:solidFill>
+                <a:latin typeface="Roboto"/>
+              </a:rPr>
+              <a:t>Update the provided template and redeploy through a change set, then return the store to its known state and show how you know.</a:t>
+            </a:r>
+          </a:p>
+        </p:txBody>
+      </p:sp>
+      <p:sp>
+        <p:nvSpPr>
+          <p:cNvPr id="6" name="Rounded Rectangle 5"/>
+          <p:cNvSpPr/>
+          <p:nvPr/>
+        </p:nvSpPr>
+        <p:spPr>
+          <a:xfrm>
+            <a:off x="640080" y="5897880"/>
+            <a:ext cx="4023360" cy="457200"/>
+          </a:xfrm>
+          <a:prstGeom prst="roundRect">
+            <a:avLst/>
+          </a:prstGeom>
+          <a:solidFill>
+            <a:srgbClr val="F9F9F9"/>
+          </a:solidFill>
+          <a:ln w="12700">
+            <a:solidFill>
+              <a:srgbClr val="CCCCCC"/>
+            </a:solidFill>
+          </a:ln>
+          <a:effectLst/>
+        </p:spPr>
+        <p:style>
+          <a:lnRef idx="1">
+            <a:schemeClr val="accent1"/>
+          </a:lnRef>
+          <a:fillRef idx="3">
+            <a:schemeClr val="accent1"/>
+          </a:fillRef>
+          <a:effectRef idx="2">
+            <a:schemeClr val="accent1"/>
+          </a:effectRef>
+          <a:fontRef idx="minor">
+            <a:schemeClr val="lt1"/>
+          </a:fontRef>
+        </p:style>
+        <p:txBody>
+          <a:bodyPr rtlCol="0" anchor="ctr"/>
+          <a:lstStyle/>
+          <a:p>
+            <a:pPr algn="ctr"/>
+          </a:p>
+        </p:txBody>
+      </p:sp>
+      <p:sp>
+        <p:nvSpPr>
+          <p:cNvPr id="7" name="TextBox 6"/>
+          <p:cNvSpPr txBox="1"/>
+          <p:nvPr/>
+        </p:nvSpPr>
+        <p:spPr>
+          <a:xfrm>
+            <a:off x="822960" y="5943600"/>
+            <a:ext cx="3657600" cy="365760"/>
+          </a:xfrm>
+          <a:prstGeom prst="rect">
+            <a:avLst/>
+          </a:prstGeom>
+          <a:noFill/>
+        </p:spPr>
+        <p:txBody>
+          <a:bodyPr wrap="square" anchor="ctr" lIns="0" rIns="0" tIns="0" bIns="0">
+            <a:spAutoFit/>
+          </a:bodyPr>
+          <a:lstStyle/>
+          <a:p>
+            <a:r>
+              <a:rPr sz="1500" b="1" i="0">
+                <a:solidFill>
+                  <a:srgbClr val="2A2929"/>
+                </a:solidFill>
+                <a:latin typeface="Roboto"/>
+              </a:rPr>
+              <a:t>⏱  ~25 min</a:t>
+            </a:r>
+          </a:p>
+        </p:txBody>
+      </p:sp>
+      <p:sp>
+        <p:nvSpPr>
+          <p:cNvPr id="8" name="Rectangle 7"/>
+          <p:cNvSpPr/>
+          <p:nvPr/>
+        </p:nvSpPr>
+        <p:spPr>
+          <a:xfrm>
+            <a:off x="0" y="6565392"/>
+            <a:ext cx="12191695" cy="38100"/>
+          </a:xfrm>
+          <a:prstGeom prst="rect">
+            <a:avLst/>
+          </a:prstGeom>
+          <a:solidFill>
+            <a:srgbClr val="004488"/>
+          </a:solidFill>
+          <a:ln>
+            <a:noFill/>
+          </a:ln>
+          <a:effectLst/>
+        </p:spPr>
+        <p:style>
+          <a:lnRef idx="1">
+            <a:schemeClr val="accent1"/>
+          </a:lnRef>
+          <a:fillRef idx="3">
+            <a:schemeClr val="accent1"/>
+          </a:fillRef>
+          <a:effectRef idx="2">
+            <a:schemeClr val="accent1"/>
+          </a:effectRef>
+          <a:fontRef idx="minor">
+            <a:schemeClr val="lt1"/>
+          </a:fontRef>
+        </p:style>
+        <p:txBody>
+          <a:bodyPr rtlCol="0" anchor="ctr"/>
+          <a:lstStyle/>
+          <a:p>
+            <a:pPr algn="ctr"/>
+          </a:p>
+        </p:txBody>
+      </p:sp>
+      <p:sp>
+        <p:nvSpPr>
+          <p:cNvPr id="9" name="TextBox 8"/>
+          <p:cNvSpPr txBox="1"/>
+          <p:nvPr/>
+        </p:nvSpPr>
+        <p:spPr>
+          <a:xfrm>
+            <a:off x="502920" y="6400800"/>
+            <a:ext cx="5486400" cy="320040"/>
+          </a:xfrm>
+          <a:prstGeom prst="rect">
+            <a:avLst/>
+          </a:prstGeom>
+          <a:noFill/>
+        </p:spPr>
+        <p:txBody>
+          <a:bodyPr wrap="square" anchor="t" lIns="0" rIns="0" tIns="0" bIns="0">
+            <a:spAutoFit/>
+          </a:bodyPr>
+          <a:lstStyle/>
+          <a:p>
+            <a:r>
+              <a:rPr sz="1100" b="1" i="0">
+                <a:solidFill>
+                  <a:srgbClr val="2A2929"/>
+                </a:solidFill>
+                <a:latin typeface="Roboto"/>
+              </a:rPr>
+              <a:t>Kangan </a:t>
+            </a:r>
+            <a:r>
+              <a:rPr sz="1100" b="1" i="0">
+                <a:solidFill>
+                  <a:srgbClr val="D68E10"/>
+                </a:solidFill>
+                <a:latin typeface="Roboto"/>
+              </a:rPr>
+              <a:t>Institute</a:t>
+            </a:r>
+          </a:p>
+        </p:txBody>
+      </p:sp>
+      <p:sp>
+        <p:nvSpPr>
+          <p:cNvPr id="10" name="TextBox 9"/>
+          <p:cNvSpPr txBox="1"/>
+          <p:nvPr/>
+        </p:nvSpPr>
+        <p:spPr>
+          <a:xfrm>
+            <a:off x="10515600" y="6400800"/>
+            <a:ext cx="1188720" cy="320040"/>
+          </a:xfrm>
+          <a:prstGeom prst="rect">
+            <a:avLst/>
+          </a:prstGeom>
+          <a:noFill/>
+        </p:spPr>
+        <p:txBody>
+          <a:bodyPr wrap="square" anchor="t" lIns="0" rIns="0" tIns="0" bIns="0">
+            <a:spAutoFit/>
+          </a:bodyPr>
+          <a:lstStyle/>
+          <a:p>
+            <a:pPr algn="r"/>
+            <a:r>
+              <a:rPr sz="1100" b="0" i="0">
+                <a:solidFill>
+                  <a:srgbClr val="7A7A7A"/>
+                </a:solidFill>
+                <a:latin typeface="Roboto"/>
+              </a:rPr>
+              <a:t>18</a:t>
+            </a:r>
+          </a:p>
+        </p:txBody>
+      </p:sp>
+    </p:spTree>
+  </p:cSld>
+  <p:clrMapOvr>
+    <a:masterClrMapping/>
+  </p:clrMapOvr>
+</p:sld>
+</file>
+
+<file path=ppt/slides/slide24.xml><?xml version="1.0" encoding="utf-8"?>
+<p:sld xmlns:a="http://schemas.openxmlformats.org/drawingml/2006/main" xmlns:p="http://schemas.openxmlformats.org/presentationml/2006/main" xmlns:r="http://schemas.openxmlformats.org/officeDocument/2006/relationships">
+  <p:cSld>
+    <p:bg>
+      <p:bgPr>
+        <a:solidFill>
+          <a:srgbClr val="F9F9F9"/>
+        </a:solidFill>
+        <a:effectLst/>
+      </p:bgPr>
+    </p:bg>
+    <p:spTree>
+      <p:nvGrpSpPr>
+        <p:cNvPr id="1" name=""/>
+        <p:cNvGrpSpPr/>
+        <p:nvPr/>
+      </p:nvGrpSpPr>
+      <p:grpSpPr/>
+      <p:sp>
+        <p:nvSpPr>
+          <p:cNvPr id="2" name="TextBox 1"/>
+          <p:cNvSpPr txBox="1"/>
+          <p:nvPr/>
+        </p:nvSpPr>
+        <p:spPr>
+          <a:xfrm>
+            <a:off x="640080" y="548640"/>
+            <a:ext cx="10881360" cy="1097280"/>
+          </a:xfrm>
+          <a:prstGeom prst="rect">
+            <a:avLst/>
+          </a:prstGeom>
+          <a:noFill/>
+        </p:spPr>
+        <p:txBody>
+          <a:bodyPr wrap="square" anchor="t" lIns="0" rIns="0" tIns="0" bIns="0">
+            <a:spAutoFit/>
+          </a:bodyPr>
+          <a:lstStyle/>
+          <a:p>
+            <a:r>
+              <a:rPr sz="3200" b="1" i="0">
+                <a:solidFill>
+                  <a:srgbClr val="2A2929"/>
+                </a:solidFill>
+                <a:latin typeface="Roboto"/>
+              </a:rPr>
+              <a:t>Key takeaways</a:t>
+            </a:r>
+          </a:p>
+          <a:p>
+            <a:pPr>
+              <a:spcBef>
+                <a:spcPts val="200"/>
+              </a:spcBef>
+            </a:pPr>
+            <a:r>
+              <a:rPr sz="1800" b="1" i="0">
+                <a:solidFill>
+                  <a:srgbClr val="004488"/>
+                </a:solidFill>
+                <a:latin typeface="Roboto"/>
+              </a:rPr>
+              <a:t>Section 4 · Change and reset</a:t>
+            </a:r>
+          </a:p>
+        </p:txBody>
+      </p:sp>
+      <p:sp>
+        <p:nvSpPr>
+          <p:cNvPr id="3" name="Rectangle 2"/>
+          <p:cNvSpPr/>
+          <p:nvPr/>
+        </p:nvSpPr>
+        <p:spPr>
+          <a:xfrm>
+            <a:off x="658368" y="1600200"/>
+            <a:ext cx="1463040" cy="50800"/>
+          </a:xfrm>
+          <a:prstGeom prst="rect">
+            <a:avLst/>
+          </a:prstGeom>
+          <a:solidFill>
+            <a:srgbClr val="004488"/>
+          </a:solidFill>
+          <a:ln>
+            <a:noFill/>
+          </a:ln>
+          <a:effectLst/>
+        </p:spPr>
+        <p:style>
+          <a:lnRef idx="1">
+            <a:schemeClr val="accent1"/>
+          </a:lnRef>
+          <a:fillRef idx="3">
+            <a:schemeClr val="accent1"/>
+          </a:fillRef>
+          <a:effectRef idx="2">
+            <a:schemeClr val="accent1"/>
+          </a:effectRef>
+          <a:fontRef idx="minor">
+            <a:schemeClr val="lt1"/>
+          </a:fontRef>
+        </p:style>
+        <p:txBody>
+          <a:bodyPr rtlCol="0" anchor="ctr"/>
+          <a:lstStyle/>
+          <a:p>
+            <a:pPr algn="ctr"/>
+          </a:p>
+        </p:txBody>
+      </p:sp>
+      <p:sp>
+        <p:nvSpPr>
+          <p:cNvPr id="4" name="Rectangle 3"/>
+          <p:cNvSpPr/>
+          <p:nvPr/>
+        </p:nvSpPr>
+        <p:spPr>
+          <a:xfrm>
+            <a:off x="640080" y="1965960"/>
+            <a:ext cx="10927080" cy="841248"/>
+          </a:xfrm>
+          <a:prstGeom prst="rect">
+            <a:avLst/>
+          </a:prstGeom>
+          <a:solidFill>
+            <a:srgbClr val="FFFFFF"/>
+          </a:solidFill>
+          <a:ln w="12700">
+            <a:solidFill>
+              <a:srgbClr val="CCCCCC"/>
+            </a:solidFill>
+          </a:ln>
+          <a:effectLst/>
+        </p:spPr>
+        <p:style>
+          <a:lnRef idx="1">
+            <a:schemeClr val="accent1"/>
+          </a:lnRef>
+          <a:fillRef idx="3">
+            <a:schemeClr val="accent1"/>
+          </a:fillRef>
+          <a:effectRef idx="2">
+            <a:schemeClr val="accent1"/>
+          </a:effectRef>
+          <a:fontRef idx="minor">
+            <a:schemeClr val="lt1"/>
+          </a:fontRef>
+        </p:style>
+        <p:txBody>
+          <a:bodyPr rtlCol="0" anchor="ctr"/>
+          <a:lstStyle/>
+          <a:p>
+            <a:pPr algn="ctr"/>
+          </a:p>
+        </p:txBody>
+      </p:sp>
+      <p:sp>
+        <p:nvSpPr>
+          <p:cNvPr id="5" name="Rectangle 4"/>
+          <p:cNvSpPr/>
+          <p:nvPr/>
+        </p:nvSpPr>
+        <p:spPr>
+          <a:xfrm>
+            <a:off x="640080" y="1965960"/>
+            <a:ext cx="109728" cy="841248"/>
+          </a:xfrm>
+          <a:prstGeom prst="rect">
+            <a:avLst/>
+          </a:prstGeom>
+          <a:solidFill>
+            <a:srgbClr val="004488"/>
+          </a:solidFill>
+          <a:ln>
+            <a:noFill/>
+          </a:ln>
+          <a:effectLst/>
+        </p:spPr>
+        <p:style>
+          <a:lnRef idx="1">
+            <a:schemeClr val="accent1"/>
+          </a:lnRef>
+          <a:fillRef idx="3">
+            <a:schemeClr val="accent1"/>
+          </a:fillRef>
+          <a:effectRef idx="2">
+            <a:schemeClr val="accent1"/>
+          </a:effectRef>
+          <a:fontRef idx="minor">
+            <a:schemeClr val="lt1"/>
+          </a:fontRef>
+        </p:style>
+        <p:txBody>
+          <a:bodyPr rtlCol="0" anchor="ctr"/>
+          <a:lstStyle/>
+          <a:p>
+            <a:pPr algn="ctr"/>
+          </a:p>
+        </p:txBody>
+      </p:sp>
+      <p:sp>
+        <p:nvSpPr>
+          <p:cNvPr id="6" name="TextBox 5"/>
+          <p:cNvSpPr txBox="1"/>
+          <p:nvPr/>
+        </p:nvSpPr>
+        <p:spPr>
+          <a:xfrm>
+            <a:off x="960120" y="1965960"/>
+            <a:ext cx="10424160" cy="841248"/>
+          </a:xfrm>
+          <a:prstGeom prst="rect">
+            <a:avLst/>
+          </a:prstGeom>
+          <a:noFill/>
+        </p:spPr>
+        <p:txBody>
+          <a:bodyPr wrap="square" anchor="ctr" lIns="0" rIns="0" tIns="0" bIns="0">
+            <a:spAutoFit/>
+          </a:bodyPr>
+          <a:lstStyle/>
+          <a:p>
+            <a:pPr>
+              <a:lnSpc>
+                <a:spcPct val="100000"/>
+              </a:lnSpc>
+            </a:pPr>
+            <a:r>
+              <a:rPr sz="1700" b="0" i="0">
+                <a:solidFill>
+                  <a:srgbClr val="2A2929"/>
+                </a:solidFill>
+                <a:latin typeface="Roboto"/>
+              </a:rPr>
+              <a:t>Change the template, not the resources.</a:t>
+            </a:r>
+          </a:p>
+        </p:txBody>
+      </p:sp>
+      <p:sp>
+        <p:nvSpPr>
+          <p:cNvPr id="7" name="Rectangle 6"/>
+          <p:cNvSpPr/>
+          <p:nvPr/>
+        </p:nvSpPr>
+        <p:spPr>
+          <a:xfrm>
+            <a:off x="640080" y="2916936"/>
+            <a:ext cx="10927080" cy="841248"/>
+          </a:xfrm>
+          <a:prstGeom prst="rect">
+            <a:avLst/>
+          </a:prstGeom>
+          <a:solidFill>
+            <a:srgbClr val="FFFFFF"/>
+          </a:solidFill>
+          <a:ln w="12700">
+            <a:solidFill>
+              <a:srgbClr val="CCCCCC"/>
+            </a:solidFill>
+          </a:ln>
+          <a:effectLst/>
+        </p:spPr>
+        <p:style>
+          <a:lnRef idx="1">
+            <a:schemeClr val="accent1"/>
+          </a:lnRef>
+          <a:fillRef idx="3">
+            <a:schemeClr val="accent1"/>
+          </a:fillRef>
+          <a:effectRef idx="2">
+            <a:schemeClr val="accent1"/>
+          </a:effectRef>
+          <a:fontRef idx="minor">
+            <a:schemeClr val="lt1"/>
+          </a:fontRef>
+        </p:style>
+        <p:txBody>
+          <a:bodyPr rtlCol="0" anchor="ctr"/>
+          <a:lstStyle/>
+          <a:p>
+            <a:pPr algn="ctr"/>
+          </a:p>
+        </p:txBody>
+      </p:sp>
+      <p:sp>
+        <p:nvSpPr>
+          <p:cNvPr id="8" name="Rectangle 7"/>
+          <p:cNvSpPr/>
+          <p:nvPr/>
+        </p:nvSpPr>
+        <p:spPr>
+          <a:xfrm>
+            <a:off x="640080" y="2916936"/>
+            <a:ext cx="109728" cy="841248"/>
+          </a:xfrm>
+          <a:prstGeom prst="rect">
+            <a:avLst/>
+          </a:prstGeom>
+          <a:solidFill>
+            <a:srgbClr val="004488"/>
+          </a:solidFill>
+          <a:ln>
+            <a:noFill/>
+          </a:ln>
+          <a:effectLst/>
+        </p:spPr>
+        <p:style>
+          <a:lnRef idx="1">
+            <a:schemeClr val="accent1"/>
+          </a:lnRef>
+          <a:fillRef idx="3">
+            <a:schemeClr val="accent1"/>
+          </a:fillRef>
+          <a:effectRef idx="2">
+            <a:schemeClr val="accent1"/>
+          </a:effectRef>
+          <a:fontRef idx="minor">
+            <a:schemeClr val="lt1"/>
+          </a:fontRef>
+        </p:style>
+        <p:txBody>
+          <a:bodyPr rtlCol="0" anchor="ctr"/>
+          <a:lstStyle/>
+          <a:p>
+            <a:pPr algn="ctr"/>
+          </a:p>
+        </p:txBody>
+      </p:sp>
+      <p:sp>
+        <p:nvSpPr>
+          <p:cNvPr id="9" name="TextBox 8"/>
+          <p:cNvSpPr txBox="1"/>
+          <p:nvPr/>
+        </p:nvSpPr>
+        <p:spPr>
+          <a:xfrm>
+            <a:off x="960120" y="2916936"/>
+            <a:ext cx="10424160" cy="841248"/>
+          </a:xfrm>
+          <a:prstGeom prst="rect">
+            <a:avLst/>
+          </a:prstGeom>
+          <a:noFill/>
+        </p:spPr>
+        <p:txBody>
+          <a:bodyPr wrap="square" anchor="ctr" lIns="0" rIns="0" tIns="0" bIns="0">
+            <a:spAutoFit/>
+          </a:bodyPr>
+          <a:lstStyle/>
+          <a:p>
+            <a:pPr>
+              <a:lnSpc>
+                <a:spcPct val="100000"/>
+              </a:lnSpc>
+            </a:pPr>
+            <a:r>
+              <a:rPr sz="1700" b="0" i="0">
+                <a:solidFill>
+                  <a:srgbClr val="2A2929"/>
+                </a:solidFill>
+                <a:latin typeface="Roboto"/>
+              </a:rPr>
+              <a:t>Review the diff before it runs.</a:t>
+            </a:r>
+          </a:p>
+        </p:txBody>
+      </p:sp>
+      <p:sp>
+        <p:nvSpPr>
+          <p:cNvPr id="10" name="Rectangle 9"/>
+          <p:cNvSpPr/>
+          <p:nvPr/>
+        </p:nvSpPr>
+        <p:spPr>
+          <a:xfrm>
+            <a:off x="640080" y="3867912"/>
+            <a:ext cx="10927080" cy="841248"/>
+          </a:xfrm>
+          <a:prstGeom prst="rect">
+            <a:avLst/>
+          </a:prstGeom>
+          <a:solidFill>
+            <a:srgbClr val="FFFFFF"/>
+          </a:solidFill>
+          <a:ln w="12700">
+            <a:solidFill>
+              <a:srgbClr val="CCCCCC"/>
+            </a:solidFill>
+          </a:ln>
+          <a:effectLst/>
+        </p:spPr>
+        <p:style>
+          <a:lnRef idx="1">
+            <a:schemeClr val="accent1"/>
+          </a:lnRef>
+          <a:fillRef idx="3">
+            <a:schemeClr val="accent1"/>
+          </a:fillRef>
+          <a:effectRef idx="2">
+            <a:schemeClr val="accent1"/>
+          </a:effectRef>
+          <a:fontRef idx="minor">
+            <a:schemeClr val="lt1"/>
+          </a:fontRef>
+        </p:style>
+        <p:txBody>
+          <a:bodyPr rtlCol="0" anchor="ctr"/>
+          <a:lstStyle/>
+          <a:p>
+            <a:pPr algn="ctr"/>
+          </a:p>
+        </p:txBody>
+      </p:sp>
+      <p:sp>
+        <p:nvSpPr>
+          <p:cNvPr id="11" name="Rectangle 10"/>
+          <p:cNvSpPr/>
+          <p:nvPr/>
+        </p:nvSpPr>
+        <p:spPr>
+          <a:xfrm>
+            <a:off x="640080" y="3867912"/>
+            <a:ext cx="109728" cy="841248"/>
+          </a:xfrm>
+          <a:prstGeom prst="rect">
+            <a:avLst/>
+          </a:prstGeom>
+          <a:solidFill>
+            <a:srgbClr val="004488"/>
+          </a:solidFill>
+          <a:ln>
+            <a:noFill/>
+          </a:ln>
+          <a:effectLst/>
+        </p:spPr>
+        <p:style>
+          <a:lnRef idx="1">
+            <a:schemeClr val="accent1"/>
+          </a:lnRef>
+          <a:fillRef idx="3">
+            <a:schemeClr val="accent1"/>
+          </a:fillRef>
+          <a:effectRef idx="2">
+            <a:schemeClr val="accent1"/>
+          </a:effectRef>
+          <a:fontRef idx="minor">
+            <a:schemeClr val="lt1"/>
+          </a:fontRef>
+        </p:style>
+        <p:txBody>
+          <a:bodyPr rtlCol="0" anchor="ctr"/>
+          <a:lstStyle/>
+          <a:p>
+            <a:pPr algn="ctr"/>
+          </a:p>
+        </p:txBody>
+      </p:sp>
+      <p:sp>
+        <p:nvSpPr>
+          <p:cNvPr id="12" name="TextBox 11"/>
+          <p:cNvSpPr txBox="1"/>
+          <p:nvPr/>
+        </p:nvSpPr>
+        <p:spPr>
+          <a:xfrm>
+            <a:off x="960120" y="3867912"/>
+            <a:ext cx="10424160" cy="841248"/>
+          </a:xfrm>
+          <a:prstGeom prst="rect">
+            <a:avLst/>
+          </a:prstGeom>
+          <a:noFill/>
+        </p:spPr>
+        <p:txBody>
+          <a:bodyPr wrap="square" anchor="ctr" lIns="0" rIns="0" tIns="0" bIns="0">
+            <a:spAutoFit/>
+          </a:bodyPr>
+          <a:lstStyle/>
+          <a:p>
+            <a:pPr>
+              <a:lnSpc>
+                <a:spcPct val="100000"/>
+              </a:lnSpc>
+            </a:pPr>
+            <a:r>
+              <a:rPr sz="1700" b="0" i="0">
+                <a:solidFill>
+                  <a:srgbClr val="2A2929"/>
+                </a:solidFill>
+                <a:latin typeface="Roboto"/>
+              </a:rPr>
+              <a:t>Known state is provable state.</a:t>
+            </a:r>
+          </a:p>
+        </p:txBody>
+      </p:sp>
+      <p:sp>
+        <p:nvSpPr>
+          <p:cNvPr id="13" name="Rectangle 12"/>
+          <p:cNvSpPr/>
+          <p:nvPr/>
+        </p:nvSpPr>
+        <p:spPr>
+          <a:xfrm>
+            <a:off x="0" y="6565392"/>
+            <a:ext cx="12191695" cy="38100"/>
+          </a:xfrm>
+          <a:prstGeom prst="rect">
+            <a:avLst/>
+          </a:prstGeom>
+          <a:solidFill>
+            <a:srgbClr val="004488"/>
+          </a:solidFill>
+          <a:ln>
+            <a:noFill/>
+          </a:ln>
+          <a:effectLst/>
+        </p:spPr>
+        <p:style>
+          <a:lnRef idx="1">
+            <a:schemeClr val="accent1"/>
+          </a:lnRef>
+          <a:fillRef idx="3">
+            <a:schemeClr val="accent1"/>
+          </a:fillRef>
+          <a:effectRef idx="2">
+            <a:schemeClr val="accent1"/>
+          </a:effectRef>
+          <a:fontRef idx="minor">
+            <a:schemeClr val="lt1"/>
+          </a:fontRef>
+        </p:style>
+        <p:txBody>
+          <a:bodyPr rtlCol="0" anchor="ctr"/>
+          <a:lstStyle/>
+          <a:p>
+            <a:pPr algn="ctr"/>
+          </a:p>
+        </p:txBody>
+      </p:sp>
+      <p:sp>
+        <p:nvSpPr>
+          <p:cNvPr id="14" name="TextBox 13"/>
+          <p:cNvSpPr txBox="1"/>
+          <p:nvPr/>
+        </p:nvSpPr>
+        <p:spPr>
+          <a:xfrm>
+            <a:off x="502920" y="6400800"/>
+            <a:ext cx="5486400" cy="320040"/>
+          </a:xfrm>
+          <a:prstGeom prst="rect">
+            <a:avLst/>
+          </a:prstGeom>
+          <a:noFill/>
+        </p:spPr>
+        <p:txBody>
+          <a:bodyPr wrap="square" anchor="t" lIns="0" rIns="0" tIns="0" bIns="0">
+            <a:spAutoFit/>
+          </a:bodyPr>
+          <a:lstStyle/>
+          <a:p>
+            <a:r>
+              <a:rPr sz="1100" b="1" i="0">
+                <a:solidFill>
+                  <a:srgbClr val="2A2929"/>
+                </a:solidFill>
+                <a:latin typeface="Roboto"/>
+              </a:rPr>
+              <a:t>Kangan </a:t>
+            </a:r>
+            <a:r>
+              <a:rPr sz="1100" b="1" i="0">
+                <a:solidFill>
+                  <a:srgbClr val="D68E10"/>
+                </a:solidFill>
+                <a:latin typeface="Roboto"/>
+              </a:rPr>
+              <a:t>Institute</a:t>
+            </a:r>
+          </a:p>
+        </p:txBody>
+      </p:sp>
+      <p:sp>
+        <p:nvSpPr>
+          <p:cNvPr id="15" name="TextBox 14"/>
+          <p:cNvSpPr txBox="1"/>
+          <p:nvPr/>
+        </p:nvSpPr>
+        <p:spPr>
+          <a:xfrm>
+            <a:off x="10515600" y="6400800"/>
+            <a:ext cx="1188720" cy="320040"/>
+          </a:xfrm>
+          <a:prstGeom prst="rect">
+            <a:avLst/>
+          </a:prstGeom>
+          <a:noFill/>
+        </p:spPr>
+        <p:txBody>
+          <a:bodyPr wrap="square" anchor="t" lIns="0" rIns="0" tIns="0" bIns="0">
+            <a:spAutoFit/>
+          </a:bodyPr>
+          <a:lstStyle/>
+          <a:p>
+            <a:pPr algn="r"/>
+            <a:r>
+              <a:rPr sz="1100" b="0" i="0">
+                <a:solidFill>
+                  <a:srgbClr val="7A7A7A"/>
+                </a:solidFill>
+                <a:latin typeface="Roboto"/>
+              </a:rPr>
+              <a:t>19</a:t>
+            </a:r>
+          </a:p>
+        </p:txBody>
+      </p:sp>
+    </p:spTree>
+  </p:cSld>
+  <p:clrMapOvr>
+    <a:masterClrMapping/>
+  </p:clrMapOvr>
+</p:sld>
+</file>
+
+<file path=ppt/slides/slide25.xml><?xml version="1.0" encoding="utf-8"?>
+<p:sld xmlns:a="http://schemas.openxmlformats.org/drawingml/2006/main" xmlns:p="http://schemas.openxmlformats.org/presentationml/2006/main" xmlns:r="http://schemas.openxmlformats.org/officeDocument/2006/relationships">
+  <p:cSld>
+    <p:bg>
+      <p:bgPr>
+        <a:solidFill>
+          <a:srgbClr val="FFFFFF"/>
+        </a:solidFill>
+        <a:effectLst/>
+      </p:bgPr>
+    </p:bg>
+    <p:spTree>
+      <p:nvGrpSpPr>
+        <p:cNvPr id="1" name=""/>
+        <p:cNvGrpSpPr/>
+        <p:nvPr/>
+      </p:nvGrpSpPr>
+      <p:grpSpPr/>
+      <p:sp>
+        <p:nvSpPr>
+          <p:cNvPr id="2" name="Rectangle 1"/>
+          <p:cNvSpPr/>
+          <p:nvPr/>
+        </p:nvSpPr>
+        <p:spPr>
+          <a:xfrm>
+            <a:off x="0" y="0"/>
+            <a:ext cx="3931920" cy="6858000"/>
+          </a:xfrm>
+          <a:prstGeom prst="rect">
+            <a:avLst/>
+          </a:prstGeom>
+          <a:solidFill>
+            <a:srgbClr val="92268F"/>
+          </a:solidFill>
+          <a:ln>
+            <a:noFill/>
+          </a:ln>
+          <a:effectLst/>
+        </p:spPr>
+        <p:style>
+          <a:lnRef idx="1">
+            <a:schemeClr val="accent1"/>
+          </a:lnRef>
+          <a:fillRef idx="3">
+            <a:schemeClr val="accent1"/>
+          </a:fillRef>
+          <a:effectRef idx="2">
+            <a:schemeClr val="accent1"/>
+          </a:effectRef>
+          <a:fontRef idx="minor">
+            <a:schemeClr val="lt1"/>
+          </a:fontRef>
+        </p:style>
+        <p:txBody>
+          <a:bodyPr rtlCol="0" anchor="ctr"/>
+          <a:lstStyle/>
+          <a:p>
+            <a:pPr algn="ctr"/>
+          </a:p>
+        </p:txBody>
+      </p:sp>
+      <p:sp>
+        <p:nvSpPr>
+          <p:cNvPr id="3" name="TextBox 2"/>
+          <p:cNvSpPr txBox="1"/>
+          <p:nvPr/>
+        </p:nvSpPr>
+        <p:spPr>
+          <a:xfrm>
+            <a:off x="365760" y="2103120"/>
+            <a:ext cx="3291840" cy="2194560"/>
+          </a:xfrm>
+          <a:prstGeom prst="rect">
+            <a:avLst/>
+          </a:prstGeom>
+          <a:noFill/>
+        </p:spPr>
+        <p:txBody>
+          <a:bodyPr wrap="square" anchor="t" lIns="0" rIns="0" tIns="0" bIns="0">
+            <a:spAutoFit/>
+          </a:bodyPr>
+          <a:lstStyle/>
+          <a:p>
+            <a:r>
+              <a:rPr sz="13000" b="1" i="0">
+                <a:solidFill>
+                  <a:srgbClr val="FFFFFF"/>
+                </a:solidFill>
+                <a:latin typeface="Roboto"/>
+              </a:rPr>
+              <a:t>05</a:t>
+            </a:r>
+          </a:p>
+        </p:txBody>
+      </p:sp>
+      <p:sp>
+        <p:nvSpPr>
+          <p:cNvPr id="4" name="TextBox 3"/>
+          <p:cNvSpPr txBox="1"/>
+          <p:nvPr/>
+        </p:nvSpPr>
+        <p:spPr>
+          <a:xfrm>
+            <a:off x="4480560" y="2468880"/>
+            <a:ext cx="7132320" cy="2194560"/>
+          </a:xfrm>
+          <a:prstGeom prst="rect">
+            <a:avLst/>
+          </a:prstGeom>
+          <a:noFill/>
+        </p:spPr>
+        <p:txBody>
+          <a:bodyPr wrap="square" anchor="t" lIns="0" rIns="0" tIns="0" bIns="0">
+            <a:spAutoFit/>
+          </a:bodyPr>
+          <a:lstStyle/>
+          <a:p>
+            <a:r>
+              <a:rPr sz="1600" b="1" i="0">
+                <a:solidFill>
+                  <a:srgbClr val="92268F"/>
+                </a:solidFill>
+                <a:latin typeface="Roboto"/>
+              </a:rPr>
+              <a:t>SECTION</a:t>
+            </a:r>
+          </a:p>
+          <a:p>
+            <a:pPr>
+              <a:spcBef>
+                <a:spcPts val="600"/>
+              </a:spcBef>
+            </a:pPr>
+            <a:r>
+              <a:rPr sz="3800" b="1" i="0">
+                <a:solidFill>
+                  <a:srgbClr val="2A2929"/>
+                </a:solidFill>
+                <a:latin typeface="Roboto"/>
+              </a:rPr>
+              <a:t>Shared cloud foundations</a:t>
+            </a:r>
+          </a:p>
+          <a:p>
+            <a:pPr>
+              <a:spcBef>
+                <a:spcPts val="1000"/>
+              </a:spcBef>
+            </a:pPr>
+            <a:r>
+              <a:rPr sz="2000" b="0" i="1">
+                <a:solidFill>
+                  <a:srgbClr val="484848"/>
+                </a:solidFill>
+                <a:latin typeface="Roboto Light"/>
+              </a:rPr>
+              <a:t>the standards under the build</a:t>
+            </a:r>
+          </a:p>
+        </p:txBody>
+      </p:sp>
+      <p:sp>
+        <p:nvSpPr>
+          <p:cNvPr id="5" name="Rectangle 4"/>
+          <p:cNvSpPr/>
+          <p:nvPr/>
+        </p:nvSpPr>
+        <p:spPr>
+          <a:xfrm>
+            <a:off x="0" y="6565392"/>
+            <a:ext cx="12191695" cy="38100"/>
+          </a:xfrm>
+          <a:prstGeom prst="rect">
+            <a:avLst/>
+          </a:prstGeom>
+          <a:solidFill>
+            <a:srgbClr val="92268F"/>
+          </a:solidFill>
+          <a:ln>
+            <a:noFill/>
+          </a:ln>
+          <a:effectLst/>
+        </p:spPr>
+        <p:style>
+          <a:lnRef idx="1">
+            <a:schemeClr val="accent1"/>
+          </a:lnRef>
+          <a:fillRef idx="3">
+            <a:schemeClr val="accent1"/>
+          </a:fillRef>
+          <a:effectRef idx="2">
+            <a:schemeClr val="accent1"/>
+          </a:effectRef>
+          <a:fontRef idx="minor">
+            <a:schemeClr val="lt1"/>
+          </a:fontRef>
+        </p:style>
+        <p:txBody>
+          <a:bodyPr rtlCol="0" anchor="ctr"/>
+          <a:lstStyle/>
+          <a:p>
+            <a:pPr algn="ctr"/>
+          </a:p>
+        </p:txBody>
+      </p:sp>
+      <p:sp>
+        <p:nvSpPr>
+          <p:cNvPr id="6" name="TextBox 5"/>
+          <p:cNvSpPr txBox="1"/>
+          <p:nvPr/>
+        </p:nvSpPr>
+        <p:spPr>
+          <a:xfrm>
+            <a:off x="502920" y="6400800"/>
+            <a:ext cx="5486400" cy="320040"/>
+          </a:xfrm>
+          <a:prstGeom prst="rect">
+            <a:avLst/>
+          </a:prstGeom>
+          <a:noFill/>
+        </p:spPr>
+        <p:txBody>
+          <a:bodyPr wrap="square" anchor="t" lIns="0" rIns="0" tIns="0" bIns="0">
+            <a:spAutoFit/>
+          </a:bodyPr>
+          <a:lstStyle/>
+          <a:p>
+            <a:r>
+              <a:rPr sz="1100" b="1" i="0">
+                <a:solidFill>
+                  <a:srgbClr val="2A2929"/>
+                </a:solidFill>
+                <a:latin typeface="Roboto"/>
+              </a:rPr>
+              <a:t>Kangan </a:t>
+            </a:r>
+            <a:r>
+              <a:rPr sz="1100" b="1" i="0">
+                <a:solidFill>
+                  <a:srgbClr val="D68E10"/>
+                </a:solidFill>
+                <a:latin typeface="Roboto"/>
+              </a:rPr>
+              <a:t>Institute</a:t>
+            </a:r>
+          </a:p>
+        </p:txBody>
+      </p:sp>
+      <p:sp>
+        <p:nvSpPr>
+          <p:cNvPr id="7" name="TextBox 6"/>
+          <p:cNvSpPr txBox="1"/>
+          <p:nvPr/>
+        </p:nvSpPr>
+        <p:spPr>
+          <a:xfrm>
+            <a:off x="10515600" y="6400800"/>
+            <a:ext cx="1188720" cy="320040"/>
+          </a:xfrm>
+          <a:prstGeom prst="rect">
+            <a:avLst/>
+          </a:prstGeom>
+          <a:noFill/>
+        </p:spPr>
+        <p:txBody>
+          <a:bodyPr wrap="square" anchor="t" lIns="0" rIns="0" tIns="0" bIns="0">
+            <a:spAutoFit/>
+          </a:bodyPr>
+          <a:lstStyle/>
+          <a:p>
+            <a:pPr algn="r"/>
+            <a:r>
+              <a:rPr sz="1100" b="0" i="0">
+                <a:solidFill>
+                  <a:srgbClr val="7A7A7A"/>
+                </a:solidFill>
+                <a:latin typeface="Roboto"/>
+              </a:rPr>
+              <a:t/>
+            </a:r>
+          </a:p>
+        </p:txBody>
+      </p:sp>
+    </p:spTree>
+  </p:cSld>
+  <p:clrMapOvr>
+    <a:masterClrMapping/>
+  </p:clrMapOvr>
+</p:sld>
+</file>
+
+<file path=ppt/slides/slide26.xml><?xml version="1.0" encoding="utf-8"?>
+<p:sld xmlns:a="http://schemas.openxmlformats.org/drawingml/2006/main" xmlns:p="http://schemas.openxmlformats.org/presentationml/2006/main" xmlns:r="http://schemas.openxmlformats.org/officeDocument/2006/relationships">
+  <p:cSld>
+    <p:bg>
+      <p:bgPr>
+        <a:solidFill>
+          <a:srgbClr val="FFFFFF"/>
+        </a:solidFill>
+        <a:effectLst/>
+      </p:bgPr>
+    </p:bg>
+    <p:spTree>
+      <p:nvGrpSpPr>
+        <p:cNvPr id="1" name=""/>
+        <p:cNvGrpSpPr/>
+        <p:nvPr/>
+      </p:nvGrpSpPr>
+      <p:grpSpPr/>
+      <p:sp>
+        <p:nvSpPr>
+          <p:cNvPr id="2" name="TextBox 1"/>
+          <p:cNvSpPr txBox="1"/>
+          <p:nvPr/>
+        </p:nvSpPr>
+        <p:spPr>
+          <a:xfrm>
+            <a:off x="640080" y="457200"/>
+            <a:ext cx="10881360" cy="960120"/>
+          </a:xfrm>
+          <a:prstGeom prst="rect">
+            <a:avLst/>
+          </a:prstGeom>
+          <a:noFill/>
+        </p:spPr>
+        <p:txBody>
+          <a:bodyPr wrap="square" anchor="t" lIns="0" rIns="0" tIns="0" bIns="0">
+            <a:spAutoFit/>
+          </a:bodyPr>
+          <a:lstStyle/>
+          <a:p>
+            <a:r>
+              <a:rPr sz="2800" b="1" i="0">
+                <a:solidFill>
+                  <a:srgbClr val="2A2929"/>
+                </a:solidFill>
+                <a:latin typeface="Roboto"/>
+              </a:rPr>
+              <a:t>Standards and standard products</a:t>
+            </a:r>
+          </a:p>
+        </p:txBody>
+      </p:sp>
+      <p:sp>
+        <p:nvSpPr>
+          <p:cNvPr id="3" name="Rectangle 2"/>
+          <p:cNvSpPr/>
+          <p:nvPr/>
+        </p:nvSpPr>
+        <p:spPr>
+          <a:xfrm>
+            <a:off x="658368" y="1371600"/>
+            <a:ext cx="1463040" cy="50800"/>
+          </a:xfrm>
+          <a:prstGeom prst="rect">
+            <a:avLst/>
+          </a:prstGeom>
+          <a:solidFill>
+            <a:srgbClr val="92268F"/>
+          </a:solidFill>
+          <a:ln>
+            <a:noFill/>
+          </a:ln>
+          <a:effectLst/>
+        </p:spPr>
+        <p:style>
+          <a:lnRef idx="1">
+            <a:schemeClr val="accent1"/>
+          </a:lnRef>
+          <a:fillRef idx="3">
+            <a:schemeClr val="accent1"/>
+          </a:fillRef>
+          <a:effectRef idx="2">
+            <a:schemeClr val="accent1"/>
+          </a:effectRef>
+          <a:fontRef idx="minor">
+            <a:schemeClr val="lt1"/>
+          </a:fontRef>
+        </p:style>
+        <p:txBody>
+          <a:bodyPr rtlCol="0" anchor="ctr"/>
+          <a:lstStyle/>
+          <a:p>
+            <a:pPr algn="ctr"/>
+          </a:p>
+        </p:txBody>
+      </p:sp>
+      <p:sp>
+        <p:nvSpPr>
+          <p:cNvPr id="4" name="TextBox 3"/>
+          <p:cNvSpPr txBox="1"/>
+          <p:nvPr/>
+        </p:nvSpPr>
+        <p:spPr>
+          <a:xfrm>
+            <a:off x="658368" y="1691640"/>
+            <a:ext cx="10881360" cy="4480560"/>
+          </a:xfrm>
+          <a:prstGeom prst="rect">
+            <a:avLst/>
+          </a:prstGeom>
+          <a:noFill/>
+        </p:spPr>
+        <p:txBody>
+          <a:bodyPr wrap="square" anchor="ctr" lIns="0" rIns="0" tIns="0" bIns="0">
+            <a:spAutoFit/>
+          </a:bodyPr>
+          <a:lstStyle/>
+          <a:p>
+            <a:pPr marL="0" indent="0">
+              <a:lnSpc>
+                <a:spcPct val="105000"/>
+              </a:lnSpc>
+              <a:spcBef>
+                <a:spcPts val="0"/>
+              </a:spcBef>
+              <a:spcAft>
+                <a:spcPts val="1000"/>
+              </a:spcAft>
+            </a:pPr>
+            <a:r>
+              <a:rPr sz="2400" b="1" i="0">
+                <a:solidFill>
+                  <a:srgbClr val="EDAB0C"/>
+                </a:solidFill>
+                <a:latin typeface="Roboto"/>
+              </a:rPr>
+              <a:t>■  </a:t>
+            </a:r>
+            <a:r>
+              <a:rPr sz="2400" b="0" i="0">
+                <a:solidFill>
+                  <a:srgbClr val="2A2929"/>
+                </a:solidFill>
+                <a:latin typeface="Roboto"/>
+              </a:rPr>
+              <a:t>Industry technology standards underpin the build: interoperability, security and management baselines.</a:t>
+            </a:r>
+          </a:p>
+          <a:p>
+            <a:pPr marL="0" indent="0">
+              <a:lnSpc>
+                <a:spcPct val="105000"/>
+              </a:lnSpc>
+              <a:spcBef>
+                <a:spcPts val="0"/>
+              </a:spcBef>
+              <a:spcAft>
+                <a:spcPts val="1000"/>
+              </a:spcAft>
+            </a:pPr>
+            <a:r>
+              <a:rPr sz="2400" b="1" i="0">
+                <a:solidFill>
+                  <a:srgbClr val="EDAB0C"/>
+                </a:solidFill>
+                <a:latin typeface="Roboto"/>
+              </a:rPr>
+              <a:t>■  </a:t>
+            </a:r>
+            <a:r>
+              <a:rPr sz="2400" b="0" i="0">
+                <a:solidFill>
+                  <a:srgbClr val="2A2929"/>
+                </a:solidFill>
+                <a:latin typeface="Roboto"/>
+              </a:rPr>
+              <a:t>Standard products are what the platform assembles from: compute families, managed databases, object and block storage.</a:t>
+            </a:r>
+          </a:p>
+          <a:p>
+            <a:pPr marL="0" indent="0">
+              <a:lnSpc>
+                <a:spcPct val="105000"/>
+              </a:lnSpc>
+              <a:spcBef>
+                <a:spcPts val="0"/>
+              </a:spcBef>
+              <a:spcAft>
+                <a:spcPts val="1000"/>
+              </a:spcAft>
+            </a:pPr>
+            <a:r>
+              <a:rPr sz="2400" b="1" i="0">
+                <a:solidFill>
+                  <a:srgbClr val="EDAB0C"/>
+                </a:solidFill>
+                <a:latin typeface="Roboto"/>
+              </a:rPr>
+              <a:t>■  </a:t>
+            </a:r>
+            <a:r>
+              <a:rPr sz="2400" b="0" i="0">
+                <a:solidFill>
+                  <a:srgbClr val="2A2929"/>
+                </a:solidFill>
+                <a:latin typeface="Roboto"/>
+              </a:rPr>
+              <a:t>This foundation sits under both halves of the build — the templates and the microservice — and it comes back in the written questions.</a:t>
+            </a:r>
+          </a:p>
+        </p:txBody>
+      </p:sp>
+      <p:sp>
+        <p:nvSpPr>
+          <p:cNvPr id="5" name="Rectangle 4"/>
+          <p:cNvSpPr/>
+          <p:nvPr/>
+        </p:nvSpPr>
+        <p:spPr>
+          <a:xfrm>
+            <a:off x="0" y="6565392"/>
+            <a:ext cx="12191695" cy="38100"/>
+          </a:xfrm>
+          <a:prstGeom prst="rect">
+            <a:avLst/>
+          </a:prstGeom>
+          <a:solidFill>
+            <a:srgbClr val="92268F"/>
+          </a:solidFill>
+          <a:ln>
+            <a:noFill/>
+          </a:ln>
+          <a:effectLst/>
+        </p:spPr>
+        <p:style>
+          <a:lnRef idx="1">
+            <a:schemeClr val="accent1"/>
+          </a:lnRef>
+          <a:fillRef idx="3">
+            <a:schemeClr val="accent1"/>
+          </a:fillRef>
+          <a:effectRef idx="2">
+            <a:schemeClr val="accent1"/>
+          </a:effectRef>
+          <a:fontRef idx="minor">
+            <a:schemeClr val="lt1"/>
+          </a:fontRef>
+        </p:style>
+        <p:txBody>
+          <a:bodyPr rtlCol="0" anchor="ctr"/>
+          <a:lstStyle/>
+          <a:p>
+            <a:pPr algn="ctr"/>
+          </a:p>
+        </p:txBody>
+      </p:sp>
+      <p:sp>
+        <p:nvSpPr>
+          <p:cNvPr id="6" name="TextBox 5"/>
+          <p:cNvSpPr txBox="1"/>
+          <p:nvPr/>
+        </p:nvSpPr>
+        <p:spPr>
+          <a:xfrm>
+            <a:off x="502920" y="6400800"/>
+            <a:ext cx="5486400" cy="320040"/>
+          </a:xfrm>
+          <a:prstGeom prst="rect">
+            <a:avLst/>
+          </a:prstGeom>
+          <a:noFill/>
+        </p:spPr>
+        <p:txBody>
+          <a:bodyPr wrap="square" anchor="t" lIns="0" rIns="0" tIns="0" bIns="0">
+            <a:spAutoFit/>
+          </a:bodyPr>
+          <a:lstStyle/>
+          <a:p>
+            <a:r>
+              <a:rPr sz="1100" b="1" i="0">
+                <a:solidFill>
+                  <a:srgbClr val="2A2929"/>
+                </a:solidFill>
+                <a:latin typeface="Roboto"/>
+              </a:rPr>
+              <a:t>Kangan </a:t>
+            </a:r>
+            <a:r>
+              <a:rPr sz="1100" b="1" i="0">
+                <a:solidFill>
+                  <a:srgbClr val="D68E10"/>
+                </a:solidFill>
+                <a:latin typeface="Roboto"/>
+              </a:rPr>
+              <a:t>Institute</a:t>
+            </a:r>
+          </a:p>
+        </p:txBody>
+      </p:sp>
+      <p:sp>
+        <p:nvSpPr>
+          <p:cNvPr id="7" name="TextBox 6"/>
+          <p:cNvSpPr txBox="1"/>
+          <p:nvPr/>
+        </p:nvSpPr>
+        <p:spPr>
+          <a:xfrm>
+            <a:off x="10515600" y="6400800"/>
+            <a:ext cx="1188720" cy="320040"/>
+          </a:xfrm>
+          <a:prstGeom prst="rect">
+            <a:avLst/>
+          </a:prstGeom>
+          <a:noFill/>
+        </p:spPr>
+        <p:txBody>
+          <a:bodyPr wrap="square" anchor="t" lIns="0" rIns="0" tIns="0" bIns="0">
+            <a:spAutoFit/>
+          </a:bodyPr>
+          <a:lstStyle/>
+          <a:p>
+            <a:pPr algn="r"/>
+            <a:r>
+              <a:rPr sz="1100" b="0" i="0">
+                <a:solidFill>
+                  <a:srgbClr val="7A7A7A"/>
+                </a:solidFill>
+                <a:latin typeface="Roboto"/>
+              </a:rPr>
+              <a:t>20</a:t>
+            </a:r>
+          </a:p>
+        </p:txBody>
+      </p:sp>
+    </p:spTree>
+  </p:cSld>
+  <p:clrMapOvr>
+    <a:masterClrMapping/>
+  </p:clrMapOvr>
+</p:sld>
+</file>
+
+<file path=ppt/slides/slide27.xml><?xml version="1.0" encoding="utf-8"?>
+<p:sld xmlns:a="http://schemas.openxmlformats.org/drawingml/2006/main" xmlns:p="http://schemas.openxmlformats.org/presentationml/2006/main" xmlns:r="http://schemas.openxmlformats.org/officeDocument/2006/relationships">
+  <p:cSld>
+    <p:bg>
+      <p:bgPr>
+        <a:solidFill>
+          <a:srgbClr val="2A2929"/>
+        </a:solidFill>
+        <a:effectLst/>
+      </p:bgPr>
+    </p:bg>
+    <p:spTree>
+      <p:nvGrpSpPr>
+        <p:cNvPr id="1" name=""/>
+        <p:cNvGrpSpPr/>
+        <p:nvPr/>
+      </p:nvGrpSpPr>
+      <p:grpSpPr/>
+      <p:sp>
+        <p:nvSpPr>
+          <p:cNvPr id="2" name="Rectangle 1"/>
+          <p:cNvSpPr/>
+          <p:nvPr/>
+        </p:nvSpPr>
+        <p:spPr>
+          <a:xfrm>
+            <a:off x="0" y="0"/>
+            <a:ext cx="411480" cy="6858000"/>
+          </a:xfrm>
+          <a:prstGeom prst="rect">
+            <a:avLst/>
+          </a:prstGeom>
+          <a:solidFill>
+            <a:srgbClr val="EDAB0C"/>
+          </a:solidFill>
+          <a:ln>
+            <a:noFill/>
+          </a:ln>
+          <a:effectLst/>
+        </p:spPr>
+        <p:style>
+          <a:lnRef idx="1">
+            <a:schemeClr val="accent1"/>
+          </a:lnRef>
+          <a:fillRef idx="3">
+            <a:schemeClr val="accent1"/>
+          </a:fillRef>
+          <a:effectRef idx="2">
+            <a:schemeClr val="accent1"/>
+          </a:effectRef>
+          <a:fontRef idx="minor">
+            <a:schemeClr val="lt1"/>
+          </a:fontRef>
+        </p:style>
+        <p:txBody>
+          <a:bodyPr rtlCol="0" anchor="ctr"/>
+          <a:lstStyle/>
+          <a:p>
+            <a:pPr algn="ctr"/>
+          </a:p>
+        </p:txBody>
+      </p:sp>
+      <p:sp>
+        <p:nvSpPr>
+          <p:cNvPr id="3" name="TextBox 2"/>
+          <p:cNvSpPr txBox="1"/>
+          <p:nvPr/>
+        </p:nvSpPr>
+        <p:spPr>
+          <a:xfrm>
+            <a:off x="914400" y="1463040"/>
+            <a:ext cx="10515600" cy="4023360"/>
+          </a:xfrm>
+          <a:prstGeom prst="rect">
+            <a:avLst/>
+          </a:prstGeom>
+          <a:noFill/>
+        </p:spPr>
+        <p:txBody>
+          <a:bodyPr wrap="square" anchor="t" lIns="0" rIns="0" tIns="0" bIns="0">
+            <a:spAutoFit/>
+          </a:bodyPr>
+          <a:lstStyle/>
+          <a:p>
+            <a:r>
+              <a:rPr sz="4000" b="1" i="0">
+                <a:solidFill>
+                  <a:srgbClr val="FFFFFF"/>
+                </a:solidFill>
+                <a:latin typeface="Roboto"/>
+              </a:rPr>
+              <a:t>Next: Topic 7 — author your own</a:t>
+            </a:r>
+          </a:p>
+          <a:p>
+            <a:pPr>
+              <a:lnSpc>
+                <a:spcPct val="105000"/>
+              </a:lnSpc>
+              <a:spcBef>
+                <a:spcPts val="1200"/>
+              </a:spcBef>
+            </a:pPr>
+            <a:r>
+              <a:rPr sz="1900" b="0" i="0">
+                <a:solidFill>
+                  <a:srgbClr val="E8E8E8"/>
+                </a:solidFill>
+                <a:latin typeface="Roboto Light"/>
+              </a:rPr>
+              <a:t>You can read, deploy, fix, update and reset a template someone else wrote.</a:t>
+            </a:r>
+          </a:p>
+          <a:p>
+            <a:pPr>
+              <a:lnSpc>
+                <a:spcPct val="105000"/>
+              </a:lnSpc>
+              <a:spcBef>
+                <a:spcPts val="1200"/>
+              </a:spcBef>
+            </a:pPr>
+            <a:r>
+              <a:rPr sz="1900" b="0" i="0">
+                <a:solidFill>
+                  <a:srgbClr val="E8E8E8"/>
+                </a:solidFill>
+                <a:latin typeface="Roboto Light"/>
+              </a:rPr>
+              <a:t>Next you write your own — and what it deploys is the microservice you designed in Topic 2.</a:t>
             </a:r>
           </a:p>
         </p:txBody>
@@ -9320,7 +12511,7 @@
                 </a:solidFill>
                 <a:latin typeface="Roboto"/>
               </a:rPr>
-              <a:t>Why IaC</a:t>
+              <a:t>Why IaC, and choosing the service</a:t>
             </a:r>
           </a:p>
           <a:p>
@@ -9647,7 +12838,7 @@
                 </a:solidFill>
                 <a:latin typeface="Roboto"/>
               </a:rPr>
-              <a:t>Benefits over manual console work: repeatable, versioned, reviewable, fast to rebuild (KE 3).</a:t>
+              <a:t>Benefits over manual console work: repeatable, versioned, reviewable, fast to rebuild.</a:t>
             </a:r>
           </a:p>
           <a:p>
@@ -9860,7 +13051,7 @@
                 </a:solidFill>
                 <a:latin typeface="Roboto"/>
               </a:rPr>
-              <a:t>Automation, risks &amp; choosing a service</a:t>
+              <a:t>What automation gives, and what can go wrong</a:t>
             </a:r>
           </a:p>
         </p:txBody>
@@ -9958,7 +13149,7 @@
                 </a:solidFill>
                 <a:latin typeface="Roboto"/>
               </a:rPr>
-              <a:t>Automation leverages the platform: one template stands up many related resources consistently.</a:t>
+              <a:t>One template stands up many related resources consistently, in the right order, without manual steps.</a:t>
             </a:r>
           </a:p>
           <a:p>
@@ -9989,7 +13180,7 @@
                 </a:solidFill>
                 <a:latin typeface="Roboto"/>
               </a:rPr>
-              <a:t>Potential issues: drift from manual edits, a bad change rolling back a stack, permission/quota errors.</a:t>
+              <a:t>The failure modes are real: drift from manual edits, a bad change rolling a stack back, permission and quota errors.</a:t>
             </a:r>
           </a:p>
           <a:p>
@@ -10020,7 +13211,7 @@
                 </a:solidFill>
                 <a:latin typeface="Roboto"/>
               </a:rPr>
-              <a:t>Choose an IaC service compatible with the platform — on AWS, CloudFormation is native (KE 4); manage/measure deployments by stack status and change sets (KE 11).</a:t>
+              <a:t>Knowing what can go wrong is part of the competence — it's a workbook task, not a footnote.</a:t>
             </a:r>
           </a:p>
         </p:txBody>
@@ -10175,20 +13366,54 @@
       <p:grpSpPr/>
       <p:sp>
         <p:nvSpPr>
-          <p:cNvPr id="2" name="Rectangle 1"/>
+          <p:cNvPr id="2" name="TextBox 1"/>
+          <p:cNvSpPr txBox="1"/>
+          <p:nvPr/>
+        </p:nvSpPr>
+        <p:spPr>
+          <a:xfrm>
+            <a:off x="640080" y="457200"/>
+            <a:ext cx="10881360" cy="960120"/>
+          </a:xfrm>
+          <a:prstGeom prst="rect">
+            <a:avLst/>
+          </a:prstGeom>
+          <a:noFill/>
+        </p:spPr>
+        <p:txBody>
+          <a:bodyPr wrap="square" anchor="t" lIns="0" rIns="0" tIns="0" bIns="0">
+            <a:spAutoFit/>
+          </a:bodyPr>
+          <a:lstStyle/>
+          <a:p>
+            <a:r>
+              <a:rPr sz="2800" b="1" i="0">
+                <a:solidFill>
+                  <a:srgbClr val="2A2929"/>
+                </a:solidFill>
+                <a:latin typeface="Roboto"/>
+              </a:rPr>
+              <a:t>Select the infrastructure-as-code service</a:t>
+            </a:r>
+          </a:p>
+        </p:txBody>
+      </p:sp>
+      <p:sp>
+        <p:nvSpPr>
+          <p:cNvPr id="3" name="Rectangle 2"/>
           <p:cNvSpPr/>
           <p:nvPr/>
         </p:nvSpPr>
         <p:spPr>
           <a:xfrm>
-            <a:off x="0" y="0"/>
-            <a:ext cx="3931920" cy="6858000"/>
+            <a:off x="658368" y="1371600"/>
+            <a:ext cx="1463040" cy="50800"/>
           </a:xfrm>
           <a:prstGeom prst="rect">
             <a:avLst/>
           </a:prstGeom>
           <a:solidFill>
-            <a:srgbClr val="27B5CE"/>
+            <a:srgbClr val="92268F"/>
           </a:solidFill>
           <a:ln>
             <a:noFill/>
@@ -10219,14 +13444,14 @@
       </p:sp>
       <p:sp>
         <p:nvSpPr>
-          <p:cNvPr id="3" name="TextBox 2"/>
+          <p:cNvPr id="4" name="TextBox 3"/>
           <p:cNvSpPr txBox="1"/>
           <p:nvPr/>
         </p:nvSpPr>
         <p:spPr>
           <a:xfrm>
-            <a:off x="365760" y="2103120"/>
-            <a:ext cx="3291840" cy="2194560"/>
+            <a:off x="658368" y="1691640"/>
+            <a:ext cx="10881360" cy="4480560"/>
           </a:xfrm>
           <a:prstGeom prst="rect">
             <a:avLst/>
@@ -10234,85 +13459,101 @@
           <a:noFill/>
         </p:spPr>
         <p:txBody>
-          <a:bodyPr wrap="square" anchor="t" lIns="0" rIns="0" tIns="0" bIns="0">
+          <a:bodyPr wrap="square" anchor="ctr" lIns="0" rIns="0" tIns="0" bIns="0">
             <a:spAutoFit/>
           </a:bodyPr>
           <a:lstStyle/>
           <a:p>
-            <a:r>
-              <a:rPr sz="13000" b="1" i="0">
-                <a:solidFill>
-                  <a:srgbClr val="FFFFFF"/>
-                </a:solidFill>
-                <a:latin typeface="Roboto"/>
-              </a:rPr>
-              <a:t>02</a:t>
-            </a:r>
-          </a:p>
-        </p:txBody>
-      </p:sp>
-      <p:sp>
-        <p:nvSpPr>
-          <p:cNvPr id="4" name="TextBox 3"/>
-          <p:cNvSpPr txBox="1"/>
-          <p:nvPr/>
-        </p:nvSpPr>
-        <p:spPr>
-          <a:xfrm>
-            <a:off x="4480560" y="2468880"/>
-            <a:ext cx="7132320" cy="2194560"/>
-          </a:xfrm>
-          <a:prstGeom prst="rect">
-            <a:avLst/>
-          </a:prstGeom>
-          <a:noFill/>
-        </p:spPr>
-        <p:txBody>
-          <a:bodyPr wrap="square" anchor="t" lIns="0" rIns="0" tIns="0" bIns="0">
-            <a:spAutoFit/>
-          </a:bodyPr>
-          <a:lstStyle/>
-          <a:p>
-            <a:r>
-              <a:rPr sz="1600" b="1" i="0">
-                <a:solidFill>
-                  <a:srgbClr val="27B5CE"/>
-                </a:solidFill>
-                <a:latin typeface="Roboto"/>
-              </a:rPr>
-              <a:t>SECTION</a:t>
-            </a:r>
-          </a:p>
-          <a:p>
-            <a:pPr>
+            <a:pPr marL="0" indent="0">
+              <a:lnSpc>
+                <a:spcPct val="105000"/>
+              </a:lnSpc>
               <a:spcBef>
-                <a:spcPts val="600"/>
+                <a:spcPts val="0"/>
               </a:spcBef>
+              <a:spcAft>
+                <a:spcPts val="1000"/>
+              </a:spcAft>
             </a:pPr>
             <a:r>
-              <a:rPr sz="3800" b="1" i="0">
+              <a:rPr sz="2400" b="1" i="0">
+                <a:solidFill>
+                  <a:srgbClr val="EDAB0C"/>
+                </a:solidFill>
+                <a:latin typeface="Roboto"/>
+              </a:rPr>
+              <a:t>■  </a:t>
+            </a:r>
+            <a:r>
+              <a:rPr sz="2400" b="0" i="0">
                 <a:solidFill>
                   <a:srgbClr val="2A2929"/>
                 </a:solidFill>
                 <a:latin typeface="Roboto"/>
               </a:rPr>
-              <a:t>Template anatomy &amp; review</a:t>
-            </a:r>
-          </a:p>
-          <a:p>
-            <a:pPr>
+              <a:t>Choose an IaC service compatible with the platform — on AWS, CloudFormation is native.</a:t>
+            </a:r>
+          </a:p>
+          <a:p>
+            <a:pPr marL="0" indent="0">
+              <a:lnSpc>
+                <a:spcPct val="105000"/>
+              </a:lnSpc>
               <a:spcBef>
+                <a:spcPts val="0"/>
+              </a:spcBef>
+              <a:spcAft>
                 <a:spcPts val="1000"/>
+              </a:spcAft>
+            </a:pPr>
+            <a:r>
+              <a:rPr sz="2400" b="1" i="0">
+                <a:solidFill>
+                  <a:srgbClr val="EDAB0C"/>
+                </a:solidFill>
+                <a:latin typeface="Roboto"/>
+              </a:rPr>
+              <a:t>■  </a:t>
+            </a:r>
+            <a:r>
+              <a:rPr sz="2400" b="0" i="0">
+                <a:solidFill>
+                  <a:srgbClr val="2A2929"/>
+                </a:solidFill>
+                <a:latin typeface="Roboto"/>
+              </a:rPr>
+              <a:t>Compatibility is the criterion: the service must speak the platform's resources directly.</a:t>
+            </a:r>
+          </a:p>
+          <a:p>
+            <a:pPr marL="0" indent="0">
+              <a:lnSpc>
+                <a:spcPct val="105000"/>
+              </a:lnSpc>
+              <a:spcBef>
+                <a:spcPts val="0"/>
               </a:spcBef>
+              <a:spcAft>
+                <a:spcPts val="1000"/>
+              </a:spcAft>
             </a:pPr>
             <a:r>
-              <a:rPr sz="2000" b="0" i="1">
-                <a:solidFill>
-                  <a:srgbClr val="484848"/>
-                </a:solidFill>
-                <a:latin typeface="Roboto Light"/>
-              </a:rPr>
-              <a:t>read a template before you run it</a:t>
+              <a:rPr sz="2400" b="1" i="0">
+                <a:solidFill>
+                  <a:srgbClr val="EDAB0C"/>
+                </a:solidFill>
+                <a:latin typeface="Roboto"/>
+              </a:rPr>
+              <a:t>■  </a:t>
+            </a:r>
+            <a:r>
+              <a:rPr sz="2400" b="0" i="0">
+                <a:solidFill>
+                  <a:srgbClr val="2A2929"/>
+                </a:solidFill>
+                <a:latin typeface="Roboto"/>
+              </a:rPr>
+              <a:t>Record the choice and the reason — it's a decision, and decisions get justified.</a:t>
             </a:r>
           </a:p>
         </p:txBody>
@@ -10332,7 +13573,7 @@
             <a:avLst/>
           </a:prstGeom>
           <a:solidFill>
-            <a:srgbClr val="27B5CE"/>
+            <a:srgbClr val="92268F"/>
           </a:solidFill>
           <a:ln>
             <a:noFill/>
@@ -10434,7 +13675,7 @@
                 </a:solidFill>
                 <a:latin typeface="Roboto"/>
               </a:rPr>
-              <a:t/>
+              <a:t>4</a:t>
             </a:r>
           </a:p>
         </p:txBody>
@@ -10467,54 +13708,20 @@
       <p:grpSpPr/>
       <p:sp>
         <p:nvSpPr>
-          <p:cNvPr id="2" name="TextBox 1"/>
-          <p:cNvSpPr txBox="1"/>
-          <p:nvPr/>
-        </p:nvSpPr>
-        <p:spPr>
-          <a:xfrm>
-            <a:off x="640080" y="457200"/>
-            <a:ext cx="10881360" cy="960120"/>
-          </a:xfrm>
-          <a:prstGeom prst="rect">
-            <a:avLst/>
-          </a:prstGeom>
-          <a:noFill/>
-        </p:spPr>
-        <p:txBody>
-          <a:bodyPr wrap="square" anchor="t" lIns="0" rIns="0" tIns="0" bIns="0">
-            <a:spAutoFit/>
-          </a:bodyPr>
-          <a:lstStyle/>
-          <a:p>
-            <a:r>
-              <a:rPr sz="2800" b="1" i="0">
-                <a:solidFill>
-                  <a:srgbClr val="2A2929"/>
-                </a:solidFill>
-                <a:latin typeface="Roboto"/>
-              </a:rPr>
-              <a:t>Template syntax</a:t>
-            </a:r>
-          </a:p>
-        </p:txBody>
-      </p:sp>
-      <p:sp>
-        <p:nvSpPr>
-          <p:cNvPr id="3" name="Rectangle 2"/>
+          <p:cNvPr id="2" name="Rectangle 1"/>
           <p:cNvSpPr/>
           <p:nvPr/>
         </p:nvSpPr>
         <p:spPr>
           <a:xfrm>
-            <a:off x="658368" y="1371600"/>
-            <a:ext cx="1463040" cy="50800"/>
+            <a:off x="0" y="0"/>
+            <a:ext cx="12191695" cy="1234440"/>
           </a:xfrm>
           <a:prstGeom prst="rect">
             <a:avLst/>
           </a:prstGeom>
           <a:solidFill>
-            <a:srgbClr val="27B5CE"/>
+            <a:srgbClr val="92268F"/>
           </a:solidFill>
           <a:ln>
             <a:noFill/>
@@ -10545,14 +13752,67 @@
       </p:sp>
       <p:sp>
         <p:nvSpPr>
+          <p:cNvPr id="3" name="Rounded Rectangle 2"/>
+          <p:cNvSpPr/>
+          <p:nvPr/>
+        </p:nvSpPr>
+        <p:spPr>
+          <a:xfrm>
+            <a:off x="640080" y="384048"/>
+            <a:ext cx="1691640" cy="457200"/>
+          </a:xfrm>
+          <a:prstGeom prst="roundRect">
+            <a:avLst/>
+          </a:prstGeom>
+          <a:solidFill>
+            <a:srgbClr val="2A2929"/>
+          </a:solidFill>
+          <a:ln>
+            <a:noFill/>
+          </a:ln>
+          <a:effectLst/>
+        </p:spPr>
+        <p:style>
+          <a:lnRef idx="1">
+            <a:schemeClr val="accent1"/>
+          </a:lnRef>
+          <a:fillRef idx="3">
+            <a:schemeClr val="accent1"/>
+          </a:fillRef>
+          <a:effectRef idx="2">
+            <a:schemeClr val="accent1"/>
+          </a:effectRef>
+          <a:fontRef idx="minor">
+            <a:schemeClr val="lt1"/>
+          </a:fontRef>
+        </p:style>
+        <p:txBody>
+          <a:bodyPr rtlCol="0" anchor="ctr"/>
+          <a:lstStyle/>
+          <a:p>
+            <a:pPr algn="ctr"/>
+            <a:r>
+              <a:rPr sz="1400" b="1" i="0">
+                <a:solidFill>
+                  <a:srgbClr val="FBB900"/>
+                </a:solidFill>
+                <a:latin typeface="Roboto"/>
+              </a:rPr>
+              <a:t>ACTIVITY</a:t>
+            </a:r>
+          </a:p>
+        </p:txBody>
+      </p:sp>
+      <p:sp>
+        <p:nvSpPr>
           <p:cNvPr id="4" name="TextBox 3"/>
           <p:cNvSpPr txBox="1"/>
           <p:nvPr/>
         </p:nvSpPr>
         <p:spPr>
           <a:xfrm>
-            <a:off x="658368" y="1691640"/>
-            <a:ext cx="10881360" cy="4480560"/>
+            <a:off x="2560320" y="310896"/>
+            <a:ext cx="8961120" cy="685800"/>
           </a:xfrm>
           <a:prstGeom prst="rect">
             <a:avLst/>
@@ -10561,6 +13821,40 @@
         </p:spPr>
         <p:txBody>
           <a:bodyPr wrap="square" anchor="ctr" lIns="0" rIns="0" tIns="0" bIns="0">
+            <a:spAutoFit/>
+          </a:bodyPr>
+          <a:lstStyle/>
+          <a:p>
+            <a:r>
+              <a:rPr sz="2600" b="1" i="0">
+                <a:solidFill>
+                  <a:srgbClr val="FFFFFF"/>
+                </a:solidFill>
+                <a:latin typeface="Roboto"/>
+              </a:rPr>
+              <a:t>The IaC groundwork</a:t>
+            </a:r>
+          </a:p>
+        </p:txBody>
+      </p:sp>
+      <p:sp>
+        <p:nvSpPr>
+          <p:cNvPr id="5" name="TextBox 4"/>
+          <p:cNvSpPr txBox="1"/>
+          <p:nvPr/>
+        </p:nvSpPr>
+        <p:spPr>
+          <a:xfrm>
+            <a:off x="658368" y="1554480"/>
+            <a:ext cx="10881360" cy="4297680"/>
+          </a:xfrm>
+          <a:prstGeom prst="rect">
+            <a:avLst/>
+          </a:prstGeom>
+          <a:noFill/>
+        </p:spPr>
+        <p:txBody>
+          <a:bodyPr wrap="square" anchor="t" lIns="0" rIns="0" tIns="0" bIns="0">
             <a:spAutoFit/>
           </a:bodyPr>
           <a:lstStyle/>
@@ -10577,7 +13871,7 @@
               </a:spcAft>
             </a:pPr>
             <a:r>
-              <a:rPr sz="2400" b="1" i="0">
+              <a:rPr sz="1700" b="1" i="0">
                 <a:solidFill>
                   <a:srgbClr val="EDAB0C"/>
                 </a:solidFill>
@@ -10586,13 +13880,13 @@
               <a:t>■  </a:t>
             </a:r>
             <a:r>
-              <a:rPr sz="2400" b="0" i="0">
+              <a:rPr sz="1700" b="0" i="0">
                 <a:solidFill>
                   <a:srgbClr val="2A2929"/>
                 </a:solidFill>
                 <a:latin typeface="Roboto"/>
               </a:rPr>
-              <a:t>The parts: Parameters (inputs), Resources (what to create), Outputs (what to share), intrinsic functions (!Ref, !GetAtt, !Sub).</a:t>
+              <a:t>Workbook — tasks 1, 2, 3 and 4.</a:t>
             </a:r>
           </a:p>
           <a:p>
@@ -10608,7 +13902,7 @@
               </a:spcAft>
             </a:pPr>
             <a:r>
-              <a:rPr sz="2400" b="1" i="0">
+              <a:rPr sz="1700" b="1" i="0">
                 <a:solidFill>
                   <a:srgbClr val="EDAB0C"/>
                 </a:solidFill>
@@ -10617,51 +13911,100 @@
               <a:t>■  </a:t>
             </a:r>
             <a:r>
-              <a:rPr sz="2400" b="0" i="0">
+              <a:rPr sz="1700" b="0" i="0">
                 <a:solidFill>
                   <a:srgbClr val="2A2929"/>
                 </a:solidFill>
                 <a:latin typeface="Roboto"/>
               </a:rPr>
-              <a:t>Resources declare desired state; the platform works out how to reach it.</a:t>
-            </a:r>
-          </a:p>
-          <a:p>
-            <a:pPr marL="0" indent="0">
-              <a:lnSpc>
-                <a:spcPct val="105000"/>
-              </a:lnSpc>
-              <a:spcBef>
-                <a:spcPts val="0"/>
-              </a:spcBef>
-              <a:spcAft>
-                <a:spcPts val="1000"/>
-              </a:spcAft>
-            </a:pPr>
-            <a:r>
-              <a:rPr sz="2400" b="1" i="0">
-                <a:solidFill>
-                  <a:srgbClr val="EDAB0C"/>
-                </a:solidFill>
-                <a:latin typeface="Roboto"/>
-              </a:rPr>
-              <a:t>■  </a:t>
-            </a:r>
-            <a:r>
-              <a:rPr sz="2400" b="0" i="0">
+              <a:t>Record why IaC fits this job, what the automation gives, what can go wrong, and the service you select.</a:t>
+            </a:r>
+          </a:p>
+        </p:txBody>
+      </p:sp>
+      <p:sp>
+        <p:nvSpPr>
+          <p:cNvPr id="6" name="Rounded Rectangle 5"/>
+          <p:cNvSpPr/>
+          <p:nvPr/>
+        </p:nvSpPr>
+        <p:spPr>
+          <a:xfrm>
+            <a:off x="640080" y="5897880"/>
+            <a:ext cx="4023360" cy="457200"/>
+          </a:xfrm>
+          <a:prstGeom prst="roundRect">
+            <a:avLst/>
+          </a:prstGeom>
+          <a:solidFill>
+            <a:srgbClr val="F9F9F9"/>
+          </a:solidFill>
+          <a:ln w="12700">
+            <a:solidFill>
+              <a:srgbClr val="CCCCCC"/>
+            </a:solidFill>
+          </a:ln>
+          <a:effectLst/>
+        </p:spPr>
+        <p:style>
+          <a:lnRef idx="1">
+            <a:schemeClr val="accent1"/>
+          </a:lnRef>
+          <a:fillRef idx="3">
+            <a:schemeClr val="accent1"/>
+          </a:fillRef>
+          <a:effectRef idx="2">
+            <a:schemeClr val="accent1"/>
+          </a:effectRef>
+          <a:fontRef idx="minor">
+            <a:schemeClr val="lt1"/>
+          </a:fontRef>
+        </p:style>
+        <p:txBody>
+          <a:bodyPr rtlCol="0" anchor="ctr"/>
+          <a:lstStyle/>
+          <a:p>
+            <a:pPr algn="ctr"/>
+          </a:p>
+        </p:txBody>
+      </p:sp>
+      <p:sp>
+        <p:nvSpPr>
+          <p:cNvPr id="7" name="TextBox 6"/>
+          <p:cNvSpPr txBox="1"/>
+          <p:nvPr/>
+        </p:nvSpPr>
+        <p:spPr>
+          <a:xfrm>
+            <a:off x="822960" y="5943600"/>
+            <a:ext cx="3657600" cy="365760"/>
+          </a:xfrm>
+          <a:prstGeom prst="rect">
+            <a:avLst/>
+          </a:prstGeom>
+          <a:noFill/>
+        </p:spPr>
+        <p:txBody>
+          <a:bodyPr wrap="square" anchor="ctr" lIns="0" rIns="0" tIns="0" bIns="0">
+            <a:spAutoFit/>
+          </a:bodyPr>
+          <a:lstStyle/>
+          <a:p>
+            <a:r>
+              <a:rPr sz="1500" b="1" i="0">
                 <a:solidFill>
                   <a:srgbClr val="2A2929"/>
                 </a:solidFill>
                 <a:latin typeface="Roboto"/>
               </a:rPr>
-              <a:t>Learn to read it top-down: inputs → resources → outputs (KE 5).</a:t>
-            </a:r>
-          </a:p>
-        </p:txBody>
-      </p:sp>
-      <p:sp>
-        <p:nvSpPr>
-          <p:cNvPr id="5" name="Rectangle 4"/>
+              <a:t>⏱  ~25 min</a:t>
+            </a:r>
+          </a:p>
+        </p:txBody>
+      </p:sp>
+      <p:sp>
+        <p:nvSpPr>
+          <p:cNvPr id="8" name="Rectangle 7"/>
           <p:cNvSpPr/>
           <p:nvPr/>
         </p:nvSpPr>
@@ -10674,7 +14017,7 @@
             <a:avLst/>
           </a:prstGeom>
           <a:solidFill>
-            <a:srgbClr val="27B5CE"/>
+            <a:srgbClr val="92268F"/>
           </a:solidFill>
           <a:ln>
             <a:noFill/>
@@ -10705,7 +14048,7 @@
       </p:sp>
       <p:sp>
         <p:nvSpPr>
-          <p:cNvPr id="6" name="TextBox 5"/>
+          <p:cNvPr id="9" name="TextBox 8"/>
           <p:cNvSpPr txBox="1"/>
           <p:nvPr/>
         </p:nvSpPr>
@@ -10748,7 +14091,7 @@
       </p:sp>
       <p:sp>
         <p:nvSpPr>
-          <p:cNvPr id="7" name="TextBox 6"/>
+          <p:cNvPr id="10" name="TextBox 9"/>
           <p:cNvSpPr txBox="1"/>
           <p:nvPr/>
         </p:nvSpPr>
@@ -10776,7 +14119,7 @@
                 </a:solidFill>
                 <a:latin typeface="Roboto"/>
               </a:rPr>
-              <a:t>4</a:t>
+              <a:t>5</a:t>
             </a:r>
           </a:p>
         </p:txBody>
@@ -10795,7 +14138,7 @@
     <p:bg>
       <p:bgPr>
         <a:solidFill>
-          <a:srgbClr val="FFFFFF"/>
+          <a:srgbClr val="F9F9F9"/>
         </a:solidFill>
         <a:effectLst/>
       </p:bgPr>
@@ -10815,8 +14158,8 @@
         </p:nvSpPr>
         <p:spPr>
           <a:xfrm>
-            <a:off x="640080" y="457200"/>
-            <a:ext cx="10881360" cy="960120"/>
+            <a:off x="640080" y="548640"/>
+            <a:ext cx="10881360" cy="1097280"/>
           </a:xfrm>
           <a:prstGeom prst="rect">
             <a:avLst/>
@@ -10830,13 +14173,29 @@
           <a:lstStyle/>
           <a:p>
             <a:r>
-              <a:rPr sz="2800" b="1" i="0">
+              <a:rPr sz="3200" b="1" i="0">
                 <a:solidFill>
                   <a:srgbClr val="2A2929"/>
                 </a:solidFill>
                 <a:latin typeface="Roboto"/>
               </a:rPr>
-              <a:t>Review a provided template</a:t>
+              <a:t>Key takeaways</a:t>
+            </a:r>
+          </a:p>
+          <a:p>
+            <a:pPr>
+              <a:spcBef>
+                <a:spcPts val="200"/>
+              </a:spcBef>
+            </a:pPr>
+            <a:r>
+              <a:rPr sz="1800" b="1" i="0">
+                <a:solidFill>
+                  <a:srgbClr val="92268F"/>
+                </a:solidFill>
+                <a:latin typeface="Roboto"/>
+              </a:rPr>
+              <a:t>Section 1 · The groundwork</a:t>
             </a:r>
           </a:p>
         </p:txBody>
@@ -10849,14 +14208,14 @@
         </p:nvSpPr>
         <p:spPr>
           <a:xfrm>
-            <a:off x="658368" y="1371600"/>
+            <a:off x="658368" y="1600200"/>
             <a:ext cx="1463040" cy="50800"/>
           </a:xfrm>
           <a:prstGeom prst="rect">
             <a:avLst/>
           </a:prstGeom>
           <a:solidFill>
-            <a:srgbClr val="27B5CE"/>
+            <a:srgbClr val="92268F"/>
           </a:solidFill>
           <a:ln>
             <a:noFill/>
@@ -10887,160 +14246,66 @@
       </p:sp>
       <p:sp>
         <p:nvSpPr>
-          <p:cNvPr id="4" name="TextBox 3"/>
-          <p:cNvSpPr txBox="1"/>
-          <p:nvPr/>
-        </p:nvSpPr>
-        <p:spPr>
-          <a:xfrm>
-            <a:off x="658368" y="1737360"/>
-            <a:ext cx="5486400" cy="4297680"/>
-          </a:xfrm>
-          <a:prstGeom prst="rect">
-            <a:avLst/>
-          </a:prstGeom>
-          <a:noFill/>
-        </p:spPr>
-        <p:txBody>
-          <a:bodyPr wrap="square" anchor="t" lIns="0" rIns="0" tIns="0" bIns="0">
-            <a:spAutoFit/>
-          </a:bodyPr>
-          <a:lstStyle/>
-          <a:p>
-            <a:pPr marL="0" indent="0">
-              <a:lnSpc>
-                <a:spcPct val="105000"/>
-              </a:lnSpc>
-              <a:spcBef>
-                <a:spcPts val="0"/>
-              </a:spcBef>
-              <a:spcAft>
-                <a:spcPts val="1000"/>
-              </a:spcAft>
-            </a:pPr>
-            <a:r>
-              <a:rPr sz="1700" b="1" i="0">
-                <a:solidFill>
-                  <a:srgbClr val="EDAB0C"/>
-                </a:solidFill>
-                <a:latin typeface="Roboto"/>
-              </a:rPr>
-              <a:t>■  </a:t>
-            </a:r>
-            <a:r>
-              <a:rPr sz="1700" b="0" i="0">
-                <a:solidFill>
-                  <a:srgbClr val="2A2929"/>
-                </a:solidFill>
-                <a:latin typeface="Roboto"/>
-              </a:rPr>
-              <a:t>Review a pre-defined template to determine the resources it creates and their dependencies.</a:t>
-            </a:r>
-          </a:p>
-          <a:p>
-            <a:pPr marL="0" indent="0">
-              <a:lnSpc>
-                <a:spcPct val="105000"/>
-              </a:lnSpc>
-              <a:spcBef>
-                <a:spcPts val="0"/>
-              </a:spcBef>
-              <a:spcAft>
-                <a:spcPts val="1000"/>
-              </a:spcAft>
-            </a:pPr>
-            <a:r>
-              <a:rPr sz="1700" b="1" i="0">
-                <a:solidFill>
-                  <a:srgbClr val="EDAB0C"/>
-                </a:solidFill>
-                <a:latin typeface="Roboto"/>
-              </a:rPr>
-              <a:t>■  </a:t>
-            </a:r>
-            <a:r>
-              <a:rPr sz="1700" b="0" i="0">
-                <a:solidFill>
-                  <a:srgbClr val="2A2929"/>
-                </a:solidFill>
-                <a:latin typeface="Roboto"/>
-              </a:rPr>
-              <a:t>Trace !Ref/!GetAtt to see what depends on what — the build order falls out of the references.</a:t>
-            </a:r>
-          </a:p>
-          <a:p>
-            <a:pPr marL="0" indent="0">
-              <a:lnSpc>
-                <a:spcPct val="105000"/>
-              </a:lnSpc>
-              <a:spcBef>
-                <a:spcPts val="0"/>
-              </a:spcBef>
-              <a:spcAft>
-                <a:spcPts val="1000"/>
-              </a:spcAft>
-            </a:pPr>
-            <a:r>
-              <a:rPr sz="1700" b="1" i="0">
-                <a:solidFill>
-                  <a:srgbClr val="EDAB0C"/>
-                </a:solidFill>
-                <a:latin typeface="Roboto"/>
-              </a:rPr>
-              <a:t>■  </a:t>
-            </a:r>
-            <a:r>
-              <a:rPr sz="1700" b="0" i="0">
-                <a:solidFill>
-                  <a:srgbClr val="2A2929"/>
-                </a:solidFill>
-                <a:latin typeface="Roboto"/>
-              </a:rPr>
-              <a:t>Know what a template does before you deploy it (the provided data-store template is your AT2 case).</a:t>
-            </a:r>
-          </a:p>
-        </p:txBody>
-      </p:sp>
-      <p:pic>
-        <p:nvPicPr>
-          <p:cNvPr id="5" name="Picture 4" descr="cfn-template-anatomy.png"/>
-          <p:cNvPicPr>
-            <a:picLocks noChangeAspect="1"/>
-          </p:cNvPicPr>
-          <p:nvPr/>
-        </p:nvPicPr>
-        <p:blipFill>
-          <a:blip r:embed="rId2"/>
-          <a:stretch>
-            <a:fillRect/>
-          </a:stretch>
-        </p:blipFill>
-        <p:spPr>
-          <a:xfrm>
-            <a:off x="6400800" y="1828800"/>
-            <a:ext cx="5120640" cy="3931920"/>
-          </a:xfrm>
-          <a:prstGeom prst="rect">
-            <a:avLst/>
-          </a:prstGeom>
-        </p:spPr>
-      </p:pic>
-      <p:sp>
-        <p:nvSpPr>
-          <p:cNvPr id="6" name="Rectangle 5"/>
+          <p:cNvPr id="4" name="Rectangle 3"/>
           <p:cNvSpPr/>
           <p:nvPr/>
         </p:nvSpPr>
         <p:spPr>
           <a:xfrm>
-            <a:off x="0" y="6565392"/>
-            <a:ext cx="12191695" cy="38100"/>
+            <a:off x="640080" y="1965960"/>
+            <a:ext cx="10927080" cy="841248"/>
           </a:xfrm>
           <a:prstGeom prst="rect">
             <a:avLst/>
           </a:prstGeom>
           <a:solidFill>
-            <a:srgbClr val="27B5CE"/>
+            <a:srgbClr val="FFFFFF"/>
+          </a:solidFill>
+          <a:ln w="12700">
+            <a:solidFill>
+              <a:srgbClr val="CCCCCC"/>
+            </a:solidFill>
+          </a:ln>
+          <a:effectLst/>
+        </p:spPr>
+        <p:style>
+          <a:lnRef idx="1">
+            <a:schemeClr val="accent1"/>
+          </a:lnRef>
+          <a:fillRef idx="3">
+            <a:schemeClr val="accent1"/>
+          </a:fillRef>
+          <a:effectRef idx="2">
+            <a:schemeClr val="accent1"/>
+          </a:effectRef>
+          <a:fontRef idx="minor">
+            <a:schemeClr val="lt1"/>
+          </a:fontRef>
+        </p:style>
+        <p:txBody>
+          <a:bodyPr rtlCol="0" anchor="ctr"/>
+          <a:lstStyle/>
+          <a:p>
+            <a:pPr algn="ctr"/>
+          </a:p>
+        </p:txBody>
+      </p:sp>
+      <p:sp>
+        <p:nvSpPr>
+          <p:cNvPr id="5" name="Rectangle 4"/>
+          <p:cNvSpPr/>
+          <p:nvPr/>
+        </p:nvSpPr>
+        <p:spPr>
+          <a:xfrm>
+            <a:off x="640080" y="1965960"/>
+            <a:ext cx="109728" cy="841248"/>
+          </a:xfrm>
+          <a:prstGeom prst="rect">
+            <a:avLst/>
+          </a:prstGeom>
+          <a:solidFill>
+            <a:srgbClr val="92268F"/>
           </a:solidFill>
           <a:ln>
             <a:noFill/>
@@ -11071,7 +14336,348 @@
       </p:sp>
       <p:sp>
         <p:nvSpPr>
-          <p:cNvPr id="7" name="TextBox 6"/>
+          <p:cNvPr id="6" name="TextBox 5"/>
+          <p:cNvSpPr txBox="1"/>
+          <p:nvPr/>
+        </p:nvSpPr>
+        <p:spPr>
+          <a:xfrm>
+            <a:off x="960120" y="1965960"/>
+            <a:ext cx="10424160" cy="841248"/>
+          </a:xfrm>
+          <a:prstGeom prst="rect">
+            <a:avLst/>
+          </a:prstGeom>
+          <a:noFill/>
+        </p:spPr>
+        <p:txBody>
+          <a:bodyPr wrap="square" anchor="ctr" lIns="0" rIns="0" tIns="0" bIns="0">
+            <a:spAutoFit/>
+          </a:bodyPr>
+          <a:lstStyle/>
+          <a:p>
+            <a:pPr>
+              <a:lnSpc>
+                <a:spcPct val="100000"/>
+              </a:lnSpc>
+            </a:pPr>
+            <a:r>
+              <a:rPr sz="1700" b="0" i="0">
+                <a:solidFill>
+                  <a:srgbClr val="2A2929"/>
+                </a:solidFill>
+                <a:latin typeface="Roboto"/>
+              </a:rPr>
+              <a:t>Repeatable, versioned, reviewable, rebuildable.</a:t>
+            </a:r>
+          </a:p>
+        </p:txBody>
+      </p:sp>
+      <p:sp>
+        <p:nvSpPr>
+          <p:cNvPr id="7" name="Rectangle 6"/>
+          <p:cNvSpPr/>
+          <p:nvPr/>
+        </p:nvSpPr>
+        <p:spPr>
+          <a:xfrm>
+            <a:off x="640080" y="2916936"/>
+            <a:ext cx="10927080" cy="841248"/>
+          </a:xfrm>
+          <a:prstGeom prst="rect">
+            <a:avLst/>
+          </a:prstGeom>
+          <a:solidFill>
+            <a:srgbClr val="FFFFFF"/>
+          </a:solidFill>
+          <a:ln w="12700">
+            <a:solidFill>
+              <a:srgbClr val="CCCCCC"/>
+            </a:solidFill>
+          </a:ln>
+          <a:effectLst/>
+        </p:spPr>
+        <p:style>
+          <a:lnRef idx="1">
+            <a:schemeClr val="accent1"/>
+          </a:lnRef>
+          <a:fillRef idx="3">
+            <a:schemeClr val="accent1"/>
+          </a:fillRef>
+          <a:effectRef idx="2">
+            <a:schemeClr val="accent1"/>
+          </a:effectRef>
+          <a:fontRef idx="minor">
+            <a:schemeClr val="lt1"/>
+          </a:fontRef>
+        </p:style>
+        <p:txBody>
+          <a:bodyPr rtlCol="0" anchor="ctr"/>
+          <a:lstStyle/>
+          <a:p>
+            <a:pPr algn="ctr"/>
+          </a:p>
+        </p:txBody>
+      </p:sp>
+      <p:sp>
+        <p:nvSpPr>
+          <p:cNvPr id="8" name="Rectangle 7"/>
+          <p:cNvSpPr/>
+          <p:nvPr/>
+        </p:nvSpPr>
+        <p:spPr>
+          <a:xfrm>
+            <a:off x="640080" y="2916936"/>
+            <a:ext cx="109728" cy="841248"/>
+          </a:xfrm>
+          <a:prstGeom prst="rect">
+            <a:avLst/>
+          </a:prstGeom>
+          <a:solidFill>
+            <a:srgbClr val="92268F"/>
+          </a:solidFill>
+          <a:ln>
+            <a:noFill/>
+          </a:ln>
+          <a:effectLst/>
+        </p:spPr>
+        <p:style>
+          <a:lnRef idx="1">
+            <a:schemeClr val="accent1"/>
+          </a:lnRef>
+          <a:fillRef idx="3">
+            <a:schemeClr val="accent1"/>
+          </a:fillRef>
+          <a:effectRef idx="2">
+            <a:schemeClr val="accent1"/>
+          </a:effectRef>
+          <a:fontRef idx="minor">
+            <a:schemeClr val="lt1"/>
+          </a:fontRef>
+        </p:style>
+        <p:txBody>
+          <a:bodyPr rtlCol="0" anchor="ctr"/>
+          <a:lstStyle/>
+          <a:p>
+            <a:pPr algn="ctr"/>
+          </a:p>
+        </p:txBody>
+      </p:sp>
+      <p:sp>
+        <p:nvSpPr>
+          <p:cNvPr id="9" name="TextBox 8"/>
+          <p:cNvSpPr txBox="1"/>
+          <p:nvPr/>
+        </p:nvSpPr>
+        <p:spPr>
+          <a:xfrm>
+            <a:off x="960120" y="2916936"/>
+            <a:ext cx="10424160" cy="841248"/>
+          </a:xfrm>
+          <a:prstGeom prst="rect">
+            <a:avLst/>
+          </a:prstGeom>
+          <a:noFill/>
+        </p:spPr>
+        <p:txBody>
+          <a:bodyPr wrap="square" anchor="ctr" lIns="0" rIns="0" tIns="0" bIns="0">
+            <a:spAutoFit/>
+          </a:bodyPr>
+          <a:lstStyle/>
+          <a:p>
+            <a:pPr>
+              <a:lnSpc>
+                <a:spcPct val="100000"/>
+              </a:lnSpc>
+            </a:pPr>
+            <a:r>
+              <a:rPr sz="1700" b="0" i="0">
+                <a:solidFill>
+                  <a:srgbClr val="2A2929"/>
+                </a:solidFill>
+                <a:latin typeface="Roboto"/>
+              </a:rPr>
+              <a:t>The failure modes are part of the knowledge.</a:t>
+            </a:r>
+          </a:p>
+        </p:txBody>
+      </p:sp>
+      <p:sp>
+        <p:nvSpPr>
+          <p:cNvPr id="10" name="Rectangle 9"/>
+          <p:cNvSpPr/>
+          <p:nvPr/>
+        </p:nvSpPr>
+        <p:spPr>
+          <a:xfrm>
+            <a:off x="640080" y="3867912"/>
+            <a:ext cx="10927080" cy="841248"/>
+          </a:xfrm>
+          <a:prstGeom prst="rect">
+            <a:avLst/>
+          </a:prstGeom>
+          <a:solidFill>
+            <a:srgbClr val="FFFFFF"/>
+          </a:solidFill>
+          <a:ln w="12700">
+            <a:solidFill>
+              <a:srgbClr val="CCCCCC"/>
+            </a:solidFill>
+          </a:ln>
+          <a:effectLst/>
+        </p:spPr>
+        <p:style>
+          <a:lnRef idx="1">
+            <a:schemeClr val="accent1"/>
+          </a:lnRef>
+          <a:fillRef idx="3">
+            <a:schemeClr val="accent1"/>
+          </a:fillRef>
+          <a:effectRef idx="2">
+            <a:schemeClr val="accent1"/>
+          </a:effectRef>
+          <a:fontRef idx="minor">
+            <a:schemeClr val="lt1"/>
+          </a:fontRef>
+        </p:style>
+        <p:txBody>
+          <a:bodyPr rtlCol="0" anchor="ctr"/>
+          <a:lstStyle/>
+          <a:p>
+            <a:pPr algn="ctr"/>
+          </a:p>
+        </p:txBody>
+      </p:sp>
+      <p:sp>
+        <p:nvSpPr>
+          <p:cNvPr id="11" name="Rectangle 10"/>
+          <p:cNvSpPr/>
+          <p:nvPr/>
+        </p:nvSpPr>
+        <p:spPr>
+          <a:xfrm>
+            <a:off x="640080" y="3867912"/>
+            <a:ext cx="109728" cy="841248"/>
+          </a:xfrm>
+          <a:prstGeom prst="rect">
+            <a:avLst/>
+          </a:prstGeom>
+          <a:solidFill>
+            <a:srgbClr val="92268F"/>
+          </a:solidFill>
+          <a:ln>
+            <a:noFill/>
+          </a:ln>
+          <a:effectLst/>
+        </p:spPr>
+        <p:style>
+          <a:lnRef idx="1">
+            <a:schemeClr val="accent1"/>
+          </a:lnRef>
+          <a:fillRef idx="3">
+            <a:schemeClr val="accent1"/>
+          </a:fillRef>
+          <a:effectRef idx="2">
+            <a:schemeClr val="accent1"/>
+          </a:effectRef>
+          <a:fontRef idx="minor">
+            <a:schemeClr val="lt1"/>
+          </a:fontRef>
+        </p:style>
+        <p:txBody>
+          <a:bodyPr rtlCol="0" anchor="ctr"/>
+          <a:lstStyle/>
+          <a:p>
+            <a:pPr algn="ctr"/>
+          </a:p>
+        </p:txBody>
+      </p:sp>
+      <p:sp>
+        <p:nvSpPr>
+          <p:cNvPr id="12" name="TextBox 11"/>
+          <p:cNvSpPr txBox="1"/>
+          <p:nvPr/>
+        </p:nvSpPr>
+        <p:spPr>
+          <a:xfrm>
+            <a:off x="960120" y="3867912"/>
+            <a:ext cx="10424160" cy="841248"/>
+          </a:xfrm>
+          <a:prstGeom prst="rect">
+            <a:avLst/>
+          </a:prstGeom>
+          <a:noFill/>
+        </p:spPr>
+        <p:txBody>
+          <a:bodyPr wrap="square" anchor="ctr" lIns="0" rIns="0" tIns="0" bIns="0">
+            <a:spAutoFit/>
+          </a:bodyPr>
+          <a:lstStyle/>
+          <a:p>
+            <a:pPr>
+              <a:lnSpc>
+                <a:spcPct val="100000"/>
+              </a:lnSpc>
+            </a:pPr>
+            <a:r>
+              <a:rPr sz="1700" b="0" i="0">
+                <a:solidFill>
+                  <a:srgbClr val="2A2929"/>
+                </a:solidFill>
+                <a:latin typeface="Roboto"/>
+              </a:rPr>
+              <a:t>Select the service for compatibility, and justify it.</a:t>
+            </a:r>
+          </a:p>
+        </p:txBody>
+      </p:sp>
+      <p:sp>
+        <p:nvSpPr>
+          <p:cNvPr id="13" name="Rectangle 12"/>
+          <p:cNvSpPr/>
+          <p:nvPr/>
+        </p:nvSpPr>
+        <p:spPr>
+          <a:xfrm>
+            <a:off x="0" y="6565392"/>
+            <a:ext cx="12191695" cy="38100"/>
+          </a:xfrm>
+          <a:prstGeom prst="rect">
+            <a:avLst/>
+          </a:prstGeom>
+          <a:solidFill>
+            <a:srgbClr val="92268F"/>
+          </a:solidFill>
+          <a:ln>
+            <a:noFill/>
+          </a:ln>
+          <a:effectLst/>
+        </p:spPr>
+        <p:style>
+          <a:lnRef idx="1">
+            <a:schemeClr val="accent1"/>
+          </a:lnRef>
+          <a:fillRef idx="3">
+            <a:schemeClr val="accent1"/>
+          </a:fillRef>
+          <a:effectRef idx="2">
+            <a:schemeClr val="accent1"/>
+          </a:effectRef>
+          <a:fontRef idx="minor">
+            <a:schemeClr val="lt1"/>
+          </a:fontRef>
+        </p:style>
+        <p:txBody>
+          <a:bodyPr rtlCol="0" anchor="ctr"/>
+          <a:lstStyle/>
+          <a:p>
+            <a:pPr algn="ctr"/>
+          </a:p>
+        </p:txBody>
+      </p:sp>
+      <p:sp>
+        <p:nvSpPr>
+          <p:cNvPr id="14" name="TextBox 13"/>
           <p:cNvSpPr txBox="1"/>
           <p:nvPr/>
         </p:nvSpPr>
@@ -11114,7 +14720,7 @@
       </p:sp>
       <p:sp>
         <p:nvSpPr>
-          <p:cNvPr id="8" name="TextBox 7"/>
+          <p:cNvPr id="15" name="TextBox 14"/>
           <p:cNvSpPr txBox="1"/>
           <p:nvPr/>
         </p:nvSpPr>
@@ -11142,7 +14748,7 @@
                 </a:solidFill>
                 <a:latin typeface="Roboto"/>
               </a:rPr>
-              <a:t>5</a:t>
+              <a:t>6</a:t>
             </a:r>
           </a:p>
         </p:txBody>
@@ -11188,7 +14794,7 @@
             <a:avLst/>
           </a:prstGeom>
           <a:solidFill>
-            <a:srgbClr val="205F61"/>
+            <a:srgbClr val="27B5CE"/>
           </a:solidFill>
           <a:ln>
             <a:noFill/>
@@ -11246,7 +14852,7 @@
                 </a:solidFill>
                 <a:latin typeface="Roboto"/>
               </a:rPr>
-              <a:t>03</a:t>
+              <a:t>02</a:t>
             </a:r>
           </a:p>
         </p:txBody>
@@ -11276,7 +14882,7 @@
             <a:r>
               <a:rPr sz="1600" b="1" i="0">
                 <a:solidFill>
-                  <a:srgbClr val="205F61"/>
+                  <a:srgbClr val="27B5CE"/>
                 </a:solidFill>
                 <a:latin typeface="Roboto"/>
               </a:rPr>
@@ -11296,7 +14902,7 @@
                 </a:solidFill>
                 <a:latin typeface="Roboto"/>
               </a:rPr>
-              <a:t>Operating a provided template</a:t>
+              <a:t>Reading a template you were given</a:t>
             </a:r>
           </a:p>
           <a:p>
@@ -11312,7 +14918,7 @@
                 </a:solidFill>
                 <a:latin typeface="Roboto Light"/>
               </a:rPr>
-              <a:t>deploy, update, delete — cleanly</a:t>
+              <a:t>read it before you run it</a:t>
             </a:r>
           </a:p>
         </p:txBody>
@@ -11332,7 +14938,7 @@
             <a:avLst/>
           </a:prstGeom>
           <a:solidFill>
-            <a:srgbClr val="205F61"/>
+            <a:srgbClr val="27B5CE"/>
           </a:solidFill>
           <a:ln>
             <a:noFill/>
